--- a/GraphDB/1-intro/1-Basics.pptx
+++ b/GraphDB/1-intro/1-Basics.pptx
@@ -5,27 +5,34 @@
     <p:sldMasterId id="2147483648" r:id="rId1"/>
   </p:sldMasterIdLst>
   <p:notesMasterIdLst>
-    <p:notesMasterId r:id="rId17"/>
+    <p:notesMasterId r:id="rId24"/>
   </p:notesMasterIdLst>
   <p:handoutMasterIdLst>
-    <p:handoutMasterId r:id="rId18"/>
+    <p:handoutMasterId r:id="rId25"/>
   </p:handoutMasterIdLst>
   <p:sldIdLst>
     <p:sldId id="257" r:id="rId2"/>
     <p:sldId id="275" r:id="rId3"/>
-    <p:sldId id="278" r:id="rId4"/>
-    <p:sldId id="279" r:id="rId5"/>
-    <p:sldId id="280" r:id="rId6"/>
-    <p:sldId id="281" r:id="rId7"/>
-    <p:sldId id="282" r:id="rId8"/>
-    <p:sldId id="288" r:id="rId9"/>
-    <p:sldId id="284" r:id="rId10"/>
-    <p:sldId id="283" r:id="rId11"/>
-    <p:sldId id="277" r:id="rId12"/>
-    <p:sldId id="286" r:id="rId13"/>
-    <p:sldId id="287" r:id="rId14"/>
-    <p:sldId id="285" r:id="rId15"/>
-    <p:sldId id="276" r:id="rId16"/>
+    <p:sldId id="290" r:id="rId4"/>
+    <p:sldId id="278" r:id="rId5"/>
+    <p:sldId id="279" r:id="rId6"/>
+    <p:sldId id="289" r:id="rId7"/>
+    <p:sldId id="280" r:id="rId8"/>
+    <p:sldId id="281" r:id="rId9"/>
+    <p:sldId id="288" r:id="rId10"/>
+    <p:sldId id="291" r:id="rId11"/>
+    <p:sldId id="296" r:id="rId12"/>
+    <p:sldId id="295" r:id="rId13"/>
+    <p:sldId id="284" r:id="rId14"/>
+    <p:sldId id="294" r:id="rId15"/>
+    <p:sldId id="297" r:id="rId16"/>
+    <p:sldId id="293" r:id="rId17"/>
+    <p:sldId id="283" r:id="rId18"/>
+    <p:sldId id="277" r:id="rId19"/>
+    <p:sldId id="286" r:id="rId20"/>
+    <p:sldId id="287" r:id="rId21"/>
+    <p:sldId id="285" r:id="rId22"/>
+    <p:sldId id="276" r:id="rId23"/>
   </p:sldIdLst>
   <p:sldSz cx="12192000" cy="6858000"/>
   <p:notesSz cx="6858000" cy="9144000"/>
@@ -229,7 +236,7 @@
           <a:p>
             <a:fld id="{7BAEECA8-D063-486F-AE31-5020270C1449}" type="datetimeFigureOut">
               <a:rPr lang="en-US" smtClean="0"/>
-              <a:t>3/23/2026</a:t>
+              <a:t>7/23/2026</a:t>
             </a:fld>
             <a:endParaRPr lang="en-US"/>
           </a:p>
@@ -406,7 +413,7 @@
           <a:p>
             <a:fld id="{CB233BD1-3BA8-448D-9D08-7846095EA517}" type="datetimeFigureOut">
               <a:rPr lang="en-US" smtClean="0"/>
-              <a:t>3/23/2026</a:t>
+              <a:t>7/23/2026</a:t>
             </a:fld>
             <a:endParaRPr lang="en-US"/>
           </a:p>
@@ -820,7 +827,7 @@
           <a:p>
             <a:fld id="{6383FAE1-13DE-4511-8C1B-C8AFB720664C}" type="datetimeFigureOut">
               <a:rPr lang="en-US" smtClean="0"/>
-              <a:t>3/23/2026</a:t>
+              <a:t>7/23/2026</a:t>
             </a:fld>
             <a:endParaRPr lang="en-US"/>
           </a:p>
@@ -1018,7 +1025,7 @@
           <a:p>
             <a:fld id="{6383FAE1-13DE-4511-8C1B-C8AFB720664C}" type="datetimeFigureOut">
               <a:rPr lang="en-US" smtClean="0"/>
-              <a:t>3/23/2026</a:t>
+              <a:t>7/23/2026</a:t>
             </a:fld>
             <a:endParaRPr lang="en-US"/>
           </a:p>
@@ -1226,7 +1233,7 @@
           <a:p>
             <a:fld id="{6383FAE1-13DE-4511-8C1B-C8AFB720664C}" type="datetimeFigureOut">
               <a:rPr lang="en-US" smtClean="0"/>
-              <a:t>3/23/2026</a:t>
+              <a:t>7/23/2026</a:t>
             </a:fld>
             <a:endParaRPr lang="en-US"/>
           </a:p>
@@ -1424,7 +1431,7 @@
           <a:p>
             <a:fld id="{6383FAE1-13DE-4511-8C1B-C8AFB720664C}" type="datetimeFigureOut">
               <a:rPr lang="en-US" smtClean="0"/>
-              <a:t>3/23/2026</a:t>
+              <a:t>7/23/2026</a:t>
             </a:fld>
             <a:endParaRPr lang="en-US"/>
           </a:p>
@@ -1699,7 +1706,7 @@
           <a:p>
             <a:fld id="{6383FAE1-13DE-4511-8C1B-C8AFB720664C}" type="datetimeFigureOut">
               <a:rPr lang="en-US" smtClean="0"/>
-              <a:t>3/23/2026</a:t>
+              <a:t>7/23/2026</a:t>
             </a:fld>
             <a:endParaRPr lang="en-US"/>
           </a:p>
@@ -1964,7 +1971,7 @@
           <a:p>
             <a:fld id="{6383FAE1-13DE-4511-8C1B-C8AFB720664C}" type="datetimeFigureOut">
               <a:rPr lang="en-US" smtClean="0"/>
-              <a:t>3/23/2026</a:t>
+              <a:t>7/23/2026</a:t>
             </a:fld>
             <a:endParaRPr lang="en-US"/>
           </a:p>
@@ -2376,7 +2383,7 @@
           <a:p>
             <a:fld id="{6383FAE1-13DE-4511-8C1B-C8AFB720664C}" type="datetimeFigureOut">
               <a:rPr lang="en-US" smtClean="0"/>
-              <a:t>3/23/2026</a:t>
+              <a:t>7/23/2026</a:t>
             </a:fld>
             <a:endParaRPr lang="en-US"/>
           </a:p>
@@ -2517,7 +2524,7 @@
           <a:p>
             <a:fld id="{6383FAE1-13DE-4511-8C1B-C8AFB720664C}" type="datetimeFigureOut">
               <a:rPr lang="en-US" smtClean="0"/>
-              <a:t>3/23/2026</a:t>
+              <a:t>7/23/2026</a:t>
             </a:fld>
             <a:endParaRPr lang="en-US"/>
           </a:p>
@@ -2630,7 +2637,7 @@
           <a:p>
             <a:fld id="{6383FAE1-13DE-4511-8C1B-C8AFB720664C}" type="datetimeFigureOut">
               <a:rPr lang="en-US" smtClean="0"/>
-              <a:t>3/23/2026</a:t>
+              <a:t>7/23/2026</a:t>
             </a:fld>
             <a:endParaRPr lang="en-US"/>
           </a:p>
@@ -2941,7 +2948,7 @@
           <a:p>
             <a:fld id="{6383FAE1-13DE-4511-8C1B-C8AFB720664C}" type="datetimeFigureOut">
               <a:rPr lang="en-US" smtClean="0"/>
-              <a:t>3/23/2026</a:t>
+              <a:t>7/23/2026</a:t>
             </a:fld>
             <a:endParaRPr lang="en-US"/>
           </a:p>
@@ -3232,7 +3239,7 @@
           <a:p>
             <a:fld id="{6383FAE1-13DE-4511-8C1B-C8AFB720664C}" type="datetimeFigureOut">
               <a:rPr lang="en-US" smtClean="0"/>
-              <a:t>3/23/2026</a:t>
+              <a:t>7/23/2026</a:t>
             </a:fld>
             <a:endParaRPr lang="en-US"/>
           </a:p>
@@ -3476,7 +3483,7 @@
           <a:p>
             <a:fld id="{6383FAE1-13DE-4511-8C1B-C8AFB720664C}" type="datetimeFigureOut">
               <a:rPr lang="en-US" smtClean="0"/>
-              <a:t>3/23/2026</a:t>
+              <a:t>7/23/2026</a:t>
             </a:fld>
             <a:endParaRPr lang="en-US"/>
           </a:p>
@@ -4102,6 +4109,2507 @@
 </file>
 
 <file path=ppt/slides/slide10.xml><?xml version="1.0" encoding="utf-8"?>
+<p:sld xmlns:a="http://schemas.openxmlformats.org/drawingml/2006/main" xmlns:r="http://schemas.openxmlformats.org/officeDocument/2006/relationships" xmlns:p="http://schemas.openxmlformats.org/presentationml/2006/main">
+  <p:cSld>
+    <p:spTree>
+      <p:nvGrpSpPr>
+        <p:cNvPr id="1" name="">
+          <a:extLst>
+            <a:ext uri="{FF2B5EF4-FFF2-40B4-BE49-F238E27FC236}">
+              <a16:creationId xmlns:a16="http://schemas.microsoft.com/office/drawing/2014/main" id="{71C20EC3-D3C2-A977-B3F9-83643DBFC8D9}"/>
+            </a:ext>
+          </a:extLst>
+        </p:cNvPr>
+        <p:cNvGrpSpPr/>
+        <p:nvPr/>
+      </p:nvGrpSpPr>
+      <p:grpSpPr>
+        <a:xfrm>
+          <a:off x="0" y="0"/>
+          <a:ext cx="0" cy="0"/>
+          <a:chOff x="0" y="0"/>
+          <a:chExt cx="0" cy="0"/>
+        </a:xfrm>
+      </p:grpSpPr>
+      <p:sp>
+        <p:nvSpPr>
+          <p:cNvPr id="3" name="TextBox 2">
+            <a:extLst>
+              <a:ext uri="{FF2B5EF4-FFF2-40B4-BE49-F238E27FC236}">
+                <a16:creationId xmlns:a16="http://schemas.microsoft.com/office/drawing/2014/main" id="{B617C54C-D7FF-26D3-9D34-334248B7CC57}"/>
+              </a:ext>
+            </a:extLst>
+          </p:cNvPr>
+          <p:cNvSpPr txBox="1"/>
+          <p:nvPr/>
+        </p:nvSpPr>
+        <p:spPr>
+          <a:xfrm>
+            <a:off x="7653528" y="603659"/>
+            <a:ext cx="5166360" cy="5940088"/>
+          </a:xfrm>
+          <a:prstGeom prst="rect">
+            <a:avLst/>
+          </a:prstGeom>
+          <a:noFill/>
+        </p:spPr>
+        <p:txBody>
+          <a:bodyPr wrap="square">
+            <a:spAutoFit/>
+          </a:bodyPr>
+          <a:lstStyle/>
+          <a:p>
+            <a:pPr>
+              <a:buNone/>
+            </a:pPr>
+            <a:r>
+              <a:rPr lang="en-US" sz="2000" dirty="0">
+                <a:solidFill>
+                  <a:schemeClr val="accent6">
+                    <a:lumMod val="60000"/>
+                    <a:lumOff val="40000"/>
+                  </a:schemeClr>
+                </a:solidFill>
+              </a:rPr>
+              <a:t>// 1. Create the People (Pink Nodes)</a:t>
+            </a:r>
+          </a:p>
+          <a:p>
+            <a:pPr>
+              <a:buNone/>
+            </a:pPr>
+            <a:r>
+              <a:rPr lang="en-US" sz="2000" dirty="0">
+                <a:solidFill>
+                  <a:schemeClr val="accent6">
+                    <a:lumMod val="60000"/>
+                    <a:lumOff val="40000"/>
+                  </a:schemeClr>
+                </a:solidFill>
+              </a:rPr>
+              <a:t>CREATE (</a:t>
+            </a:r>
+            <a:r>
+              <a:rPr lang="en-US" sz="2000" dirty="0" err="1">
+                <a:solidFill>
+                  <a:schemeClr val="accent6">
+                    <a:lumMod val="60000"/>
+                    <a:lumOff val="40000"/>
+                  </a:schemeClr>
+                </a:solidFill>
+              </a:rPr>
+              <a:t>ash:Person</a:t>
+            </a:r>
+            <a:r>
+              <a:rPr lang="en-US" sz="2000" dirty="0">
+                <a:solidFill>
+                  <a:schemeClr val="accent6">
+                    <a:lumMod val="60000"/>
+                    <a:lumOff val="40000"/>
+                  </a:schemeClr>
+                </a:solidFill>
+              </a:rPr>
+              <a:t> {name: 'Ash'})</a:t>
+            </a:r>
+          </a:p>
+          <a:p>
+            <a:pPr>
+              <a:buNone/>
+            </a:pPr>
+            <a:r>
+              <a:rPr lang="en-US" sz="2000" dirty="0">
+                <a:solidFill>
+                  <a:schemeClr val="accent6">
+                    <a:lumMod val="60000"/>
+                    <a:lumOff val="40000"/>
+                  </a:schemeClr>
+                </a:solidFill>
+              </a:rPr>
+              <a:t>CREATE (</a:t>
+            </a:r>
+            <a:r>
+              <a:rPr lang="en-US" sz="2000" dirty="0" err="1">
+                <a:solidFill>
+                  <a:schemeClr val="accent6">
+                    <a:lumMod val="60000"/>
+                    <a:lumOff val="40000"/>
+                  </a:schemeClr>
+                </a:solidFill>
+              </a:rPr>
+              <a:t>ravi:Person</a:t>
+            </a:r>
+            <a:r>
+              <a:rPr lang="en-US" sz="2000" dirty="0">
+                <a:solidFill>
+                  <a:schemeClr val="accent6">
+                    <a:lumMod val="60000"/>
+                    <a:lumOff val="40000"/>
+                  </a:schemeClr>
+                </a:solidFill>
+              </a:rPr>
+              <a:t> {name: 'Ravi'})</a:t>
+            </a:r>
+          </a:p>
+          <a:p>
+            <a:pPr>
+              <a:buNone/>
+            </a:pPr>
+            <a:r>
+              <a:rPr lang="en-US" sz="2000" dirty="0">
+                <a:solidFill>
+                  <a:schemeClr val="accent6">
+                    <a:lumMod val="60000"/>
+                    <a:lumOff val="40000"/>
+                  </a:schemeClr>
+                </a:solidFill>
+              </a:rPr>
+              <a:t>CREATE (</a:t>
+            </a:r>
+            <a:r>
+              <a:rPr lang="en-US" sz="2000" dirty="0" err="1">
+                <a:solidFill>
+                  <a:schemeClr val="accent6">
+                    <a:lumMod val="60000"/>
+                    <a:lumOff val="40000"/>
+                  </a:schemeClr>
+                </a:solidFill>
+              </a:rPr>
+              <a:t>neha:Person</a:t>
+            </a:r>
+            <a:r>
+              <a:rPr lang="en-US" sz="2000" dirty="0">
+                <a:solidFill>
+                  <a:schemeClr val="accent6">
+                    <a:lumMod val="60000"/>
+                    <a:lumOff val="40000"/>
+                  </a:schemeClr>
+                </a:solidFill>
+              </a:rPr>
+              <a:t> {name: 'Neha'})</a:t>
+            </a:r>
+          </a:p>
+          <a:p>
+            <a:pPr>
+              <a:buNone/>
+            </a:pPr>
+            <a:endParaRPr lang="en-US" sz="2000" dirty="0">
+              <a:solidFill>
+                <a:schemeClr val="accent6">
+                  <a:lumMod val="60000"/>
+                  <a:lumOff val="40000"/>
+                </a:schemeClr>
+              </a:solidFill>
+            </a:endParaRPr>
+          </a:p>
+          <a:p>
+            <a:pPr>
+              <a:buNone/>
+            </a:pPr>
+            <a:endParaRPr lang="en-US" sz="2000" dirty="0">
+              <a:solidFill>
+                <a:schemeClr val="accent6">
+                  <a:lumMod val="60000"/>
+                  <a:lumOff val="40000"/>
+                </a:schemeClr>
+              </a:solidFill>
+            </a:endParaRPr>
+          </a:p>
+          <a:p>
+            <a:pPr>
+              <a:buNone/>
+            </a:pPr>
+            <a:r>
+              <a:rPr lang="en-US" sz="2000" dirty="0">
+                <a:solidFill>
+                  <a:schemeClr val="accent6">
+                    <a:lumMod val="60000"/>
+                    <a:lumOff val="40000"/>
+                  </a:schemeClr>
+                </a:solidFill>
+              </a:rPr>
+              <a:t>// 2. Create the Cities (Blue Nodes)</a:t>
+            </a:r>
+          </a:p>
+          <a:p>
+            <a:pPr>
+              <a:buNone/>
+            </a:pPr>
+            <a:r>
+              <a:rPr lang="en-US" sz="2000" dirty="0">
+                <a:solidFill>
+                  <a:schemeClr val="accent6">
+                    <a:lumMod val="60000"/>
+                    <a:lumOff val="40000"/>
+                  </a:schemeClr>
+                </a:solidFill>
+              </a:rPr>
+              <a:t>CREATE (</a:t>
+            </a:r>
+            <a:r>
+              <a:rPr lang="en-US" sz="2000" dirty="0" err="1">
+                <a:solidFill>
+                  <a:schemeClr val="accent6">
+                    <a:lumMod val="60000"/>
+                    <a:lumOff val="40000"/>
+                  </a:schemeClr>
+                </a:solidFill>
+              </a:rPr>
+              <a:t>delhi:City</a:t>
+            </a:r>
+            <a:r>
+              <a:rPr lang="en-US" sz="2000" dirty="0">
+                <a:solidFill>
+                  <a:schemeClr val="accent6">
+                    <a:lumMod val="60000"/>
+                    <a:lumOff val="40000"/>
+                  </a:schemeClr>
+                </a:solidFill>
+              </a:rPr>
+              <a:t> {name: 'Delhi'})</a:t>
+            </a:r>
+          </a:p>
+          <a:p>
+            <a:pPr>
+              <a:buNone/>
+            </a:pPr>
+            <a:r>
+              <a:rPr lang="en-US" sz="2000" dirty="0">
+                <a:solidFill>
+                  <a:schemeClr val="accent6">
+                    <a:lumMod val="60000"/>
+                    <a:lumOff val="40000"/>
+                  </a:schemeClr>
+                </a:solidFill>
+              </a:rPr>
+              <a:t>CREATE (</a:t>
+            </a:r>
+            <a:r>
+              <a:rPr lang="en-US" sz="2000" dirty="0" err="1">
+                <a:solidFill>
+                  <a:schemeClr val="accent6">
+                    <a:lumMod val="60000"/>
+                    <a:lumOff val="40000"/>
+                  </a:schemeClr>
+                </a:solidFill>
+              </a:rPr>
+              <a:t>tokyo:City</a:t>
+            </a:r>
+            <a:r>
+              <a:rPr lang="en-US" sz="2000" dirty="0">
+                <a:solidFill>
+                  <a:schemeClr val="accent6">
+                    <a:lumMod val="60000"/>
+                    <a:lumOff val="40000"/>
+                  </a:schemeClr>
+                </a:solidFill>
+              </a:rPr>
+              <a:t> {name: 'Tokyo'})</a:t>
+            </a:r>
+          </a:p>
+          <a:p>
+            <a:pPr>
+              <a:buNone/>
+            </a:pPr>
+            <a:endParaRPr lang="en-US" sz="2000" dirty="0">
+              <a:solidFill>
+                <a:schemeClr val="accent6">
+                  <a:lumMod val="60000"/>
+                  <a:lumOff val="40000"/>
+                </a:schemeClr>
+              </a:solidFill>
+            </a:endParaRPr>
+          </a:p>
+          <a:p>
+            <a:pPr>
+              <a:buNone/>
+            </a:pPr>
+            <a:endParaRPr lang="en-US" sz="2000" dirty="0">
+              <a:solidFill>
+                <a:schemeClr val="accent6">
+                  <a:lumMod val="60000"/>
+                  <a:lumOff val="40000"/>
+                </a:schemeClr>
+              </a:solidFill>
+            </a:endParaRPr>
+          </a:p>
+          <a:p>
+            <a:pPr>
+              <a:buNone/>
+            </a:pPr>
+            <a:r>
+              <a:rPr lang="en-US" sz="2000" dirty="0">
+                <a:solidFill>
+                  <a:schemeClr val="accent6">
+                    <a:lumMod val="60000"/>
+                    <a:lumOff val="40000"/>
+                  </a:schemeClr>
+                </a:solidFill>
+              </a:rPr>
+              <a:t>// 3. Create the Posts (Green Nodes)</a:t>
+            </a:r>
+          </a:p>
+          <a:p>
+            <a:pPr>
+              <a:buNone/>
+            </a:pPr>
+            <a:r>
+              <a:rPr lang="en-US" sz="2000" dirty="0">
+                <a:solidFill>
+                  <a:schemeClr val="accent6">
+                    <a:lumMod val="60000"/>
+                    <a:lumOff val="40000"/>
+                  </a:schemeClr>
+                </a:solidFill>
+              </a:rPr>
+              <a:t>CREATE (post1:Post {name: 'Post1'})</a:t>
+            </a:r>
+          </a:p>
+          <a:p>
+            <a:pPr>
+              <a:buNone/>
+            </a:pPr>
+            <a:r>
+              <a:rPr lang="en-US" sz="2000" dirty="0">
+                <a:solidFill>
+                  <a:schemeClr val="accent6">
+                    <a:lumMod val="60000"/>
+                    <a:lumOff val="40000"/>
+                  </a:schemeClr>
+                </a:solidFill>
+              </a:rPr>
+              <a:t>CREATE (post2:Post {name: 'Post2'})</a:t>
+            </a:r>
+          </a:p>
+          <a:p>
+            <a:pPr>
+              <a:buNone/>
+            </a:pPr>
+            <a:endParaRPr lang="en-US" sz="2000" dirty="0">
+              <a:solidFill>
+                <a:schemeClr val="accent6">
+                  <a:lumMod val="60000"/>
+                  <a:lumOff val="40000"/>
+                </a:schemeClr>
+              </a:solidFill>
+            </a:endParaRPr>
+          </a:p>
+          <a:p>
+            <a:pPr>
+              <a:buNone/>
+            </a:pPr>
+            <a:endParaRPr lang="en-US" sz="2000" dirty="0">
+              <a:solidFill>
+                <a:schemeClr val="accent6">
+                  <a:lumMod val="60000"/>
+                  <a:lumOff val="40000"/>
+                </a:schemeClr>
+              </a:solidFill>
+            </a:endParaRPr>
+          </a:p>
+          <a:p>
+            <a:pPr>
+              <a:buNone/>
+            </a:pPr>
+            <a:r>
+              <a:rPr lang="en-US" sz="2000" dirty="0">
+                <a:solidFill>
+                  <a:schemeClr val="accent6">
+                    <a:lumMod val="60000"/>
+                    <a:lumOff val="40000"/>
+                  </a:schemeClr>
+                </a:solidFill>
+              </a:rPr>
+              <a:t>// 4. Create the Topics (Yellow Nodes)</a:t>
+            </a:r>
+          </a:p>
+          <a:p>
+            <a:pPr>
+              <a:buNone/>
+            </a:pPr>
+            <a:r>
+              <a:rPr lang="en-US" sz="2000" dirty="0">
+                <a:solidFill>
+                  <a:schemeClr val="accent6">
+                    <a:lumMod val="60000"/>
+                    <a:lumOff val="40000"/>
+                  </a:schemeClr>
+                </a:solidFill>
+              </a:rPr>
+              <a:t>CREATE (</a:t>
+            </a:r>
+            <a:r>
+              <a:rPr lang="en-US" sz="2000" dirty="0" err="1">
+                <a:solidFill>
+                  <a:schemeClr val="accent6">
+                    <a:lumMod val="60000"/>
+                    <a:lumOff val="40000"/>
+                  </a:schemeClr>
+                </a:solidFill>
+              </a:rPr>
+              <a:t>ai:Topic</a:t>
+            </a:r>
+            <a:r>
+              <a:rPr lang="en-US" sz="2000" dirty="0">
+                <a:solidFill>
+                  <a:schemeClr val="accent6">
+                    <a:lumMod val="60000"/>
+                    <a:lumOff val="40000"/>
+                  </a:schemeClr>
+                </a:solidFill>
+              </a:rPr>
+              <a:t> {name: 'AI'})</a:t>
+            </a:r>
+          </a:p>
+          <a:p>
+            <a:pPr>
+              <a:buNone/>
+            </a:pPr>
+            <a:r>
+              <a:rPr lang="en-US" sz="2000" dirty="0">
+                <a:solidFill>
+                  <a:schemeClr val="accent6">
+                    <a:lumMod val="60000"/>
+                    <a:lumOff val="40000"/>
+                  </a:schemeClr>
+                </a:solidFill>
+              </a:rPr>
+              <a:t>CREATE (</a:t>
+            </a:r>
+            <a:r>
+              <a:rPr lang="en-US" sz="2000" dirty="0" err="1">
+                <a:solidFill>
+                  <a:schemeClr val="accent6">
+                    <a:lumMod val="60000"/>
+                    <a:lumOff val="40000"/>
+                  </a:schemeClr>
+                </a:solidFill>
+              </a:rPr>
+              <a:t>travel:Topic</a:t>
+            </a:r>
+            <a:r>
+              <a:rPr lang="en-US" sz="2000" dirty="0">
+                <a:solidFill>
+                  <a:schemeClr val="accent6">
+                    <a:lumMod val="60000"/>
+                    <a:lumOff val="40000"/>
+                  </a:schemeClr>
+                </a:solidFill>
+              </a:rPr>
+              <a:t> {name: 'Travel'})</a:t>
+            </a:r>
+          </a:p>
+        </p:txBody>
+      </p:sp>
+      <p:sp>
+        <p:nvSpPr>
+          <p:cNvPr id="5" name="TextBox 4">
+            <a:extLst>
+              <a:ext uri="{FF2B5EF4-FFF2-40B4-BE49-F238E27FC236}">
+                <a16:creationId xmlns:a16="http://schemas.microsoft.com/office/drawing/2014/main" id="{83787867-27DA-0FD5-0ABC-EBFF826EE92F}"/>
+              </a:ext>
+            </a:extLst>
+          </p:cNvPr>
+          <p:cNvSpPr txBox="1"/>
+          <p:nvPr/>
+        </p:nvSpPr>
+        <p:spPr>
+          <a:xfrm>
+            <a:off x="406908" y="5676638"/>
+            <a:ext cx="6190488" cy="461665"/>
+          </a:xfrm>
+          <a:prstGeom prst="rect">
+            <a:avLst/>
+          </a:prstGeom>
+          <a:noFill/>
+        </p:spPr>
+        <p:txBody>
+          <a:bodyPr wrap="square">
+            <a:spAutoFit/>
+          </a:bodyPr>
+          <a:lstStyle/>
+          <a:p>
+            <a:r>
+              <a:rPr lang="en-US" sz="2400" dirty="0">
+                <a:solidFill>
+                  <a:schemeClr val="accent6">
+                    <a:lumMod val="60000"/>
+                    <a:lumOff val="40000"/>
+                  </a:schemeClr>
+                </a:solidFill>
+              </a:rPr>
+              <a:t>STEP1: Create Nodes</a:t>
+            </a:r>
+          </a:p>
+        </p:txBody>
+      </p:sp>
+      <p:pic>
+        <p:nvPicPr>
+          <p:cNvPr id="8" name="Picture 7">
+            <a:extLst>
+              <a:ext uri="{FF2B5EF4-FFF2-40B4-BE49-F238E27FC236}">
+                <a16:creationId xmlns:a16="http://schemas.microsoft.com/office/drawing/2014/main" id="{099C9994-3724-135B-E0F7-74CFFEF62D98}"/>
+              </a:ext>
+            </a:extLst>
+          </p:cNvPr>
+          <p:cNvPicPr>
+            <a:picLocks noChangeAspect="1"/>
+          </p:cNvPicPr>
+          <p:nvPr/>
+        </p:nvPicPr>
+        <p:blipFill>
+          <a:blip r:embed="rId2"/>
+          <a:stretch>
+            <a:fillRect/>
+          </a:stretch>
+        </p:blipFill>
+        <p:spPr>
+          <a:xfrm>
+            <a:off x="86792" y="1"/>
+            <a:ext cx="7248166" cy="4654296"/>
+          </a:xfrm>
+          <a:prstGeom prst="rect">
+            <a:avLst/>
+          </a:prstGeom>
+        </p:spPr>
+      </p:pic>
+    </p:spTree>
+    <p:extLst>
+      <p:ext uri="{BB962C8B-B14F-4D97-AF65-F5344CB8AC3E}">
+        <p14:creationId xmlns:p14="http://schemas.microsoft.com/office/powerpoint/2010/main" val="1467984923"/>
+      </p:ext>
+    </p:extLst>
+  </p:cSld>
+  <p:clrMapOvr>
+    <a:masterClrMapping/>
+  </p:clrMapOvr>
+</p:sld>
+</file>
+
+<file path=ppt/slides/slide11.xml><?xml version="1.0" encoding="utf-8"?>
+<p:sld xmlns:a="http://schemas.openxmlformats.org/drawingml/2006/main" xmlns:r="http://schemas.openxmlformats.org/officeDocument/2006/relationships" xmlns:p="http://schemas.openxmlformats.org/presentationml/2006/main">
+  <p:cSld>
+    <p:spTree>
+      <p:nvGrpSpPr>
+        <p:cNvPr id="1" name="">
+          <a:extLst>
+            <a:ext uri="{FF2B5EF4-FFF2-40B4-BE49-F238E27FC236}">
+              <a16:creationId xmlns:a16="http://schemas.microsoft.com/office/drawing/2014/main" id="{578D2822-B526-60A3-36D5-EB04325AA85E}"/>
+            </a:ext>
+          </a:extLst>
+        </p:cNvPr>
+        <p:cNvGrpSpPr/>
+        <p:nvPr/>
+      </p:nvGrpSpPr>
+      <p:grpSpPr>
+        <a:xfrm>
+          <a:off x="0" y="0"/>
+          <a:ext cx="0" cy="0"/>
+          <a:chOff x="0" y="0"/>
+          <a:chExt cx="0" cy="0"/>
+        </a:xfrm>
+      </p:grpSpPr>
+      <p:sp>
+        <p:nvSpPr>
+          <p:cNvPr id="3" name="TextBox 2">
+            <a:extLst>
+              <a:ext uri="{FF2B5EF4-FFF2-40B4-BE49-F238E27FC236}">
+                <a16:creationId xmlns:a16="http://schemas.microsoft.com/office/drawing/2014/main" id="{84B47A1E-21BE-4262-DC51-2A72F5E38E6E}"/>
+              </a:ext>
+            </a:extLst>
+          </p:cNvPr>
+          <p:cNvSpPr txBox="1"/>
+          <p:nvPr/>
+        </p:nvSpPr>
+        <p:spPr>
+          <a:xfrm>
+            <a:off x="7516368" y="731675"/>
+            <a:ext cx="5166360" cy="4708981"/>
+          </a:xfrm>
+          <a:prstGeom prst="rect">
+            <a:avLst/>
+          </a:prstGeom>
+          <a:noFill/>
+        </p:spPr>
+        <p:txBody>
+          <a:bodyPr wrap="square">
+            <a:spAutoFit/>
+          </a:bodyPr>
+          <a:lstStyle/>
+          <a:p>
+            <a:pPr>
+              <a:buNone/>
+            </a:pPr>
+            <a:r>
+              <a:rPr lang="en-US" sz="2000" dirty="0">
+                <a:solidFill>
+                  <a:schemeClr val="accent6">
+                    <a:lumMod val="60000"/>
+                    <a:lumOff val="40000"/>
+                  </a:schemeClr>
+                </a:solidFill>
+              </a:rPr>
+              <a:t>// 5. Connect the Relationships</a:t>
+            </a:r>
+          </a:p>
+          <a:p>
+            <a:pPr>
+              <a:buNone/>
+            </a:pPr>
+            <a:r>
+              <a:rPr lang="en-US" sz="2000" dirty="0">
+                <a:solidFill>
+                  <a:schemeClr val="accent6">
+                    <a:lumMod val="60000"/>
+                    <a:lumOff val="40000"/>
+                  </a:schemeClr>
+                </a:solidFill>
+              </a:rPr>
+              <a:t>CREATE (ash)-[:</a:t>
+            </a:r>
+            <a:r>
+              <a:rPr lang="en-US" sz="2000" dirty="0" err="1">
+                <a:solidFill>
+                  <a:schemeClr val="accent6">
+                    <a:lumMod val="60000"/>
+                    <a:lumOff val="40000"/>
+                  </a:schemeClr>
+                </a:solidFill>
+              </a:rPr>
+              <a:t>Lives_in</a:t>
+            </a:r>
+            <a:r>
+              <a:rPr lang="en-US" sz="2000" dirty="0">
+                <a:solidFill>
+                  <a:schemeClr val="accent6">
+                    <a:lumMod val="60000"/>
+                    <a:lumOff val="40000"/>
+                  </a:schemeClr>
+                </a:solidFill>
+              </a:rPr>
+              <a:t>]-&gt;(</a:t>
+            </a:r>
+            <a:r>
+              <a:rPr lang="en-US" sz="2000" dirty="0" err="1">
+                <a:solidFill>
+                  <a:schemeClr val="accent6">
+                    <a:lumMod val="60000"/>
+                    <a:lumOff val="40000"/>
+                  </a:schemeClr>
+                </a:solidFill>
+              </a:rPr>
+              <a:t>delhi</a:t>
+            </a:r>
+            <a:r>
+              <a:rPr lang="en-US" sz="2000" dirty="0">
+                <a:solidFill>
+                  <a:schemeClr val="accent6">
+                    <a:lumMod val="60000"/>
+                    <a:lumOff val="40000"/>
+                  </a:schemeClr>
+                </a:solidFill>
+              </a:rPr>
+              <a:t>)</a:t>
+            </a:r>
+          </a:p>
+          <a:p>
+            <a:pPr>
+              <a:buNone/>
+            </a:pPr>
+            <a:r>
+              <a:rPr lang="en-US" sz="2000" dirty="0">
+                <a:solidFill>
+                  <a:schemeClr val="accent6">
+                    <a:lumMod val="60000"/>
+                    <a:lumOff val="40000"/>
+                  </a:schemeClr>
+                </a:solidFill>
+              </a:rPr>
+              <a:t>CREATE (ash)-[:Follows]-&gt;(</a:t>
+            </a:r>
+            <a:r>
+              <a:rPr lang="en-US" sz="2000" dirty="0" err="1">
+                <a:solidFill>
+                  <a:schemeClr val="accent6">
+                    <a:lumMod val="60000"/>
+                    <a:lumOff val="40000"/>
+                  </a:schemeClr>
+                </a:solidFill>
+              </a:rPr>
+              <a:t>ravi</a:t>
+            </a:r>
+            <a:r>
+              <a:rPr lang="en-US" sz="2000" dirty="0">
+                <a:solidFill>
+                  <a:schemeClr val="accent6">
+                    <a:lumMod val="60000"/>
+                    <a:lumOff val="40000"/>
+                  </a:schemeClr>
+                </a:solidFill>
+              </a:rPr>
+              <a:t>)</a:t>
+            </a:r>
+          </a:p>
+          <a:p>
+            <a:pPr>
+              <a:buNone/>
+            </a:pPr>
+            <a:r>
+              <a:rPr lang="en-US" sz="2000" dirty="0">
+                <a:solidFill>
+                  <a:schemeClr val="accent6">
+                    <a:lumMod val="60000"/>
+                    <a:lumOff val="40000"/>
+                  </a:schemeClr>
+                </a:solidFill>
+              </a:rPr>
+              <a:t>CREATE (ash)-[:Follows]-&gt;(</a:t>
+            </a:r>
+            <a:r>
+              <a:rPr lang="en-US" sz="2000" dirty="0" err="1">
+                <a:solidFill>
+                  <a:schemeClr val="accent6">
+                    <a:lumMod val="60000"/>
+                    <a:lumOff val="40000"/>
+                  </a:schemeClr>
+                </a:solidFill>
+              </a:rPr>
+              <a:t>neha</a:t>
+            </a:r>
+            <a:r>
+              <a:rPr lang="en-US" sz="2000" dirty="0">
+                <a:solidFill>
+                  <a:schemeClr val="accent6">
+                    <a:lumMod val="60000"/>
+                    <a:lumOff val="40000"/>
+                  </a:schemeClr>
+                </a:solidFill>
+              </a:rPr>
+              <a:t>)</a:t>
+            </a:r>
+          </a:p>
+          <a:p>
+            <a:pPr>
+              <a:buNone/>
+            </a:pPr>
+            <a:r>
+              <a:rPr lang="en-US" sz="2000" dirty="0">
+                <a:solidFill>
+                  <a:schemeClr val="accent6">
+                    <a:lumMod val="60000"/>
+                    <a:lumOff val="40000"/>
+                  </a:schemeClr>
+                </a:solidFill>
+              </a:rPr>
+              <a:t>CREATE (ash)-[:Created]-&gt;(post1)</a:t>
+            </a:r>
+          </a:p>
+          <a:p>
+            <a:pPr>
+              <a:buNone/>
+            </a:pPr>
+            <a:r>
+              <a:rPr lang="en-US" sz="2000" dirty="0">
+                <a:solidFill>
+                  <a:schemeClr val="accent6">
+                    <a:lumMod val="60000"/>
+                    <a:lumOff val="40000"/>
+                  </a:schemeClr>
+                </a:solidFill>
+              </a:rPr>
+              <a:t>CREATE (ash)-[:Likes]-&gt;(post2)</a:t>
+            </a:r>
+          </a:p>
+          <a:p>
+            <a:pPr>
+              <a:buNone/>
+            </a:pPr>
+            <a:endParaRPr lang="en-US" sz="2000" dirty="0">
+              <a:solidFill>
+                <a:schemeClr val="accent6">
+                  <a:lumMod val="60000"/>
+                  <a:lumOff val="40000"/>
+                </a:schemeClr>
+              </a:solidFill>
+            </a:endParaRPr>
+          </a:p>
+          <a:p>
+            <a:pPr>
+              <a:buNone/>
+            </a:pPr>
+            <a:r>
+              <a:rPr lang="en-US" sz="2000" dirty="0">
+                <a:solidFill>
+                  <a:schemeClr val="accent6">
+                    <a:lumMod val="60000"/>
+                    <a:lumOff val="40000"/>
+                  </a:schemeClr>
+                </a:solidFill>
+              </a:rPr>
+              <a:t>CREATE (</a:t>
+            </a:r>
+            <a:r>
+              <a:rPr lang="en-US" sz="2000" dirty="0" err="1">
+                <a:solidFill>
+                  <a:schemeClr val="accent6">
+                    <a:lumMod val="60000"/>
+                    <a:lumOff val="40000"/>
+                  </a:schemeClr>
+                </a:solidFill>
+              </a:rPr>
+              <a:t>ravi</a:t>
+            </a:r>
+            <a:r>
+              <a:rPr lang="en-US" sz="2000" dirty="0">
+                <a:solidFill>
+                  <a:schemeClr val="accent6">
+                    <a:lumMod val="60000"/>
+                    <a:lumOff val="40000"/>
+                  </a:schemeClr>
+                </a:solidFill>
+              </a:rPr>
+              <a:t>)-[:Follows]-&gt;(</a:t>
+            </a:r>
+            <a:r>
+              <a:rPr lang="en-US" sz="2000" dirty="0" err="1">
+                <a:solidFill>
+                  <a:schemeClr val="accent6">
+                    <a:lumMod val="60000"/>
+                    <a:lumOff val="40000"/>
+                  </a:schemeClr>
+                </a:solidFill>
+              </a:rPr>
+              <a:t>neha</a:t>
+            </a:r>
+            <a:r>
+              <a:rPr lang="en-US" sz="2000" dirty="0">
+                <a:solidFill>
+                  <a:schemeClr val="accent6">
+                    <a:lumMod val="60000"/>
+                    <a:lumOff val="40000"/>
+                  </a:schemeClr>
+                </a:solidFill>
+              </a:rPr>
+              <a:t>)</a:t>
+            </a:r>
+          </a:p>
+          <a:p>
+            <a:pPr>
+              <a:buNone/>
+            </a:pPr>
+            <a:r>
+              <a:rPr lang="en-US" sz="2000" dirty="0">
+                <a:solidFill>
+                  <a:schemeClr val="accent6">
+                    <a:lumMod val="60000"/>
+                    <a:lumOff val="40000"/>
+                  </a:schemeClr>
+                </a:solidFill>
+              </a:rPr>
+              <a:t>CREATE (</a:t>
+            </a:r>
+            <a:r>
+              <a:rPr lang="en-US" sz="2000" dirty="0" err="1">
+                <a:solidFill>
+                  <a:schemeClr val="accent6">
+                    <a:lumMod val="60000"/>
+                    <a:lumOff val="40000"/>
+                  </a:schemeClr>
+                </a:solidFill>
+              </a:rPr>
+              <a:t>ravi</a:t>
+            </a:r>
+            <a:r>
+              <a:rPr lang="en-US" sz="2000" dirty="0">
+                <a:solidFill>
+                  <a:schemeClr val="accent6">
+                    <a:lumMod val="60000"/>
+                    <a:lumOff val="40000"/>
+                  </a:schemeClr>
+                </a:solidFill>
+              </a:rPr>
+              <a:t>)-[:Created]-&gt;(post2)</a:t>
+            </a:r>
+          </a:p>
+          <a:p>
+            <a:pPr>
+              <a:buNone/>
+            </a:pPr>
+            <a:r>
+              <a:rPr lang="en-US" sz="2000" dirty="0">
+                <a:solidFill>
+                  <a:schemeClr val="accent6">
+                    <a:lumMod val="60000"/>
+                    <a:lumOff val="40000"/>
+                  </a:schemeClr>
+                </a:solidFill>
+              </a:rPr>
+              <a:t>CREATE (</a:t>
+            </a:r>
+            <a:r>
+              <a:rPr lang="en-US" sz="2000" dirty="0" err="1">
+                <a:solidFill>
+                  <a:schemeClr val="accent6">
+                    <a:lumMod val="60000"/>
+                    <a:lumOff val="40000"/>
+                  </a:schemeClr>
+                </a:solidFill>
+              </a:rPr>
+              <a:t>ravi</a:t>
+            </a:r>
+            <a:r>
+              <a:rPr lang="en-US" sz="2000" dirty="0">
+                <a:solidFill>
+                  <a:schemeClr val="accent6">
+                    <a:lumMod val="60000"/>
+                    <a:lumOff val="40000"/>
+                  </a:schemeClr>
+                </a:solidFill>
+              </a:rPr>
+              <a:t>)-[:</a:t>
+            </a:r>
+            <a:r>
+              <a:rPr lang="en-US" sz="2000" dirty="0" err="1">
+                <a:solidFill>
+                  <a:schemeClr val="accent6">
+                    <a:lumMod val="60000"/>
+                    <a:lumOff val="40000"/>
+                  </a:schemeClr>
+                </a:solidFill>
+              </a:rPr>
+              <a:t>Lives_in</a:t>
+            </a:r>
+            <a:r>
+              <a:rPr lang="en-US" sz="2000" dirty="0">
+                <a:solidFill>
+                  <a:schemeClr val="accent6">
+                    <a:lumMod val="60000"/>
+                    <a:lumOff val="40000"/>
+                  </a:schemeClr>
+                </a:solidFill>
+              </a:rPr>
+              <a:t>]-&gt;(</a:t>
+            </a:r>
+            <a:r>
+              <a:rPr lang="en-US" sz="2000" dirty="0" err="1">
+                <a:solidFill>
+                  <a:schemeClr val="accent6">
+                    <a:lumMod val="60000"/>
+                    <a:lumOff val="40000"/>
+                  </a:schemeClr>
+                </a:solidFill>
+              </a:rPr>
+              <a:t>tokyo</a:t>
+            </a:r>
+            <a:r>
+              <a:rPr lang="en-US" sz="2000" dirty="0">
+                <a:solidFill>
+                  <a:schemeClr val="accent6">
+                    <a:lumMod val="60000"/>
+                    <a:lumOff val="40000"/>
+                  </a:schemeClr>
+                </a:solidFill>
+              </a:rPr>
+              <a:t>)</a:t>
+            </a:r>
+          </a:p>
+          <a:p>
+            <a:pPr>
+              <a:buNone/>
+            </a:pPr>
+            <a:endParaRPr lang="en-US" sz="2000" dirty="0">
+              <a:solidFill>
+                <a:schemeClr val="accent6">
+                  <a:lumMod val="60000"/>
+                  <a:lumOff val="40000"/>
+                </a:schemeClr>
+              </a:solidFill>
+            </a:endParaRPr>
+          </a:p>
+          <a:p>
+            <a:pPr>
+              <a:buNone/>
+            </a:pPr>
+            <a:r>
+              <a:rPr lang="en-US" sz="2000" dirty="0">
+                <a:solidFill>
+                  <a:schemeClr val="accent6">
+                    <a:lumMod val="60000"/>
+                    <a:lumOff val="40000"/>
+                  </a:schemeClr>
+                </a:solidFill>
+              </a:rPr>
+              <a:t>CREATE (</a:t>
+            </a:r>
+            <a:r>
+              <a:rPr lang="en-US" sz="2000" dirty="0" err="1">
+                <a:solidFill>
+                  <a:schemeClr val="accent6">
+                    <a:lumMod val="60000"/>
+                    <a:lumOff val="40000"/>
+                  </a:schemeClr>
+                </a:solidFill>
+              </a:rPr>
+              <a:t>neha</a:t>
+            </a:r>
+            <a:r>
+              <a:rPr lang="en-US" sz="2000" dirty="0">
+                <a:solidFill>
+                  <a:schemeClr val="accent6">
+                    <a:lumMod val="60000"/>
+                    <a:lumOff val="40000"/>
+                  </a:schemeClr>
+                </a:solidFill>
+              </a:rPr>
+              <a:t>)-[:Likes]-&gt;(post1)</a:t>
+            </a:r>
+          </a:p>
+          <a:p>
+            <a:pPr>
+              <a:buNone/>
+            </a:pPr>
+            <a:endParaRPr lang="en-US" sz="2000" dirty="0">
+              <a:solidFill>
+                <a:schemeClr val="accent6">
+                  <a:lumMod val="60000"/>
+                  <a:lumOff val="40000"/>
+                </a:schemeClr>
+              </a:solidFill>
+            </a:endParaRPr>
+          </a:p>
+          <a:p>
+            <a:pPr>
+              <a:buNone/>
+            </a:pPr>
+            <a:r>
+              <a:rPr lang="en-US" sz="2000" dirty="0">
+                <a:solidFill>
+                  <a:schemeClr val="accent6">
+                    <a:lumMod val="60000"/>
+                    <a:lumOff val="40000"/>
+                  </a:schemeClr>
+                </a:solidFill>
+              </a:rPr>
+              <a:t>CREATE (post1)-[:About]-&gt;(ai)</a:t>
+            </a:r>
+          </a:p>
+          <a:p>
+            <a:pPr>
+              <a:buNone/>
+            </a:pPr>
+            <a:r>
+              <a:rPr lang="en-US" sz="2000" dirty="0">
+                <a:solidFill>
+                  <a:schemeClr val="accent6">
+                    <a:lumMod val="60000"/>
+                    <a:lumOff val="40000"/>
+                  </a:schemeClr>
+                </a:solidFill>
+              </a:rPr>
+              <a:t>CREATE (post2)-[:About]-&gt;(travel)</a:t>
+            </a:r>
+          </a:p>
+        </p:txBody>
+      </p:sp>
+      <p:sp>
+        <p:nvSpPr>
+          <p:cNvPr id="5" name="TextBox 4">
+            <a:extLst>
+              <a:ext uri="{FF2B5EF4-FFF2-40B4-BE49-F238E27FC236}">
+                <a16:creationId xmlns:a16="http://schemas.microsoft.com/office/drawing/2014/main" id="{584E2BA8-1CD3-5CD7-AC38-187956145B73}"/>
+              </a:ext>
+            </a:extLst>
+          </p:cNvPr>
+          <p:cNvSpPr txBox="1"/>
+          <p:nvPr/>
+        </p:nvSpPr>
+        <p:spPr>
+          <a:xfrm>
+            <a:off x="425196" y="5630918"/>
+            <a:ext cx="6190488" cy="461665"/>
+          </a:xfrm>
+          <a:prstGeom prst="rect">
+            <a:avLst/>
+          </a:prstGeom>
+          <a:noFill/>
+        </p:spPr>
+        <p:txBody>
+          <a:bodyPr wrap="square">
+            <a:spAutoFit/>
+          </a:bodyPr>
+          <a:lstStyle/>
+          <a:p>
+            <a:r>
+              <a:rPr lang="en-US" sz="2400" dirty="0">
+                <a:solidFill>
+                  <a:schemeClr val="accent6">
+                    <a:lumMod val="60000"/>
+                    <a:lumOff val="40000"/>
+                  </a:schemeClr>
+                </a:solidFill>
+              </a:rPr>
+              <a:t>STEP2: Create relationships</a:t>
+            </a:r>
+          </a:p>
+        </p:txBody>
+      </p:sp>
+      <p:pic>
+        <p:nvPicPr>
+          <p:cNvPr id="8" name="Picture 7">
+            <a:extLst>
+              <a:ext uri="{FF2B5EF4-FFF2-40B4-BE49-F238E27FC236}">
+                <a16:creationId xmlns:a16="http://schemas.microsoft.com/office/drawing/2014/main" id="{F434049E-52EB-C0F5-19A3-7159FD893D2A}"/>
+              </a:ext>
+            </a:extLst>
+          </p:cNvPr>
+          <p:cNvPicPr>
+            <a:picLocks noChangeAspect="1"/>
+          </p:cNvPicPr>
+          <p:nvPr/>
+        </p:nvPicPr>
+        <p:blipFill>
+          <a:blip r:embed="rId2"/>
+          <a:stretch>
+            <a:fillRect/>
+          </a:stretch>
+        </p:blipFill>
+        <p:spPr>
+          <a:xfrm>
+            <a:off x="86792" y="1"/>
+            <a:ext cx="7248166" cy="4654296"/>
+          </a:xfrm>
+          <a:prstGeom prst="rect">
+            <a:avLst/>
+          </a:prstGeom>
+        </p:spPr>
+      </p:pic>
+    </p:spTree>
+    <p:extLst>
+      <p:ext uri="{BB962C8B-B14F-4D97-AF65-F5344CB8AC3E}">
+        <p14:creationId xmlns:p14="http://schemas.microsoft.com/office/powerpoint/2010/main" val="2274748014"/>
+      </p:ext>
+    </p:extLst>
+  </p:cSld>
+  <p:clrMapOvr>
+    <a:masterClrMapping/>
+  </p:clrMapOvr>
+</p:sld>
+</file>
+
+<file path=ppt/slides/slide12.xml><?xml version="1.0" encoding="utf-8"?>
+<p:sld xmlns:a="http://schemas.openxmlformats.org/drawingml/2006/main" xmlns:r="http://schemas.openxmlformats.org/officeDocument/2006/relationships" xmlns:p="http://schemas.openxmlformats.org/presentationml/2006/main">
+  <p:cSld>
+    <p:spTree>
+      <p:nvGrpSpPr>
+        <p:cNvPr id="1" name="">
+          <a:extLst>
+            <a:ext uri="{FF2B5EF4-FFF2-40B4-BE49-F238E27FC236}">
+              <a16:creationId xmlns:a16="http://schemas.microsoft.com/office/drawing/2014/main" id="{5D3D88A5-4913-1606-644D-66939E52DC8F}"/>
+            </a:ext>
+          </a:extLst>
+        </p:cNvPr>
+        <p:cNvGrpSpPr/>
+        <p:nvPr/>
+      </p:nvGrpSpPr>
+      <p:grpSpPr>
+        <a:xfrm>
+          <a:off x="0" y="0"/>
+          <a:ext cx="0" cy="0"/>
+          <a:chOff x="0" y="0"/>
+          <a:chExt cx="0" cy="0"/>
+        </a:xfrm>
+      </p:grpSpPr>
+      <p:sp>
+        <p:nvSpPr>
+          <p:cNvPr id="5" name="TextBox 4">
+            <a:extLst>
+              <a:ext uri="{FF2B5EF4-FFF2-40B4-BE49-F238E27FC236}">
+                <a16:creationId xmlns:a16="http://schemas.microsoft.com/office/drawing/2014/main" id="{E7A6E635-C1CD-6E5A-441B-A8966EFB4DD1}"/>
+              </a:ext>
+            </a:extLst>
+          </p:cNvPr>
+          <p:cNvSpPr txBox="1"/>
+          <p:nvPr/>
+        </p:nvSpPr>
+        <p:spPr>
+          <a:xfrm>
+            <a:off x="406908" y="5676638"/>
+            <a:ext cx="6190488" cy="830997"/>
+          </a:xfrm>
+          <a:prstGeom prst="rect">
+            <a:avLst/>
+          </a:prstGeom>
+          <a:noFill/>
+        </p:spPr>
+        <p:txBody>
+          <a:bodyPr wrap="square">
+            <a:spAutoFit/>
+          </a:bodyPr>
+          <a:lstStyle/>
+          <a:p>
+            <a:r>
+              <a:rPr lang="en-US" sz="2400" dirty="0">
+                <a:solidFill>
+                  <a:schemeClr val="accent6">
+                    <a:lumMod val="60000"/>
+                    <a:lumOff val="40000"/>
+                  </a:schemeClr>
+                </a:solidFill>
+              </a:rPr>
+              <a:t>Q: Find topics liked by people Ash follows ?</a:t>
+            </a:r>
+          </a:p>
+          <a:p>
+            <a:r>
+              <a:rPr lang="en-US" sz="2400" dirty="0">
+                <a:solidFill>
+                  <a:schemeClr val="accent6">
+                    <a:lumMod val="60000"/>
+                    <a:lumOff val="40000"/>
+                  </a:schemeClr>
+                </a:solidFill>
+              </a:rPr>
+              <a:t>Answer (Visually): AI</a:t>
+            </a:r>
+          </a:p>
+        </p:txBody>
+      </p:sp>
+      <p:pic>
+        <p:nvPicPr>
+          <p:cNvPr id="8" name="Picture 7">
+            <a:extLst>
+              <a:ext uri="{FF2B5EF4-FFF2-40B4-BE49-F238E27FC236}">
+                <a16:creationId xmlns:a16="http://schemas.microsoft.com/office/drawing/2014/main" id="{1ADC3EA1-01A7-9254-7775-0801CA7F0123}"/>
+              </a:ext>
+            </a:extLst>
+          </p:cNvPr>
+          <p:cNvPicPr>
+            <a:picLocks noChangeAspect="1"/>
+          </p:cNvPicPr>
+          <p:nvPr/>
+        </p:nvPicPr>
+        <p:blipFill>
+          <a:blip r:embed="rId2"/>
+          <a:stretch>
+            <a:fillRect/>
+          </a:stretch>
+        </p:blipFill>
+        <p:spPr>
+          <a:xfrm>
+            <a:off x="86792" y="1"/>
+            <a:ext cx="7248166" cy="4654296"/>
+          </a:xfrm>
+          <a:prstGeom prst="rect">
+            <a:avLst/>
+          </a:prstGeom>
+        </p:spPr>
+      </p:pic>
+    </p:spTree>
+    <p:extLst>
+      <p:ext uri="{BB962C8B-B14F-4D97-AF65-F5344CB8AC3E}">
+        <p14:creationId xmlns:p14="http://schemas.microsoft.com/office/powerpoint/2010/main" val="2053784175"/>
+      </p:ext>
+    </p:extLst>
+  </p:cSld>
+  <p:clrMapOvr>
+    <a:masterClrMapping/>
+  </p:clrMapOvr>
+</p:sld>
+</file>
+
+<file path=ppt/slides/slide13.xml><?xml version="1.0" encoding="utf-8"?>
+<p:sld xmlns:a="http://schemas.openxmlformats.org/drawingml/2006/main" xmlns:r="http://schemas.openxmlformats.org/officeDocument/2006/relationships" xmlns:p="http://schemas.openxmlformats.org/presentationml/2006/main">
+  <p:cSld>
+    <p:spTree>
+      <p:nvGrpSpPr>
+        <p:cNvPr id="1" name="">
+          <a:extLst>
+            <a:ext uri="{FF2B5EF4-FFF2-40B4-BE49-F238E27FC236}">
+              <a16:creationId xmlns:a16="http://schemas.microsoft.com/office/drawing/2014/main" id="{CAAE8007-FD01-AE27-11B1-44FFAE3E333C}"/>
+            </a:ext>
+          </a:extLst>
+        </p:cNvPr>
+        <p:cNvGrpSpPr/>
+        <p:nvPr/>
+      </p:nvGrpSpPr>
+      <p:grpSpPr>
+        <a:xfrm>
+          <a:off x="0" y="0"/>
+          <a:ext cx="0" cy="0"/>
+          <a:chOff x="0" y="0"/>
+          <a:chExt cx="0" cy="0"/>
+        </a:xfrm>
+      </p:grpSpPr>
+      <p:sp>
+        <p:nvSpPr>
+          <p:cNvPr id="7" name="TextBox 6">
+            <a:extLst>
+              <a:ext uri="{FF2B5EF4-FFF2-40B4-BE49-F238E27FC236}">
+                <a16:creationId xmlns:a16="http://schemas.microsoft.com/office/drawing/2014/main" id="{C7509A48-5C1C-31CF-2B24-9DED63E06D08}"/>
+              </a:ext>
+            </a:extLst>
+          </p:cNvPr>
+          <p:cNvSpPr txBox="1"/>
+          <p:nvPr/>
+        </p:nvSpPr>
+        <p:spPr>
+          <a:xfrm>
+            <a:off x="137160" y="164360"/>
+            <a:ext cx="9015984" cy="3416320"/>
+          </a:xfrm>
+          <a:prstGeom prst="rect">
+            <a:avLst/>
+          </a:prstGeom>
+          <a:noFill/>
+        </p:spPr>
+        <p:txBody>
+          <a:bodyPr wrap="square">
+            <a:spAutoFit/>
+          </a:bodyPr>
+          <a:lstStyle/>
+          <a:p>
+            <a:r>
+              <a:rPr lang="en-US" sz="2400" b="1" dirty="0">
+                <a:solidFill>
+                  <a:schemeClr val="accent6">
+                    <a:lumMod val="60000"/>
+                    <a:lumOff val="40000"/>
+                  </a:schemeClr>
+                </a:solidFill>
+              </a:rPr>
+              <a:t>4. Query Example</a:t>
+            </a:r>
+          </a:p>
+          <a:p>
+            <a:r>
+              <a:rPr lang="en-US" sz="2400" dirty="0">
+                <a:solidFill>
+                  <a:schemeClr val="accent6">
+                    <a:lumMod val="60000"/>
+                    <a:lumOff val="40000"/>
+                  </a:schemeClr>
+                </a:solidFill>
+              </a:rPr>
+              <a:t>In graph databases like Neo4j, you use </a:t>
+            </a:r>
+            <a:r>
+              <a:rPr lang="en-US" sz="2400" b="1" dirty="0">
+                <a:solidFill>
+                  <a:schemeClr val="accent6">
+                    <a:lumMod val="60000"/>
+                    <a:lumOff val="40000"/>
+                  </a:schemeClr>
+                </a:solidFill>
+              </a:rPr>
+              <a:t>Cypher query language</a:t>
+            </a:r>
+            <a:r>
+              <a:rPr lang="en-US" sz="2400" dirty="0">
+                <a:solidFill>
+                  <a:schemeClr val="accent6">
+                    <a:lumMod val="60000"/>
+                    <a:lumOff val="40000"/>
+                  </a:schemeClr>
+                </a:solidFill>
+              </a:rPr>
+              <a:t>:</a:t>
+            </a:r>
+          </a:p>
+          <a:p>
+            <a:endParaRPr lang="en-US" sz="2400" dirty="0">
+              <a:solidFill>
+                <a:schemeClr val="accent6">
+                  <a:lumMod val="60000"/>
+                  <a:lumOff val="40000"/>
+                </a:schemeClr>
+              </a:solidFill>
+            </a:endParaRPr>
+          </a:p>
+          <a:p>
+            <a:r>
+              <a:rPr lang="en-US" sz="2400" dirty="0">
+                <a:solidFill>
+                  <a:schemeClr val="accent6">
+                    <a:lumMod val="60000"/>
+                    <a:lumOff val="40000"/>
+                  </a:schemeClr>
+                </a:solidFill>
+              </a:rPr>
+              <a:t>Q: Find out where Ash lives.</a:t>
+            </a:r>
+          </a:p>
+          <a:p>
+            <a:endParaRPr lang="en-US" sz="2400" dirty="0">
+              <a:solidFill>
+                <a:schemeClr val="accent6">
+                  <a:lumMod val="60000"/>
+                  <a:lumOff val="40000"/>
+                </a:schemeClr>
+              </a:solidFill>
+            </a:endParaRPr>
+          </a:p>
+          <a:p>
+            <a:r>
+              <a:rPr lang="en-US" sz="2400" dirty="0">
+                <a:solidFill>
+                  <a:schemeClr val="accent6">
+                    <a:lumMod val="60000"/>
+                    <a:lumOff val="40000"/>
+                  </a:schemeClr>
+                </a:solidFill>
+              </a:rPr>
+              <a:t>MATCH (</a:t>
+            </a:r>
+            <a:r>
+              <a:rPr lang="en-US" sz="2400" dirty="0" err="1">
+                <a:solidFill>
+                  <a:schemeClr val="accent6">
+                    <a:lumMod val="60000"/>
+                    <a:lumOff val="40000"/>
+                  </a:schemeClr>
+                </a:solidFill>
+              </a:rPr>
+              <a:t>p:Person</a:t>
+            </a:r>
+            <a:r>
+              <a:rPr lang="en-US" sz="2400" dirty="0">
+                <a:solidFill>
+                  <a:schemeClr val="accent6">
+                    <a:lumMod val="60000"/>
+                    <a:lumOff val="40000"/>
+                  </a:schemeClr>
+                </a:solidFill>
+              </a:rPr>
+              <a:t> {name: 'Ash'})-[:</a:t>
+            </a:r>
+            <a:r>
+              <a:rPr lang="en-US" sz="2400" dirty="0" err="1">
+                <a:solidFill>
+                  <a:schemeClr val="accent6">
+                    <a:lumMod val="60000"/>
+                    <a:lumOff val="40000"/>
+                  </a:schemeClr>
+                </a:solidFill>
+              </a:rPr>
+              <a:t>Lives_in</a:t>
+            </a:r>
+            <a:r>
+              <a:rPr lang="en-US" sz="2400" dirty="0">
+                <a:solidFill>
+                  <a:schemeClr val="accent6">
+                    <a:lumMod val="60000"/>
+                    <a:lumOff val="40000"/>
+                  </a:schemeClr>
+                </a:solidFill>
+              </a:rPr>
+              <a:t>]-&gt;(</a:t>
+            </a:r>
+            <a:r>
+              <a:rPr lang="en-US" sz="2400" dirty="0" err="1">
+                <a:solidFill>
+                  <a:schemeClr val="accent6">
+                    <a:lumMod val="60000"/>
+                    <a:lumOff val="40000"/>
+                  </a:schemeClr>
+                </a:solidFill>
+              </a:rPr>
+              <a:t>c:City</a:t>
+            </a:r>
+            <a:r>
+              <a:rPr lang="en-US" sz="2400" dirty="0">
+                <a:solidFill>
+                  <a:schemeClr val="accent6">
+                    <a:lumMod val="60000"/>
+                    <a:lumOff val="40000"/>
+                  </a:schemeClr>
+                </a:solidFill>
+              </a:rPr>
+              <a:t>)</a:t>
+            </a:r>
+          </a:p>
+          <a:p>
+            <a:r>
+              <a:rPr lang="en-US" sz="2400" dirty="0">
+                <a:solidFill>
+                  <a:schemeClr val="accent6">
+                    <a:lumMod val="60000"/>
+                    <a:lumOff val="40000"/>
+                  </a:schemeClr>
+                </a:solidFill>
+              </a:rPr>
+              <a:t>RETURN c.name AS City</a:t>
+            </a:r>
+          </a:p>
+          <a:p>
+            <a:endParaRPr lang="en-US" sz="2400" dirty="0">
+              <a:solidFill>
+                <a:schemeClr val="accent6">
+                  <a:lumMod val="60000"/>
+                  <a:lumOff val="40000"/>
+                </a:schemeClr>
+              </a:solidFill>
+            </a:endParaRPr>
+          </a:p>
+          <a:p>
+            <a:r>
+              <a:rPr lang="en-US" sz="2400" dirty="0">
+                <a:solidFill>
+                  <a:schemeClr val="accent6">
+                    <a:lumMod val="60000"/>
+                    <a:lumOff val="40000"/>
+                  </a:schemeClr>
+                </a:solidFill>
+              </a:rPr>
+              <a:t>Answer: Delhi</a:t>
+            </a:r>
+          </a:p>
+        </p:txBody>
+      </p:sp>
+      <p:pic>
+        <p:nvPicPr>
+          <p:cNvPr id="3" name="Picture 2">
+            <a:extLst>
+              <a:ext uri="{FF2B5EF4-FFF2-40B4-BE49-F238E27FC236}">
+                <a16:creationId xmlns:a16="http://schemas.microsoft.com/office/drawing/2014/main" id="{3D54CDC4-9EDC-D190-D444-B49D3DCAD703}"/>
+              </a:ext>
+            </a:extLst>
+          </p:cNvPr>
+          <p:cNvPicPr>
+            <a:picLocks noChangeAspect="1"/>
+          </p:cNvPicPr>
+          <p:nvPr/>
+        </p:nvPicPr>
+        <p:blipFill>
+          <a:blip r:embed="rId2"/>
+          <a:stretch>
+            <a:fillRect/>
+          </a:stretch>
+        </p:blipFill>
+        <p:spPr>
+          <a:xfrm>
+            <a:off x="5774995" y="2825496"/>
+            <a:ext cx="6279845" cy="4032504"/>
+          </a:xfrm>
+          <a:prstGeom prst="rect">
+            <a:avLst/>
+          </a:prstGeom>
+        </p:spPr>
+      </p:pic>
+    </p:spTree>
+    <p:extLst>
+      <p:ext uri="{BB962C8B-B14F-4D97-AF65-F5344CB8AC3E}">
+        <p14:creationId xmlns:p14="http://schemas.microsoft.com/office/powerpoint/2010/main" val="2424340829"/>
+      </p:ext>
+    </p:extLst>
+  </p:cSld>
+  <p:clrMapOvr>
+    <a:masterClrMapping/>
+  </p:clrMapOvr>
+</p:sld>
+</file>
+
+<file path=ppt/slides/slide14.xml><?xml version="1.0" encoding="utf-8"?>
+<p:sld xmlns:a="http://schemas.openxmlformats.org/drawingml/2006/main" xmlns:r="http://schemas.openxmlformats.org/officeDocument/2006/relationships" xmlns:p="http://schemas.openxmlformats.org/presentationml/2006/main">
+  <p:cSld>
+    <p:spTree>
+      <p:nvGrpSpPr>
+        <p:cNvPr id="1" name="">
+          <a:extLst>
+            <a:ext uri="{FF2B5EF4-FFF2-40B4-BE49-F238E27FC236}">
+              <a16:creationId xmlns:a16="http://schemas.microsoft.com/office/drawing/2014/main" id="{3A362E74-DA92-05FB-1776-C0EB85BE2917}"/>
+            </a:ext>
+          </a:extLst>
+        </p:cNvPr>
+        <p:cNvGrpSpPr/>
+        <p:nvPr/>
+      </p:nvGrpSpPr>
+      <p:grpSpPr>
+        <a:xfrm>
+          <a:off x="0" y="0"/>
+          <a:ext cx="0" cy="0"/>
+          <a:chOff x="0" y="0"/>
+          <a:chExt cx="0" cy="0"/>
+        </a:xfrm>
+      </p:grpSpPr>
+      <p:sp>
+        <p:nvSpPr>
+          <p:cNvPr id="7" name="TextBox 6">
+            <a:extLst>
+              <a:ext uri="{FF2B5EF4-FFF2-40B4-BE49-F238E27FC236}">
+                <a16:creationId xmlns:a16="http://schemas.microsoft.com/office/drawing/2014/main" id="{F1CAC1BD-FE13-6E4C-1150-D75DC1D0FEB4}"/>
+              </a:ext>
+            </a:extLst>
+          </p:cNvPr>
+          <p:cNvSpPr txBox="1"/>
+          <p:nvPr/>
+        </p:nvSpPr>
+        <p:spPr>
+          <a:xfrm>
+            <a:off x="137160" y="164360"/>
+            <a:ext cx="9015984" cy="3416320"/>
+          </a:xfrm>
+          <a:prstGeom prst="rect">
+            <a:avLst/>
+          </a:prstGeom>
+          <a:noFill/>
+        </p:spPr>
+        <p:txBody>
+          <a:bodyPr wrap="square">
+            <a:spAutoFit/>
+          </a:bodyPr>
+          <a:lstStyle/>
+          <a:p>
+            <a:r>
+              <a:rPr lang="en-US" sz="2400" b="1" dirty="0">
+                <a:solidFill>
+                  <a:schemeClr val="accent6">
+                    <a:lumMod val="60000"/>
+                    <a:lumOff val="40000"/>
+                  </a:schemeClr>
+                </a:solidFill>
+              </a:rPr>
+              <a:t>4. Query Example</a:t>
+            </a:r>
+          </a:p>
+          <a:p>
+            <a:r>
+              <a:rPr lang="en-US" sz="2400" dirty="0">
+                <a:solidFill>
+                  <a:schemeClr val="accent6">
+                    <a:lumMod val="60000"/>
+                    <a:lumOff val="40000"/>
+                  </a:schemeClr>
+                </a:solidFill>
+              </a:rPr>
+              <a:t>In graph databases like Neo4j, you use </a:t>
+            </a:r>
+            <a:r>
+              <a:rPr lang="en-US" sz="2400" b="1" dirty="0">
+                <a:solidFill>
+                  <a:schemeClr val="accent6">
+                    <a:lumMod val="60000"/>
+                    <a:lumOff val="40000"/>
+                  </a:schemeClr>
+                </a:solidFill>
+              </a:rPr>
+              <a:t>Cypher query language</a:t>
+            </a:r>
+            <a:r>
+              <a:rPr lang="en-US" sz="2400" dirty="0">
+                <a:solidFill>
+                  <a:schemeClr val="accent6">
+                    <a:lumMod val="60000"/>
+                    <a:lumOff val="40000"/>
+                  </a:schemeClr>
+                </a:solidFill>
+              </a:rPr>
+              <a:t>:</a:t>
+            </a:r>
+          </a:p>
+          <a:p>
+            <a:endParaRPr lang="en-US" sz="2400" dirty="0">
+              <a:solidFill>
+                <a:schemeClr val="accent6">
+                  <a:lumMod val="60000"/>
+                  <a:lumOff val="40000"/>
+                </a:schemeClr>
+              </a:solidFill>
+            </a:endParaRPr>
+          </a:p>
+          <a:p>
+            <a:r>
+              <a:rPr lang="en-US" sz="2400" dirty="0">
+                <a:solidFill>
+                  <a:schemeClr val="accent6">
+                    <a:lumMod val="60000"/>
+                    <a:lumOff val="40000"/>
+                  </a:schemeClr>
+                </a:solidFill>
+              </a:rPr>
+              <a:t>Q: Find all the people Ash follows ?</a:t>
+            </a:r>
+          </a:p>
+          <a:p>
+            <a:endParaRPr lang="en-US" sz="2400" dirty="0">
+              <a:solidFill>
+                <a:schemeClr val="accent6">
+                  <a:lumMod val="60000"/>
+                  <a:lumOff val="40000"/>
+                </a:schemeClr>
+              </a:solidFill>
+            </a:endParaRPr>
+          </a:p>
+          <a:p>
+            <a:r>
+              <a:rPr lang="en-US" sz="2400" dirty="0">
+                <a:solidFill>
+                  <a:schemeClr val="accent6">
+                    <a:lumMod val="60000"/>
+                    <a:lumOff val="40000"/>
+                  </a:schemeClr>
+                </a:solidFill>
+              </a:rPr>
+              <a:t>MATCH (</a:t>
+            </a:r>
+            <a:r>
+              <a:rPr lang="en-US" sz="2400" dirty="0" err="1">
+                <a:solidFill>
+                  <a:schemeClr val="accent6">
+                    <a:lumMod val="60000"/>
+                    <a:lumOff val="40000"/>
+                  </a:schemeClr>
+                </a:solidFill>
+              </a:rPr>
+              <a:t>p:Person</a:t>
+            </a:r>
+            <a:r>
+              <a:rPr lang="en-US" sz="2400" dirty="0">
+                <a:solidFill>
+                  <a:schemeClr val="accent6">
+                    <a:lumMod val="60000"/>
+                    <a:lumOff val="40000"/>
+                  </a:schemeClr>
+                </a:solidFill>
+              </a:rPr>
+              <a:t> {name: 'Ash'})-[:Follows]-&gt;(</a:t>
+            </a:r>
+            <a:r>
+              <a:rPr lang="en-US" sz="2400" dirty="0" err="1">
+                <a:solidFill>
+                  <a:schemeClr val="accent6">
+                    <a:lumMod val="60000"/>
+                    <a:lumOff val="40000"/>
+                  </a:schemeClr>
+                </a:solidFill>
+              </a:rPr>
+              <a:t>p:Person</a:t>
+            </a:r>
+            <a:r>
+              <a:rPr lang="en-US" sz="2400" dirty="0">
+                <a:solidFill>
+                  <a:schemeClr val="accent6">
+                    <a:lumMod val="60000"/>
+                    <a:lumOff val="40000"/>
+                  </a:schemeClr>
+                </a:solidFill>
+              </a:rPr>
+              <a:t>)</a:t>
+            </a:r>
+          </a:p>
+          <a:p>
+            <a:r>
+              <a:rPr lang="en-US" sz="2400" dirty="0">
+                <a:solidFill>
+                  <a:schemeClr val="accent6">
+                    <a:lumMod val="60000"/>
+                    <a:lumOff val="40000"/>
+                  </a:schemeClr>
+                </a:solidFill>
+              </a:rPr>
+              <a:t>RETURN p.name AS </a:t>
+            </a:r>
+            <a:r>
+              <a:rPr lang="en-US" sz="2400" dirty="0" err="1">
+                <a:solidFill>
+                  <a:schemeClr val="accent6">
+                    <a:lumMod val="60000"/>
+                    <a:lumOff val="40000"/>
+                  </a:schemeClr>
+                </a:solidFill>
+              </a:rPr>
+              <a:t>FollowedPerson</a:t>
+            </a:r>
+            <a:endParaRPr lang="en-US" sz="2400" dirty="0">
+              <a:solidFill>
+                <a:schemeClr val="accent6">
+                  <a:lumMod val="60000"/>
+                  <a:lumOff val="40000"/>
+                </a:schemeClr>
+              </a:solidFill>
+            </a:endParaRPr>
+          </a:p>
+          <a:p>
+            <a:endParaRPr lang="en-US" sz="2400" dirty="0">
+              <a:solidFill>
+                <a:schemeClr val="accent6">
+                  <a:lumMod val="60000"/>
+                  <a:lumOff val="40000"/>
+                </a:schemeClr>
+              </a:solidFill>
+            </a:endParaRPr>
+          </a:p>
+          <a:p>
+            <a:r>
+              <a:rPr lang="en-US" sz="2400" dirty="0">
+                <a:solidFill>
+                  <a:schemeClr val="accent6">
+                    <a:lumMod val="60000"/>
+                    <a:lumOff val="40000"/>
+                  </a:schemeClr>
+                </a:solidFill>
+              </a:rPr>
+              <a:t>Answer: Ravi and Neha</a:t>
+            </a:r>
+          </a:p>
+        </p:txBody>
+      </p:sp>
+      <p:pic>
+        <p:nvPicPr>
+          <p:cNvPr id="3" name="Picture 2">
+            <a:extLst>
+              <a:ext uri="{FF2B5EF4-FFF2-40B4-BE49-F238E27FC236}">
+                <a16:creationId xmlns:a16="http://schemas.microsoft.com/office/drawing/2014/main" id="{0FEFBE84-5012-735D-A516-6128D7C49CDF}"/>
+              </a:ext>
+            </a:extLst>
+          </p:cNvPr>
+          <p:cNvPicPr>
+            <a:picLocks noChangeAspect="1"/>
+          </p:cNvPicPr>
+          <p:nvPr/>
+        </p:nvPicPr>
+        <p:blipFill>
+          <a:blip r:embed="rId2"/>
+          <a:stretch>
+            <a:fillRect/>
+          </a:stretch>
+        </p:blipFill>
+        <p:spPr>
+          <a:xfrm>
+            <a:off x="5774995" y="2825496"/>
+            <a:ext cx="6279845" cy="4032504"/>
+          </a:xfrm>
+          <a:prstGeom prst="rect">
+            <a:avLst/>
+          </a:prstGeom>
+        </p:spPr>
+      </p:pic>
+    </p:spTree>
+    <p:extLst>
+      <p:ext uri="{BB962C8B-B14F-4D97-AF65-F5344CB8AC3E}">
+        <p14:creationId xmlns:p14="http://schemas.microsoft.com/office/powerpoint/2010/main" val="1324144712"/>
+      </p:ext>
+    </p:extLst>
+  </p:cSld>
+  <p:clrMapOvr>
+    <a:masterClrMapping/>
+  </p:clrMapOvr>
+</p:sld>
+</file>
+
+<file path=ppt/slides/slide15.xml><?xml version="1.0" encoding="utf-8"?>
+<p:sld xmlns:a="http://schemas.openxmlformats.org/drawingml/2006/main" xmlns:r="http://schemas.openxmlformats.org/officeDocument/2006/relationships" xmlns:p="http://schemas.openxmlformats.org/presentationml/2006/main">
+  <p:cSld>
+    <p:spTree>
+      <p:nvGrpSpPr>
+        <p:cNvPr id="1" name="">
+          <a:extLst>
+            <a:ext uri="{FF2B5EF4-FFF2-40B4-BE49-F238E27FC236}">
+              <a16:creationId xmlns:a16="http://schemas.microsoft.com/office/drawing/2014/main" id="{EB5081DD-0B24-17F1-CBD9-CE3413F1EB70}"/>
+            </a:ext>
+          </a:extLst>
+        </p:cNvPr>
+        <p:cNvGrpSpPr/>
+        <p:nvPr/>
+      </p:nvGrpSpPr>
+      <p:grpSpPr>
+        <a:xfrm>
+          <a:off x="0" y="0"/>
+          <a:ext cx="0" cy="0"/>
+          <a:chOff x="0" y="0"/>
+          <a:chExt cx="0" cy="0"/>
+        </a:xfrm>
+      </p:grpSpPr>
+      <p:sp>
+        <p:nvSpPr>
+          <p:cNvPr id="7" name="TextBox 6">
+            <a:extLst>
+              <a:ext uri="{FF2B5EF4-FFF2-40B4-BE49-F238E27FC236}">
+                <a16:creationId xmlns:a16="http://schemas.microsoft.com/office/drawing/2014/main" id="{1144203A-D9EE-64BF-CA52-E9761ACF7E5F}"/>
+              </a:ext>
+            </a:extLst>
+          </p:cNvPr>
+          <p:cNvSpPr txBox="1"/>
+          <p:nvPr/>
+        </p:nvSpPr>
+        <p:spPr>
+          <a:xfrm>
+            <a:off x="137160" y="164360"/>
+            <a:ext cx="10789920" cy="3416320"/>
+          </a:xfrm>
+          <a:prstGeom prst="rect">
+            <a:avLst/>
+          </a:prstGeom>
+          <a:noFill/>
+        </p:spPr>
+        <p:txBody>
+          <a:bodyPr wrap="square">
+            <a:spAutoFit/>
+          </a:bodyPr>
+          <a:lstStyle/>
+          <a:p>
+            <a:r>
+              <a:rPr lang="en-US" sz="2400" b="1" dirty="0">
+                <a:solidFill>
+                  <a:schemeClr val="accent6">
+                    <a:lumMod val="60000"/>
+                    <a:lumOff val="40000"/>
+                  </a:schemeClr>
+                </a:solidFill>
+              </a:rPr>
+              <a:t>4. Query Example</a:t>
+            </a:r>
+          </a:p>
+          <a:p>
+            <a:r>
+              <a:rPr lang="en-US" sz="2400" dirty="0">
+                <a:solidFill>
+                  <a:schemeClr val="accent6">
+                    <a:lumMod val="60000"/>
+                    <a:lumOff val="40000"/>
+                  </a:schemeClr>
+                </a:solidFill>
+              </a:rPr>
+              <a:t>In graph databases like Neo4j, you use </a:t>
+            </a:r>
+            <a:r>
+              <a:rPr lang="en-US" sz="2400" b="1" dirty="0">
+                <a:solidFill>
+                  <a:schemeClr val="accent6">
+                    <a:lumMod val="60000"/>
+                    <a:lumOff val="40000"/>
+                  </a:schemeClr>
+                </a:solidFill>
+              </a:rPr>
+              <a:t>Cypher query language</a:t>
+            </a:r>
+            <a:r>
+              <a:rPr lang="en-US" sz="2400" dirty="0">
+                <a:solidFill>
+                  <a:schemeClr val="accent6">
+                    <a:lumMod val="60000"/>
+                    <a:lumOff val="40000"/>
+                  </a:schemeClr>
+                </a:solidFill>
+              </a:rPr>
+              <a:t>:</a:t>
+            </a:r>
+          </a:p>
+          <a:p>
+            <a:endParaRPr lang="en-US" sz="2400" dirty="0">
+              <a:solidFill>
+                <a:schemeClr val="accent6">
+                  <a:lumMod val="60000"/>
+                  <a:lumOff val="40000"/>
+                </a:schemeClr>
+              </a:solidFill>
+            </a:endParaRPr>
+          </a:p>
+          <a:p>
+            <a:r>
+              <a:rPr lang="en-US" sz="2400" dirty="0">
+                <a:solidFill>
+                  <a:schemeClr val="accent6">
+                    <a:lumMod val="60000"/>
+                    <a:lumOff val="40000"/>
+                  </a:schemeClr>
+                </a:solidFill>
+              </a:rPr>
+              <a:t>Q: what kind of post Ash likes ?</a:t>
+            </a:r>
+          </a:p>
+          <a:p>
+            <a:endParaRPr lang="en-US" sz="2400" dirty="0">
+              <a:solidFill>
+                <a:schemeClr val="accent6">
+                  <a:lumMod val="60000"/>
+                  <a:lumOff val="40000"/>
+                </a:schemeClr>
+              </a:solidFill>
+            </a:endParaRPr>
+          </a:p>
+          <a:p>
+            <a:r>
+              <a:rPr lang="en-US" sz="2400" dirty="0">
+                <a:solidFill>
+                  <a:schemeClr val="accent6">
+                    <a:lumMod val="60000"/>
+                    <a:lumOff val="40000"/>
+                  </a:schemeClr>
+                </a:solidFill>
+              </a:rPr>
+              <a:t>MATCH (</a:t>
+            </a:r>
+            <a:r>
+              <a:rPr lang="en-US" sz="2400" dirty="0" err="1">
+                <a:solidFill>
+                  <a:schemeClr val="accent6">
+                    <a:lumMod val="60000"/>
+                    <a:lumOff val="40000"/>
+                  </a:schemeClr>
+                </a:solidFill>
+              </a:rPr>
+              <a:t>p:Person</a:t>
+            </a:r>
+            <a:r>
+              <a:rPr lang="en-US" sz="2400" dirty="0">
+                <a:solidFill>
+                  <a:schemeClr val="accent6">
+                    <a:lumMod val="60000"/>
+                    <a:lumOff val="40000"/>
+                  </a:schemeClr>
+                </a:solidFill>
+              </a:rPr>
+              <a:t> {name: 'Ash'})-[:Likes]-&gt;(</a:t>
+            </a:r>
+            <a:r>
+              <a:rPr lang="en-US" sz="2400" dirty="0" err="1">
+                <a:solidFill>
+                  <a:schemeClr val="accent6">
+                    <a:lumMod val="60000"/>
+                    <a:lumOff val="40000"/>
+                  </a:schemeClr>
+                </a:solidFill>
+              </a:rPr>
+              <a:t>post:Post</a:t>
+            </a:r>
+            <a:r>
+              <a:rPr lang="en-US" sz="2400" dirty="0">
+                <a:solidFill>
+                  <a:schemeClr val="accent6">
+                    <a:lumMod val="60000"/>
+                    <a:lumOff val="40000"/>
+                  </a:schemeClr>
+                </a:solidFill>
+              </a:rPr>
+              <a:t>)-[:About]-&gt;(</a:t>
+            </a:r>
+            <a:r>
+              <a:rPr lang="en-US" sz="2400" dirty="0" err="1">
+                <a:solidFill>
+                  <a:schemeClr val="accent6">
+                    <a:lumMod val="60000"/>
+                    <a:lumOff val="40000"/>
+                  </a:schemeClr>
+                </a:solidFill>
+              </a:rPr>
+              <a:t>t:Topic</a:t>
+            </a:r>
+            <a:r>
+              <a:rPr lang="en-US" sz="2400" dirty="0">
+                <a:solidFill>
+                  <a:schemeClr val="accent6">
+                    <a:lumMod val="60000"/>
+                    <a:lumOff val="40000"/>
+                  </a:schemeClr>
+                </a:solidFill>
+              </a:rPr>
+              <a:t>)</a:t>
+            </a:r>
+          </a:p>
+          <a:p>
+            <a:r>
+              <a:rPr lang="en-US" sz="2400" dirty="0">
+                <a:solidFill>
+                  <a:schemeClr val="accent6">
+                    <a:lumMod val="60000"/>
+                    <a:lumOff val="40000"/>
+                  </a:schemeClr>
+                </a:solidFill>
+              </a:rPr>
+              <a:t>RETURN t.name AS Topic</a:t>
+            </a:r>
+          </a:p>
+          <a:p>
+            <a:endParaRPr lang="en-US" sz="2400" dirty="0">
+              <a:solidFill>
+                <a:schemeClr val="accent6">
+                  <a:lumMod val="60000"/>
+                  <a:lumOff val="40000"/>
+                </a:schemeClr>
+              </a:solidFill>
+            </a:endParaRPr>
+          </a:p>
+          <a:p>
+            <a:r>
+              <a:rPr lang="en-US" sz="2400" dirty="0">
+                <a:solidFill>
+                  <a:schemeClr val="accent6">
+                    <a:lumMod val="60000"/>
+                    <a:lumOff val="40000"/>
+                  </a:schemeClr>
+                </a:solidFill>
+              </a:rPr>
+              <a:t>Answer: Travel</a:t>
+            </a:r>
+          </a:p>
+        </p:txBody>
+      </p:sp>
+      <p:pic>
+        <p:nvPicPr>
+          <p:cNvPr id="3" name="Picture 2">
+            <a:extLst>
+              <a:ext uri="{FF2B5EF4-FFF2-40B4-BE49-F238E27FC236}">
+                <a16:creationId xmlns:a16="http://schemas.microsoft.com/office/drawing/2014/main" id="{6BC0B1F2-BA03-A0CD-8DAD-7B3FA4BF15AE}"/>
+              </a:ext>
+            </a:extLst>
+          </p:cNvPr>
+          <p:cNvPicPr>
+            <a:picLocks noChangeAspect="1"/>
+          </p:cNvPicPr>
+          <p:nvPr/>
+        </p:nvPicPr>
+        <p:blipFill>
+          <a:blip r:embed="rId2"/>
+          <a:stretch>
+            <a:fillRect/>
+          </a:stretch>
+        </p:blipFill>
+        <p:spPr>
+          <a:xfrm>
+            <a:off x="5774995" y="2825496"/>
+            <a:ext cx="6279845" cy="4032504"/>
+          </a:xfrm>
+          <a:prstGeom prst="rect">
+            <a:avLst/>
+          </a:prstGeom>
+        </p:spPr>
+      </p:pic>
+    </p:spTree>
+    <p:extLst>
+      <p:ext uri="{BB962C8B-B14F-4D97-AF65-F5344CB8AC3E}">
+        <p14:creationId xmlns:p14="http://schemas.microsoft.com/office/powerpoint/2010/main" val="1336088131"/>
+      </p:ext>
+    </p:extLst>
+  </p:cSld>
+  <p:clrMapOvr>
+    <a:masterClrMapping/>
+  </p:clrMapOvr>
+</p:sld>
+</file>
+
+<file path=ppt/slides/slide16.xml><?xml version="1.0" encoding="utf-8"?>
+<p:sld xmlns:a="http://schemas.openxmlformats.org/drawingml/2006/main" xmlns:r="http://schemas.openxmlformats.org/officeDocument/2006/relationships" xmlns:p="http://schemas.openxmlformats.org/presentationml/2006/main">
+  <p:cSld>
+    <p:spTree>
+      <p:nvGrpSpPr>
+        <p:cNvPr id="1" name="">
+          <a:extLst>
+            <a:ext uri="{FF2B5EF4-FFF2-40B4-BE49-F238E27FC236}">
+              <a16:creationId xmlns:a16="http://schemas.microsoft.com/office/drawing/2014/main" id="{37D6FCDF-1E3E-AE96-9963-B910F2BFB058}"/>
+            </a:ext>
+          </a:extLst>
+        </p:cNvPr>
+        <p:cNvGrpSpPr/>
+        <p:nvPr/>
+      </p:nvGrpSpPr>
+      <p:grpSpPr>
+        <a:xfrm>
+          <a:off x="0" y="0"/>
+          <a:ext cx="0" cy="0"/>
+          <a:chOff x="0" y="0"/>
+          <a:chExt cx="0" cy="0"/>
+        </a:xfrm>
+      </p:grpSpPr>
+      <p:sp>
+        <p:nvSpPr>
+          <p:cNvPr id="7" name="TextBox 6">
+            <a:extLst>
+              <a:ext uri="{FF2B5EF4-FFF2-40B4-BE49-F238E27FC236}">
+                <a16:creationId xmlns:a16="http://schemas.microsoft.com/office/drawing/2014/main" id="{9A63B7CF-27EF-E10F-E4CF-0C65959701F0}"/>
+              </a:ext>
+            </a:extLst>
+          </p:cNvPr>
+          <p:cNvSpPr txBox="1"/>
+          <p:nvPr/>
+        </p:nvSpPr>
+        <p:spPr>
+          <a:xfrm>
+            <a:off x="137160" y="164360"/>
+            <a:ext cx="12054840" cy="3785652"/>
+          </a:xfrm>
+          <a:prstGeom prst="rect">
+            <a:avLst/>
+          </a:prstGeom>
+          <a:noFill/>
+        </p:spPr>
+        <p:txBody>
+          <a:bodyPr wrap="square">
+            <a:spAutoFit/>
+          </a:bodyPr>
+          <a:lstStyle/>
+          <a:p>
+            <a:r>
+              <a:rPr lang="en-US" sz="2400" b="1" dirty="0">
+                <a:solidFill>
+                  <a:schemeClr val="accent6">
+                    <a:lumMod val="60000"/>
+                    <a:lumOff val="40000"/>
+                  </a:schemeClr>
+                </a:solidFill>
+              </a:rPr>
+              <a:t>4. Query Example</a:t>
+            </a:r>
+          </a:p>
+          <a:p>
+            <a:r>
+              <a:rPr lang="en-US" sz="2400" dirty="0">
+                <a:solidFill>
+                  <a:schemeClr val="accent6">
+                    <a:lumMod val="60000"/>
+                    <a:lumOff val="40000"/>
+                  </a:schemeClr>
+                </a:solidFill>
+              </a:rPr>
+              <a:t>In graph databases like Neo4j, you use </a:t>
+            </a:r>
+            <a:r>
+              <a:rPr lang="en-US" sz="2400" b="1" dirty="0">
+                <a:solidFill>
+                  <a:schemeClr val="accent6">
+                    <a:lumMod val="60000"/>
+                    <a:lumOff val="40000"/>
+                  </a:schemeClr>
+                </a:solidFill>
+              </a:rPr>
+              <a:t>Cypher query language</a:t>
+            </a:r>
+            <a:r>
+              <a:rPr lang="en-US" sz="2400" dirty="0">
+                <a:solidFill>
+                  <a:schemeClr val="accent6">
+                    <a:lumMod val="60000"/>
+                    <a:lumOff val="40000"/>
+                  </a:schemeClr>
+                </a:solidFill>
+              </a:rPr>
+              <a:t>:</a:t>
+            </a:r>
+          </a:p>
+          <a:p>
+            <a:endParaRPr lang="en-US" sz="2400" dirty="0">
+              <a:solidFill>
+                <a:schemeClr val="accent6">
+                  <a:lumMod val="60000"/>
+                  <a:lumOff val="40000"/>
+                </a:schemeClr>
+              </a:solidFill>
+            </a:endParaRPr>
+          </a:p>
+          <a:p>
+            <a:r>
+              <a:rPr lang="en-US" sz="2400" dirty="0">
+                <a:solidFill>
+                  <a:schemeClr val="accent6">
+                    <a:lumMod val="60000"/>
+                    <a:lumOff val="40000"/>
+                  </a:schemeClr>
+                </a:solidFill>
+              </a:rPr>
+              <a:t>Q: Find topics liked by people Ash follows ?</a:t>
+            </a:r>
+          </a:p>
+          <a:p>
+            <a:endParaRPr lang="en-US" sz="2400" dirty="0">
+              <a:solidFill>
+                <a:schemeClr val="accent6">
+                  <a:lumMod val="60000"/>
+                  <a:lumOff val="40000"/>
+                </a:schemeClr>
+              </a:solidFill>
+            </a:endParaRPr>
+          </a:p>
+          <a:p>
+            <a:r>
+              <a:rPr lang="en-US" sz="2400" dirty="0">
+                <a:solidFill>
+                  <a:schemeClr val="accent6">
+                    <a:lumMod val="60000"/>
+                    <a:lumOff val="40000"/>
+                  </a:schemeClr>
+                </a:solidFill>
+              </a:rPr>
+              <a:t>MATCH (</a:t>
+            </a:r>
+            <a:r>
+              <a:rPr lang="en-US" sz="2400" dirty="0" err="1">
+                <a:solidFill>
+                  <a:schemeClr val="accent6">
+                    <a:lumMod val="60000"/>
+                    <a:lumOff val="40000"/>
+                  </a:schemeClr>
+                </a:solidFill>
+              </a:rPr>
+              <a:t>p:Person</a:t>
+            </a:r>
+            <a:r>
+              <a:rPr lang="en-US" sz="2400" dirty="0">
+                <a:solidFill>
+                  <a:schemeClr val="accent6">
+                    <a:lumMod val="60000"/>
+                    <a:lumOff val="40000"/>
+                  </a:schemeClr>
+                </a:solidFill>
+              </a:rPr>
+              <a:t> {name: 'Ash'})-[:Follows]-&gt;(</a:t>
+            </a:r>
+            <a:r>
+              <a:rPr lang="en-US" sz="2400" dirty="0" err="1">
+                <a:solidFill>
+                  <a:schemeClr val="accent6">
+                    <a:lumMod val="60000"/>
+                    <a:lumOff val="40000"/>
+                  </a:schemeClr>
+                </a:solidFill>
+              </a:rPr>
+              <a:t>f:Person</a:t>
+            </a:r>
+            <a:r>
+              <a:rPr lang="en-US" sz="2400" dirty="0">
+                <a:solidFill>
+                  <a:schemeClr val="accent6">
+                    <a:lumMod val="60000"/>
+                    <a:lumOff val="40000"/>
+                  </a:schemeClr>
+                </a:solidFill>
+              </a:rPr>
+              <a:t>)-[:Likes]-&gt;(</a:t>
+            </a:r>
+            <a:r>
+              <a:rPr lang="en-US" sz="2400" dirty="0" err="1">
+                <a:solidFill>
+                  <a:schemeClr val="accent6">
+                    <a:lumMod val="60000"/>
+                    <a:lumOff val="40000"/>
+                  </a:schemeClr>
+                </a:solidFill>
+              </a:rPr>
+              <a:t>post:Post</a:t>
+            </a:r>
+            <a:r>
+              <a:rPr lang="en-US" sz="2400" dirty="0">
+                <a:solidFill>
+                  <a:schemeClr val="accent6">
+                    <a:lumMod val="60000"/>
+                    <a:lumOff val="40000"/>
+                  </a:schemeClr>
+                </a:solidFill>
+              </a:rPr>
+              <a:t>)-[:About]-&gt;(</a:t>
+            </a:r>
+            <a:r>
+              <a:rPr lang="en-US" sz="2400" dirty="0" err="1">
+                <a:solidFill>
+                  <a:schemeClr val="accent6">
+                    <a:lumMod val="60000"/>
+                    <a:lumOff val="40000"/>
+                  </a:schemeClr>
+                </a:solidFill>
+              </a:rPr>
+              <a:t>t:Topic</a:t>
+            </a:r>
+            <a:r>
+              <a:rPr lang="en-US" sz="2400" dirty="0">
+                <a:solidFill>
+                  <a:schemeClr val="accent6">
+                    <a:lumMod val="60000"/>
+                    <a:lumOff val="40000"/>
+                  </a:schemeClr>
+                </a:solidFill>
+              </a:rPr>
+              <a:t>)</a:t>
+            </a:r>
+          </a:p>
+          <a:p>
+            <a:r>
+              <a:rPr lang="en-US" sz="2400" dirty="0">
+                <a:solidFill>
+                  <a:schemeClr val="accent6">
+                    <a:lumMod val="60000"/>
+                    <a:lumOff val="40000"/>
+                  </a:schemeClr>
+                </a:solidFill>
+              </a:rPr>
+              <a:t>RETURN DISTINCT t.name AS Topic</a:t>
+            </a:r>
+          </a:p>
+          <a:p>
+            <a:endParaRPr lang="en-US" sz="2400" dirty="0">
+              <a:solidFill>
+                <a:schemeClr val="accent6">
+                  <a:lumMod val="60000"/>
+                  <a:lumOff val="40000"/>
+                </a:schemeClr>
+              </a:solidFill>
+            </a:endParaRPr>
+          </a:p>
+          <a:p>
+            <a:endParaRPr lang="en-US" sz="2400" dirty="0">
+              <a:solidFill>
+                <a:schemeClr val="accent6">
+                  <a:lumMod val="60000"/>
+                  <a:lumOff val="40000"/>
+                </a:schemeClr>
+              </a:solidFill>
+            </a:endParaRPr>
+          </a:p>
+          <a:p>
+            <a:r>
+              <a:rPr lang="en-US" sz="2400" dirty="0">
+                <a:solidFill>
+                  <a:schemeClr val="accent6">
+                    <a:lumMod val="60000"/>
+                    <a:lumOff val="40000"/>
+                  </a:schemeClr>
+                </a:solidFill>
+              </a:rPr>
+              <a:t>Answer: AI</a:t>
+            </a:r>
+          </a:p>
+        </p:txBody>
+      </p:sp>
+      <p:pic>
+        <p:nvPicPr>
+          <p:cNvPr id="3" name="Picture 2">
+            <a:extLst>
+              <a:ext uri="{FF2B5EF4-FFF2-40B4-BE49-F238E27FC236}">
+                <a16:creationId xmlns:a16="http://schemas.microsoft.com/office/drawing/2014/main" id="{4BA41FC6-9539-B25D-E101-02D3F3852285}"/>
+              </a:ext>
+            </a:extLst>
+          </p:cNvPr>
+          <p:cNvPicPr>
+            <a:picLocks noChangeAspect="1"/>
+          </p:cNvPicPr>
+          <p:nvPr/>
+        </p:nvPicPr>
+        <p:blipFill>
+          <a:blip r:embed="rId2"/>
+          <a:stretch>
+            <a:fillRect/>
+          </a:stretch>
+        </p:blipFill>
+        <p:spPr>
+          <a:xfrm>
+            <a:off x="5774995" y="2825496"/>
+            <a:ext cx="6279845" cy="4032504"/>
+          </a:xfrm>
+          <a:prstGeom prst="rect">
+            <a:avLst/>
+          </a:prstGeom>
+        </p:spPr>
+      </p:pic>
+    </p:spTree>
+    <p:extLst>
+      <p:ext uri="{BB962C8B-B14F-4D97-AF65-F5344CB8AC3E}">
+        <p14:creationId xmlns:p14="http://schemas.microsoft.com/office/powerpoint/2010/main" val="117749790"/>
+      </p:ext>
+    </p:extLst>
+  </p:cSld>
+  <p:clrMapOvr>
+    <a:masterClrMapping/>
+  </p:clrMapOvr>
+</p:sld>
+</file>
+
+<file path=ppt/slides/slide17.xml><?xml version="1.0" encoding="utf-8"?>
 <p:sld xmlns:a="http://schemas.openxmlformats.org/drawingml/2006/main" xmlns:r="http://schemas.openxmlformats.org/officeDocument/2006/relationships" xmlns:p="http://schemas.openxmlformats.org/presentationml/2006/main">
   <p:cSld>
     <p:spTree>
@@ -4769,6 +7277,48 @@
           </a:graphicData>
         </a:graphic>
       </p:graphicFrame>
+      <p:sp>
+        <p:nvSpPr>
+          <p:cNvPr id="4" name="TextBox 3">
+            <a:extLst>
+              <a:ext uri="{FF2B5EF4-FFF2-40B4-BE49-F238E27FC236}">
+                <a16:creationId xmlns:a16="http://schemas.microsoft.com/office/drawing/2014/main" id="{D0D64B0D-F331-5CF4-38DA-39DA15009DAA}"/>
+              </a:ext>
+            </a:extLst>
+          </p:cNvPr>
+          <p:cNvSpPr txBox="1"/>
+          <p:nvPr/>
+        </p:nvSpPr>
+        <p:spPr>
+          <a:xfrm>
+            <a:off x="859536" y="709875"/>
+            <a:ext cx="8343900" cy="461665"/>
+          </a:xfrm>
+          <a:prstGeom prst="rect">
+            <a:avLst/>
+          </a:prstGeom>
+          <a:noFill/>
+        </p:spPr>
+        <p:txBody>
+          <a:bodyPr wrap="square">
+            <a:spAutoFit/>
+          </a:bodyPr>
+          <a:lstStyle/>
+          <a:p>
+            <a:r>
+              <a:rPr lang="en-US" sz="2400" b="1" dirty="0">
+                <a:solidFill>
+                  <a:schemeClr val="accent6">
+                    <a:lumMod val="60000"/>
+                    <a:lumOff val="40000"/>
+                  </a:schemeClr>
+                </a:solidFill>
+              </a:rPr>
+              <a:t>Comparison: Graph Databases vs Relation DB</a:t>
+            </a:r>
+          </a:p>
+        </p:txBody>
+      </p:sp>
     </p:spTree>
     <p:extLst>
       <p:ext uri="{BB962C8B-B14F-4D97-AF65-F5344CB8AC3E}">
@@ -4782,7 +7332,7 @@
 </p:sld>
 </file>
 
-<file path=ppt/slides/slide11.xml><?xml version="1.0" encoding="utf-8"?>
+<file path=ppt/slides/slide18.xml><?xml version="1.0" encoding="utf-8"?>
 <p:sld xmlns:a="http://schemas.openxmlformats.org/drawingml/2006/main" xmlns:r="http://schemas.openxmlformats.org/officeDocument/2006/relationships" xmlns:p="http://schemas.openxmlformats.org/presentationml/2006/main">
   <p:cSld>
     <p:spTree>
@@ -4820,7 +7370,7 @@
         <p:spPr>
           <a:xfrm>
             <a:off x="859536" y="709875"/>
-            <a:ext cx="8343900" cy="4524315"/>
+            <a:ext cx="8343900" cy="3416320"/>
           </a:xfrm>
           <a:prstGeom prst="rect">
             <a:avLst/>
@@ -4874,7 +7424,7 @@
                   </a:schemeClr>
                 </a:solidFill>
               </a:rPr>
-              <a:t>✅ 1. Relationship-heavy data</a:t>
+              <a:t>a. Relationship-heavy data</a:t>
             </a:r>
           </a:p>
           <a:p>
@@ -4955,7 +7505,7 @@
                   </a:schemeClr>
                 </a:solidFill>
               </a:rPr>
-              <a:t>✅ 2. Faster queries for connections</a:t>
+              <a:t>b. Faster queries for connections</a:t>
             </a:r>
           </a:p>
           <a:p>
@@ -4973,50 +7523,6 @@
                 </a:solidFill>
               </a:rPr>
               <a:t>No expensive JOINs </a:t>
-            </a:r>
-          </a:p>
-          <a:p>
-            <a:pPr marL="342900" indent="-342900">
-              <a:buFont typeface="Arial" panose="020B0604020202020204" pitchFamily="34" charset="0"/>
-              <a:buChar char="•"/>
-            </a:pPr>
-            <a:endParaRPr lang="en-US" sz="2400" b="1" dirty="0">
-              <a:solidFill>
-                <a:schemeClr val="accent6">
-                  <a:lumMod val="60000"/>
-                  <a:lumOff val="40000"/>
-                </a:schemeClr>
-              </a:solidFill>
-            </a:endParaRPr>
-          </a:p>
-          <a:p>
-            <a:r>
-              <a:rPr lang="en-US" sz="2400" b="1" dirty="0">
-                <a:solidFill>
-                  <a:schemeClr val="accent6">
-                    <a:lumMod val="60000"/>
-                    <a:lumOff val="40000"/>
-                  </a:schemeClr>
-                </a:solidFill>
-              </a:rPr>
-              <a:t>✅ 3. Flexible schema</a:t>
-            </a:r>
-          </a:p>
-          <a:p>
-            <a:pPr marL="342900" indent="-342900">
-              <a:buFont typeface="Arial" panose="020B0604020202020204" pitchFamily="34" charset="0"/>
-              <a:buChar char="•"/>
-            </a:pPr>
-            <a:r>
-              <a:rPr lang="en-US" sz="2400" dirty="0">
-                <a:solidFill>
-                  <a:schemeClr val="accent6">
-                    <a:lumMod val="60000"/>
-                    <a:lumOff val="40000"/>
-                  </a:schemeClr>
-                </a:solidFill>
-              </a:rPr>
-              <a:t>Easy to evolve data</a:t>
             </a:r>
           </a:p>
         </p:txBody>
@@ -5034,7 +7540,7 @@
 </p:sld>
 </file>
 
-<file path=ppt/slides/slide12.xml><?xml version="1.0" encoding="utf-8"?>
+<file path=ppt/slides/slide19.xml><?xml version="1.0" encoding="utf-8"?>
 <p:sld xmlns:a="http://schemas.openxmlformats.org/drawingml/2006/main" xmlns:r="http://schemas.openxmlformats.org/officeDocument/2006/relationships" xmlns:p="http://schemas.openxmlformats.org/presentationml/2006/main">
   <p:cSld>
     <p:spTree>
@@ -5354,7 +7860,183 @@
 </p:sld>
 </file>
 
-<file path=ppt/slides/slide13.xml><?xml version="1.0" encoding="utf-8"?>
+<file path=ppt/slides/slide2.xml><?xml version="1.0" encoding="utf-8"?>
+<p:sld xmlns:a="http://schemas.openxmlformats.org/drawingml/2006/main" xmlns:r="http://schemas.openxmlformats.org/officeDocument/2006/relationships" xmlns:p="http://schemas.openxmlformats.org/presentationml/2006/main">
+  <p:cSld>
+    <p:spTree>
+      <p:nvGrpSpPr>
+        <p:cNvPr id="1" name="">
+          <a:extLst>
+            <a:ext uri="{FF2B5EF4-FFF2-40B4-BE49-F238E27FC236}">
+              <a16:creationId xmlns:a16="http://schemas.microsoft.com/office/drawing/2014/main" id="{DD931D7F-4279-DA2E-FA64-6CF3C441D414}"/>
+            </a:ext>
+          </a:extLst>
+        </p:cNvPr>
+        <p:cNvGrpSpPr/>
+        <p:nvPr/>
+      </p:nvGrpSpPr>
+      <p:grpSpPr>
+        <a:xfrm>
+          <a:off x="0" y="0"/>
+          <a:ext cx="0" cy="0"/>
+          <a:chOff x="0" y="0"/>
+          <a:chExt cx="0" cy="0"/>
+        </a:xfrm>
+      </p:grpSpPr>
+      <p:sp>
+        <p:nvSpPr>
+          <p:cNvPr id="7" name="TextBox 6">
+            <a:extLst>
+              <a:ext uri="{FF2B5EF4-FFF2-40B4-BE49-F238E27FC236}">
+                <a16:creationId xmlns:a16="http://schemas.microsoft.com/office/drawing/2014/main" id="{15E1C549-05C2-509B-7E55-FC53425D92E1}"/>
+              </a:ext>
+            </a:extLst>
+          </p:cNvPr>
+          <p:cNvSpPr txBox="1"/>
+          <p:nvPr/>
+        </p:nvSpPr>
+        <p:spPr>
+          <a:xfrm>
+            <a:off x="841248" y="989552"/>
+            <a:ext cx="8362188" cy="1938992"/>
+          </a:xfrm>
+          <a:prstGeom prst="rect">
+            <a:avLst/>
+          </a:prstGeom>
+          <a:noFill/>
+        </p:spPr>
+        <p:txBody>
+          <a:bodyPr wrap="square">
+            <a:spAutoFit/>
+          </a:bodyPr>
+          <a:lstStyle/>
+          <a:p>
+            <a:pPr>
+              <a:buNone/>
+            </a:pPr>
+            <a:r>
+              <a:rPr lang="en-US" sz="2400" dirty="0">
+                <a:solidFill>
+                  <a:schemeClr val="accent6">
+                    <a:lumMod val="60000"/>
+                    <a:lumOff val="40000"/>
+                  </a:schemeClr>
+                </a:solidFill>
+              </a:rPr>
+              <a:t>A </a:t>
+            </a:r>
+            <a:r>
+              <a:rPr lang="en-US" sz="2400" b="1" dirty="0">
+                <a:solidFill>
+                  <a:schemeClr val="accent6">
+                    <a:lumMod val="60000"/>
+                    <a:lumOff val="40000"/>
+                  </a:schemeClr>
+                </a:solidFill>
+              </a:rPr>
+              <a:t>Graph Database (Graph DB)</a:t>
+            </a:r>
+            <a:r>
+              <a:rPr lang="en-US" sz="2400" dirty="0">
+                <a:solidFill>
+                  <a:schemeClr val="accent6">
+                    <a:lumMod val="60000"/>
+                    <a:lumOff val="40000"/>
+                  </a:schemeClr>
+                </a:solidFill>
+              </a:rPr>
+              <a:t> is a type of database designed to store and manage data based on </a:t>
+            </a:r>
+            <a:r>
+              <a:rPr lang="en-US" sz="2400" b="1" dirty="0">
+                <a:solidFill>
+                  <a:schemeClr val="accent6">
+                    <a:lumMod val="60000"/>
+                    <a:lumOff val="40000"/>
+                  </a:schemeClr>
+                </a:solidFill>
+              </a:rPr>
+              <a:t>relationships</a:t>
+            </a:r>
+            <a:r>
+              <a:rPr lang="en-US" sz="2400" dirty="0">
+                <a:solidFill>
+                  <a:schemeClr val="accent6">
+                    <a:lumMod val="60000"/>
+                    <a:lumOff val="40000"/>
+                  </a:schemeClr>
+                </a:solidFill>
+              </a:rPr>
+              <a:t> rather than tables.</a:t>
+            </a:r>
+          </a:p>
+          <a:p>
+            <a:pPr>
+              <a:buNone/>
+            </a:pPr>
+            <a:endParaRPr lang="en-US" sz="2400" dirty="0">
+              <a:solidFill>
+                <a:schemeClr val="accent6">
+                  <a:lumMod val="60000"/>
+                  <a:lumOff val="40000"/>
+                </a:schemeClr>
+              </a:solidFill>
+            </a:endParaRPr>
+          </a:p>
+          <a:p>
+            <a:pPr>
+              <a:buNone/>
+            </a:pPr>
+            <a:r>
+              <a:rPr lang="en-US" sz="2400" dirty="0">
+                <a:solidFill>
+                  <a:schemeClr val="accent6">
+                    <a:lumMod val="60000"/>
+                    <a:lumOff val="40000"/>
+                  </a:schemeClr>
+                </a:solidFill>
+              </a:rPr>
+              <a:t>Instead of rows and columns (like in SQL), it uses a structure similar to a </a:t>
+            </a:r>
+            <a:r>
+              <a:rPr lang="en-US" sz="2400" b="1" dirty="0">
+                <a:solidFill>
+                  <a:schemeClr val="accent6">
+                    <a:lumMod val="60000"/>
+                    <a:lumOff val="40000"/>
+                  </a:schemeClr>
+                </a:solidFill>
+              </a:rPr>
+              <a:t>network or graph</a:t>
+            </a:r>
+            <a:r>
+              <a:rPr lang="en-US" sz="2400" dirty="0">
+                <a:solidFill>
+                  <a:schemeClr val="accent6">
+                    <a:lumMod val="60000"/>
+                    <a:lumOff val="40000"/>
+                  </a:schemeClr>
+                </a:solidFill>
+              </a:rPr>
+              <a:t>.</a:t>
+            </a:r>
+          </a:p>
+        </p:txBody>
+      </p:sp>
+    </p:spTree>
+    <p:extLst>
+      <p:ext uri="{BB962C8B-B14F-4D97-AF65-F5344CB8AC3E}">
+        <p14:creationId xmlns:p14="http://schemas.microsoft.com/office/powerpoint/2010/main" val="366625378"/>
+      </p:ext>
+    </p:extLst>
+  </p:cSld>
+  <p:clrMapOvr>
+    <a:masterClrMapping/>
+  </p:clrMapOvr>
+</p:sld>
+</file>
+
+<file path=ppt/slides/slide20.xml><?xml version="1.0" encoding="utf-8"?>
 <p:sld xmlns:a="http://schemas.openxmlformats.org/drawingml/2006/main" xmlns:r="http://schemas.openxmlformats.org/officeDocument/2006/relationships" xmlns:p="http://schemas.openxmlformats.org/presentationml/2006/main">
   <p:cSld>
     <p:spTree>
@@ -5392,7 +8074,7 @@
         <p:spPr>
           <a:xfrm>
             <a:off x="859536" y="709875"/>
-            <a:ext cx="8343900" cy="2308324"/>
+            <a:ext cx="8343900" cy="1569660"/>
           </a:xfrm>
           <a:prstGeom prst="rect">
             <a:avLst/>
@@ -5459,62 +8141,6 @@
                 </a:solidFill>
               </a:rPr>
               <a:t>Amazon Neptune </a:t>
-            </a:r>
-          </a:p>
-          <a:p>
-            <a:pPr marL="342900" indent="-342900">
-              <a:buFont typeface="Arial" panose="020B0604020202020204" pitchFamily="34" charset="0"/>
-              <a:buChar char="•"/>
-            </a:pPr>
-            <a:r>
-              <a:rPr lang="en-US" sz="2400" dirty="0" err="1">
-                <a:solidFill>
-                  <a:schemeClr val="accent6">
-                    <a:lumMod val="60000"/>
-                    <a:lumOff val="40000"/>
-                  </a:schemeClr>
-                </a:solidFill>
-              </a:rPr>
-              <a:t>ArangoDB</a:t>
-            </a:r>
-            <a:r>
-              <a:rPr lang="en-US" sz="2400" dirty="0">
-                <a:solidFill>
-                  <a:schemeClr val="accent6">
-                    <a:lumMod val="60000"/>
-                    <a:lumOff val="40000"/>
-                  </a:schemeClr>
-                </a:solidFill>
-              </a:rPr>
-              <a:t> </a:t>
-            </a:r>
-          </a:p>
-          <a:p>
-            <a:pPr marL="342900" indent="-342900">
-              <a:buFont typeface="Arial" panose="020B0604020202020204" pitchFamily="34" charset="0"/>
-              <a:buChar char="•"/>
-            </a:pPr>
-            <a:r>
-              <a:rPr lang="en-US" sz="2400" dirty="0" err="1">
-                <a:solidFill>
-                  <a:schemeClr val="accent6">
-                    <a:lumMod val="60000"/>
-                    <a:lumOff val="40000"/>
-                  </a:schemeClr>
-                </a:solidFill>
-              </a:rPr>
-              <a:t>TigerGraph</a:t>
-            </a:r>
-            <a:r>
-              <a:rPr lang="en-US" sz="2400" dirty="0">
-                <a:solidFill>
-                  <a:schemeClr val="accent6">
-                    <a:lumMod val="60000"/>
-                    <a:lumOff val="40000"/>
-                  </a:schemeClr>
-                </a:solidFill>
-              </a:rPr>
-              <a:t> </a:t>
             </a:r>
           </a:p>
         </p:txBody>
@@ -5532,7 +8158,7 @@
 </p:sld>
 </file>
 
-<file path=ppt/slides/slide14.xml><?xml version="1.0" encoding="utf-8"?>
+<file path=ppt/slides/slide21.xml><?xml version="1.0" encoding="utf-8"?>
 <p:sld xmlns:a="http://schemas.openxmlformats.org/drawingml/2006/main" xmlns:r="http://schemas.openxmlformats.org/officeDocument/2006/relationships" xmlns:p="http://schemas.openxmlformats.org/presentationml/2006/main">
   <p:cSld>
     <p:spTree>
@@ -5568,7 +8194,7 @@
 </p:sld>
 </file>
 
-<file path=ppt/slides/slide15.xml><?xml version="1.0" encoding="utf-8"?>
+<file path=ppt/slides/slide22.xml><?xml version="1.0" encoding="utf-8"?>
 <p:sld xmlns:a="http://schemas.openxmlformats.org/drawingml/2006/main" xmlns:r="http://schemas.openxmlformats.org/officeDocument/2006/relationships" xmlns:p="http://schemas.openxmlformats.org/presentationml/2006/main">
   <p:cSld>
     <p:spTree>
@@ -5766,7 +8392,7 @@
 </p:sld>
 </file>
 
-<file path=ppt/slides/slide2.xml><?xml version="1.0" encoding="utf-8"?>
+<file path=ppt/slides/slide3.xml><?xml version="1.0" encoding="utf-8"?>
 <p:sld xmlns:a="http://schemas.openxmlformats.org/drawingml/2006/main" xmlns:r="http://schemas.openxmlformats.org/officeDocument/2006/relationships" xmlns:p="http://schemas.openxmlformats.org/presentationml/2006/main">
   <p:cSld>
     <p:spTree>
@@ -5774,7 +8400,7 @@
         <p:cNvPr id="1" name="">
           <a:extLst>
             <a:ext uri="{FF2B5EF4-FFF2-40B4-BE49-F238E27FC236}">
-              <a16:creationId xmlns:a16="http://schemas.microsoft.com/office/drawing/2014/main" id="{DD931D7F-4279-DA2E-FA64-6CF3C441D414}"/>
+              <a16:creationId xmlns:a16="http://schemas.microsoft.com/office/drawing/2014/main" id="{C167EF1A-D973-97F6-D12B-C34DEE6718EB}"/>
             </a:ext>
           </a:extLst>
         </p:cNvPr>
@@ -5794,7 +8420,7 @@
           <p:cNvPr id="7" name="TextBox 6">
             <a:extLst>
               <a:ext uri="{FF2B5EF4-FFF2-40B4-BE49-F238E27FC236}">
-                <a16:creationId xmlns:a16="http://schemas.microsoft.com/office/drawing/2014/main" id="{15E1C549-05C2-509B-7E55-FC53425D92E1}"/>
+                <a16:creationId xmlns:a16="http://schemas.microsoft.com/office/drawing/2014/main" id="{5363C7BE-DCC7-D15B-3489-D924D3AF0960}"/>
               </a:ext>
             </a:extLst>
           </p:cNvPr>
@@ -5803,8 +8429,8 @@
         </p:nvSpPr>
         <p:spPr>
           <a:xfrm>
-            <a:off x="841248" y="989552"/>
-            <a:ext cx="8362188" cy="1938992"/>
+            <a:off x="603504" y="1053560"/>
+            <a:ext cx="10735056" cy="5262979"/>
           </a:xfrm>
           <a:prstGeom prst="rect">
             <a:avLst/>
@@ -5817,20 +8443,6 @@
           </a:bodyPr>
           <a:lstStyle/>
           <a:p>
-            <a:pPr>
-              <a:buNone/>
-            </a:pPr>
-            <a:r>
-              <a:rPr lang="en-US" sz="2400" dirty="0">
-                <a:solidFill>
-                  <a:schemeClr val="accent6">
-                    <a:lumMod val="60000"/>
-                    <a:lumOff val="40000"/>
-                  </a:schemeClr>
-                </a:solidFill>
-              </a:rPr>
-              <a:t>A </a:t>
-            </a:r>
             <a:r>
               <a:rPr lang="en-US" sz="2400" b="1" dirty="0">
                 <a:solidFill>
@@ -5840,18 +8452,18 @@
                   </a:schemeClr>
                 </a:solidFill>
               </a:rPr>
-              <a:t>Graph Database (Graph DB)</a:t>
-            </a:r>
-            <a:r>
-              <a:rPr lang="en-US" sz="2400" dirty="0">
-                <a:solidFill>
-                  <a:schemeClr val="accent6">
-                    <a:lumMod val="60000"/>
-                    <a:lumOff val="40000"/>
-                  </a:schemeClr>
-                </a:solidFill>
-              </a:rPr>
-              <a:t> is a type of database designed to store and manage data based on </a:t>
+              <a:t>Need for </a:t>
+            </a:r>
+            <a:r>
+              <a:rPr lang="en-US" sz="2400" b="1" dirty="0" err="1">
+                <a:solidFill>
+                  <a:schemeClr val="accent6">
+                    <a:lumMod val="60000"/>
+                    <a:lumOff val="40000"/>
+                  </a:schemeClr>
+                </a:solidFill>
+              </a:rPr>
+              <a:t>GraphDB</a:t>
             </a:r>
             <a:r>
               <a:rPr lang="en-US" sz="2400" b="1" dirty="0">
@@ -5862,24 +8474,10 @@
                   </a:schemeClr>
                 </a:solidFill>
               </a:rPr>
-              <a:t>relationships</a:t>
-            </a:r>
-            <a:r>
-              <a:rPr lang="en-US" sz="2400" dirty="0">
-                <a:solidFill>
-                  <a:schemeClr val="accent6">
-                    <a:lumMod val="60000"/>
-                    <a:lumOff val="40000"/>
-                  </a:schemeClr>
-                </a:solidFill>
-              </a:rPr>
-              <a:t> rather than tables.</a:t>
-            </a:r>
-          </a:p>
-          <a:p>
-            <a:pPr>
-              <a:buNone/>
-            </a:pPr>
+              <a:t>: </a:t>
+            </a:r>
+          </a:p>
+          <a:p>
             <a:endParaRPr lang="en-US" sz="2400" dirty="0">
               <a:solidFill>
                 <a:schemeClr val="accent6">
@@ -5890,10 +8488,114 @@
             </a:endParaRPr>
           </a:p>
           <a:p>
-            <a:pPr>
-              <a:buNone/>
+            <a:r>
+              <a:rPr lang="en-US" sz="2400" dirty="0">
+                <a:solidFill>
+                  <a:schemeClr val="accent6">
+                    <a:lumMod val="60000"/>
+                    <a:lumOff val="40000"/>
+                  </a:schemeClr>
+                </a:solidFill>
+              </a:rPr>
+              <a:t>Vector databases fail when an AI needs to understand </a:t>
+            </a:r>
+            <a:r>
+              <a:rPr lang="en-US" sz="2400" b="1" dirty="0">
+                <a:solidFill>
+                  <a:schemeClr val="accent6">
+                    <a:lumMod val="60000"/>
+                    <a:lumOff val="40000"/>
+                  </a:schemeClr>
+                </a:solidFill>
+              </a:rPr>
+              <a:t>multi-hop relationships, exact logic, or structural hierarchies</a:t>
+            </a:r>
+            <a:r>
+              <a:rPr lang="en-US" sz="2400" dirty="0">
+                <a:solidFill>
+                  <a:schemeClr val="accent6">
+                    <a:lumMod val="60000"/>
+                    <a:lumOff val="40000"/>
+                  </a:schemeClr>
+                </a:solidFill>
+              </a:rPr>
+              <a:t>, because vectors only measure superficial semantic similarity (how close words are in meaning), not actual connections. </a:t>
+            </a:r>
+          </a:p>
+          <a:p>
+            <a:endParaRPr lang="en-US" sz="2400" dirty="0">
+              <a:solidFill>
+                <a:schemeClr val="accent6">
+                  <a:lumMod val="60000"/>
+                  <a:lumOff val="40000"/>
+                </a:schemeClr>
+              </a:solidFill>
+            </a:endParaRPr>
+          </a:p>
+          <a:p>
+            <a:r>
+              <a:rPr lang="en-US" sz="2400" dirty="0">
+                <a:solidFill>
+                  <a:schemeClr val="accent6">
+                    <a:lumMod val="60000"/>
+                    <a:lumOff val="40000"/>
+                  </a:schemeClr>
+                </a:solidFill>
+              </a:rPr>
+              <a:t>A prime example where a Vector DB fails</a:t>
+            </a:r>
+          </a:p>
+          <a:p>
+            <a:pPr marL="457200" indent="-457200">
+              <a:buAutoNum type="arabicParenR"/>
             </a:pPr>
             <a:r>
+              <a:rPr lang="en-US" sz="2400" b="1" dirty="0">
+                <a:solidFill>
+                  <a:schemeClr val="accent6">
+                    <a:lumMod val="60000"/>
+                    <a:lumOff val="40000"/>
+                  </a:schemeClr>
+                </a:solidFill>
+              </a:rPr>
+              <a:t>Social Networking: </a:t>
+            </a:r>
+          </a:p>
+          <a:p>
+            <a:r>
+              <a:rPr lang="en-US" sz="2400" i="1" dirty="0">
+                <a:solidFill>
+                  <a:schemeClr val="accent6">
+                    <a:lumMod val="60000"/>
+                    <a:lumOff val="40000"/>
+                  </a:schemeClr>
+                </a:solidFill>
+              </a:rPr>
+              <a:t>“Find posts liked by people Ash follows ?”</a:t>
+            </a:r>
+          </a:p>
+          <a:p>
+            <a:endParaRPr lang="en-US" sz="2400" b="1" dirty="0">
+              <a:solidFill>
+                <a:schemeClr val="accent6">
+                  <a:lumMod val="60000"/>
+                  <a:lumOff val="40000"/>
+                </a:schemeClr>
+              </a:solidFill>
+            </a:endParaRPr>
+          </a:p>
+          <a:p>
+            <a:endParaRPr lang="en-US" sz="2400" dirty="0">
+              <a:solidFill>
+                <a:schemeClr val="accent6">
+                  <a:lumMod val="60000"/>
+                  <a:lumOff val="40000"/>
+                </a:schemeClr>
+              </a:solidFill>
+            </a:endParaRPr>
+          </a:p>
+          <a:p>
+            <a:r>
               <a:rPr lang="en-US" sz="2400" dirty="0">
                 <a:solidFill>
                   <a:schemeClr val="accent6">
@@ -5902,7 +8604,7 @@
                   </a:schemeClr>
                 </a:solidFill>
               </a:rPr>
-              <a:t>Instead of rows and columns (like in SQL), it uses a structure similar to a </a:t>
+              <a:t> 2) </a:t>
             </a:r>
             <a:r>
               <a:rPr lang="en-US" sz="2400" b="1" dirty="0">
@@ -5913,7 +8615,7 @@
                   </a:schemeClr>
                 </a:solidFill>
               </a:rPr>
-              <a:t>network or graph</a:t>
+              <a:t>Corporate Supply Chain Risk Management &amp; Compliance</a:t>
             </a:r>
             <a:r>
               <a:rPr lang="en-US" sz="2400" dirty="0">
@@ -5925,6 +8627,41 @@
                 </a:solidFill>
               </a:rPr>
               <a:t>.</a:t>
+            </a:r>
+          </a:p>
+          <a:p>
+            <a:r>
+              <a:rPr lang="en-US" sz="2400" i="1" dirty="0">
+                <a:solidFill>
+                  <a:schemeClr val="accent6">
+                    <a:lumMod val="60000"/>
+                    <a:lumOff val="40000"/>
+                  </a:schemeClr>
+                </a:solidFill>
+              </a:rPr>
+              <a:t>"Are we sourcing components from any supplier owned by or connected to </a:t>
+            </a:r>
+            <a:r>
+              <a:rPr lang="en-US" sz="2400" b="1" i="1" dirty="0">
+                <a:solidFill>
+                  <a:schemeClr val="accent6">
+                    <a:lumMod val="60000"/>
+                    <a:lumOff val="40000"/>
+                  </a:schemeClr>
+                </a:solidFill>
+              </a:rPr>
+              <a:t>Company X</a:t>
+            </a:r>
+            <a:r>
+              <a:rPr lang="en-US" sz="2400" i="1" dirty="0">
+                <a:solidFill>
+                  <a:schemeClr val="accent6">
+                    <a:lumMod val="60000"/>
+                    <a:lumOff val="40000"/>
+                  </a:schemeClr>
+                </a:solidFill>
+              </a:rPr>
+              <a:t>, which was recently blacklisted?"</a:t>
             </a:r>
           </a:p>
         </p:txBody>
@@ -5932,7 +8669,7 @@
     </p:spTree>
     <p:extLst>
       <p:ext uri="{BB962C8B-B14F-4D97-AF65-F5344CB8AC3E}">
-        <p14:creationId xmlns:p14="http://schemas.microsoft.com/office/powerpoint/2010/main" val="366625378"/>
+        <p14:creationId xmlns:p14="http://schemas.microsoft.com/office/powerpoint/2010/main" val="4104936514"/>
       </p:ext>
     </p:extLst>
   </p:cSld>
@@ -5942,7 +8679,7 @@
 </p:sld>
 </file>
 
-<file path=ppt/slides/slide3.xml><?xml version="1.0" encoding="utf-8"?>
+<file path=ppt/slides/slide4.xml><?xml version="1.0" encoding="utf-8"?>
 <p:sld xmlns:a="http://schemas.openxmlformats.org/drawingml/2006/main" xmlns:r="http://schemas.openxmlformats.org/officeDocument/2006/relationships" xmlns:p="http://schemas.openxmlformats.org/presentationml/2006/main">
   <p:cSld>
     <p:spTree>
@@ -5979,7 +8716,7 @@
         </p:nvSpPr>
         <p:spPr>
           <a:xfrm>
-            <a:off x="841248" y="989552"/>
+            <a:off x="1042416" y="901452"/>
             <a:ext cx="8362188" cy="2677656"/>
           </a:xfrm>
           <a:prstGeom prst="rect">
@@ -6118,6 +8855,482 @@
                 </a:solidFill>
               </a:rPr>
               <a:t>, not a table.</a:t>
+            </a:r>
+          </a:p>
+        </p:txBody>
+      </p:sp>
+      <p:sp>
+        <p:nvSpPr>
+          <p:cNvPr id="2" name="Oval 1">
+            <a:extLst>
+              <a:ext uri="{FF2B5EF4-FFF2-40B4-BE49-F238E27FC236}">
+                <a16:creationId xmlns:a16="http://schemas.microsoft.com/office/drawing/2014/main" id="{6C65B778-7039-6828-A88B-096C16F546C3}"/>
+              </a:ext>
+            </a:extLst>
+          </p:cNvPr>
+          <p:cNvSpPr/>
+          <p:nvPr/>
+        </p:nvSpPr>
+        <p:spPr>
+          <a:xfrm>
+            <a:off x="1417320" y="4617720"/>
+            <a:ext cx="1353312" cy="950976"/>
+          </a:xfrm>
+          <a:prstGeom prst="ellipse">
+            <a:avLst/>
+          </a:prstGeom>
+        </p:spPr>
+        <p:style>
+          <a:lnRef idx="2">
+            <a:schemeClr val="accent1">
+              <a:shade val="15000"/>
+            </a:schemeClr>
+          </a:lnRef>
+          <a:fillRef idx="1">
+            <a:schemeClr val="accent1"/>
+          </a:fillRef>
+          <a:effectRef idx="0">
+            <a:schemeClr val="accent1"/>
+          </a:effectRef>
+          <a:fontRef idx="minor">
+            <a:schemeClr val="lt1"/>
+          </a:fontRef>
+        </p:style>
+        <p:txBody>
+          <a:bodyPr rtlCol="0" anchor="ctr"/>
+          <a:lstStyle/>
+          <a:p>
+            <a:pPr algn="ctr"/>
+            <a:r>
+              <a:rPr lang="en-US" sz="2800" dirty="0"/>
+              <a:t>You</a:t>
+            </a:r>
+          </a:p>
+        </p:txBody>
+      </p:sp>
+      <p:sp>
+        <p:nvSpPr>
+          <p:cNvPr id="4" name="Oval 3">
+            <a:extLst>
+              <a:ext uri="{FF2B5EF4-FFF2-40B4-BE49-F238E27FC236}">
+                <a16:creationId xmlns:a16="http://schemas.microsoft.com/office/drawing/2014/main" id="{5AF522B1-2673-8467-5BBF-49BE56B24A45}"/>
+              </a:ext>
+            </a:extLst>
+          </p:cNvPr>
+          <p:cNvSpPr/>
+          <p:nvPr/>
+        </p:nvSpPr>
+        <p:spPr>
+          <a:xfrm>
+            <a:off x="3791712" y="4706112"/>
+            <a:ext cx="2023872" cy="950976"/>
+          </a:xfrm>
+          <a:prstGeom prst="ellipse">
+            <a:avLst/>
+          </a:prstGeom>
+        </p:spPr>
+        <p:style>
+          <a:lnRef idx="2">
+            <a:schemeClr val="accent1">
+              <a:shade val="15000"/>
+            </a:schemeClr>
+          </a:lnRef>
+          <a:fillRef idx="1">
+            <a:schemeClr val="accent1"/>
+          </a:fillRef>
+          <a:effectRef idx="0">
+            <a:schemeClr val="accent1"/>
+          </a:effectRef>
+          <a:fontRef idx="minor">
+            <a:schemeClr val="lt1"/>
+          </a:fontRef>
+        </p:style>
+        <p:txBody>
+          <a:bodyPr rtlCol="0" anchor="ctr"/>
+          <a:lstStyle/>
+          <a:p>
+            <a:pPr algn="ctr"/>
+            <a:r>
+              <a:rPr lang="en-US" sz="2800" dirty="0"/>
+              <a:t>Fredo</a:t>
+            </a:r>
+          </a:p>
+          <a:p>
+            <a:pPr algn="ctr"/>
+            <a:r>
+              <a:rPr lang="en-US" sz="2800" dirty="0"/>
+              <a:t>(Friend)</a:t>
+            </a:r>
+          </a:p>
+        </p:txBody>
+      </p:sp>
+      <p:sp>
+        <p:nvSpPr>
+          <p:cNvPr id="5" name="Arrow: Right 4">
+            <a:extLst>
+              <a:ext uri="{FF2B5EF4-FFF2-40B4-BE49-F238E27FC236}">
+                <a16:creationId xmlns:a16="http://schemas.microsoft.com/office/drawing/2014/main" id="{63313806-64CE-069D-474A-2A5519CF224C}"/>
+              </a:ext>
+            </a:extLst>
+          </p:cNvPr>
+          <p:cNvSpPr/>
+          <p:nvPr/>
+        </p:nvSpPr>
+        <p:spPr>
+          <a:xfrm>
+            <a:off x="2889504" y="4974336"/>
+            <a:ext cx="749808" cy="265176"/>
+          </a:xfrm>
+          <a:prstGeom prst="rightArrow">
+            <a:avLst/>
+          </a:prstGeom>
+        </p:spPr>
+        <p:style>
+          <a:lnRef idx="2">
+            <a:schemeClr val="accent1">
+              <a:shade val="15000"/>
+            </a:schemeClr>
+          </a:lnRef>
+          <a:fillRef idx="1">
+            <a:schemeClr val="accent1"/>
+          </a:fillRef>
+          <a:effectRef idx="0">
+            <a:schemeClr val="accent1"/>
+          </a:effectRef>
+          <a:fontRef idx="minor">
+            <a:schemeClr val="lt1"/>
+          </a:fontRef>
+        </p:style>
+        <p:txBody>
+          <a:bodyPr rtlCol="0" anchor="ctr"/>
+          <a:lstStyle/>
+          <a:p>
+            <a:pPr algn="ctr"/>
+            <a:endParaRPr lang="en-US"/>
+          </a:p>
+        </p:txBody>
+      </p:sp>
+      <p:sp>
+        <p:nvSpPr>
+          <p:cNvPr id="8" name="Oval 7">
+            <a:extLst>
+              <a:ext uri="{FF2B5EF4-FFF2-40B4-BE49-F238E27FC236}">
+                <a16:creationId xmlns:a16="http://schemas.microsoft.com/office/drawing/2014/main" id="{A7A2013B-BBDA-D424-B522-6CD50DD3B47E}"/>
+              </a:ext>
+            </a:extLst>
+          </p:cNvPr>
+          <p:cNvSpPr/>
+          <p:nvPr/>
+        </p:nvSpPr>
+        <p:spPr>
+          <a:xfrm>
+            <a:off x="7007352" y="4715256"/>
+            <a:ext cx="2023872" cy="950976"/>
+          </a:xfrm>
+          <a:prstGeom prst="ellipse">
+            <a:avLst/>
+          </a:prstGeom>
+        </p:spPr>
+        <p:style>
+          <a:lnRef idx="2">
+            <a:schemeClr val="accent1">
+              <a:shade val="15000"/>
+            </a:schemeClr>
+          </a:lnRef>
+          <a:fillRef idx="1">
+            <a:schemeClr val="accent1"/>
+          </a:fillRef>
+          <a:effectRef idx="0">
+            <a:schemeClr val="accent1"/>
+          </a:effectRef>
+          <a:fontRef idx="minor">
+            <a:schemeClr val="lt1"/>
+          </a:fontRef>
+        </p:style>
+        <p:txBody>
+          <a:bodyPr rtlCol="0" anchor="ctr"/>
+          <a:lstStyle/>
+          <a:p>
+            <a:pPr algn="ctr"/>
+            <a:r>
+              <a:rPr lang="en-US" sz="2800" dirty="0"/>
+              <a:t>Post</a:t>
+            </a:r>
+          </a:p>
+        </p:txBody>
+      </p:sp>
+      <p:sp>
+        <p:nvSpPr>
+          <p:cNvPr id="10" name="Arrow: Right 9">
+            <a:extLst>
+              <a:ext uri="{FF2B5EF4-FFF2-40B4-BE49-F238E27FC236}">
+                <a16:creationId xmlns:a16="http://schemas.microsoft.com/office/drawing/2014/main" id="{C653BA85-B94E-9777-4EEA-A440E25AA5CF}"/>
+              </a:ext>
+            </a:extLst>
+          </p:cNvPr>
+          <p:cNvSpPr/>
+          <p:nvPr/>
+        </p:nvSpPr>
+        <p:spPr>
+          <a:xfrm>
+            <a:off x="6036564" y="4974336"/>
+            <a:ext cx="749808" cy="265176"/>
+          </a:xfrm>
+          <a:prstGeom prst="rightArrow">
+            <a:avLst/>
+          </a:prstGeom>
+        </p:spPr>
+        <p:style>
+          <a:lnRef idx="2">
+            <a:schemeClr val="accent1">
+              <a:shade val="15000"/>
+            </a:schemeClr>
+          </a:lnRef>
+          <a:fillRef idx="1">
+            <a:schemeClr val="accent1"/>
+          </a:fillRef>
+          <a:effectRef idx="0">
+            <a:schemeClr val="accent1"/>
+          </a:effectRef>
+          <a:fontRef idx="minor">
+            <a:schemeClr val="lt1"/>
+          </a:fontRef>
+        </p:style>
+        <p:txBody>
+          <a:bodyPr rtlCol="0" anchor="ctr"/>
+          <a:lstStyle/>
+          <a:p>
+            <a:pPr algn="ctr"/>
+            <a:endParaRPr lang="en-US"/>
+          </a:p>
+        </p:txBody>
+      </p:sp>
+      <p:sp>
+        <p:nvSpPr>
+          <p:cNvPr id="12" name="Oval 11">
+            <a:extLst>
+              <a:ext uri="{FF2B5EF4-FFF2-40B4-BE49-F238E27FC236}">
+                <a16:creationId xmlns:a16="http://schemas.microsoft.com/office/drawing/2014/main" id="{A98CC8A8-43DF-A148-8574-DEA20DACDB36}"/>
+              </a:ext>
+            </a:extLst>
+          </p:cNvPr>
+          <p:cNvSpPr/>
+          <p:nvPr/>
+        </p:nvSpPr>
+        <p:spPr>
+          <a:xfrm>
+            <a:off x="10024872" y="4631436"/>
+            <a:ext cx="2023872" cy="950976"/>
+          </a:xfrm>
+          <a:prstGeom prst="ellipse">
+            <a:avLst/>
+          </a:prstGeom>
+        </p:spPr>
+        <p:style>
+          <a:lnRef idx="2">
+            <a:schemeClr val="accent1">
+              <a:shade val="15000"/>
+            </a:schemeClr>
+          </a:lnRef>
+          <a:fillRef idx="1">
+            <a:schemeClr val="accent1"/>
+          </a:fillRef>
+          <a:effectRef idx="0">
+            <a:schemeClr val="accent1"/>
+          </a:effectRef>
+          <a:fontRef idx="minor">
+            <a:schemeClr val="lt1"/>
+          </a:fontRef>
+        </p:style>
+        <p:txBody>
+          <a:bodyPr rtlCol="0" anchor="ctr"/>
+          <a:lstStyle/>
+          <a:p>
+            <a:pPr algn="ctr"/>
+            <a:r>
+              <a:rPr lang="en-US" sz="2800" dirty="0"/>
+              <a:t>Stocks</a:t>
+            </a:r>
+          </a:p>
+        </p:txBody>
+      </p:sp>
+      <p:sp>
+        <p:nvSpPr>
+          <p:cNvPr id="14" name="Arrow: Right 13">
+            <a:extLst>
+              <a:ext uri="{FF2B5EF4-FFF2-40B4-BE49-F238E27FC236}">
+                <a16:creationId xmlns:a16="http://schemas.microsoft.com/office/drawing/2014/main" id="{74890C8F-F060-5BD4-677F-BCEE460A70C8}"/>
+              </a:ext>
+            </a:extLst>
+          </p:cNvPr>
+          <p:cNvSpPr/>
+          <p:nvPr/>
+        </p:nvSpPr>
+        <p:spPr>
+          <a:xfrm>
+            <a:off x="9153144" y="5079492"/>
+            <a:ext cx="749808" cy="265176"/>
+          </a:xfrm>
+          <a:prstGeom prst="rightArrow">
+            <a:avLst/>
+          </a:prstGeom>
+        </p:spPr>
+        <p:style>
+          <a:lnRef idx="2">
+            <a:schemeClr val="accent1">
+              <a:shade val="15000"/>
+            </a:schemeClr>
+          </a:lnRef>
+          <a:fillRef idx="1">
+            <a:schemeClr val="accent1"/>
+          </a:fillRef>
+          <a:effectRef idx="0">
+            <a:schemeClr val="accent1"/>
+          </a:effectRef>
+          <a:fontRef idx="minor">
+            <a:schemeClr val="lt1"/>
+          </a:fontRef>
+        </p:style>
+        <p:txBody>
+          <a:bodyPr rtlCol="0" anchor="ctr"/>
+          <a:lstStyle/>
+          <a:p>
+            <a:pPr algn="ctr"/>
+            <a:endParaRPr lang="en-US"/>
+          </a:p>
+        </p:txBody>
+      </p:sp>
+      <p:sp>
+        <p:nvSpPr>
+          <p:cNvPr id="15" name="TextBox 14">
+            <a:extLst>
+              <a:ext uri="{FF2B5EF4-FFF2-40B4-BE49-F238E27FC236}">
+                <a16:creationId xmlns:a16="http://schemas.microsoft.com/office/drawing/2014/main" id="{EB291F78-CFBC-155C-CFB9-7FAA9D025CFF}"/>
+              </a:ext>
+            </a:extLst>
+          </p:cNvPr>
+          <p:cNvSpPr txBox="1"/>
+          <p:nvPr/>
+        </p:nvSpPr>
+        <p:spPr>
+          <a:xfrm>
+            <a:off x="2666685" y="4512671"/>
+            <a:ext cx="1122295" cy="461665"/>
+          </a:xfrm>
+          <a:prstGeom prst="rect">
+            <a:avLst/>
+          </a:prstGeom>
+          <a:noFill/>
+        </p:spPr>
+        <p:txBody>
+          <a:bodyPr wrap="none" rtlCol="0">
+            <a:spAutoFit/>
+          </a:bodyPr>
+          <a:lstStyle/>
+          <a:p>
+            <a:r>
+              <a:rPr lang="en-US" sz="2400" dirty="0">
+                <a:solidFill>
+                  <a:schemeClr val="accent6">
+                    <a:lumMod val="60000"/>
+                    <a:lumOff val="40000"/>
+                  </a:schemeClr>
+                </a:solidFill>
+                <a:highlight>
+                  <a:srgbClr val="800000"/>
+                </a:highlight>
+              </a:rPr>
+              <a:t>Follows</a:t>
+            </a:r>
+          </a:p>
+        </p:txBody>
+      </p:sp>
+      <p:sp>
+        <p:nvSpPr>
+          <p:cNvPr id="17" name="TextBox 16">
+            <a:extLst>
+              <a:ext uri="{FF2B5EF4-FFF2-40B4-BE49-F238E27FC236}">
+                <a16:creationId xmlns:a16="http://schemas.microsoft.com/office/drawing/2014/main" id="{6CDA9414-6804-8464-1994-88915D945373}"/>
+              </a:ext>
+            </a:extLst>
+          </p:cNvPr>
+          <p:cNvSpPr txBox="1"/>
+          <p:nvPr/>
+        </p:nvSpPr>
+        <p:spPr>
+          <a:xfrm>
+            <a:off x="5784630" y="4518767"/>
+            <a:ext cx="788677" cy="461665"/>
+          </a:xfrm>
+          <a:prstGeom prst="rect">
+            <a:avLst/>
+          </a:prstGeom>
+          <a:noFill/>
+        </p:spPr>
+        <p:txBody>
+          <a:bodyPr wrap="none" rtlCol="0">
+            <a:spAutoFit/>
+          </a:bodyPr>
+          <a:lstStyle/>
+          <a:p>
+            <a:r>
+              <a:rPr lang="en-US" sz="2400" dirty="0">
+                <a:solidFill>
+                  <a:schemeClr val="accent6">
+                    <a:lumMod val="60000"/>
+                    <a:lumOff val="40000"/>
+                  </a:schemeClr>
+                </a:solidFill>
+                <a:highlight>
+                  <a:srgbClr val="800000"/>
+                </a:highlight>
+              </a:rPr>
+              <a:t>Likes</a:t>
+            </a:r>
+          </a:p>
+        </p:txBody>
+      </p:sp>
+      <p:sp>
+        <p:nvSpPr>
+          <p:cNvPr id="19" name="TextBox 18">
+            <a:extLst>
+              <a:ext uri="{FF2B5EF4-FFF2-40B4-BE49-F238E27FC236}">
+                <a16:creationId xmlns:a16="http://schemas.microsoft.com/office/drawing/2014/main" id="{43DEDC61-D9D7-EB39-3802-C83B0DA505A5}"/>
+              </a:ext>
+            </a:extLst>
+          </p:cNvPr>
+          <p:cNvSpPr txBox="1"/>
+          <p:nvPr/>
+        </p:nvSpPr>
+        <p:spPr>
+          <a:xfrm>
+            <a:off x="8778059" y="4475279"/>
+            <a:ext cx="1494512" cy="461665"/>
+          </a:xfrm>
+          <a:prstGeom prst="rect">
+            <a:avLst/>
+          </a:prstGeom>
+          <a:noFill/>
+        </p:spPr>
+        <p:txBody>
+          <a:bodyPr wrap="none" rtlCol="0">
+            <a:spAutoFit/>
+          </a:bodyPr>
+          <a:lstStyle/>
+          <a:p>
+            <a:r>
+              <a:rPr lang="en-US" sz="2400" dirty="0">
+                <a:solidFill>
+                  <a:schemeClr val="accent6">
+                    <a:lumMod val="60000"/>
+                    <a:lumOff val="40000"/>
+                  </a:schemeClr>
+                </a:solidFill>
+                <a:highlight>
+                  <a:srgbClr val="800000"/>
+                </a:highlight>
+              </a:rPr>
+              <a:t>Belongs to</a:t>
             </a:r>
           </a:p>
         </p:txBody>
@@ -6135,7 +9348,7 @@
 </p:sld>
 </file>
 
-<file path=ppt/slides/slide4.xml><?xml version="1.0" encoding="utf-8"?>
+<file path=ppt/slides/slide5.xml><?xml version="1.0" encoding="utf-8"?>
 <p:sld xmlns:a="http://schemas.openxmlformats.org/drawingml/2006/main" xmlns:r="http://schemas.openxmlformats.org/officeDocument/2006/relationships" xmlns:p="http://schemas.openxmlformats.org/presentationml/2006/main">
   <p:cSld>
     <p:spTree>
@@ -6172,8 +9385,8 @@
         </p:nvSpPr>
         <p:spPr>
           <a:xfrm>
-            <a:off x="192024" y="331184"/>
-            <a:ext cx="8362188" cy="4154984"/>
+            <a:off x="1618488" y="1401032"/>
+            <a:ext cx="8362188" cy="646331"/>
           </a:xfrm>
           <a:prstGeom prst="rect">
             <a:avLst/>
@@ -6187,7 +9400,7 @@
           <a:lstStyle/>
           <a:p>
             <a:r>
-              <a:rPr lang="en-US" sz="2400" b="1" dirty="0">
+              <a:rPr lang="en-US" sz="3600" b="1" dirty="0">
                 <a:solidFill>
                   <a:schemeClr val="accent6">
                     <a:lumMod val="60000"/>
@@ -6197,196 +9410,6 @@
               </a:rPr>
               <a:t>2. Basic Components of a Graph DB</a:t>
             </a:r>
-          </a:p>
-          <a:p>
-            <a:endParaRPr lang="en-US" sz="2400" b="1" dirty="0">
-              <a:solidFill>
-                <a:schemeClr val="accent6">
-                  <a:lumMod val="60000"/>
-                  <a:lumOff val="40000"/>
-                </a:schemeClr>
-              </a:solidFill>
-            </a:endParaRPr>
-          </a:p>
-          <a:p>
-            <a:pPr marL="457200" indent="-457200">
-              <a:buAutoNum type="arabicPeriod"/>
-            </a:pPr>
-            <a:r>
-              <a:rPr lang="en-US" sz="2400" b="1" dirty="0">
-                <a:solidFill>
-                  <a:schemeClr val="accent6">
-                    <a:lumMod val="60000"/>
-                    <a:lumOff val="40000"/>
-                  </a:schemeClr>
-                </a:solidFill>
-              </a:rPr>
-              <a:t>Nodes (Entities)</a:t>
-            </a:r>
-          </a:p>
-          <a:p>
-            <a:pPr marL="457200" indent="-457200">
-              <a:buAutoNum type="arabicPeriod"/>
-            </a:pPr>
-            <a:endParaRPr lang="en-US" sz="2400" b="1" dirty="0">
-              <a:solidFill>
-                <a:schemeClr val="accent6">
-                  <a:lumMod val="60000"/>
-                  <a:lumOff val="40000"/>
-                </a:schemeClr>
-              </a:solidFill>
-            </a:endParaRPr>
-          </a:p>
-          <a:p>
-            <a:r>
-              <a:rPr lang="en-US" sz="2400" dirty="0">
-                <a:solidFill>
-                  <a:schemeClr val="accent6">
-                    <a:lumMod val="60000"/>
-                    <a:lumOff val="40000"/>
-                  </a:schemeClr>
-                </a:solidFill>
-              </a:rPr>
-              <a:t>Represent objects </a:t>
-            </a:r>
-          </a:p>
-          <a:p>
-            <a:r>
-              <a:rPr lang="en-US" sz="2400" dirty="0">
-                <a:solidFill>
-                  <a:schemeClr val="accent6">
-                    <a:lumMod val="60000"/>
-                    <a:lumOff val="40000"/>
-                  </a:schemeClr>
-                </a:solidFill>
-              </a:rPr>
-              <a:t>Example: Person, Product, City </a:t>
-            </a:r>
-          </a:p>
-          <a:p>
-            <a:endParaRPr lang="en-US" sz="2400" dirty="0">
-              <a:solidFill>
-                <a:schemeClr val="accent6">
-                  <a:lumMod val="60000"/>
-                  <a:lumOff val="40000"/>
-                </a:schemeClr>
-              </a:solidFill>
-            </a:endParaRPr>
-          </a:p>
-          <a:p>
-            <a:r>
-              <a:rPr lang="en-US" sz="2400" dirty="0">
-                <a:solidFill>
-                  <a:schemeClr val="accent6">
-                    <a:lumMod val="60000"/>
-                    <a:lumOff val="40000"/>
-                  </a:schemeClr>
-                </a:solidFill>
-              </a:rPr>
-              <a:t>👉 Example:</a:t>
-            </a:r>
-          </a:p>
-          <a:p>
-            <a:r>
-              <a:rPr lang="en-US" sz="2400" dirty="0">
-                <a:solidFill>
-                  <a:schemeClr val="accent6">
-                    <a:lumMod val="60000"/>
-                    <a:lumOff val="40000"/>
-                  </a:schemeClr>
-                </a:solidFill>
-              </a:rPr>
-              <a:t>Node: </a:t>
-            </a:r>
-            <a:r>
-              <a:rPr lang="en-US" sz="2400" i="1" dirty="0">
-                <a:solidFill>
-                  <a:schemeClr val="accent6">
-                    <a:lumMod val="60000"/>
-                    <a:lumOff val="40000"/>
-                  </a:schemeClr>
-                </a:solidFill>
-              </a:rPr>
-              <a:t>Ash</a:t>
-            </a:r>
-            <a:r>
-              <a:rPr lang="en-US" sz="2400" dirty="0">
-                <a:solidFill>
-                  <a:schemeClr val="accent6">
-                    <a:lumMod val="60000"/>
-                    <a:lumOff val="40000"/>
-                  </a:schemeClr>
-                </a:solidFill>
-              </a:rPr>
-              <a:t> </a:t>
-            </a:r>
-          </a:p>
-          <a:p>
-            <a:r>
-              <a:rPr lang="en-US" sz="2400" dirty="0">
-                <a:solidFill>
-                  <a:schemeClr val="accent6">
-                    <a:lumMod val="60000"/>
-                    <a:lumOff val="40000"/>
-                  </a:schemeClr>
-                </a:solidFill>
-              </a:rPr>
-              <a:t>Node: </a:t>
-            </a:r>
-            <a:r>
-              <a:rPr lang="en-US" sz="2400" i="1" dirty="0">
-                <a:solidFill>
-                  <a:schemeClr val="accent6">
-                    <a:lumMod val="60000"/>
-                    <a:lumOff val="40000"/>
-                  </a:schemeClr>
-                </a:solidFill>
-              </a:rPr>
-              <a:t>Course</a:t>
-            </a:r>
-            <a:r>
-              <a:rPr lang="en-US" sz="2400" dirty="0">
-                <a:solidFill>
-                  <a:schemeClr val="accent6">
-                    <a:lumMod val="60000"/>
-                    <a:lumOff val="40000"/>
-                  </a:schemeClr>
-                </a:solidFill>
-              </a:rPr>
-              <a:t> </a:t>
-            </a:r>
-          </a:p>
-          <a:p>
-            <a:r>
-              <a:rPr lang="en-US" sz="2400" dirty="0">
-                <a:solidFill>
-                  <a:schemeClr val="accent6">
-                    <a:lumMod val="60000"/>
-                    <a:lumOff val="40000"/>
-                  </a:schemeClr>
-                </a:solidFill>
-              </a:rPr>
-              <a:t>Node: </a:t>
-            </a:r>
-            <a:r>
-              <a:rPr lang="en-US" sz="2400" i="1" dirty="0">
-                <a:solidFill>
-                  <a:schemeClr val="accent6">
-                    <a:lumMod val="60000"/>
-                    <a:lumOff val="40000"/>
-                  </a:schemeClr>
-                </a:solidFill>
-              </a:rPr>
-              <a:t>Delhi</a:t>
-            </a:r>
-            <a:endParaRPr lang="en-US" sz="2400" dirty="0">
-              <a:solidFill>
-                <a:schemeClr val="accent6">
-                  <a:lumMod val="60000"/>
-                  <a:lumOff val="40000"/>
-                </a:schemeClr>
-              </a:solidFill>
-            </a:endParaRPr>
           </a:p>
         </p:txBody>
       </p:sp>
@@ -6403,7 +9426,376 @@
 </p:sld>
 </file>
 
-<file path=ppt/slides/slide5.xml><?xml version="1.0" encoding="utf-8"?>
+<file path=ppt/slides/slide6.xml><?xml version="1.0" encoding="utf-8"?>
+<p:sld xmlns:a="http://schemas.openxmlformats.org/drawingml/2006/main" xmlns:r="http://schemas.openxmlformats.org/officeDocument/2006/relationships" xmlns:p="http://schemas.openxmlformats.org/presentationml/2006/main">
+  <p:cSld>
+    <p:spTree>
+      <p:nvGrpSpPr>
+        <p:cNvPr id="1" name="">
+          <a:extLst>
+            <a:ext uri="{FF2B5EF4-FFF2-40B4-BE49-F238E27FC236}">
+              <a16:creationId xmlns:a16="http://schemas.microsoft.com/office/drawing/2014/main" id="{C21644EE-1EF6-3983-2656-03DFA273BD3D}"/>
+            </a:ext>
+          </a:extLst>
+        </p:cNvPr>
+        <p:cNvGrpSpPr/>
+        <p:nvPr/>
+      </p:nvGrpSpPr>
+      <p:grpSpPr>
+        <a:xfrm>
+          <a:off x="0" y="0"/>
+          <a:ext cx="0" cy="0"/>
+          <a:chOff x="0" y="0"/>
+          <a:chExt cx="0" cy="0"/>
+        </a:xfrm>
+      </p:grpSpPr>
+      <p:sp>
+        <p:nvSpPr>
+          <p:cNvPr id="7" name="TextBox 6">
+            <a:extLst>
+              <a:ext uri="{FF2B5EF4-FFF2-40B4-BE49-F238E27FC236}">
+                <a16:creationId xmlns:a16="http://schemas.microsoft.com/office/drawing/2014/main" id="{34FC7FFC-5144-36AE-4D2A-B29E05728C43}"/>
+              </a:ext>
+            </a:extLst>
+          </p:cNvPr>
+          <p:cNvSpPr txBox="1"/>
+          <p:nvPr/>
+        </p:nvSpPr>
+        <p:spPr>
+          <a:xfrm>
+            <a:off x="192024" y="331184"/>
+            <a:ext cx="8362188" cy="2677656"/>
+          </a:xfrm>
+          <a:prstGeom prst="rect">
+            <a:avLst/>
+          </a:prstGeom>
+          <a:noFill/>
+        </p:spPr>
+        <p:txBody>
+          <a:bodyPr wrap="square">
+            <a:spAutoFit/>
+          </a:bodyPr>
+          <a:lstStyle/>
+          <a:p>
+            <a:pPr marL="457200" indent="-457200">
+              <a:buAutoNum type="arabicPeriod"/>
+            </a:pPr>
+            <a:r>
+              <a:rPr lang="en-US" sz="2400" b="1" dirty="0">
+                <a:solidFill>
+                  <a:schemeClr val="accent6">
+                    <a:lumMod val="60000"/>
+                    <a:lumOff val="40000"/>
+                  </a:schemeClr>
+                </a:solidFill>
+              </a:rPr>
+              <a:t>Nodes (Entities)</a:t>
+            </a:r>
+          </a:p>
+          <a:p>
+            <a:pPr marL="457200" indent="-457200">
+              <a:buAutoNum type="arabicPeriod"/>
+            </a:pPr>
+            <a:endParaRPr lang="en-US" sz="2400" b="1" dirty="0">
+              <a:solidFill>
+                <a:schemeClr val="accent6">
+                  <a:lumMod val="60000"/>
+                  <a:lumOff val="40000"/>
+                </a:schemeClr>
+              </a:solidFill>
+            </a:endParaRPr>
+          </a:p>
+          <a:p>
+            <a:r>
+              <a:rPr lang="en-US" sz="2400" dirty="0">
+                <a:solidFill>
+                  <a:schemeClr val="accent6">
+                    <a:lumMod val="60000"/>
+                    <a:lumOff val="40000"/>
+                  </a:schemeClr>
+                </a:solidFill>
+              </a:rPr>
+              <a:t>Represent objects  -  Example: Person, Product, City </a:t>
+            </a:r>
+          </a:p>
+          <a:p>
+            <a:r>
+              <a:rPr lang="en-US" sz="2400" dirty="0">
+                <a:solidFill>
+                  <a:schemeClr val="accent6">
+                    <a:lumMod val="60000"/>
+                    <a:lumOff val="40000"/>
+                  </a:schemeClr>
+                </a:solidFill>
+              </a:rPr>
+              <a:t>👉 Example:</a:t>
+            </a:r>
+          </a:p>
+          <a:p>
+            <a:r>
+              <a:rPr lang="en-US" sz="2400" dirty="0">
+                <a:solidFill>
+                  <a:schemeClr val="accent6">
+                    <a:lumMod val="60000"/>
+                    <a:lumOff val="40000"/>
+                  </a:schemeClr>
+                </a:solidFill>
+              </a:rPr>
+              <a:t>Node: </a:t>
+            </a:r>
+            <a:r>
+              <a:rPr lang="en-US" sz="2400" i="1" dirty="0">
+                <a:solidFill>
+                  <a:schemeClr val="accent6">
+                    <a:lumMod val="60000"/>
+                    <a:lumOff val="40000"/>
+                  </a:schemeClr>
+                </a:solidFill>
+              </a:rPr>
+              <a:t>Ash</a:t>
+            </a:r>
+            <a:r>
+              <a:rPr lang="en-US" sz="2400" dirty="0">
+                <a:solidFill>
+                  <a:schemeClr val="accent6">
+                    <a:lumMod val="60000"/>
+                    <a:lumOff val="40000"/>
+                  </a:schemeClr>
+                </a:solidFill>
+              </a:rPr>
+              <a:t> </a:t>
+            </a:r>
+          </a:p>
+          <a:p>
+            <a:r>
+              <a:rPr lang="en-US" sz="2400" dirty="0">
+                <a:solidFill>
+                  <a:schemeClr val="accent6">
+                    <a:lumMod val="60000"/>
+                    <a:lumOff val="40000"/>
+                  </a:schemeClr>
+                </a:solidFill>
+              </a:rPr>
+              <a:t>Node: </a:t>
+            </a:r>
+            <a:r>
+              <a:rPr lang="en-US" sz="2400" i="1" dirty="0">
+                <a:solidFill>
+                  <a:schemeClr val="accent6">
+                    <a:lumMod val="60000"/>
+                    <a:lumOff val="40000"/>
+                  </a:schemeClr>
+                </a:solidFill>
+              </a:rPr>
+              <a:t>Course</a:t>
+            </a:r>
+            <a:r>
+              <a:rPr lang="en-US" sz="2400" dirty="0">
+                <a:solidFill>
+                  <a:schemeClr val="accent6">
+                    <a:lumMod val="60000"/>
+                    <a:lumOff val="40000"/>
+                  </a:schemeClr>
+                </a:solidFill>
+              </a:rPr>
+              <a:t> </a:t>
+            </a:r>
+          </a:p>
+          <a:p>
+            <a:r>
+              <a:rPr lang="en-US" sz="2400" dirty="0">
+                <a:solidFill>
+                  <a:schemeClr val="accent6">
+                    <a:lumMod val="60000"/>
+                    <a:lumOff val="40000"/>
+                  </a:schemeClr>
+                </a:solidFill>
+              </a:rPr>
+              <a:t>Node: </a:t>
+            </a:r>
+            <a:r>
+              <a:rPr lang="en-US" sz="2400" i="1" dirty="0">
+                <a:solidFill>
+                  <a:schemeClr val="accent6">
+                    <a:lumMod val="60000"/>
+                    <a:lumOff val="40000"/>
+                  </a:schemeClr>
+                </a:solidFill>
+              </a:rPr>
+              <a:t>Delhi</a:t>
+            </a:r>
+            <a:endParaRPr lang="en-US" sz="2400" dirty="0">
+              <a:solidFill>
+                <a:schemeClr val="accent6">
+                  <a:lumMod val="60000"/>
+                  <a:lumOff val="40000"/>
+                </a:schemeClr>
+              </a:solidFill>
+            </a:endParaRPr>
+          </a:p>
+        </p:txBody>
+      </p:sp>
+      <p:sp>
+        <p:nvSpPr>
+          <p:cNvPr id="6" name="Oval 5">
+            <a:extLst>
+              <a:ext uri="{FF2B5EF4-FFF2-40B4-BE49-F238E27FC236}">
+                <a16:creationId xmlns:a16="http://schemas.microsoft.com/office/drawing/2014/main" id="{2C9C4981-71A4-F4DA-0BDB-E4732FE304E8}"/>
+              </a:ext>
+            </a:extLst>
+          </p:cNvPr>
+          <p:cNvSpPr/>
+          <p:nvPr/>
+        </p:nvSpPr>
+        <p:spPr>
+          <a:xfrm>
+            <a:off x="722376" y="3008840"/>
+            <a:ext cx="2679192" cy="1453432"/>
+          </a:xfrm>
+          <a:prstGeom prst="ellipse">
+            <a:avLst/>
+          </a:prstGeom>
+        </p:spPr>
+        <p:style>
+          <a:lnRef idx="2">
+            <a:schemeClr val="accent1">
+              <a:shade val="15000"/>
+            </a:schemeClr>
+          </a:lnRef>
+          <a:fillRef idx="1">
+            <a:schemeClr val="accent1"/>
+          </a:fillRef>
+          <a:effectRef idx="0">
+            <a:schemeClr val="accent1"/>
+          </a:effectRef>
+          <a:fontRef idx="minor">
+            <a:schemeClr val="lt1"/>
+          </a:fontRef>
+        </p:style>
+        <p:txBody>
+          <a:bodyPr rtlCol="0" anchor="ctr"/>
+          <a:lstStyle/>
+          <a:p>
+            <a:pPr algn="ctr"/>
+            <a:r>
+              <a:rPr lang="en-US" sz="2400" dirty="0"/>
+              <a:t>Ash</a:t>
+            </a:r>
+          </a:p>
+        </p:txBody>
+      </p:sp>
+      <p:sp>
+        <p:nvSpPr>
+          <p:cNvPr id="9" name="Oval 8">
+            <a:extLst>
+              <a:ext uri="{FF2B5EF4-FFF2-40B4-BE49-F238E27FC236}">
+                <a16:creationId xmlns:a16="http://schemas.microsoft.com/office/drawing/2014/main" id="{55272EC6-C67F-EA6F-247E-564769059879}"/>
+              </a:ext>
+            </a:extLst>
+          </p:cNvPr>
+          <p:cNvSpPr/>
+          <p:nvPr/>
+        </p:nvSpPr>
+        <p:spPr>
+          <a:xfrm>
+            <a:off x="6440426" y="3429000"/>
+            <a:ext cx="2868166" cy="1033272"/>
+          </a:xfrm>
+          <a:prstGeom prst="ellipse">
+            <a:avLst/>
+          </a:prstGeom>
+        </p:spPr>
+        <p:style>
+          <a:lnRef idx="2">
+            <a:schemeClr val="accent1">
+              <a:shade val="15000"/>
+            </a:schemeClr>
+          </a:lnRef>
+          <a:fillRef idx="1">
+            <a:schemeClr val="accent1"/>
+          </a:fillRef>
+          <a:effectRef idx="0">
+            <a:schemeClr val="accent1"/>
+          </a:effectRef>
+          <a:fontRef idx="minor">
+            <a:schemeClr val="lt1"/>
+          </a:fontRef>
+        </p:style>
+        <p:txBody>
+          <a:bodyPr rtlCol="0" anchor="ctr"/>
+          <a:lstStyle/>
+          <a:p>
+            <a:pPr algn="ctr"/>
+            <a:r>
+              <a:rPr lang="en-US" sz="2400" dirty="0"/>
+              <a:t>Python Course</a:t>
+            </a:r>
+          </a:p>
+        </p:txBody>
+      </p:sp>
+      <p:sp>
+        <p:nvSpPr>
+          <p:cNvPr id="15" name="Oval 14">
+            <a:extLst>
+              <a:ext uri="{FF2B5EF4-FFF2-40B4-BE49-F238E27FC236}">
+                <a16:creationId xmlns:a16="http://schemas.microsoft.com/office/drawing/2014/main" id="{8747E2A9-4690-8CE6-CEBF-FEB1671E781B}"/>
+              </a:ext>
+            </a:extLst>
+          </p:cNvPr>
+          <p:cNvSpPr/>
+          <p:nvPr/>
+        </p:nvSpPr>
+        <p:spPr>
+          <a:xfrm>
+            <a:off x="6821424" y="5340632"/>
+            <a:ext cx="1591056" cy="1033272"/>
+          </a:xfrm>
+          <a:prstGeom prst="ellipse">
+            <a:avLst/>
+          </a:prstGeom>
+        </p:spPr>
+        <p:style>
+          <a:lnRef idx="2">
+            <a:schemeClr val="accent1">
+              <a:shade val="15000"/>
+            </a:schemeClr>
+          </a:lnRef>
+          <a:fillRef idx="1">
+            <a:schemeClr val="accent1"/>
+          </a:fillRef>
+          <a:effectRef idx="0">
+            <a:schemeClr val="accent1"/>
+          </a:effectRef>
+          <a:fontRef idx="minor">
+            <a:schemeClr val="lt1"/>
+          </a:fontRef>
+        </p:style>
+        <p:txBody>
+          <a:bodyPr rtlCol="0" anchor="ctr"/>
+          <a:lstStyle/>
+          <a:p>
+            <a:pPr algn="ctr"/>
+            <a:r>
+              <a:rPr lang="en-US" sz="2400" dirty="0"/>
+              <a:t>Delhi</a:t>
+            </a:r>
+          </a:p>
+        </p:txBody>
+      </p:sp>
+    </p:spTree>
+    <p:extLst>
+      <p:ext uri="{BB962C8B-B14F-4D97-AF65-F5344CB8AC3E}">
+        <p14:creationId xmlns:p14="http://schemas.microsoft.com/office/powerpoint/2010/main" val="2682543753"/>
+      </p:ext>
+    </p:extLst>
+  </p:cSld>
+  <p:clrMapOvr>
+    <a:masterClrMapping/>
+  </p:clrMapOvr>
+</p:sld>
+</file>
+
+<file path=ppt/slides/slide7.xml><?xml version="1.0" encoding="utf-8"?>
 <p:sld xmlns:a="http://schemas.openxmlformats.org/drawingml/2006/main" xmlns:r="http://schemas.openxmlformats.org/officeDocument/2006/relationships" xmlns:p="http://schemas.openxmlformats.org/presentationml/2006/main">
   <p:cSld>
     <p:spTree>
@@ -6441,7 +9833,7 @@
         <p:spPr>
           <a:xfrm>
             <a:off x="192024" y="331184"/>
-            <a:ext cx="8362188" cy="3785652"/>
+            <a:ext cx="8362188" cy="2677656"/>
           </a:xfrm>
           <a:prstGeom prst="rect">
             <a:avLst/>
@@ -6453,29 +9845,6 @@
             <a:spAutoFit/>
           </a:bodyPr>
           <a:lstStyle/>
-          <a:p>
-            <a:r>
-              <a:rPr lang="en-US" sz="2400" b="1" dirty="0">
-                <a:solidFill>
-                  <a:schemeClr val="accent6">
-                    <a:lumMod val="60000"/>
-                    <a:lumOff val="40000"/>
-                  </a:schemeClr>
-                </a:solidFill>
-              </a:rPr>
-              <a:t>2. Basic Components of a Graph DB</a:t>
-            </a:r>
-          </a:p>
-          <a:p>
-            <a:endParaRPr lang="en-US" sz="2400" b="1" dirty="0">
-              <a:solidFill>
-                <a:schemeClr val="accent6">
-                  <a:lumMod val="60000"/>
-                  <a:lumOff val="40000"/>
-                </a:schemeClr>
-              </a:solidFill>
-            </a:endParaRPr>
-          </a:p>
           <a:p>
             <a:r>
               <a:rPr lang="en-US" sz="2400" b="1" dirty="0">
@@ -6646,15 +10015,336 @@
               <a:t> → Delhi</a:t>
             </a:r>
           </a:p>
-          <a:p>
-            <a:endParaRPr lang="en-US" sz="2400" b="1" dirty="0">
-              <a:solidFill>
-                <a:schemeClr val="accent6">
-                  <a:lumMod val="60000"/>
-                  <a:lumOff val="40000"/>
-                </a:schemeClr>
-              </a:solidFill>
-            </a:endParaRPr>
+        </p:txBody>
+      </p:sp>
+      <p:sp>
+        <p:nvSpPr>
+          <p:cNvPr id="17" name="Oval 16">
+            <a:extLst>
+              <a:ext uri="{FF2B5EF4-FFF2-40B4-BE49-F238E27FC236}">
+                <a16:creationId xmlns:a16="http://schemas.microsoft.com/office/drawing/2014/main" id="{0C3257FE-A44F-AA81-1768-D48C7FC9242C}"/>
+              </a:ext>
+            </a:extLst>
+          </p:cNvPr>
+          <p:cNvSpPr/>
+          <p:nvPr/>
+        </p:nvSpPr>
+        <p:spPr>
+          <a:xfrm>
+            <a:off x="722376" y="3008840"/>
+            <a:ext cx="2679192" cy="1453432"/>
+          </a:xfrm>
+          <a:prstGeom prst="ellipse">
+            <a:avLst/>
+          </a:prstGeom>
+        </p:spPr>
+        <p:style>
+          <a:lnRef idx="2">
+            <a:schemeClr val="accent1">
+              <a:shade val="15000"/>
+            </a:schemeClr>
+          </a:lnRef>
+          <a:fillRef idx="1">
+            <a:schemeClr val="accent1"/>
+          </a:fillRef>
+          <a:effectRef idx="0">
+            <a:schemeClr val="accent1"/>
+          </a:effectRef>
+          <a:fontRef idx="minor">
+            <a:schemeClr val="lt1"/>
+          </a:fontRef>
+        </p:style>
+        <p:txBody>
+          <a:bodyPr rtlCol="0" anchor="ctr"/>
+          <a:lstStyle/>
+          <a:p>
+            <a:pPr algn="ctr"/>
+            <a:r>
+              <a:rPr lang="en-US" sz="2400" dirty="0"/>
+              <a:t>Ash</a:t>
+            </a:r>
+          </a:p>
+        </p:txBody>
+      </p:sp>
+      <p:sp>
+        <p:nvSpPr>
+          <p:cNvPr id="19" name="Oval 18">
+            <a:extLst>
+              <a:ext uri="{FF2B5EF4-FFF2-40B4-BE49-F238E27FC236}">
+                <a16:creationId xmlns:a16="http://schemas.microsoft.com/office/drawing/2014/main" id="{C4845B29-7BDB-99E5-D8B3-117C97BE827B}"/>
+              </a:ext>
+            </a:extLst>
+          </p:cNvPr>
+          <p:cNvSpPr/>
+          <p:nvPr/>
+        </p:nvSpPr>
+        <p:spPr>
+          <a:xfrm>
+            <a:off x="6440426" y="3429000"/>
+            <a:ext cx="2868166" cy="1033272"/>
+          </a:xfrm>
+          <a:prstGeom prst="ellipse">
+            <a:avLst/>
+          </a:prstGeom>
+        </p:spPr>
+        <p:style>
+          <a:lnRef idx="2">
+            <a:schemeClr val="accent1">
+              <a:shade val="15000"/>
+            </a:schemeClr>
+          </a:lnRef>
+          <a:fillRef idx="1">
+            <a:schemeClr val="accent1"/>
+          </a:fillRef>
+          <a:effectRef idx="0">
+            <a:schemeClr val="accent1"/>
+          </a:effectRef>
+          <a:fontRef idx="minor">
+            <a:schemeClr val="lt1"/>
+          </a:fontRef>
+        </p:style>
+        <p:txBody>
+          <a:bodyPr rtlCol="0" anchor="ctr"/>
+          <a:lstStyle/>
+          <a:p>
+            <a:pPr algn="ctr"/>
+            <a:r>
+              <a:rPr lang="en-US" sz="2400" dirty="0"/>
+              <a:t>Python Course</a:t>
+            </a:r>
+          </a:p>
+        </p:txBody>
+      </p:sp>
+      <p:sp>
+        <p:nvSpPr>
+          <p:cNvPr id="21" name="Arrow: Right 20">
+            <a:extLst>
+              <a:ext uri="{FF2B5EF4-FFF2-40B4-BE49-F238E27FC236}">
+                <a16:creationId xmlns:a16="http://schemas.microsoft.com/office/drawing/2014/main" id="{E499FEC1-708E-E774-5B7F-69C872D0C6F6}"/>
+              </a:ext>
+            </a:extLst>
+          </p:cNvPr>
+          <p:cNvSpPr/>
+          <p:nvPr/>
+        </p:nvSpPr>
+        <p:spPr>
+          <a:xfrm>
+            <a:off x="4800600" y="3785616"/>
+            <a:ext cx="950976" cy="475488"/>
+          </a:xfrm>
+          <a:prstGeom prst="rightArrow">
+            <a:avLst/>
+          </a:prstGeom>
+        </p:spPr>
+        <p:style>
+          <a:lnRef idx="2">
+            <a:schemeClr val="accent1">
+              <a:shade val="15000"/>
+            </a:schemeClr>
+          </a:lnRef>
+          <a:fillRef idx="1">
+            <a:schemeClr val="accent1"/>
+          </a:fillRef>
+          <a:effectRef idx="0">
+            <a:schemeClr val="accent1"/>
+          </a:effectRef>
+          <a:fontRef idx="minor">
+            <a:schemeClr val="lt1"/>
+          </a:fontRef>
+        </p:style>
+        <p:txBody>
+          <a:bodyPr rtlCol="0" anchor="ctr"/>
+          <a:lstStyle/>
+          <a:p>
+            <a:pPr algn="ctr"/>
+            <a:endParaRPr lang="en-US"/>
+          </a:p>
+        </p:txBody>
+      </p:sp>
+      <p:sp>
+        <p:nvSpPr>
+          <p:cNvPr id="23" name="TextBox 22">
+            <a:extLst>
+              <a:ext uri="{FF2B5EF4-FFF2-40B4-BE49-F238E27FC236}">
+                <a16:creationId xmlns:a16="http://schemas.microsoft.com/office/drawing/2014/main" id="{664CFDA6-1860-A432-E2F3-E3700DD74B61}"/>
+              </a:ext>
+            </a:extLst>
+          </p:cNvPr>
+          <p:cNvSpPr txBox="1"/>
+          <p:nvPr/>
+        </p:nvSpPr>
+        <p:spPr>
+          <a:xfrm>
+            <a:off x="4367403" y="3018164"/>
+            <a:ext cx="1817370" cy="461665"/>
+          </a:xfrm>
+          <a:prstGeom prst="rect">
+            <a:avLst/>
+          </a:prstGeom>
+          <a:noFill/>
+        </p:spPr>
+        <p:txBody>
+          <a:bodyPr wrap="square">
+            <a:spAutoFit/>
+          </a:bodyPr>
+          <a:lstStyle/>
+          <a:p>
+            <a:pPr algn="ctr"/>
+            <a:r>
+              <a:rPr lang="en-US" sz="2400" b="1" dirty="0">
+                <a:solidFill>
+                  <a:schemeClr val="accent6">
+                    <a:lumMod val="60000"/>
+                    <a:lumOff val="40000"/>
+                  </a:schemeClr>
+                </a:solidFill>
+                <a:highlight>
+                  <a:srgbClr val="800000"/>
+                </a:highlight>
+              </a:rPr>
+              <a:t>TEACHES</a:t>
+            </a:r>
+          </a:p>
+        </p:txBody>
+      </p:sp>
+      <p:sp>
+        <p:nvSpPr>
+          <p:cNvPr id="25" name="Oval 24">
+            <a:extLst>
+              <a:ext uri="{FF2B5EF4-FFF2-40B4-BE49-F238E27FC236}">
+                <a16:creationId xmlns:a16="http://schemas.microsoft.com/office/drawing/2014/main" id="{23CD2358-A0FA-9E44-D28D-A66ECF864130}"/>
+              </a:ext>
+            </a:extLst>
+          </p:cNvPr>
+          <p:cNvSpPr/>
+          <p:nvPr/>
+        </p:nvSpPr>
+        <p:spPr>
+          <a:xfrm>
+            <a:off x="6821424" y="5340632"/>
+            <a:ext cx="1591056" cy="1033272"/>
+          </a:xfrm>
+          <a:prstGeom prst="ellipse">
+            <a:avLst/>
+          </a:prstGeom>
+        </p:spPr>
+        <p:style>
+          <a:lnRef idx="2">
+            <a:schemeClr val="accent1">
+              <a:shade val="15000"/>
+            </a:schemeClr>
+          </a:lnRef>
+          <a:fillRef idx="1">
+            <a:schemeClr val="accent1"/>
+          </a:fillRef>
+          <a:effectRef idx="0">
+            <a:schemeClr val="accent1"/>
+          </a:effectRef>
+          <a:fontRef idx="minor">
+            <a:schemeClr val="lt1"/>
+          </a:fontRef>
+        </p:style>
+        <p:txBody>
+          <a:bodyPr rtlCol="0" anchor="ctr"/>
+          <a:lstStyle/>
+          <a:p>
+            <a:pPr algn="ctr"/>
+            <a:r>
+              <a:rPr lang="en-US" sz="2400" dirty="0"/>
+              <a:t>Delhi</a:t>
+            </a:r>
+          </a:p>
+        </p:txBody>
+      </p:sp>
+      <p:sp>
+        <p:nvSpPr>
+          <p:cNvPr id="27" name="Arrow: Right 26">
+            <a:extLst>
+              <a:ext uri="{FF2B5EF4-FFF2-40B4-BE49-F238E27FC236}">
+                <a16:creationId xmlns:a16="http://schemas.microsoft.com/office/drawing/2014/main" id="{99CC68BD-7F9C-1E39-97BC-B2D86A5002AF}"/>
+              </a:ext>
+            </a:extLst>
+          </p:cNvPr>
+          <p:cNvSpPr/>
+          <p:nvPr/>
+        </p:nvSpPr>
+        <p:spPr>
+          <a:xfrm rot="1414725">
+            <a:off x="4271159" y="5001987"/>
+            <a:ext cx="2272526" cy="475488"/>
+          </a:xfrm>
+          <a:prstGeom prst="rightArrow">
+            <a:avLst/>
+          </a:prstGeom>
+        </p:spPr>
+        <p:style>
+          <a:lnRef idx="2">
+            <a:schemeClr val="accent1">
+              <a:shade val="15000"/>
+            </a:schemeClr>
+          </a:lnRef>
+          <a:fillRef idx="1">
+            <a:schemeClr val="accent1"/>
+          </a:fillRef>
+          <a:effectRef idx="0">
+            <a:schemeClr val="accent1"/>
+          </a:effectRef>
+          <a:fontRef idx="minor">
+            <a:schemeClr val="lt1"/>
+          </a:fontRef>
+        </p:style>
+        <p:txBody>
+          <a:bodyPr rtlCol="0" anchor="ctr"/>
+          <a:lstStyle/>
+          <a:p>
+            <a:pPr algn="ctr"/>
+            <a:endParaRPr lang="en-US"/>
+          </a:p>
+        </p:txBody>
+      </p:sp>
+      <p:sp>
+        <p:nvSpPr>
+          <p:cNvPr id="29" name="TextBox 28">
+            <a:extLst>
+              <a:ext uri="{FF2B5EF4-FFF2-40B4-BE49-F238E27FC236}">
+                <a16:creationId xmlns:a16="http://schemas.microsoft.com/office/drawing/2014/main" id="{C150A6F2-F838-B06E-D636-EE3D88AD9920}"/>
+              </a:ext>
+            </a:extLst>
+          </p:cNvPr>
+          <p:cNvSpPr txBox="1"/>
+          <p:nvPr/>
+        </p:nvSpPr>
+        <p:spPr>
+          <a:xfrm>
+            <a:off x="4120514" y="5713481"/>
+            <a:ext cx="1813941" cy="461665"/>
+          </a:xfrm>
+          <a:prstGeom prst="rect">
+            <a:avLst/>
+          </a:prstGeom>
+          <a:noFill/>
+        </p:spPr>
+        <p:txBody>
+          <a:bodyPr wrap="square">
+            <a:spAutoFit/>
+          </a:bodyPr>
+          <a:lstStyle/>
+          <a:p>
+            <a:pPr algn="ctr"/>
+            <a:r>
+              <a:rPr lang="en-US" sz="2400" b="1" dirty="0">
+                <a:solidFill>
+                  <a:schemeClr val="accent6">
+                    <a:lumMod val="60000"/>
+                    <a:lumOff val="40000"/>
+                  </a:schemeClr>
+                </a:solidFill>
+                <a:highlight>
+                  <a:srgbClr val="800000"/>
+                </a:highlight>
+              </a:rPr>
+              <a:t>LIVES_IN</a:t>
+            </a:r>
           </a:p>
         </p:txBody>
       </p:sp>
@@ -6671,7 +10361,7 @@
 </p:sld>
 </file>
 
-<file path=ppt/slides/slide6.xml><?xml version="1.0" encoding="utf-8"?>
+<file path=ppt/slides/slide8.xml><?xml version="1.0" encoding="utf-8"?>
 <p:sld xmlns:a="http://schemas.openxmlformats.org/drawingml/2006/main" xmlns:r="http://schemas.openxmlformats.org/officeDocument/2006/relationships" xmlns:p="http://schemas.openxmlformats.org/presentationml/2006/main">
   <p:cSld>
     <p:spTree>
@@ -6709,7 +10399,7 @@
         <p:spPr>
           <a:xfrm>
             <a:off x="192024" y="331184"/>
-            <a:ext cx="8362188" cy="3416320"/>
+            <a:ext cx="8362188" cy="2677656"/>
           </a:xfrm>
           <a:prstGeom prst="rect">
             <a:avLst/>
@@ -6731,7 +10421,81 @@
                   </a:schemeClr>
                 </a:solidFill>
               </a:rPr>
-              <a:t>2. Basic Components of a Graph DB</a:t>
+              <a:t>3. Properties</a:t>
+            </a:r>
+          </a:p>
+          <a:p>
+            <a:pPr marL="342900" indent="-342900">
+              <a:buFont typeface="Arial" panose="020B0604020202020204" pitchFamily="34" charset="0"/>
+              <a:buChar char="•"/>
+            </a:pPr>
+            <a:r>
+              <a:rPr lang="en-US" sz="2400" dirty="0">
+                <a:solidFill>
+                  <a:schemeClr val="accent6">
+                    <a:lumMod val="60000"/>
+                    <a:lumOff val="40000"/>
+                  </a:schemeClr>
+                </a:solidFill>
+              </a:rPr>
+              <a:t>Additional information about nodes/relationships </a:t>
+            </a:r>
+          </a:p>
+          <a:p>
+            <a:endParaRPr lang="en-US" sz="2400" dirty="0">
+              <a:solidFill>
+                <a:schemeClr val="accent6">
+                  <a:lumMod val="60000"/>
+                  <a:lumOff val="40000"/>
+                </a:schemeClr>
+              </a:solidFill>
+            </a:endParaRPr>
+          </a:p>
+          <a:p>
+            <a:r>
+              <a:rPr lang="en-US" sz="2400" dirty="0">
+                <a:solidFill>
+                  <a:schemeClr val="accent6">
+                    <a:lumMod val="60000"/>
+                    <a:lumOff val="40000"/>
+                  </a:schemeClr>
+                </a:solidFill>
+              </a:rPr>
+              <a:t>👉 Example:</a:t>
+            </a:r>
+          </a:p>
+          <a:p>
+            <a:pPr marL="342900" indent="-342900">
+              <a:buFont typeface="Arial" panose="020B0604020202020204" pitchFamily="34" charset="0"/>
+              <a:buChar char="•"/>
+            </a:pPr>
+            <a:r>
+              <a:rPr lang="en-US" sz="2400" dirty="0">
+                <a:solidFill>
+                  <a:schemeClr val="accent6">
+                    <a:lumMod val="60000"/>
+                    <a:lumOff val="40000"/>
+                  </a:schemeClr>
+                </a:solidFill>
+              </a:rPr>
+              <a:t>Node (Ash): {age: 30, role: Trainer} </a:t>
+            </a:r>
+          </a:p>
+          <a:p>
+            <a:pPr marL="342900" indent="-342900">
+              <a:buFont typeface="Arial" panose="020B0604020202020204" pitchFamily="34" charset="0"/>
+              <a:buChar char="•"/>
+            </a:pPr>
+            <a:r>
+              <a:rPr lang="en-US" sz="2400" dirty="0">
+                <a:solidFill>
+                  <a:schemeClr val="accent6">
+                    <a:lumMod val="60000"/>
+                    <a:lumOff val="40000"/>
+                  </a:schemeClr>
+                </a:solidFill>
+              </a:rPr>
+              <a:t>Relationship: { since: 2022 }</a:t>
             </a:r>
           </a:p>
           <a:p>
@@ -6744,7 +10508,217 @@
               </a:solidFill>
             </a:endParaRPr>
           </a:p>
-          <a:p>
+        </p:txBody>
+      </p:sp>
+      <p:sp>
+        <p:nvSpPr>
+          <p:cNvPr id="3" name="Oval 2">
+            <a:extLst>
+              <a:ext uri="{FF2B5EF4-FFF2-40B4-BE49-F238E27FC236}">
+                <a16:creationId xmlns:a16="http://schemas.microsoft.com/office/drawing/2014/main" id="{12D2026F-3363-24D3-DC72-F73E81B0E9CB}"/>
+              </a:ext>
+            </a:extLst>
+          </p:cNvPr>
+          <p:cNvSpPr/>
+          <p:nvPr/>
+        </p:nvSpPr>
+        <p:spPr>
+          <a:xfrm>
+            <a:off x="722376" y="3008840"/>
+            <a:ext cx="2679192" cy="1453432"/>
+          </a:xfrm>
+          <a:prstGeom prst="ellipse">
+            <a:avLst/>
+          </a:prstGeom>
+        </p:spPr>
+        <p:style>
+          <a:lnRef idx="2">
+            <a:schemeClr val="accent1">
+              <a:shade val="15000"/>
+            </a:schemeClr>
+          </a:lnRef>
+          <a:fillRef idx="1">
+            <a:schemeClr val="accent1"/>
+          </a:fillRef>
+          <a:effectRef idx="0">
+            <a:schemeClr val="accent1"/>
+          </a:effectRef>
+          <a:fontRef idx="minor">
+            <a:schemeClr val="lt1"/>
+          </a:fontRef>
+        </p:style>
+        <p:txBody>
+          <a:bodyPr rtlCol="0" anchor="ctr"/>
+          <a:lstStyle/>
+          <a:p>
+            <a:pPr algn="ctr"/>
+            <a:r>
+              <a:rPr lang="en-US" sz="2400" dirty="0"/>
+              <a:t>Ash</a:t>
+            </a:r>
+          </a:p>
+          <a:p>
+            <a:pPr algn="ctr"/>
+            <a:r>
+              <a:rPr lang="en-US" sz="2400" dirty="0">
+                <a:solidFill>
+                  <a:schemeClr val="accent6">
+                    <a:lumMod val="60000"/>
+                    <a:lumOff val="40000"/>
+                  </a:schemeClr>
+                </a:solidFill>
+              </a:rPr>
+              <a:t>{age: 30,</a:t>
+            </a:r>
+          </a:p>
+          <a:p>
+            <a:pPr algn="ctr"/>
+            <a:r>
+              <a:rPr lang="en-US" sz="2400" dirty="0">
+                <a:solidFill>
+                  <a:schemeClr val="accent6">
+                    <a:lumMod val="60000"/>
+                    <a:lumOff val="40000"/>
+                  </a:schemeClr>
+                </a:solidFill>
+              </a:rPr>
+              <a:t> role: Trainer}</a:t>
+            </a:r>
+            <a:endParaRPr lang="en-US" sz="2400" dirty="0"/>
+          </a:p>
+        </p:txBody>
+      </p:sp>
+      <p:sp>
+        <p:nvSpPr>
+          <p:cNvPr id="5" name="Oval 4">
+            <a:extLst>
+              <a:ext uri="{FF2B5EF4-FFF2-40B4-BE49-F238E27FC236}">
+                <a16:creationId xmlns:a16="http://schemas.microsoft.com/office/drawing/2014/main" id="{276705A4-DC33-38B1-D4D8-EA0263F66F91}"/>
+              </a:ext>
+            </a:extLst>
+          </p:cNvPr>
+          <p:cNvSpPr/>
+          <p:nvPr/>
+        </p:nvSpPr>
+        <p:spPr>
+          <a:xfrm>
+            <a:off x="6440426" y="3429000"/>
+            <a:ext cx="2868166" cy="1033272"/>
+          </a:xfrm>
+          <a:prstGeom prst="ellipse">
+            <a:avLst/>
+          </a:prstGeom>
+        </p:spPr>
+        <p:style>
+          <a:lnRef idx="2">
+            <a:schemeClr val="accent1">
+              <a:shade val="15000"/>
+            </a:schemeClr>
+          </a:lnRef>
+          <a:fillRef idx="1">
+            <a:schemeClr val="accent1"/>
+          </a:fillRef>
+          <a:effectRef idx="0">
+            <a:schemeClr val="accent1"/>
+          </a:effectRef>
+          <a:fontRef idx="minor">
+            <a:schemeClr val="lt1"/>
+          </a:fontRef>
+        </p:style>
+        <p:txBody>
+          <a:bodyPr rtlCol="0" anchor="ctr"/>
+          <a:lstStyle/>
+          <a:p>
+            <a:pPr algn="ctr"/>
+            <a:r>
+              <a:rPr lang="en-US" sz="2400" dirty="0"/>
+              <a:t>Python Course</a:t>
+            </a:r>
+          </a:p>
+          <a:p>
+            <a:pPr algn="ctr"/>
+            <a:r>
+              <a:rPr lang="en-US" sz="2400" dirty="0"/>
+              <a:t>{Cost: 300 }</a:t>
+            </a:r>
+          </a:p>
+        </p:txBody>
+      </p:sp>
+      <p:sp>
+        <p:nvSpPr>
+          <p:cNvPr id="8" name="Arrow: Right 7">
+            <a:extLst>
+              <a:ext uri="{FF2B5EF4-FFF2-40B4-BE49-F238E27FC236}">
+                <a16:creationId xmlns:a16="http://schemas.microsoft.com/office/drawing/2014/main" id="{0E79E258-756F-FF7F-AAC2-925933B79093}"/>
+              </a:ext>
+            </a:extLst>
+          </p:cNvPr>
+          <p:cNvSpPr/>
+          <p:nvPr/>
+        </p:nvSpPr>
+        <p:spPr>
+          <a:xfrm>
+            <a:off x="4800600" y="3785616"/>
+            <a:ext cx="950976" cy="475488"/>
+          </a:xfrm>
+          <a:prstGeom prst="rightArrow">
+            <a:avLst/>
+          </a:prstGeom>
+        </p:spPr>
+        <p:style>
+          <a:lnRef idx="2">
+            <a:schemeClr val="accent1">
+              <a:shade val="15000"/>
+            </a:schemeClr>
+          </a:lnRef>
+          <a:fillRef idx="1">
+            <a:schemeClr val="accent1"/>
+          </a:fillRef>
+          <a:effectRef idx="0">
+            <a:schemeClr val="accent1"/>
+          </a:effectRef>
+          <a:fontRef idx="minor">
+            <a:schemeClr val="lt1"/>
+          </a:fontRef>
+        </p:style>
+        <p:txBody>
+          <a:bodyPr rtlCol="0" anchor="ctr"/>
+          <a:lstStyle/>
+          <a:p>
+            <a:pPr algn="ctr"/>
+            <a:endParaRPr lang="en-US"/>
+          </a:p>
+        </p:txBody>
+      </p:sp>
+      <p:sp>
+        <p:nvSpPr>
+          <p:cNvPr id="10" name="TextBox 9">
+            <a:extLst>
+              <a:ext uri="{FF2B5EF4-FFF2-40B4-BE49-F238E27FC236}">
+                <a16:creationId xmlns:a16="http://schemas.microsoft.com/office/drawing/2014/main" id="{D8255465-1211-E2AF-90D2-7DB5E0A9A353}"/>
+              </a:ext>
+            </a:extLst>
+          </p:cNvPr>
+          <p:cNvSpPr txBox="1"/>
+          <p:nvPr/>
+        </p:nvSpPr>
+        <p:spPr>
+          <a:xfrm>
+            <a:off x="4367403" y="3018164"/>
+            <a:ext cx="1817370" cy="830997"/>
+          </a:xfrm>
+          <a:prstGeom prst="rect">
+            <a:avLst/>
+          </a:prstGeom>
+          <a:noFill/>
+        </p:spPr>
+        <p:txBody>
+          <a:bodyPr wrap="square">
+            <a:spAutoFit/>
+          </a:bodyPr>
+          <a:lstStyle/>
+          <a:p>
+            <a:pPr algn="ctr"/>
             <a:r>
               <a:rPr lang="en-US" sz="2400" b="1" dirty="0">
                 <a:solidFill>
@@ -6753,92 +10727,196 @@
                     <a:lumOff val="40000"/>
                   </a:schemeClr>
                 </a:solidFill>
-              </a:rPr>
-              <a:t>3. Properties</a:t>
-            </a:r>
-          </a:p>
-          <a:p>
-            <a:pPr marL="342900" indent="-342900">
-              <a:buFont typeface="Arial" panose="020B0604020202020204" pitchFamily="34" charset="0"/>
-              <a:buChar char="•"/>
-            </a:pPr>
-            <a:r>
-              <a:rPr lang="en-US" sz="2400" dirty="0">
-                <a:solidFill>
-                  <a:schemeClr val="accent6">
-                    <a:lumMod val="60000"/>
-                    <a:lumOff val="40000"/>
-                  </a:schemeClr>
-                </a:solidFill>
-              </a:rPr>
-              <a:t>Additional information about nodes/relationships </a:t>
-            </a:r>
-          </a:p>
-          <a:p>
-            <a:endParaRPr lang="en-US" sz="2400" dirty="0">
-              <a:solidFill>
-                <a:schemeClr val="accent6">
-                  <a:lumMod val="60000"/>
-                  <a:lumOff val="40000"/>
-                </a:schemeClr>
-              </a:solidFill>
+                <a:highlight>
+                  <a:srgbClr val="800000"/>
+                </a:highlight>
+              </a:rPr>
+              <a:t>TEACHES</a:t>
+            </a:r>
+          </a:p>
+          <a:p>
+            <a:pPr algn="ctr"/>
+            <a:r>
+              <a:rPr lang="en-US" sz="2400" b="1" dirty="0">
+                <a:solidFill>
+                  <a:schemeClr val="accent6">
+                    <a:lumMod val="60000"/>
+                    <a:lumOff val="40000"/>
+                  </a:schemeClr>
+                </a:solidFill>
+                <a:highlight>
+                  <a:srgbClr val="800000"/>
+                </a:highlight>
+              </a:rPr>
+              <a:t>{since: 2022}</a:t>
+            </a:r>
+            <a:endParaRPr lang="en-US" dirty="0">
+              <a:highlight>
+                <a:srgbClr val="800000"/>
+              </a:highlight>
             </a:endParaRPr>
           </a:p>
-          <a:p>
-            <a:r>
-              <a:rPr lang="en-US" sz="2400" dirty="0">
-                <a:solidFill>
-                  <a:schemeClr val="accent6">
-                    <a:lumMod val="60000"/>
-                    <a:lumOff val="40000"/>
-                  </a:schemeClr>
-                </a:solidFill>
-              </a:rPr>
-              <a:t>👉 Example:</a:t>
-            </a:r>
-          </a:p>
-          <a:p>
-            <a:pPr marL="342900" indent="-342900">
-              <a:buFont typeface="Arial" panose="020B0604020202020204" pitchFamily="34" charset="0"/>
-              <a:buChar char="•"/>
-            </a:pPr>
-            <a:r>
-              <a:rPr lang="en-US" sz="2400" dirty="0">
-                <a:solidFill>
-                  <a:schemeClr val="accent6">
-                    <a:lumMod val="60000"/>
-                    <a:lumOff val="40000"/>
-                  </a:schemeClr>
-                </a:solidFill>
-              </a:rPr>
-              <a:t>Node (Ash): {age: 30, role: Trainer} </a:t>
-            </a:r>
-          </a:p>
-          <a:p>
-            <a:pPr marL="342900" indent="-342900">
-              <a:buFont typeface="Arial" panose="020B0604020202020204" pitchFamily="34" charset="0"/>
-              <a:buChar char="•"/>
-            </a:pPr>
-            <a:r>
-              <a:rPr lang="en-US" sz="2400" dirty="0">
-                <a:solidFill>
-                  <a:schemeClr val="accent6">
-                    <a:lumMod val="60000"/>
-                    <a:lumOff val="40000"/>
-                  </a:schemeClr>
-                </a:solidFill>
-              </a:rPr>
-              <a:t>Relationship: { since: 2022 }</a:t>
-            </a:r>
-          </a:p>
-          <a:p>
-            <a:endParaRPr lang="en-US" sz="2400" b="1" dirty="0">
-              <a:solidFill>
-                <a:schemeClr val="accent6">
-                  <a:lumMod val="60000"/>
-                  <a:lumOff val="40000"/>
-                </a:schemeClr>
-              </a:solidFill>
+        </p:txBody>
+      </p:sp>
+      <p:sp>
+        <p:nvSpPr>
+          <p:cNvPr id="12" name="Oval 11">
+            <a:extLst>
+              <a:ext uri="{FF2B5EF4-FFF2-40B4-BE49-F238E27FC236}">
+                <a16:creationId xmlns:a16="http://schemas.microsoft.com/office/drawing/2014/main" id="{75CABCFF-49C2-15E7-E992-5BB07A246A4F}"/>
+              </a:ext>
+            </a:extLst>
+          </p:cNvPr>
+          <p:cNvSpPr/>
+          <p:nvPr/>
+        </p:nvSpPr>
+        <p:spPr>
+          <a:xfrm>
+            <a:off x="6821424" y="5340632"/>
+            <a:ext cx="1591056" cy="1033272"/>
+          </a:xfrm>
+          <a:prstGeom prst="ellipse">
+            <a:avLst/>
+          </a:prstGeom>
+        </p:spPr>
+        <p:style>
+          <a:lnRef idx="2">
+            <a:schemeClr val="accent1">
+              <a:shade val="15000"/>
+            </a:schemeClr>
+          </a:lnRef>
+          <a:fillRef idx="1">
+            <a:schemeClr val="accent1"/>
+          </a:fillRef>
+          <a:effectRef idx="0">
+            <a:schemeClr val="accent1"/>
+          </a:effectRef>
+          <a:fontRef idx="minor">
+            <a:schemeClr val="lt1"/>
+          </a:fontRef>
+        </p:style>
+        <p:txBody>
+          <a:bodyPr rtlCol="0" anchor="ctr"/>
+          <a:lstStyle/>
+          <a:p>
+            <a:pPr algn="ctr"/>
+            <a:r>
+              <a:rPr lang="en-US" sz="2400" dirty="0"/>
+              <a:t>Delhi</a:t>
+            </a:r>
+          </a:p>
+        </p:txBody>
+      </p:sp>
+      <p:sp>
+        <p:nvSpPr>
+          <p:cNvPr id="14" name="Arrow: Right 13">
+            <a:extLst>
+              <a:ext uri="{FF2B5EF4-FFF2-40B4-BE49-F238E27FC236}">
+                <a16:creationId xmlns:a16="http://schemas.microsoft.com/office/drawing/2014/main" id="{BF24E424-0AE1-17D5-BDF7-DE165A4294A1}"/>
+              </a:ext>
+            </a:extLst>
+          </p:cNvPr>
+          <p:cNvSpPr/>
+          <p:nvPr/>
+        </p:nvSpPr>
+        <p:spPr>
+          <a:xfrm rot="1414725">
+            <a:off x="4271159" y="5001987"/>
+            <a:ext cx="2272526" cy="475488"/>
+          </a:xfrm>
+          <a:prstGeom prst="rightArrow">
+            <a:avLst/>
+          </a:prstGeom>
+        </p:spPr>
+        <p:style>
+          <a:lnRef idx="2">
+            <a:schemeClr val="accent1">
+              <a:shade val="15000"/>
+            </a:schemeClr>
+          </a:lnRef>
+          <a:fillRef idx="1">
+            <a:schemeClr val="accent1"/>
+          </a:fillRef>
+          <a:effectRef idx="0">
+            <a:schemeClr val="accent1"/>
+          </a:effectRef>
+          <a:fontRef idx="minor">
+            <a:schemeClr val="lt1"/>
+          </a:fontRef>
+        </p:style>
+        <p:txBody>
+          <a:bodyPr rtlCol="0" anchor="ctr"/>
+          <a:lstStyle/>
+          <a:p>
+            <a:pPr algn="ctr"/>
+            <a:endParaRPr lang="en-US"/>
+          </a:p>
+        </p:txBody>
+      </p:sp>
+      <p:sp>
+        <p:nvSpPr>
+          <p:cNvPr id="16" name="TextBox 15">
+            <a:extLst>
+              <a:ext uri="{FF2B5EF4-FFF2-40B4-BE49-F238E27FC236}">
+                <a16:creationId xmlns:a16="http://schemas.microsoft.com/office/drawing/2014/main" id="{1FD0E11D-84A8-933E-D5D3-E3DC93DB236E}"/>
+              </a:ext>
+            </a:extLst>
+          </p:cNvPr>
+          <p:cNvSpPr txBox="1"/>
+          <p:nvPr/>
+        </p:nvSpPr>
+        <p:spPr>
+          <a:xfrm>
+            <a:off x="4120514" y="5713481"/>
+            <a:ext cx="1813941" cy="830997"/>
+          </a:xfrm>
+          <a:prstGeom prst="rect">
+            <a:avLst/>
+          </a:prstGeom>
+          <a:noFill/>
+        </p:spPr>
+        <p:txBody>
+          <a:bodyPr wrap="square">
+            <a:spAutoFit/>
+          </a:bodyPr>
+          <a:lstStyle/>
+          <a:p>
+            <a:pPr algn="ctr"/>
+            <a:r>
+              <a:rPr lang="en-US" sz="2400" b="1" dirty="0">
+                <a:solidFill>
+                  <a:schemeClr val="accent6">
+                    <a:lumMod val="60000"/>
+                    <a:lumOff val="40000"/>
+                  </a:schemeClr>
+                </a:solidFill>
+                <a:highlight>
+                  <a:srgbClr val="800000"/>
+                </a:highlight>
+              </a:rPr>
+              <a:t>LIVES_IN</a:t>
+            </a:r>
+          </a:p>
+          <a:p>
+            <a:pPr algn="ctr"/>
+            <a:r>
+              <a:rPr lang="en-US" sz="2400" b="1" dirty="0">
+                <a:solidFill>
+                  <a:schemeClr val="accent6">
+                    <a:lumMod val="60000"/>
+                    <a:lumOff val="40000"/>
+                  </a:schemeClr>
+                </a:solidFill>
+                <a:highlight>
+                  <a:srgbClr val="800000"/>
+                </a:highlight>
+              </a:rPr>
+              <a:t>{since: 1998}</a:t>
+            </a:r>
+            <a:endParaRPr lang="en-US" dirty="0">
+              <a:highlight>
+                <a:srgbClr val="800000"/>
+              </a:highlight>
             </a:endParaRPr>
           </a:p>
         </p:txBody>
@@ -6856,144 +10934,7 @@
 </p:sld>
 </file>
 
-<file path=ppt/slides/slide7.xml><?xml version="1.0" encoding="utf-8"?>
-<p:sld xmlns:a="http://schemas.openxmlformats.org/drawingml/2006/main" xmlns:r="http://schemas.openxmlformats.org/officeDocument/2006/relationships" xmlns:p="http://schemas.openxmlformats.org/presentationml/2006/main">
-  <p:cSld>
-    <p:spTree>
-      <p:nvGrpSpPr>
-        <p:cNvPr id="1" name="">
-          <a:extLst>
-            <a:ext uri="{FF2B5EF4-FFF2-40B4-BE49-F238E27FC236}">
-              <a16:creationId xmlns:a16="http://schemas.microsoft.com/office/drawing/2014/main" id="{1CA660E2-64E9-8E3E-6B0B-063DC295EAB8}"/>
-            </a:ext>
-          </a:extLst>
-        </p:cNvPr>
-        <p:cNvGrpSpPr/>
-        <p:nvPr/>
-      </p:nvGrpSpPr>
-      <p:grpSpPr>
-        <a:xfrm>
-          <a:off x="0" y="0"/>
-          <a:ext cx="0" cy="0"/>
-          <a:chOff x="0" y="0"/>
-          <a:chExt cx="0" cy="0"/>
-        </a:xfrm>
-      </p:grpSpPr>
-      <p:sp>
-        <p:nvSpPr>
-          <p:cNvPr id="7" name="TextBox 6">
-            <a:extLst>
-              <a:ext uri="{FF2B5EF4-FFF2-40B4-BE49-F238E27FC236}">
-                <a16:creationId xmlns:a16="http://schemas.microsoft.com/office/drawing/2014/main" id="{E25AD05F-6BC6-272C-9D68-5081A1E4455E}"/>
-              </a:ext>
-            </a:extLst>
-          </p:cNvPr>
-          <p:cNvSpPr txBox="1"/>
-          <p:nvPr/>
-        </p:nvSpPr>
-        <p:spPr>
-          <a:xfrm>
-            <a:off x="192024" y="331184"/>
-            <a:ext cx="8362188" cy="2308324"/>
-          </a:xfrm>
-          <a:prstGeom prst="rect">
-            <a:avLst/>
-          </a:prstGeom>
-          <a:noFill/>
-        </p:spPr>
-        <p:txBody>
-          <a:bodyPr wrap="square">
-            <a:spAutoFit/>
-          </a:bodyPr>
-          <a:lstStyle/>
-          <a:p>
-            <a:r>
-              <a:rPr lang="en-US" sz="2400" b="1" dirty="0">
-                <a:solidFill>
-                  <a:schemeClr val="accent6">
-                    <a:lumMod val="60000"/>
-                    <a:lumOff val="40000"/>
-                  </a:schemeClr>
-                </a:solidFill>
-              </a:rPr>
-              <a:t>3. How It Looks (Simple Graph)</a:t>
-            </a:r>
-          </a:p>
-          <a:p>
-            <a:endParaRPr lang="en-US" sz="2400" b="1" dirty="0">
-              <a:solidFill>
-                <a:schemeClr val="accent6">
-                  <a:lumMod val="60000"/>
-                  <a:lumOff val="40000"/>
-                </a:schemeClr>
-              </a:solidFill>
-            </a:endParaRPr>
-          </a:p>
-          <a:p>
-            <a:endParaRPr lang="en-US" sz="2400" b="1" dirty="0">
-              <a:solidFill>
-                <a:schemeClr val="accent6">
-                  <a:lumMod val="60000"/>
-                  <a:lumOff val="40000"/>
-                </a:schemeClr>
-              </a:solidFill>
-            </a:endParaRPr>
-          </a:p>
-          <a:p>
-            <a:r>
-              <a:rPr lang="en-US" sz="2400" dirty="0">
-                <a:solidFill>
-                  <a:schemeClr val="accent6">
-                    <a:lumMod val="60000"/>
-                    <a:lumOff val="40000"/>
-                  </a:schemeClr>
-                </a:solidFill>
-              </a:rPr>
-              <a:t>(Ash) ---TEACHES---&gt; (Python Course)</a:t>
-            </a:r>
-          </a:p>
-          <a:p>
-            <a:r>
-              <a:rPr lang="en-US" sz="2400" dirty="0">
-                <a:solidFill>
-                  <a:schemeClr val="accent6">
-                    <a:lumMod val="60000"/>
-                    <a:lumOff val="40000"/>
-                  </a:schemeClr>
-                </a:solidFill>
-              </a:rPr>
-              <a:t>   |</a:t>
-            </a:r>
-          </a:p>
-          <a:p>
-            <a:r>
-              <a:rPr lang="en-US" sz="2400" dirty="0">
-                <a:solidFill>
-                  <a:schemeClr val="accent6">
-                    <a:lumMod val="60000"/>
-                    <a:lumOff val="40000"/>
-                  </a:schemeClr>
-                </a:solidFill>
-              </a:rPr>
-              <a:t>   └---LIVES_IN---&gt; (Delhi)</a:t>
-            </a:r>
-          </a:p>
-        </p:txBody>
-      </p:sp>
-    </p:spTree>
-    <p:extLst>
-      <p:ext uri="{BB962C8B-B14F-4D97-AF65-F5344CB8AC3E}">
-        <p14:creationId xmlns:p14="http://schemas.microsoft.com/office/powerpoint/2010/main" val="4106861625"/>
-      </p:ext>
-    </p:extLst>
-  </p:cSld>
-  <p:clrMapOvr>
-    <a:masterClrMapping/>
-  </p:clrMapOvr>
-</p:sld>
-</file>
-
-<file path=ppt/slides/slide8.xml><?xml version="1.0" encoding="utf-8"?>
+<file path=ppt/slides/slide9.xml><?xml version="1.0" encoding="utf-8"?>
 <p:sld xmlns:a="http://schemas.openxmlformats.org/drawingml/2006/main" xmlns:r="http://schemas.openxmlformats.org/officeDocument/2006/relationships" xmlns:p="http://schemas.openxmlformats.org/presentationml/2006/main">
   <p:cSld>
     <p:spTree>
@@ -7031,7 +10972,7 @@
         <p:spPr>
           <a:xfrm>
             <a:off x="192024" y="331184"/>
-            <a:ext cx="4946904" cy="3046988"/>
+            <a:ext cx="5660136" cy="3416320"/>
           </a:xfrm>
           <a:prstGeom prst="rect">
             <a:avLst/>
@@ -7053,7 +10994,7 @@
                   </a:schemeClr>
                 </a:solidFill>
               </a:rPr>
-              <a:t>Some more examples:</a:t>
+              <a:t>Query example:</a:t>
             </a:r>
           </a:p>
           <a:p>
@@ -7080,6 +11021,16 @@
             </a:r>
           </a:p>
           <a:p>
+            <a:endParaRPr lang="en-US" sz="2400" b="1" dirty="0">
+              <a:solidFill>
+                <a:schemeClr val="accent6">
+                  <a:lumMod val="60000"/>
+                  <a:lumOff val="40000"/>
+                </a:schemeClr>
+              </a:solidFill>
+            </a:endParaRPr>
+          </a:p>
+          <a:p>
             <a:r>
               <a:rPr lang="en-US" sz="2400" b="1" dirty="0">
                 <a:solidFill>
@@ -7128,7 +11079,7 @@
                   </a:schemeClr>
                 </a:solidFill>
               </a:rPr>
-              <a:t>City: Delhi, Mumbai </a:t>
+              <a:t>City: Delhi, Tokyo</a:t>
             </a:r>
           </a:p>
           <a:p>
@@ -7148,10 +11099,10 @@
       </p:sp>
       <p:sp>
         <p:nvSpPr>
-          <p:cNvPr id="3" name="TextBox 2">
-            <a:extLst>
-              <a:ext uri="{FF2B5EF4-FFF2-40B4-BE49-F238E27FC236}">
-                <a16:creationId xmlns:a16="http://schemas.microsoft.com/office/drawing/2014/main" id="{4182B778-C7FE-55AB-35CA-5BF3E1BE5581}"/>
+          <p:cNvPr id="5" name="TextBox 4">
+            <a:extLst>
+              <a:ext uri="{FF2B5EF4-FFF2-40B4-BE49-F238E27FC236}">
+                <a16:creationId xmlns:a16="http://schemas.microsoft.com/office/drawing/2014/main" id="{EE797C98-9965-ED3F-9993-7389712A5CC3}"/>
               </a:ext>
             </a:extLst>
           </p:cNvPr>
@@ -7160,8 +11111,63 @@
         </p:nvSpPr>
         <p:spPr>
           <a:xfrm>
-            <a:off x="6135624" y="343883"/>
-            <a:ext cx="5815584" cy="5016758"/>
+            <a:off x="192024" y="5283446"/>
+            <a:ext cx="6190488" cy="830997"/>
+          </a:xfrm>
+          <a:prstGeom prst="rect">
+            <a:avLst/>
+          </a:prstGeom>
+          <a:noFill/>
+        </p:spPr>
+        <p:txBody>
+          <a:bodyPr wrap="square">
+            <a:spAutoFit/>
+          </a:bodyPr>
+          <a:lstStyle/>
+          <a:p>
+            <a:r>
+              <a:rPr lang="en-US" sz="2400" dirty="0">
+                <a:solidFill>
+                  <a:schemeClr val="accent6">
+                    <a:lumMod val="60000"/>
+                    <a:lumOff val="40000"/>
+                  </a:schemeClr>
+                </a:solidFill>
+              </a:rPr>
+              <a:t>Suppose you want to answer following: </a:t>
+            </a:r>
+          </a:p>
+          <a:p>
+            <a:r>
+              <a:rPr lang="en-US" sz="2400" dirty="0">
+                <a:solidFill>
+                  <a:schemeClr val="accent6">
+                    <a:lumMod val="60000"/>
+                    <a:lumOff val="40000"/>
+                  </a:schemeClr>
+                </a:solidFill>
+              </a:rPr>
+              <a:t> Find topics liked by people Ash follows ?</a:t>
+            </a:r>
+          </a:p>
+        </p:txBody>
+      </p:sp>
+      <p:sp>
+        <p:nvSpPr>
+          <p:cNvPr id="4" name="TextBox 3">
+            <a:extLst>
+              <a:ext uri="{FF2B5EF4-FFF2-40B4-BE49-F238E27FC236}">
+                <a16:creationId xmlns:a16="http://schemas.microsoft.com/office/drawing/2014/main" id="{DAC2F19D-BA93-FAE5-FC1E-CCDE6E508696}"/>
+              </a:ext>
+            </a:extLst>
+          </p:cNvPr>
+          <p:cNvSpPr txBox="1"/>
+          <p:nvPr/>
+        </p:nvSpPr>
+        <p:spPr>
+          <a:xfrm>
+            <a:off x="7379208" y="887123"/>
+            <a:ext cx="4901184" cy="5016758"/>
           </a:xfrm>
           <a:prstGeom prst="rect">
             <a:avLst/>
@@ -7429,49 +11435,7 @@
                 </a:solidFill>
                 <a:latin typeface="Courier New" panose="02070309020205020404" pitchFamily="49" charset="0"/>
               </a:rPr>
-              <a:t>(Ravi) ---LIVES_IN---&gt; (Mumbai)</a:t>
-            </a:r>
-          </a:p>
-        </p:txBody>
-      </p:sp>
-      <p:sp>
-        <p:nvSpPr>
-          <p:cNvPr id="5" name="TextBox 4">
-            <a:extLst>
-              <a:ext uri="{FF2B5EF4-FFF2-40B4-BE49-F238E27FC236}">
-                <a16:creationId xmlns:a16="http://schemas.microsoft.com/office/drawing/2014/main" id="{EE797C98-9965-ED3F-9993-7389712A5CC3}"/>
-              </a:ext>
-            </a:extLst>
-          </p:cNvPr>
-          <p:cNvSpPr txBox="1"/>
-          <p:nvPr/>
-        </p:nvSpPr>
-        <p:spPr>
-          <a:xfrm>
-            <a:off x="406908" y="5676638"/>
-            <a:ext cx="6190488" cy="400110"/>
-          </a:xfrm>
-          <a:prstGeom prst="rect">
-            <a:avLst/>
-          </a:prstGeom>
-          <a:noFill/>
-        </p:spPr>
-        <p:txBody>
-          <a:bodyPr wrap="square">
-            <a:spAutoFit/>
-          </a:bodyPr>
-          <a:lstStyle/>
-          <a:p>
-            <a:r>
-              <a:rPr lang="en-US" sz="2000" dirty="0">
-                <a:solidFill>
-                  <a:schemeClr val="accent6">
-                    <a:lumMod val="60000"/>
-                    <a:lumOff val="40000"/>
-                  </a:schemeClr>
-                </a:solidFill>
-              </a:rPr>
-              <a:t>Q: Find posts liked by people Ash follows ?</a:t>
+              <a:t>(Ravi) ---LIVES_IN---&gt; (Tokyo)</a:t>
             </a:r>
           </a:p>
         </p:txBody>
@@ -7480,245 +11444,6 @@
     <p:extLst>
       <p:ext uri="{BB962C8B-B14F-4D97-AF65-F5344CB8AC3E}">
         <p14:creationId xmlns:p14="http://schemas.microsoft.com/office/powerpoint/2010/main" val="1966452714"/>
-      </p:ext>
-    </p:extLst>
-  </p:cSld>
-  <p:clrMapOvr>
-    <a:masterClrMapping/>
-  </p:clrMapOvr>
-</p:sld>
-</file>
-
-<file path=ppt/slides/slide9.xml><?xml version="1.0" encoding="utf-8"?>
-<p:sld xmlns:a="http://schemas.openxmlformats.org/drawingml/2006/main" xmlns:r="http://schemas.openxmlformats.org/officeDocument/2006/relationships" xmlns:p="http://schemas.openxmlformats.org/presentationml/2006/main">
-  <p:cSld>
-    <p:spTree>
-      <p:nvGrpSpPr>
-        <p:cNvPr id="1" name="">
-          <a:extLst>
-            <a:ext uri="{FF2B5EF4-FFF2-40B4-BE49-F238E27FC236}">
-              <a16:creationId xmlns:a16="http://schemas.microsoft.com/office/drawing/2014/main" id="{CAAE8007-FD01-AE27-11B1-44FFAE3E333C}"/>
-            </a:ext>
-          </a:extLst>
-        </p:cNvPr>
-        <p:cNvGrpSpPr/>
-        <p:nvPr/>
-      </p:nvGrpSpPr>
-      <p:grpSpPr>
-        <a:xfrm>
-          <a:off x="0" y="0"/>
-          <a:ext cx="0" cy="0"/>
-          <a:chOff x="0" y="0"/>
-          <a:chExt cx="0" cy="0"/>
-        </a:xfrm>
-      </p:grpSpPr>
-      <p:sp>
-        <p:nvSpPr>
-          <p:cNvPr id="7" name="TextBox 6">
-            <a:extLst>
-              <a:ext uri="{FF2B5EF4-FFF2-40B4-BE49-F238E27FC236}">
-                <a16:creationId xmlns:a16="http://schemas.microsoft.com/office/drawing/2014/main" id="{C7509A48-5C1C-31CF-2B24-9DED63E06D08}"/>
-              </a:ext>
-            </a:extLst>
-          </p:cNvPr>
-          <p:cNvSpPr txBox="1"/>
-          <p:nvPr/>
-        </p:nvSpPr>
-        <p:spPr>
-          <a:xfrm>
-            <a:off x="192024" y="331184"/>
-            <a:ext cx="9372600" cy="3416320"/>
-          </a:xfrm>
-          <a:prstGeom prst="rect">
-            <a:avLst/>
-          </a:prstGeom>
-          <a:noFill/>
-        </p:spPr>
-        <p:txBody>
-          <a:bodyPr wrap="square">
-            <a:spAutoFit/>
-          </a:bodyPr>
-          <a:lstStyle/>
-          <a:p>
-            <a:r>
-              <a:rPr lang="en-US" sz="2400" b="1" dirty="0">
-                <a:solidFill>
-                  <a:schemeClr val="accent6">
-                    <a:lumMod val="60000"/>
-                    <a:lumOff val="40000"/>
-                  </a:schemeClr>
-                </a:solidFill>
-              </a:rPr>
-              <a:t>4. Query Example</a:t>
-            </a:r>
-          </a:p>
-          <a:p>
-            <a:endParaRPr lang="en-US" sz="2400" b="1" dirty="0">
-              <a:solidFill>
-                <a:schemeClr val="accent6">
-                  <a:lumMod val="60000"/>
-                  <a:lumOff val="40000"/>
-                </a:schemeClr>
-              </a:solidFill>
-            </a:endParaRPr>
-          </a:p>
-          <a:p>
-            <a:r>
-              <a:rPr lang="en-US" sz="2400" dirty="0">
-                <a:solidFill>
-                  <a:schemeClr val="accent6">
-                    <a:lumMod val="60000"/>
-                    <a:lumOff val="40000"/>
-                  </a:schemeClr>
-                </a:solidFill>
-              </a:rPr>
-              <a:t>In graph databases like Neo4j, you use </a:t>
-            </a:r>
-            <a:r>
-              <a:rPr lang="en-US" sz="2400" b="1" dirty="0">
-                <a:solidFill>
-                  <a:schemeClr val="accent6">
-                    <a:lumMod val="60000"/>
-                    <a:lumOff val="40000"/>
-                  </a:schemeClr>
-                </a:solidFill>
-              </a:rPr>
-              <a:t>Cypher query language</a:t>
-            </a:r>
-            <a:r>
-              <a:rPr lang="en-US" sz="2400" dirty="0">
-                <a:solidFill>
-                  <a:schemeClr val="accent6">
-                    <a:lumMod val="60000"/>
-                    <a:lumOff val="40000"/>
-                  </a:schemeClr>
-                </a:solidFill>
-              </a:rPr>
-              <a:t>:</a:t>
-            </a:r>
-          </a:p>
-          <a:p>
-            <a:endParaRPr lang="en-US" sz="2400" dirty="0">
-              <a:solidFill>
-                <a:schemeClr val="accent6">
-                  <a:lumMod val="60000"/>
-                  <a:lumOff val="40000"/>
-                </a:schemeClr>
-              </a:solidFill>
-            </a:endParaRPr>
-          </a:p>
-          <a:p>
-            <a:r>
-              <a:rPr lang="en-US" sz="2400" dirty="0">
-                <a:solidFill>
-                  <a:schemeClr val="accent6">
-                    <a:lumMod val="60000"/>
-                    <a:lumOff val="40000"/>
-                  </a:schemeClr>
-                </a:solidFill>
-              </a:rPr>
-              <a:t>MATCH (</a:t>
-            </a:r>
-            <a:r>
-              <a:rPr lang="en-US" sz="2400" dirty="0" err="1">
-                <a:solidFill>
-                  <a:schemeClr val="accent6">
-                    <a:lumMod val="60000"/>
-                    <a:lumOff val="40000"/>
-                  </a:schemeClr>
-                </a:solidFill>
-              </a:rPr>
-              <a:t>a:Person</a:t>
-            </a:r>
-            <a:r>
-              <a:rPr lang="en-US" sz="2400" dirty="0">
-                <a:solidFill>
-                  <a:schemeClr val="accent6">
-                    <a:lumMod val="60000"/>
-                    <a:lumOff val="40000"/>
-                  </a:schemeClr>
-                </a:solidFill>
-              </a:rPr>
-              <a:t> {name: "Ash"})-[:TEACHES]-&gt;(</a:t>
-            </a:r>
-            <a:r>
-              <a:rPr lang="en-US" sz="2400" dirty="0" err="1">
-                <a:solidFill>
-                  <a:schemeClr val="accent6">
-                    <a:lumMod val="60000"/>
-                    <a:lumOff val="40000"/>
-                  </a:schemeClr>
-                </a:solidFill>
-              </a:rPr>
-              <a:t>c:Course</a:t>
-            </a:r>
-            <a:r>
-              <a:rPr lang="en-US" sz="2400" dirty="0">
-                <a:solidFill>
-                  <a:schemeClr val="accent6">
-                    <a:lumMod val="60000"/>
-                    <a:lumOff val="40000"/>
-                  </a:schemeClr>
-                </a:solidFill>
-              </a:rPr>
-              <a:t>)</a:t>
-            </a:r>
-          </a:p>
-          <a:p>
-            <a:r>
-              <a:rPr lang="en-US" sz="2400" dirty="0">
-                <a:solidFill>
-                  <a:schemeClr val="accent6">
-                    <a:lumMod val="60000"/>
-                    <a:lumOff val="40000"/>
-                  </a:schemeClr>
-                </a:solidFill>
-              </a:rPr>
-              <a:t>RETURN c</a:t>
-            </a:r>
-          </a:p>
-          <a:p>
-            <a:endParaRPr lang="en-US" sz="2400" dirty="0">
-              <a:solidFill>
-                <a:schemeClr val="accent6">
-                  <a:lumMod val="60000"/>
-                  <a:lumOff val="40000"/>
-                </a:schemeClr>
-              </a:solidFill>
-            </a:endParaRPr>
-          </a:p>
-          <a:p>
-            <a:r>
-              <a:rPr lang="en-US" sz="2400" dirty="0">
-                <a:solidFill>
-                  <a:schemeClr val="accent6">
-                    <a:lumMod val="60000"/>
-                    <a:lumOff val="40000"/>
-                  </a:schemeClr>
-                </a:solidFill>
-              </a:rPr>
-              <a:t>👉 Meaning:</a:t>
-            </a:r>
-          </a:p>
-          <a:p>
-            <a:r>
-              <a:rPr lang="en-US" sz="2400" dirty="0">
-                <a:solidFill>
-                  <a:schemeClr val="accent6">
-                    <a:lumMod val="60000"/>
-                    <a:lumOff val="40000"/>
-                  </a:schemeClr>
-                </a:solidFill>
-              </a:rPr>
-              <a:t>Find courses that Ash teaches</a:t>
-            </a:r>
-          </a:p>
-        </p:txBody>
-      </p:sp>
-    </p:spTree>
-    <p:extLst>
-      <p:ext uri="{BB962C8B-B14F-4D97-AF65-F5344CB8AC3E}">
-        <p14:creationId xmlns:p14="http://schemas.microsoft.com/office/powerpoint/2010/main" val="2424340829"/>
       </p:ext>
     </p:extLst>
   </p:cSld>

--- a/GraphDB/1-intro/1-Basics.pptx
+++ b/GraphDB/1-intro/1-Basics.pptx
@@ -5,34 +5,39 @@
     <p:sldMasterId id="2147483648" r:id="rId1"/>
   </p:sldMasterIdLst>
   <p:notesMasterIdLst>
-    <p:notesMasterId r:id="rId24"/>
+    <p:notesMasterId r:id="rId29"/>
   </p:notesMasterIdLst>
   <p:handoutMasterIdLst>
-    <p:handoutMasterId r:id="rId25"/>
+    <p:handoutMasterId r:id="rId30"/>
   </p:handoutMasterIdLst>
   <p:sldIdLst>
     <p:sldId id="257" r:id="rId2"/>
     <p:sldId id="275" r:id="rId3"/>
     <p:sldId id="290" r:id="rId4"/>
-    <p:sldId id="278" r:id="rId5"/>
-    <p:sldId id="279" r:id="rId6"/>
-    <p:sldId id="289" r:id="rId7"/>
-    <p:sldId id="280" r:id="rId8"/>
-    <p:sldId id="281" r:id="rId9"/>
-    <p:sldId id="288" r:id="rId10"/>
-    <p:sldId id="291" r:id="rId11"/>
-    <p:sldId id="296" r:id="rId12"/>
-    <p:sldId id="295" r:id="rId13"/>
-    <p:sldId id="284" r:id="rId14"/>
-    <p:sldId id="294" r:id="rId15"/>
-    <p:sldId id="297" r:id="rId16"/>
-    <p:sldId id="293" r:id="rId17"/>
-    <p:sldId id="283" r:id="rId18"/>
-    <p:sldId id="277" r:id="rId19"/>
-    <p:sldId id="286" r:id="rId20"/>
-    <p:sldId id="287" r:id="rId21"/>
-    <p:sldId id="285" r:id="rId22"/>
-    <p:sldId id="276" r:id="rId23"/>
+    <p:sldId id="299" r:id="rId5"/>
+    <p:sldId id="301" r:id="rId6"/>
+    <p:sldId id="300" r:id="rId7"/>
+    <p:sldId id="278" r:id="rId8"/>
+    <p:sldId id="279" r:id="rId9"/>
+    <p:sldId id="289" r:id="rId10"/>
+    <p:sldId id="280" r:id="rId11"/>
+    <p:sldId id="281" r:id="rId12"/>
+    <p:sldId id="288" r:id="rId13"/>
+    <p:sldId id="291" r:id="rId14"/>
+    <p:sldId id="296" r:id="rId15"/>
+    <p:sldId id="295" r:id="rId16"/>
+    <p:sldId id="298" r:id="rId17"/>
+    <p:sldId id="284" r:id="rId18"/>
+    <p:sldId id="294" r:id="rId19"/>
+    <p:sldId id="297" r:id="rId20"/>
+    <p:sldId id="293" r:id="rId21"/>
+    <p:sldId id="283" r:id="rId22"/>
+    <p:sldId id="277" r:id="rId23"/>
+    <p:sldId id="286" r:id="rId24"/>
+    <p:sldId id="302" r:id="rId25"/>
+    <p:sldId id="287" r:id="rId26"/>
+    <p:sldId id="285" r:id="rId27"/>
+    <p:sldId id="276" r:id="rId28"/>
   </p:sldIdLst>
   <p:sldSz cx="12192000" cy="6858000"/>
   <p:notesSz cx="6858000" cy="9144000"/>
@@ -236,7 +241,7 @@
           <a:p>
             <a:fld id="{7BAEECA8-D063-486F-AE31-5020270C1449}" type="datetimeFigureOut">
               <a:rPr lang="en-US" smtClean="0"/>
-              <a:t>7/23/2026</a:t>
+              <a:t>7/30/2026</a:t>
             </a:fld>
             <a:endParaRPr lang="en-US"/>
           </a:p>
@@ -329,6 +334,62 @@
   </p:cSld>
   <p:clrMap bg1="lt1" tx1="dk1" bg2="lt2" tx2="dk2" accent1="accent1" accent2="accent2" accent3="accent3" accent4="accent4" accent5="accent5" accent6="accent6" hlink="hlink" folHlink="folHlink"/>
 </p:handoutMaster>
+</file>
+
+<file path=ppt/ink/ink1.xml><?xml version="1.0" encoding="utf-8"?>
+<inkml:ink xmlns:inkml="http://www.w3.org/2003/InkML">
+  <inkml:definitions>
+    <inkml:context xml:id="ctx0">
+      <inkml:inkSource xml:id="inkSrc0">
+        <inkml:traceFormat>
+          <inkml:channel name="X" type="integer" min="-2.14748E9" max="2.14748E9" units="cm"/>
+          <inkml:channel name="Y" type="integer" min="-2.14748E9" max="2.14748E9" units="cm"/>
+          <inkml:channel name="F" type="integer" max="32767" units="dev"/>
+        </inkml:traceFormat>
+        <inkml:channelProperties>
+          <inkml:channelProperty channel="X" name="resolution" value="1000" units="1/cm"/>
+          <inkml:channelProperty channel="Y" name="resolution" value="1000" units="1/cm"/>
+          <inkml:channelProperty channel="F" name="resolution" value="0" units="1/dev"/>
+        </inkml:channelProperties>
+      </inkml:inkSource>
+      <inkml:timestamp xml:id="ts0" timeString="2026-07-30T15:58:29.838"/>
+    </inkml:context>
+    <inkml:brush xml:id="br0">
+      <inkml:brushProperty name="width" value="0.2" units="cm"/>
+      <inkml:brushProperty name="height" value="0.2" units="cm"/>
+      <inkml:brushProperty name="color" value="#F6630D"/>
+    </inkml:brush>
+  </inkml:definitions>
+  <inkml:trace contextRef="#ctx0" brushRef="#br0">5076 1 24575,'-11'13'0,"0"0"0,1 1 0,0 1 0,1 0 0,-7 16 0,-13 22 0,-102 126 0,107-146 0,-1-1 0,-2-2 0,-1 0 0,-1-2 0,-1-1 0,-2-2 0,-37 24 0,32-27 0,-1-2 0,-1-1 0,-1-2 0,-60 17 0,-172 29 0,191-50 0,-1-4 0,0-3 0,0-4 0,0-3 0,-118-18 0,-223-9 0,341 25 0,-525-2 0,553 10 0,0 2 0,-88 24 0,66-13 0,-35 9 0,2 5 0,-151 65 0,217-81 0,-1-2 0,-1-2 0,-89 12 0,-51 13 0,168-32 0,0 1 0,1 0 0,0 1 0,0 1 0,0 1 0,1 0 0,0 1 0,1 0 0,0 1 0,1 1 0,0 0 0,1 1 0,0 0 0,1 1 0,1 0 0,0 1 0,1 0 0,-10 21 0,-52 100 0,43-86 0,2 1 0,-22 61 0,39-85 0,1 0 0,1 0 0,2 0 0,0 1 0,2 0 0,0 34 0,2-27 0,-12 64 0,3-30 0,8-55 0,-2 1 0,1-1 0,-11 24 0,-6 29 0,10-41 0,10-26 0,0 1 0,-1-1 0,1 1 0,-1-1 0,1 1 0,-1-1 0,1 1 0,-1-1 0,1 1 0,-1-1 0,1 0 0,-1 1 0,0-1 0,1 0 0,-1 0 0,1 1 0,-1-1 0,0 0 0,1 0 0,-1 0 0,0 0 0,-1 0 0,-1-1 0,0 0 0,0 0 0,0-1 0,0 0 0,0 1 0,0-1 0,0 0 0,0 0 0,1-1 0,-1 1 0,1-1 0,-4-4 0,-79-90 0,-138-209 0,72 61 0,149 242 0,0 0 0,1 1 0,0-1 0,-1-1 0,1 1 0,0 0 0,1 0 0,-1 0 0,0 0 0,1-1 0,0 1 0,0 0 0,0-1 0,0-3 0,1 6 0,-1 1 0,0-1 0,0 0 0,0 1 0,1-1 0,-1 0 0,0 1 0,1-1 0,-1 1 0,1-1 0,-1 1 0,1-1 0,-1 1 0,1-1 0,-1 1 0,1-1 0,-1 1 0,1 0 0,0-1 0,-1 1 0,1 0 0,-1 0 0,1-1 0,0 1 0,0 0 0,1 0 0,0 0 0,1 0 0,-1 0 0,0 0 0,0 1 0,0-1 0,0 1 0,0-1 0,0 1 0,0 0 0,0 0 0,2 2 0,5 2 0,0 1 0,-1 0 0,0 0 0,-1 1 0,0 0 0,0 1 0,10 13 0,40 65 0,-49-72 0,170 278 0,-139-231 0,54 120 0,-91-176 0,0 0 0,0 0 0,1 0 0,0 0 0,-1-1 0,1 1 0,1-1 0,-1 0 0,1 0 0,6 6 0,-7-8 0,0-1 0,0 0 0,0 1 0,1-1 0,-1 0 0,1 0 0,-1-1 0,1 1 0,-1-1 0,1 0 0,-1 0 0,1 0 0,-1 0 0,1 0 0,-1-1 0,1 0 0,-1 0 0,5-1 0,295-99 0,-113 33 0,-62 28-1365,-25 9-5461</inkml:trace>
+</inkml:ink>
+</file>
+
+<file path=ppt/ink/ink2.xml><?xml version="1.0" encoding="utf-8"?>
+<inkml:ink xmlns:inkml="http://www.w3.org/2003/InkML">
+  <inkml:definitions>
+    <inkml:context xml:id="ctx0">
+      <inkml:inkSource xml:id="inkSrc0">
+        <inkml:traceFormat>
+          <inkml:channel name="X" type="integer" min="-2.14748E9" max="2.14748E9" units="cm"/>
+          <inkml:channel name="Y" type="integer" min="-2.14748E9" max="2.14748E9" units="cm"/>
+          <inkml:channel name="F" type="integer" max="32767" units="dev"/>
+        </inkml:traceFormat>
+        <inkml:channelProperties>
+          <inkml:channelProperty channel="X" name="resolution" value="1000" units="1/cm"/>
+          <inkml:channelProperty channel="Y" name="resolution" value="1000" units="1/cm"/>
+          <inkml:channelProperty channel="F" name="resolution" value="0" units="1/dev"/>
+        </inkml:channelProperties>
+      </inkml:inkSource>
+      <inkml:timestamp xml:id="ts0" timeString="2026-07-30T15:58:32.688"/>
+    </inkml:context>
+    <inkml:brush xml:id="br0">
+      <inkml:brushProperty name="width" value="0.2" units="cm"/>
+      <inkml:brushProperty name="height" value="0.2" units="cm"/>
+      <inkml:brushProperty name="color" value="#F6630D"/>
+    </inkml:brush>
+  </inkml:definitions>
+  <inkml:trace contextRef="#ctx0" brushRef="#br0">1 0 24575,'2'0'0,"1"0"0,-1 1 0,1-1 0,-1 1 0,0-1 0,1 1 0,-1 0 0,1 0 0,-1 0 0,0 0 0,0 0 0,0 0 0,0 1 0,0-1 0,0 1 0,0-1 0,3 4 0,23 39 0,-16-24 0,280 397 0,-172-253 0,-107-145 0,-2 0 0,-1 0 0,0 2 0,-1-1 0,-1 1 0,-1 0 0,-1 1 0,-1-1 0,3 39 0,-2 17 0,-7 115 0,-2-72 0,1-71 0,-9 53 0,4-53 0,0 56 0,7-94 0,1-1 0,-1 1 0,0-1 0,-1 0 0,-1 1 0,-3 16 0,4-26 0,1 1 0,-1-1 0,1 0 0,-1 1 0,0-1 0,0 0 0,0 1 0,0-1 0,0 0 0,0 0 0,0 1 0,0-1 0,0 0 0,0 0 0,-1-1 0,1 1 0,0 0 0,-2 1 0,0-2 0,1 1 0,0-1 0,0 0 0,0 0 0,-1 0 0,1 0 0,0 0 0,0-1 0,-1 1 0,1 0 0,0-1 0,0 0 0,0 1 0,0-1 0,0 0 0,-4-2 0,-9-8 0,0 0 0,1 0 0,0-1 0,1-1 0,0-1 0,-13-18 0,5 8 0,-126-172 0,127 172 0,1-2 0,1 0 0,2-1 0,-15-32 0,25 26 0,9 23 0,8 18 0,14 30 0,24 50 0,-31-54 0,1-1 0,1-1 0,30 36 0,62 48 0,-73-79 0,-2 1 0,-2 2 0,37 54 0,-44-53 0,44 49 0,-72-89 0,1 0 0,0 0 0,-1-1 0,1 1 0,0 0 0,0-1 0,0 1 0,-1-1 0,1 1 0,0-1 0,0 1 0,0-1 0,0 1 0,0-1 0,0 0 0,0 0 0,0 0 0,0 1 0,0-1 0,0 0 0,0 0 0,0 0 0,0 0 0,0-1 0,0 1 0,1 0 0,1-1 0,-1 0 0,1-1 0,-1 1 0,1-1 0,-1 1 0,0-1 0,0 0 0,0 0 0,4-4 0,5-8 0,-1 0 0,15-26 0,-16 25 0,5-8-78,53-87-565,130-161-1,-163 233-6182</inkml:trace>
+</inkml:ink>
 </file>
 
 <file path=ppt/notesMasters/notesMaster1.xml><?xml version="1.0" encoding="utf-8"?>
@@ -413,7 +474,7 @@
           <a:p>
             <a:fld id="{CB233BD1-3BA8-448D-9D08-7846095EA517}" type="datetimeFigureOut">
               <a:rPr lang="en-US" smtClean="0"/>
-              <a:t>7/23/2026</a:t>
+              <a:t>7/30/2026</a:t>
             </a:fld>
             <a:endParaRPr lang="en-US"/>
           </a:p>
@@ -827,7 +888,7 @@
           <a:p>
             <a:fld id="{6383FAE1-13DE-4511-8C1B-C8AFB720664C}" type="datetimeFigureOut">
               <a:rPr lang="en-US" smtClean="0"/>
-              <a:t>7/23/2026</a:t>
+              <a:t>7/30/2026</a:t>
             </a:fld>
             <a:endParaRPr lang="en-US"/>
           </a:p>
@@ -1025,7 +1086,7 @@
           <a:p>
             <a:fld id="{6383FAE1-13DE-4511-8C1B-C8AFB720664C}" type="datetimeFigureOut">
               <a:rPr lang="en-US" smtClean="0"/>
-              <a:t>7/23/2026</a:t>
+              <a:t>7/30/2026</a:t>
             </a:fld>
             <a:endParaRPr lang="en-US"/>
           </a:p>
@@ -1233,7 +1294,7 @@
           <a:p>
             <a:fld id="{6383FAE1-13DE-4511-8C1B-C8AFB720664C}" type="datetimeFigureOut">
               <a:rPr lang="en-US" smtClean="0"/>
-              <a:t>7/23/2026</a:t>
+              <a:t>7/30/2026</a:t>
             </a:fld>
             <a:endParaRPr lang="en-US"/>
           </a:p>
@@ -1431,7 +1492,7 @@
           <a:p>
             <a:fld id="{6383FAE1-13DE-4511-8C1B-C8AFB720664C}" type="datetimeFigureOut">
               <a:rPr lang="en-US" smtClean="0"/>
-              <a:t>7/23/2026</a:t>
+              <a:t>7/30/2026</a:t>
             </a:fld>
             <a:endParaRPr lang="en-US"/>
           </a:p>
@@ -1706,7 +1767,7 @@
           <a:p>
             <a:fld id="{6383FAE1-13DE-4511-8C1B-C8AFB720664C}" type="datetimeFigureOut">
               <a:rPr lang="en-US" smtClean="0"/>
-              <a:t>7/23/2026</a:t>
+              <a:t>7/30/2026</a:t>
             </a:fld>
             <a:endParaRPr lang="en-US"/>
           </a:p>
@@ -1971,7 +2032,7 @@
           <a:p>
             <a:fld id="{6383FAE1-13DE-4511-8C1B-C8AFB720664C}" type="datetimeFigureOut">
               <a:rPr lang="en-US" smtClean="0"/>
-              <a:t>7/23/2026</a:t>
+              <a:t>7/30/2026</a:t>
             </a:fld>
             <a:endParaRPr lang="en-US"/>
           </a:p>
@@ -2383,7 +2444,7 @@
           <a:p>
             <a:fld id="{6383FAE1-13DE-4511-8C1B-C8AFB720664C}" type="datetimeFigureOut">
               <a:rPr lang="en-US" smtClean="0"/>
-              <a:t>7/23/2026</a:t>
+              <a:t>7/30/2026</a:t>
             </a:fld>
             <a:endParaRPr lang="en-US"/>
           </a:p>
@@ -2524,7 +2585,7 @@
           <a:p>
             <a:fld id="{6383FAE1-13DE-4511-8C1B-C8AFB720664C}" type="datetimeFigureOut">
               <a:rPr lang="en-US" smtClean="0"/>
-              <a:t>7/23/2026</a:t>
+              <a:t>7/30/2026</a:t>
             </a:fld>
             <a:endParaRPr lang="en-US"/>
           </a:p>
@@ -2637,7 +2698,7 @@
           <a:p>
             <a:fld id="{6383FAE1-13DE-4511-8C1B-C8AFB720664C}" type="datetimeFigureOut">
               <a:rPr lang="en-US" smtClean="0"/>
-              <a:t>7/23/2026</a:t>
+              <a:t>7/30/2026</a:t>
             </a:fld>
             <a:endParaRPr lang="en-US"/>
           </a:p>
@@ -2948,7 +3009,7 @@
           <a:p>
             <a:fld id="{6383FAE1-13DE-4511-8C1B-C8AFB720664C}" type="datetimeFigureOut">
               <a:rPr lang="en-US" smtClean="0"/>
-              <a:t>7/23/2026</a:t>
+              <a:t>7/30/2026</a:t>
             </a:fld>
             <a:endParaRPr lang="en-US"/>
           </a:p>
@@ -3239,7 +3300,7 @@
           <a:p>
             <a:fld id="{6383FAE1-13DE-4511-8C1B-C8AFB720664C}" type="datetimeFigureOut">
               <a:rPr lang="en-US" smtClean="0"/>
-              <a:t>7/23/2026</a:t>
+              <a:t>7/30/2026</a:t>
             </a:fld>
             <a:endParaRPr lang="en-US"/>
           </a:p>
@@ -3483,7 +3544,7 @@
           <a:p>
             <a:fld id="{6383FAE1-13DE-4511-8C1B-C8AFB720664C}" type="datetimeFigureOut">
               <a:rPr lang="en-US" smtClean="0"/>
-              <a:t>7/23/2026</a:t>
+              <a:t>7/30/2026</a:t>
             </a:fld>
             <a:endParaRPr lang="en-US"/>
           </a:p>
@@ -4116,6 +4177,1669 @@
         <p:cNvPr id="1" name="">
           <a:extLst>
             <a:ext uri="{FF2B5EF4-FFF2-40B4-BE49-F238E27FC236}">
+              <a16:creationId xmlns:a16="http://schemas.microsoft.com/office/drawing/2014/main" id="{D212DBA7-B16F-2E9F-9E8C-D916F0B21A85}"/>
+            </a:ext>
+          </a:extLst>
+        </p:cNvPr>
+        <p:cNvGrpSpPr/>
+        <p:nvPr/>
+      </p:nvGrpSpPr>
+      <p:grpSpPr>
+        <a:xfrm>
+          <a:off x="0" y="0"/>
+          <a:ext cx="0" cy="0"/>
+          <a:chOff x="0" y="0"/>
+          <a:chExt cx="0" cy="0"/>
+        </a:xfrm>
+      </p:grpSpPr>
+      <p:sp>
+        <p:nvSpPr>
+          <p:cNvPr id="7" name="TextBox 6">
+            <a:extLst>
+              <a:ext uri="{FF2B5EF4-FFF2-40B4-BE49-F238E27FC236}">
+                <a16:creationId xmlns:a16="http://schemas.microsoft.com/office/drawing/2014/main" id="{9866BA6E-8A83-2CCF-9BA8-6FBB1A4417CF}"/>
+              </a:ext>
+            </a:extLst>
+          </p:cNvPr>
+          <p:cNvSpPr txBox="1"/>
+          <p:nvPr/>
+        </p:nvSpPr>
+        <p:spPr>
+          <a:xfrm>
+            <a:off x="192024" y="331184"/>
+            <a:ext cx="8362188" cy="2308324"/>
+          </a:xfrm>
+          <a:prstGeom prst="rect">
+            <a:avLst/>
+          </a:prstGeom>
+          <a:noFill/>
+        </p:spPr>
+        <p:txBody>
+          <a:bodyPr wrap="square">
+            <a:spAutoFit/>
+          </a:bodyPr>
+          <a:lstStyle/>
+          <a:p>
+            <a:r>
+              <a:rPr lang="en-US" sz="2400" b="1" dirty="0">
+                <a:solidFill>
+                  <a:schemeClr val="accent6">
+                    <a:lumMod val="60000"/>
+                    <a:lumOff val="40000"/>
+                  </a:schemeClr>
+                </a:solidFill>
+              </a:rPr>
+              <a:t>2. Relationships (Edges)</a:t>
+            </a:r>
+          </a:p>
+          <a:p>
+            <a:pPr marL="342900" indent="-342900">
+              <a:buFont typeface="Arial" panose="020B0604020202020204" pitchFamily="34" charset="0"/>
+              <a:buChar char="•"/>
+            </a:pPr>
+            <a:r>
+              <a:rPr lang="en-US" sz="2400" dirty="0">
+                <a:solidFill>
+                  <a:schemeClr val="accent6">
+                    <a:lumMod val="60000"/>
+                    <a:lumOff val="40000"/>
+                  </a:schemeClr>
+                </a:solidFill>
+              </a:rPr>
+              <a:t>Define how nodes are connected, i.e. related. </a:t>
+            </a:r>
+          </a:p>
+          <a:p>
+            <a:endParaRPr lang="en-US" sz="2400" dirty="0">
+              <a:solidFill>
+                <a:schemeClr val="accent6">
+                  <a:lumMod val="60000"/>
+                  <a:lumOff val="40000"/>
+                </a:schemeClr>
+              </a:solidFill>
+            </a:endParaRPr>
+          </a:p>
+          <a:p>
+            <a:r>
+              <a:rPr lang="en-US" sz="2400" dirty="0">
+                <a:solidFill>
+                  <a:schemeClr val="accent6">
+                    <a:lumMod val="60000"/>
+                    <a:lumOff val="40000"/>
+                  </a:schemeClr>
+                </a:solidFill>
+              </a:rPr>
+              <a:t>👉 Example:</a:t>
+            </a:r>
+          </a:p>
+          <a:p>
+            <a:pPr marL="342900" indent="-342900">
+              <a:buFont typeface="Arial" panose="020B0604020202020204" pitchFamily="34" charset="0"/>
+              <a:buChar char="•"/>
+            </a:pPr>
+            <a:r>
+              <a:rPr lang="en-US" sz="2400" dirty="0">
+                <a:solidFill>
+                  <a:schemeClr val="accent6">
+                    <a:lumMod val="60000"/>
+                    <a:lumOff val="40000"/>
+                  </a:schemeClr>
+                </a:solidFill>
+              </a:rPr>
+              <a:t>Ash → </a:t>
+            </a:r>
+            <a:r>
+              <a:rPr lang="en-US" sz="2400" b="1" dirty="0">
+                <a:solidFill>
+                  <a:schemeClr val="accent6">
+                    <a:lumMod val="60000"/>
+                    <a:lumOff val="40000"/>
+                  </a:schemeClr>
+                </a:solidFill>
+              </a:rPr>
+              <a:t>TEACHES</a:t>
+            </a:r>
+            <a:r>
+              <a:rPr lang="en-US" sz="2400" dirty="0">
+                <a:solidFill>
+                  <a:schemeClr val="accent6">
+                    <a:lumMod val="60000"/>
+                    <a:lumOff val="40000"/>
+                  </a:schemeClr>
+                </a:solidFill>
+              </a:rPr>
+              <a:t> → Course </a:t>
+            </a:r>
+          </a:p>
+          <a:p>
+            <a:pPr marL="342900" indent="-342900">
+              <a:buFont typeface="Arial" panose="020B0604020202020204" pitchFamily="34" charset="0"/>
+              <a:buChar char="•"/>
+            </a:pPr>
+            <a:r>
+              <a:rPr lang="en-US" sz="2400" dirty="0">
+                <a:solidFill>
+                  <a:schemeClr val="accent6">
+                    <a:lumMod val="60000"/>
+                    <a:lumOff val="40000"/>
+                  </a:schemeClr>
+                </a:solidFill>
+              </a:rPr>
+              <a:t>Ash → </a:t>
+            </a:r>
+            <a:r>
+              <a:rPr lang="en-US" sz="2400" b="1" dirty="0">
+                <a:solidFill>
+                  <a:schemeClr val="accent6">
+                    <a:lumMod val="60000"/>
+                    <a:lumOff val="40000"/>
+                  </a:schemeClr>
+                </a:solidFill>
+              </a:rPr>
+              <a:t>LIVES_IN</a:t>
+            </a:r>
+            <a:r>
+              <a:rPr lang="en-US" sz="2400" dirty="0">
+                <a:solidFill>
+                  <a:schemeClr val="accent6">
+                    <a:lumMod val="60000"/>
+                    <a:lumOff val="40000"/>
+                  </a:schemeClr>
+                </a:solidFill>
+              </a:rPr>
+              <a:t> → Delhi</a:t>
+            </a:r>
+          </a:p>
+        </p:txBody>
+      </p:sp>
+      <p:sp>
+        <p:nvSpPr>
+          <p:cNvPr id="17" name="Oval 16">
+            <a:extLst>
+              <a:ext uri="{FF2B5EF4-FFF2-40B4-BE49-F238E27FC236}">
+                <a16:creationId xmlns:a16="http://schemas.microsoft.com/office/drawing/2014/main" id="{0C3257FE-A44F-AA81-1768-D48C7FC9242C}"/>
+              </a:ext>
+            </a:extLst>
+          </p:cNvPr>
+          <p:cNvSpPr/>
+          <p:nvPr/>
+        </p:nvSpPr>
+        <p:spPr>
+          <a:xfrm>
+            <a:off x="722376" y="3008840"/>
+            <a:ext cx="2679192" cy="1453432"/>
+          </a:xfrm>
+          <a:prstGeom prst="ellipse">
+            <a:avLst/>
+          </a:prstGeom>
+        </p:spPr>
+        <p:style>
+          <a:lnRef idx="2">
+            <a:schemeClr val="accent1">
+              <a:shade val="15000"/>
+            </a:schemeClr>
+          </a:lnRef>
+          <a:fillRef idx="1">
+            <a:schemeClr val="accent1"/>
+          </a:fillRef>
+          <a:effectRef idx="0">
+            <a:schemeClr val="accent1"/>
+          </a:effectRef>
+          <a:fontRef idx="minor">
+            <a:schemeClr val="lt1"/>
+          </a:fontRef>
+        </p:style>
+        <p:txBody>
+          <a:bodyPr rtlCol="0" anchor="ctr"/>
+          <a:lstStyle/>
+          <a:p>
+            <a:pPr algn="ctr"/>
+            <a:r>
+              <a:rPr lang="en-US" sz="2400" dirty="0"/>
+              <a:t>Ash</a:t>
+            </a:r>
+          </a:p>
+        </p:txBody>
+      </p:sp>
+      <p:sp>
+        <p:nvSpPr>
+          <p:cNvPr id="19" name="Oval 18">
+            <a:extLst>
+              <a:ext uri="{FF2B5EF4-FFF2-40B4-BE49-F238E27FC236}">
+                <a16:creationId xmlns:a16="http://schemas.microsoft.com/office/drawing/2014/main" id="{C4845B29-7BDB-99E5-D8B3-117C97BE827B}"/>
+              </a:ext>
+            </a:extLst>
+          </p:cNvPr>
+          <p:cNvSpPr/>
+          <p:nvPr/>
+        </p:nvSpPr>
+        <p:spPr>
+          <a:xfrm>
+            <a:off x="6440426" y="3429000"/>
+            <a:ext cx="2868166" cy="1033272"/>
+          </a:xfrm>
+          <a:prstGeom prst="ellipse">
+            <a:avLst/>
+          </a:prstGeom>
+        </p:spPr>
+        <p:style>
+          <a:lnRef idx="2">
+            <a:schemeClr val="accent1">
+              <a:shade val="15000"/>
+            </a:schemeClr>
+          </a:lnRef>
+          <a:fillRef idx="1">
+            <a:schemeClr val="accent1"/>
+          </a:fillRef>
+          <a:effectRef idx="0">
+            <a:schemeClr val="accent1"/>
+          </a:effectRef>
+          <a:fontRef idx="minor">
+            <a:schemeClr val="lt1"/>
+          </a:fontRef>
+        </p:style>
+        <p:txBody>
+          <a:bodyPr rtlCol="0" anchor="ctr"/>
+          <a:lstStyle/>
+          <a:p>
+            <a:pPr algn="ctr"/>
+            <a:r>
+              <a:rPr lang="en-US" sz="2400" dirty="0"/>
+              <a:t>Course</a:t>
+            </a:r>
+          </a:p>
+        </p:txBody>
+      </p:sp>
+      <p:sp>
+        <p:nvSpPr>
+          <p:cNvPr id="21" name="Arrow: Right 20">
+            <a:extLst>
+              <a:ext uri="{FF2B5EF4-FFF2-40B4-BE49-F238E27FC236}">
+                <a16:creationId xmlns:a16="http://schemas.microsoft.com/office/drawing/2014/main" id="{E499FEC1-708E-E774-5B7F-69C872D0C6F6}"/>
+              </a:ext>
+            </a:extLst>
+          </p:cNvPr>
+          <p:cNvSpPr/>
+          <p:nvPr/>
+        </p:nvSpPr>
+        <p:spPr>
+          <a:xfrm>
+            <a:off x="3931920" y="3679513"/>
+            <a:ext cx="1819656" cy="475488"/>
+          </a:xfrm>
+          <a:prstGeom prst="rightArrow">
+            <a:avLst/>
+          </a:prstGeom>
+        </p:spPr>
+        <p:style>
+          <a:lnRef idx="2">
+            <a:schemeClr val="accent1">
+              <a:shade val="15000"/>
+            </a:schemeClr>
+          </a:lnRef>
+          <a:fillRef idx="1">
+            <a:schemeClr val="accent1"/>
+          </a:fillRef>
+          <a:effectRef idx="0">
+            <a:schemeClr val="accent1"/>
+          </a:effectRef>
+          <a:fontRef idx="minor">
+            <a:schemeClr val="lt1"/>
+          </a:fontRef>
+        </p:style>
+        <p:txBody>
+          <a:bodyPr rtlCol="0" anchor="ctr"/>
+          <a:lstStyle/>
+          <a:p>
+            <a:pPr algn="ctr"/>
+            <a:endParaRPr lang="en-US"/>
+          </a:p>
+        </p:txBody>
+      </p:sp>
+      <p:sp>
+        <p:nvSpPr>
+          <p:cNvPr id="23" name="TextBox 22">
+            <a:extLst>
+              <a:ext uri="{FF2B5EF4-FFF2-40B4-BE49-F238E27FC236}">
+                <a16:creationId xmlns:a16="http://schemas.microsoft.com/office/drawing/2014/main" id="{664CFDA6-1860-A432-E2F3-E3700DD74B61}"/>
+              </a:ext>
+            </a:extLst>
+          </p:cNvPr>
+          <p:cNvSpPr txBox="1"/>
+          <p:nvPr/>
+        </p:nvSpPr>
+        <p:spPr>
+          <a:xfrm>
+            <a:off x="4012312" y="3217848"/>
+            <a:ext cx="1817370" cy="461665"/>
+          </a:xfrm>
+          <a:prstGeom prst="rect">
+            <a:avLst/>
+          </a:prstGeom>
+          <a:noFill/>
+        </p:spPr>
+        <p:txBody>
+          <a:bodyPr wrap="square">
+            <a:spAutoFit/>
+          </a:bodyPr>
+          <a:lstStyle/>
+          <a:p>
+            <a:pPr algn="ctr"/>
+            <a:r>
+              <a:rPr lang="en-US" sz="2400" b="1" dirty="0">
+                <a:solidFill>
+                  <a:schemeClr val="accent6">
+                    <a:lumMod val="60000"/>
+                    <a:lumOff val="40000"/>
+                  </a:schemeClr>
+                </a:solidFill>
+                <a:highlight>
+                  <a:srgbClr val="800000"/>
+                </a:highlight>
+              </a:rPr>
+              <a:t>TEACHES</a:t>
+            </a:r>
+          </a:p>
+        </p:txBody>
+      </p:sp>
+      <p:sp>
+        <p:nvSpPr>
+          <p:cNvPr id="27" name="Arrow: Right 26">
+            <a:extLst>
+              <a:ext uri="{FF2B5EF4-FFF2-40B4-BE49-F238E27FC236}">
+                <a16:creationId xmlns:a16="http://schemas.microsoft.com/office/drawing/2014/main" id="{99CC68BD-7F9C-1E39-97BC-B2D86A5002AF}"/>
+              </a:ext>
+            </a:extLst>
+          </p:cNvPr>
+          <p:cNvSpPr/>
+          <p:nvPr/>
+        </p:nvSpPr>
+        <p:spPr>
+          <a:xfrm rot="1414725">
+            <a:off x="3539774" y="4849335"/>
+            <a:ext cx="3035772" cy="475488"/>
+          </a:xfrm>
+          <a:prstGeom prst="rightArrow">
+            <a:avLst/>
+          </a:prstGeom>
+        </p:spPr>
+        <p:style>
+          <a:lnRef idx="2">
+            <a:schemeClr val="accent1">
+              <a:shade val="15000"/>
+            </a:schemeClr>
+          </a:lnRef>
+          <a:fillRef idx="1">
+            <a:schemeClr val="accent1"/>
+          </a:fillRef>
+          <a:effectRef idx="0">
+            <a:schemeClr val="accent1"/>
+          </a:effectRef>
+          <a:fontRef idx="minor">
+            <a:schemeClr val="lt1"/>
+          </a:fontRef>
+        </p:style>
+        <p:txBody>
+          <a:bodyPr rtlCol="0" anchor="ctr"/>
+          <a:lstStyle/>
+          <a:p>
+            <a:pPr algn="ctr"/>
+            <a:endParaRPr lang="en-US"/>
+          </a:p>
+        </p:txBody>
+      </p:sp>
+      <p:sp>
+        <p:nvSpPr>
+          <p:cNvPr id="29" name="TextBox 28">
+            <a:extLst>
+              <a:ext uri="{FF2B5EF4-FFF2-40B4-BE49-F238E27FC236}">
+                <a16:creationId xmlns:a16="http://schemas.microsoft.com/office/drawing/2014/main" id="{C150A6F2-F838-B06E-D636-EE3D88AD9920}"/>
+              </a:ext>
+            </a:extLst>
+          </p:cNvPr>
+          <p:cNvSpPr txBox="1"/>
+          <p:nvPr/>
+        </p:nvSpPr>
+        <p:spPr>
+          <a:xfrm>
+            <a:off x="3931920" y="5450478"/>
+            <a:ext cx="1813941" cy="461665"/>
+          </a:xfrm>
+          <a:prstGeom prst="rect">
+            <a:avLst/>
+          </a:prstGeom>
+          <a:noFill/>
+        </p:spPr>
+        <p:txBody>
+          <a:bodyPr wrap="square">
+            <a:spAutoFit/>
+          </a:bodyPr>
+          <a:lstStyle/>
+          <a:p>
+            <a:pPr algn="ctr"/>
+            <a:r>
+              <a:rPr lang="en-US" sz="2400" b="1" dirty="0">
+                <a:solidFill>
+                  <a:schemeClr val="accent6">
+                    <a:lumMod val="60000"/>
+                    <a:lumOff val="40000"/>
+                  </a:schemeClr>
+                </a:solidFill>
+                <a:highlight>
+                  <a:srgbClr val="800000"/>
+                </a:highlight>
+              </a:rPr>
+              <a:t>LIVES_IN</a:t>
+            </a:r>
+          </a:p>
+        </p:txBody>
+      </p:sp>
+      <p:sp>
+        <p:nvSpPr>
+          <p:cNvPr id="3" name="Oval 2">
+            <a:extLst>
+              <a:ext uri="{FF2B5EF4-FFF2-40B4-BE49-F238E27FC236}">
+                <a16:creationId xmlns:a16="http://schemas.microsoft.com/office/drawing/2014/main" id="{825D7BD3-0085-5E13-F4C3-CB7C51A564C2}"/>
+              </a:ext>
+            </a:extLst>
+          </p:cNvPr>
+          <p:cNvSpPr/>
+          <p:nvPr/>
+        </p:nvSpPr>
+        <p:spPr>
+          <a:xfrm>
+            <a:off x="6821424" y="5212080"/>
+            <a:ext cx="3474720" cy="1161824"/>
+          </a:xfrm>
+          <a:prstGeom prst="ellipse">
+            <a:avLst/>
+          </a:prstGeom>
+        </p:spPr>
+        <p:style>
+          <a:lnRef idx="2">
+            <a:schemeClr val="accent1">
+              <a:shade val="15000"/>
+            </a:schemeClr>
+          </a:lnRef>
+          <a:fillRef idx="1">
+            <a:schemeClr val="accent1"/>
+          </a:fillRef>
+          <a:effectRef idx="0">
+            <a:schemeClr val="accent1"/>
+          </a:effectRef>
+          <a:fontRef idx="minor">
+            <a:schemeClr val="lt1"/>
+          </a:fontRef>
+        </p:style>
+        <p:txBody>
+          <a:bodyPr rtlCol="0" anchor="ctr"/>
+          <a:lstStyle/>
+          <a:p>
+            <a:pPr algn="ctr"/>
+            <a:r>
+              <a:rPr lang="en-US" sz="2400" dirty="0"/>
+              <a:t>Delhi</a:t>
+            </a:r>
+          </a:p>
+        </p:txBody>
+      </p:sp>
+    </p:spTree>
+    <p:extLst>
+      <p:ext uri="{BB962C8B-B14F-4D97-AF65-F5344CB8AC3E}">
+        <p14:creationId xmlns:p14="http://schemas.microsoft.com/office/powerpoint/2010/main" val="2009317395"/>
+      </p:ext>
+    </p:extLst>
+  </p:cSld>
+  <p:clrMapOvr>
+    <a:masterClrMapping/>
+  </p:clrMapOvr>
+</p:sld>
+</file>
+
+<file path=ppt/slides/slide11.xml><?xml version="1.0" encoding="utf-8"?>
+<p:sld xmlns:a="http://schemas.openxmlformats.org/drawingml/2006/main" xmlns:r="http://schemas.openxmlformats.org/officeDocument/2006/relationships" xmlns:p="http://schemas.openxmlformats.org/presentationml/2006/main">
+  <p:cSld>
+    <p:spTree>
+      <p:nvGrpSpPr>
+        <p:cNvPr id="1" name="">
+          <a:extLst>
+            <a:ext uri="{FF2B5EF4-FFF2-40B4-BE49-F238E27FC236}">
+              <a16:creationId xmlns:a16="http://schemas.microsoft.com/office/drawing/2014/main" id="{7CDCAD47-E728-E3B5-F9E6-5BD10351860A}"/>
+            </a:ext>
+          </a:extLst>
+        </p:cNvPr>
+        <p:cNvGrpSpPr/>
+        <p:nvPr/>
+      </p:nvGrpSpPr>
+      <p:grpSpPr>
+        <a:xfrm>
+          <a:off x="0" y="0"/>
+          <a:ext cx="0" cy="0"/>
+          <a:chOff x="0" y="0"/>
+          <a:chExt cx="0" cy="0"/>
+        </a:xfrm>
+      </p:grpSpPr>
+      <p:sp>
+        <p:nvSpPr>
+          <p:cNvPr id="7" name="TextBox 6">
+            <a:extLst>
+              <a:ext uri="{FF2B5EF4-FFF2-40B4-BE49-F238E27FC236}">
+                <a16:creationId xmlns:a16="http://schemas.microsoft.com/office/drawing/2014/main" id="{23AD63E1-85D4-E65E-544E-D370AE6D9C80}"/>
+              </a:ext>
+            </a:extLst>
+          </p:cNvPr>
+          <p:cNvSpPr txBox="1"/>
+          <p:nvPr/>
+        </p:nvSpPr>
+        <p:spPr>
+          <a:xfrm>
+            <a:off x="192024" y="331184"/>
+            <a:ext cx="8362188" cy="2677656"/>
+          </a:xfrm>
+          <a:prstGeom prst="rect">
+            <a:avLst/>
+          </a:prstGeom>
+          <a:noFill/>
+        </p:spPr>
+        <p:txBody>
+          <a:bodyPr wrap="square">
+            <a:spAutoFit/>
+          </a:bodyPr>
+          <a:lstStyle/>
+          <a:p>
+            <a:r>
+              <a:rPr lang="en-US" sz="2400" b="1" dirty="0">
+                <a:solidFill>
+                  <a:schemeClr val="accent6">
+                    <a:lumMod val="60000"/>
+                    <a:lumOff val="40000"/>
+                  </a:schemeClr>
+                </a:solidFill>
+              </a:rPr>
+              <a:t>3. Properties</a:t>
+            </a:r>
+          </a:p>
+          <a:p>
+            <a:pPr marL="342900" indent="-342900">
+              <a:buFont typeface="Arial" panose="020B0604020202020204" pitchFamily="34" charset="0"/>
+              <a:buChar char="•"/>
+            </a:pPr>
+            <a:r>
+              <a:rPr lang="en-US" sz="2400" dirty="0">
+                <a:solidFill>
+                  <a:schemeClr val="accent6">
+                    <a:lumMod val="60000"/>
+                    <a:lumOff val="40000"/>
+                  </a:schemeClr>
+                </a:solidFill>
+              </a:rPr>
+              <a:t>Additional information about nodes/relationships </a:t>
+            </a:r>
+          </a:p>
+          <a:p>
+            <a:endParaRPr lang="en-US" sz="2400" dirty="0">
+              <a:solidFill>
+                <a:schemeClr val="accent6">
+                  <a:lumMod val="60000"/>
+                  <a:lumOff val="40000"/>
+                </a:schemeClr>
+              </a:solidFill>
+            </a:endParaRPr>
+          </a:p>
+          <a:p>
+            <a:r>
+              <a:rPr lang="en-US" sz="2400" dirty="0">
+                <a:solidFill>
+                  <a:schemeClr val="accent6">
+                    <a:lumMod val="60000"/>
+                    <a:lumOff val="40000"/>
+                  </a:schemeClr>
+                </a:solidFill>
+              </a:rPr>
+              <a:t>👉 Example:</a:t>
+            </a:r>
+          </a:p>
+          <a:p>
+            <a:pPr marL="342900" indent="-342900">
+              <a:buFont typeface="Arial" panose="020B0604020202020204" pitchFamily="34" charset="0"/>
+              <a:buChar char="•"/>
+            </a:pPr>
+            <a:r>
+              <a:rPr lang="en-US" sz="2400" dirty="0">
+                <a:solidFill>
+                  <a:schemeClr val="accent6">
+                    <a:lumMod val="60000"/>
+                    <a:lumOff val="40000"/>
+                  </a:schemeClr>
+                </a:solidFill>
+              </a:rPr>
+              <a:t>Node (Ash): {age: 30, country: India} </a:t>
+            </a:r>
+          </a:p>
+          <a:p>
+            <a:pPr marL="342900" indent="-342900">
+              <a:buFont typeface="Arial" panose="020B0604020202020204" pitchFamily="34" charset="0"/>
+              <a:buChar char="•"/>
+            </a:pPr>
+            <a:r>
+              <a:rPr lang="en-US" sz="2400" dirty="0">
+                <a:solidFill>
+                  <a:schemeClr val="accent6">
+                    <a:lumMod val="60000"/>
+                    <a:lumOff val="40000"/>
+                  </a:schemeClr>
+                </a:solidFill>
+              </a:rPr>
+              <a:t>Relationship: { since: 2022 }</a:t>
+            </a:r>
+          </a:p>
+          <a:p>
+            <a:endParaRPr lang="en-US" sz="2400" b="1" dirty="0">
+              <a:solidFill>
+                <a:schemeClr val="accent6">
+                  <a:lumMod val="60000"/>
+                  <a:lumOff val="40000"/>
+                </a:schemeClr>
+              </a:solidFill>
+            </a:endParaRPr>
+          </a:p>
+        </p:txBody>
+      </p:sp>
+      <p:sp>
+        <p:nvSpPr>
+          <p:cNvPr id="3" name="Oval 2">
+            <a:extLst>
+              <a:ext uri="{FF2B5EF4-FFF2-40B4-BE49-F238E27FC236}">
+                <a16:creationId xmlns:a16="http://schemas.microsoft.com/office/drawing/2014/main" id="{12D2026F-3363-24D3-DC72-F73E81B0E9CB}"/>
+              </a:ext>
+            </a:extLst>
+          </p:cNvPr>
+          <p:cNvSpPr/>
+          <p:nvPr/>
+        </p:nvSpPr>
+        <p:spPr>
+          <a:xfrm>
+            <a:off x="722376" y="3008840"/>
+            <a:ext cx="2679192" cy="1453432"/>
+          </a:xfrm>
+          <a:prstGeom prst="ellipse">
+            <a:avLst/>
+          </a:prstGeom>
+        </p:spPr>
+        <p:style>
+          <a:lnRef idx="2">
+            <a:schemeClr val="accent1">
+              <a:shade val="15000"/>
+            </a:schemeClr>
+          </a:lnRef>
+          <a:fillRef idx="1">
+            <a:schemeClr val="accent1"/>
+          </a:fillRef>
+          <a:effectRef idx="0">
+            <a:schemeClr val="accent1"/>
+          </a:effectRef>
+          <a:fontRef idx="minor">
+            <a:schemeClr val="lt1"/>
+          </a:fontRef>
+        </p:style>
+        <p:txBody>
+          <a:bodyPr rtlCol="0" anchor="ctr"/>
+          <a:lstStyle/>
+          <a:p>
+            <a:pPr algn="ctr"/>
+            <a:r>
+              <a:rPr lang="en-US" sz="2400" dirty="0"/>
+              <a:t>Ash</a:t>
+            </a:r>
+          </a:p>
+          <a:p>
+            <a:pPr algn="ctr"/>
+            <a:r>
+              <a:rPr lang="en-US" sz="2400" dirty="0">
+                <a:solidFill>
+                  <a:schemeClr val="accent6">
+                    <a:lumMod val="60000"/>
+                    <a:lumOff val="40000"/>
+                  </a:schemeClr>
+                </a:solidFill>
+              </a:rPr>
+              <a:t>{age: 30,</a:t>
+            </a:r>
+          </a:p>
+          <a:p>
+            <a:pPr algn="ctr"/>
+            <a:r>
+              <a:rPr lang="en-US" sz="2400" dirty="0">
+                <a:solidFill>
+                  <a:schemeClr val="accent6">
+                    <a:lumMod val="60000"/>
+                    <a:lumOff val="40000"/>
+                  </a:schemeClr>
+                </a:solidFill>
+              </a:rPr>
+              <a:t> role: Trainer}</a:t>
+            </a:r>
+            <a:endParaRPr lang="en-US" sz="2400" dirty="0"/>
+          </a:p>
+        </p:txBody>
+      </p:sp>
+      <p:sp>
+        <p:nvSpPr>
+          <p:cNvPr id="5" name="Oval 4">
+            <a:extLst>
+              <a:ext uri="{FF2B5EF4-FFF2-40B4-BE49-F238E27FC236}">
+                <a16:creationId xmlns:a16="http://schemas.microsoft.com/office/drawing/2014/main" id="{276705A4-DC33-38B1-D4D8-EA0263F66F91}"/>
+              </a:ext>
+            </a:extLst>
+          </p:cNvPr>
+          <p:cNvSpPr/>
+          <p:nvPr/>
+        </p:nvSpPr>
+        <p:spPr>
+          <a:xfrm>
+            <a:off x="6543920" y="3222498"/>
+            <a:ext cx="2868166" cy="1344822"/>
+          </a:xfrm>
+          <a:prstGeom prst="ellipse">
+            <a:avLst/>
+          </a:prstGeom>
+        </p:spPr>
+        <p:style>
+          <a:lnRef idx="2">
+            <a:schemeClr val="accent1">
+              <a:shade val="15000"/>
+            </a:schemeClr>
+          </a:lnRef>
+          <a:fillRef idx="1">
+            <a:schemeClr val="accent1"/>
+          </a:fillRef>
+          <a:effectRef idx="0">
+            <a:schemeClr val="accent1"/>
+          </a:effectRef>
+          <a:fontRef idx="minor">
+            <a:schemeClr val="lt1"/>
+          </a:fontRef>
+        </p:style>
+        <p:txBody>
+          <a:bodyPr rtlCol="0" anchor="ctr"/>
+          <a:lstStyle/>
+          <a:p>
+            <a:pPr algn="ctr"/>
+            <a:r>
+              <a:rPr lang="en-US" sz="2400" dirty="0"/>
+              <a:t>Course</a:t>
+            </a:r>
+          </a:p>
+          <a:p>
+            <a:pPr algn="ctr"/>
+            <a:r>
+              <a:rPr lang="en-US" sz="2400" dirty="0">
+                <a:solidFill>
+                  <a:schemeClr val="accent6">
+                    <a:lumMod val="60000"/>
+                    <a:lumOff val="40000"/>
+                  </a:schemeClr>
+                </a:solidFill>
+              </a:rPr>
+              <a:t>{Cost: 300, Topic: Python}</a:t>
+            </a:r>
+          </a:p>
+        </p:txBody>
+      </p:sp>
+      <p:sp>
+        <p:nvSpPr>
+          <p:cNvPr id="8" name="Arrow: Right 7">
+            <a:extLst>
+              <a:ext uri="{FF2B5EF4-FFF2-40B4-BE49-F238E27FC236}">
+                <a16:creationId xmlns:a16="http://schemas.microsoft.com/office/drawing/2014/main" id="{0E79E258-756F-FF7F-AAC2-925933B79093}"/>
+              </a:ext>
+            </a:extLst>
+          </p:cNvPr>
+          <p:cNvSpPr/>
+          <p:nvPr/>
+        </p:nvSpPr>
+        <p:spPr>
+          <a:xfrm>
+            <a:off x="3827905" y="3692532"/>
+            <a:ext cx="2497269" cy="475488"/>
+          </a:xfrm>
+          <a:prstGeom prst="rightArrow">
+            <a:avLst/>
+          </a:prstGeom>
+        </p:spPr>
+        <p:style>
+          <a:lnRef idx="2">
+            <a:schemeClr val="accent1">
+              <a:shade val="15000"/>
+            </a:schemeClr>
+          </a:lnRef>
+          <a:fillRef idx="1">
+            <a:schemeClr val="accent1"/>
+          </a:fillRef>
+          <a:effectRef idx="0">
+            <a:schemeClr val="accent1"/>
+          </a:effectRef>
+          <a:fontRef idx="minor">
+            <a:schemeClr val="lt1"/>
+          </a:fontRef>
+        </p:style>
+        <p:txBody>
+          <a:bodyPr rtlCol="0" anchor="ctr"/>
+          <a:lstStyle/>
+          <a:p>
+            <a:pPr algn="ctr"/>
+            <a:endParaRPr lang="en-US"/>
+          </a:p>
+        </p:txBody>
+      </p:sp>
+      <p:sp>
+        <p:nvSpPr>
+          <p:cNvPr id="10" name="TextBox 9">
+            <a:extLst>
+              <a:ext uri="{FF2B5EF4-FFF2-40B4-BE49-F238E27FC236}">
+                <a16:creationId xmlns:a16="http://schemas.microsoft.com/office/drawing/2014/main" id="{D8255465-1211-E2AF-90D2-7DB5E0A9A353}"/>
+              </a:ext>
+            </a:extLst>
+          </p:cNvPr>
+          <p:cNvSpPr txBox="1"/>
+          <p:nvPr/>
+        </p:nvSpPr>
+        <p:spPr>
+          <a:xfrm>
+            <a:off x="4367403" y="3018164"/>
+            <a:ext cx="1817370" cy="830997"/>
+          </a:xfrm>
+          <a:prstGeom prst="rect">
+            <a:avLst/>
+          </a:prstGeom>
+          <a:noFill/>
+        </p:spPr>
+        <p:txBody>
+          <a:bodyPr wrap="square">
+            <a:spAutoFit/>
+          </a:bodyPr>
+          <a:lstStyle/>
+          <a:p>
+            <a:pPr algn="ctr"/>
+            <a:r>
+              <a:rPr lang="en-US" sz="2400" b="1" dirty="0">
+                <a:solidFill>
+                  <a:schemeClr val="accent6">
+                    <a:lumMod val="60000"/>
+                    <a:lumOff val="40000"/>
+                  </a:schemeClr>
+                </a:solidFill>
+                <a:highlight>
+                  <a:srgbClr val="800000"/>
+                </a:highlight>
+              </a:rPr>
+              <a:t>TEACHES</a:t>
+            </a:r>
+          </a:p>
+          <a:p>
+            <a:pPr algn="ctr"/>
+            <a:r>
+              <a:rPr lang="en-US" sz="2400" b="1" dirty="0">
+                <a:solidFill>
+                  <a:schemeClr val="accent6">
+                    <a:lumMod val="60000"/>
+                    <a:lumOff val="40000"/>
+                  </a:schemeClr>
+                </a:solidFill>
+                <a:highlight>
+                  <a:srgbClr val="800000"/>
+                </a:highlight>
+              </a:rPr>
+              <a:t>{since: 2005}</a:t>
+            </a:r>
+            <a:endParaRPr lang="en-US" dirty="0">
+              <a:highlight>
+                <a:srgbClr val="800000"/>
+              </a:highlight>
+            </a:endParaRPr>
+          </a:p>
+        </p:txBody>
+      </p:sp>
+      <p:sp>
+        <p:nvSpPr>
+          <p:cNvPr id="12" name="Oval 11">
+            <a:extLst>
+              <a:ext uri="{FF2B5EF4-FFF2-40B4-BE49-F238E27FC236}">
+                <a16:creationId xmlns:a16="http://schemas.microsoft.com/office/drawing/2014/main" id="{75CABCFF-49C2-15E7-E992-5BB07A246A4F}"/>
+              </a:ext>
+            </a:extLst>
+          </p:cNvPr>
+          <p:cNvSpPr/>
+          <p:nvPr/>
+        </p:nvSpPr>
+        <p:spPr>
+          <a:xfrm>
+            <a:off x="6821424" y="5212080"/>
+            <a:ext cx="3474720" cy="1161824"/>
+          </a:xfrm>
+          <a:prstGeom prst="ellipse">
+            <a:avLst/>
+          </a:prstGeom>
+        </p:spPr>
+        <p:style>
+          <a:lnRef idx="2">
+            <a:schemeClr val="accent1">
+              <a:shade val="15000"/>
+            </a:schemeClr>
+          </a:lnRef>
+          <a:fillRef idx="1">
+            <a:schemeClr val="accent1"/>
+          </a:fillRef>
+          <a:effectRef idx="0">
+            <a:schemeClr val="accent1"/>
+          </a:effectRef>
+          <a:fontRef idx="minor">
+            <a:schemeClr val="lt1"/>
+          </a:fontRef>
+        </p:style>
+        <p:txBody>
+          <a:bodyPr rtlCol="0" anchor="ctr"/>
+          <a:lstStyle/>
+          <a:p>
+            <a:pPr algn="ctr"/>
+            <a:r>
+              <a:rPr lang="en-US" sz="2400" dirty="0"/>
+              <a:t>Delhi</a:t>
+            </a:r>
+          </a:p>
+          <a:p>
+            <a:pPr algn="ctr"/>
+            <a:r>
+              <a:rPr lang="en-US" sz="2400" dirty="0">
+                <a:solidFill>
+                  <a:schemeClr val="accent6">
+                    <a:lumMod val="60000"/>
+                    <a:lumOff val="40000"/>
+                  </a:schemeClr>
+                </a:solidFill>
+              </a:rPr>
+              <a:t>{population: 2M}</a:t>
+            </a:r>
+          </a:p>
+        </p:txBody>
+      </p:sp>
+      <p:sp>
+        <p:nvSpPr>
+          <p:cNvPr id="14" name="Arrow: Right 13">
+            <a:extLst>
+              <a:ext uri="{FF2B5EF4-FFF2-40B4-BE49-F238E27FC236}">
+                <a16:creationId xmlns:a16="http://schemas.microsoft.com/office/drawing/2014/main" id="{BF24E424-0AE1-17D5-BDF7-DE165A4294A1}"/>
+              </a:ext>
+            </a:extLst>
+          </p:cNvPr>
+          <p:cNvSpPr/>
+          <p:nvPr/>
+        </p:nvSpPr>
+        <p:spPr>
+          <a:xfrm rot="1181174">
+            <a:off x="3612954" y="4871794"/>
+            <a:ext cx="2992327" cy="475488"/>
+          </a:xfrm>
+          <a:prstGeom prst="rightArrow">
+            <a:avLst/>
+          </a:prstGeom>
+        </p:spPr>
+        <p:style>
+          <a:lnRef idx="2">
+            <a:schemeClr val="accent1">
+              <a:shade val="15000"/>
+            </a:schemeClr>
+          </a:lnRef>
+          <a:fillRef idx="1">
+            <a:schemeClr val="accent1"/>
+          </a:fillRef>
+          <a:effectRef idx="0">
+            <a:schemeClr val="accent1"/>
+          </a:effectRef>
+          <a:fontRef idx="minor">
+            <a:schemeClr val="lt1"/>
+          </a:fontRef>
+        </p:style>
+        <p:txBody>
+          <a:bodyPr rtlCol="0" anchor="ctr"/>
+          <a:lstStyle/>
+          <a:p>
+            <a:pPr algn="ctr"/>
+            <a:endParaRPr lang="en-US"/>
+          </a:p>
+        </p:txBody>
+      </p:sp>
+      <p:sp>
+        <p:nvSpPr>
+          <p:cNvPr id="16" name="TextBox 15">
+            <a:extLst>
+              <a:ext uri="{FF2B5EF4-FFF2-40B4-BE49-F238E27FC236}">
+                <a16:creationId xmlns:a16="http://schemas.microsoft.com/office/drawing/2014/main" id="{1FD0E11D-84A8-933E-D5D3-E3DC93DB236E}"/>
+              </a:ext>
+            </a:extLst>
+          </p:cNvPr>
+          <p:cNvSpPr txBox="1"/>
+          <p:nvPr/>
+        </p:nvSpPr>
+        <p:spPr>
+          <a:xfrm>
+            <a:off x="4120514" y="5713481"/>
+            <a:ext cx="1813941" cy="830997"/>
+          </a:xfrm>
+          <a:prstGeom prst="rect">
+            <a:avLst/>
+          </a:prstGeom>
+          <a:noFill/>
+        </p:spPr>
+        <p:txBody>
+          <a:bodyPr wrap="square">
+            <a:spAutoFit/>
+          </a:bodyPr>
+          <a:lstStyle/>
+          <a:p>
+            <a:pPr algn="ctr"/>
+            <a:r>
+              <a:rPr lang="en-US" sz="2400" b="1" dirty="0">
+                <a:solidFill>
+                  <a:schemeClr val="accent6">
+                    <a:lumMod val="60000"/>
+                    <a:lumOff val="40000"/>
+                  </a:schemeClr>
+                </a:solidFill>
+                <a:highlight>
+                  <a:srgbClr val="800000"/>
+                </a:highlight>
+              </a:rPr>
+              <a:t>LIVES_IN</a:t>
+            </a:r>
+          </a:p>
+          <a:p>
+            <a:pPr algn="ctr"/>
+            <a:r>
+              <a:rPr lang="en-US" sz="2400" b="1" dirty="0">
+                <a:solidFill>
+                  <a:schemeClr val="accent6">
+                    <a:lumMod val="60000"/>
+                    <a:lumOff val="40000"/>
+                  </a:schemeClr>
+                </a:solidFill>
+                <a:highlight>
+                  <a:srgbClr val="800000"/>
+                </a:highlight>
+              </a:rPr>
+              <a:t>{since: 1998}</a:t>
+            </a:r>
+            <a:endParaRPr lang="en-US" dirty="0">
+              <a:highlight>
+                <a:srgbClr val="800000"/>
+              </a:highlight>
+            </a:endParaRPr>
+          </a:p>
+        </p:txBody>
+      </p:sp>
+    </p:spTree>
+    <p:extLst>
+      <p:ext uri="{BB962C8B-B14F-4D97-AF65-F5344CB8AC3E}">
+        <p14:creationId xmlns:p14="http://schemas.microsoft.com/office/powerpoint/2010/main" val="1757293067"/>
+      </p:ext>
+    </p:extLst>
+  </p:cSld>
+  <p:clrMapOvr>
+    <a:masterClrMapping/>
+  </p:clrMapOvr>
+</p:sld>
+</file>
+
+<file path=ppt/slides/slide12.xml><?xml version="1.0" encoding="utf-8"?>
+<p:sld xmlns:a="http://schemas.openxmlformats.org/drawingml/2006/main" xmlns:r="http://schemas.openxmlformats.org/officeDocument/2006/relationships" xmlns:p="http://schemas.openxmlformats.org/presentationml/2006/main">
+  <p:cSld>
+    <p:spTree>
+      <p:nvGrpSpPr>
+        <p:cNvPr id="1" name="">
+          <a:extLst>
+            <a:ext uri="{FF2B5EF4-FFF2-40B4-BE49-F238E27FC236}">
+              <a16:creationId xmlns:a16="http://schemas.microsoft.com/office/drawing/2014/main" id="{4B04D031-8990-B1BC-F83A-48A2A0F9CF6A}"/>
+            </a:ext>
+          </a:extLst>
+        </p:cNvPr>
+        <p:cNvGrpSpPr/>
+        <p:nvPr/>
+      </p:nvGrpSpPr>
+      <p:grpSpPr>
+        <a:xfrm>
+          <a:off x="0" y="0"/>
+          <a:ext cx="0" cy="0"/>
+          <a:chOff x="0" y="0"/>
+          <a:chExt cx="0" cy="0"/>
+        </a:xfrm>
+      </p:grpSpPr>
+      <p:sp>
+        <p:nvSpPr>
+          <p:cNvPr id="7" name="TextBox 6">
+            <a:extLst>
+              <a:ext uri="{FF2B5EF4-FFF2-40B4-BE49-F238E27FC236}">
+                <a16:creationId xmlns:a16="http://schemas.microsoft.com/office/drawing/2014/main" id="{8228D394-F464-2836-2C33-38A70D0A243A}"/>
+              </a:ext>
+            </a:extLst>
+          </p:cNvPr>
+          <p:cNvSpPr txBox="1"/>
+          <p:nvPr/>
+        </p:nvSpPr>
+        <p:spPr>
+          <a:xfrm>
+            <a:off x="192024" y="271570"/>
+            <a:ext cx="5660136" cy="5632311"/>
+          </a:xfrm>
+          <a:prstGeom prst="rect">
+            <a:avLst/>
+          </a:prstGeom>
+          <a:noFill/>
+        </p:spPr>
+        <p:txBody>
+          <a:bodyPr wrap="square">
+            <a:spAutoFit/>
+          </a:bodyPr>
+          <a:lstStyle/>
+          <a:p>
+            <a:r>
+              <a:rPr lang="en-US" sz="2400" b="1" dirty="0">
+                <a:solidFill>
+                  <a:schemeClr val="accent6">
+                    <a:lumMod val="60000"/>
+                    <a:lumOff val="40000"/>
+                  </a:schemeClr>
+                </a:solidFill>
+              </a:rPr>
+              <a:t>Query example:</a:t>
+            </a:r>
+          </a:p>
+          <a:p>
+            <a:endParaRPr lang="en-US" sz="2400" b="1" dirty="0">
+              <a:solidFill>
+                <a:schemeClr val="accent6">
+                  <a:lumMod val="60000"/>
+                  <a:lumOff val="40000"/>
+                </a:schemeClr>
+              </a:solidFill>
+            </a:endParaRPr>
+          </a:p>
+          <a:p>
+            <a:r>
+              <a:rPr lang="en-US" sz="2400" b="1" dirty="0">
+                <a:solidFill>
+                  <a:schemeClr val="accent6">
+                    <a:lumMod val="60000"/>
+                    <a:lumOff val="40000"/>
+                  </a:schemeClr>
+                </a:solidFill>
+              </a:rPr>
+              <a:t>Social Network + Content Graph</a:t>
+            </a:r>
+          </a:p>
+          <a:p>
+            <a:endParaRPr lang="en-US" sz="2400" b="1" dirty="0">
+              <a:solidFill>
+                <a:schemeClr val="accent6">
+                  <a:lumMod val="60000"/>
+                  <a:lumOff val="40000"/>
+                </a:schemeClr>
+              </a:solidFill>
+            </a:endParaRPr>
+          </a:p>
+          <a:p>
+            <a:r>
+              <a:rPr lang="en-US" sz="2400" dirty="0">
+                <a:solidFill>
+                  <a:schemeClr val="accent6">
+                    <a:lumMod val="60000"/>
+                    <a:lumOff val="40000"/>
+                  </a:schemeClr>
+                </a:solidFill>
+              </a:rPr>
+              <a:t>Ash lives in Delhi and follows both Ravi and Neha. Ash created Post1, which is about AI, and likes Post2. Ravi lives in Tokyo, follows Neha, and created Post2. Post2 is about Travel. Meanwhile, Neha likes Post1.</a:t>
+            </a:r>
+          </a:p>
+          <a:p>
+            <a:endParaRPr lang="en-US" sz="2400" dirty="0">
+              <a:solidFill>
+                <a:schemeClr val="accent6">
+                  <a:lumMod val="60000"/>
+                  <a:lumOff val="40000"/>
+                </a:schemeClr>
+              </a:solidFill>
+            </a:endParaRPr>
+          </a:p>
+          <a:p>
+            <a:r>
+              <a:rPr lang="en-US" sz="2400" b="1" dirty="0">
+                <a:solidFill>
+                  <a:schemeClr val="accent6">
+                    <a:lumMod val="60000"/>
+                    <a:lumOff val="40000"/>
+                  </a:schemeClr>
+                </a:solidFill>
+              </a:rPr>
+              <a:t>Nodes:</a:t>
+            </a:r>
+          </a:p>
+          <a:p>
+            <a:r>
+              <a:rPr lang="en-US" sz="2400" dirty="0">
+                <a:solidFill>
+                  <a:schemeClr val="accent6">
+                    <a:lumMod val="60000"/>
+                    <a:lumOff val="40000"/>
+                  </a:schemeClr>
+                </a:solidFill>
+              </a:rPr>
+              <a:t>Person: Ash, Ravi, Neha </a:t>
+            </a:r>
+          </a:p>
+          <a:p>
+            <a:r>
+              <a:rPr lang="en-US" sz="2400" dirty="0">
+                <a:solidFill>
+                  <a:schemeClr val="accent6">
+                    <a:lumMod val="60000"/>
+                    <a:lumOff val="40000"/>
+                  </a:schemeClr>
+                </a:solidFill>
+              </a:rPr>
+              <a:t>Post: Post1, Post2 </a:t>
+            </a:r>
+          </a:p>
+          <a:p>
+            <a:r>
+              <a:rPr lang="en-US" sz="2400" dirty="0">
+                <a:solidFill>
+                  <a:schemeClr val="accent6">
+                    <a:lumMod val="60000"/>
+                    <a:lumOff val="40000"/>
+                  </a:schemeClr>
+                </a:solidFill>
+              </a:rPr>
+              <a:t>City: Delhi, Tokyo</a:t>
+            </a:r>
+          </a:p>
+          <a:p>
+            <a:r>
+              <a:rPr lang="en-US" sz="2400" dirty="0">
+                <a:solidFill>
+                  <a:schemeClr val="accent6">
+                    <a:lumMod val="60000"/>
+                    <a:lumOff val="40000"/>
+                  </a:schemeClr>
+                </a:solidFill>
+              </a:rPr>
+              <a:t>Topic: AI, Travel</a:t>
+            </a:r>
+          </a:p>
+        </p:txBody>
+      </p:sp>
+      <p:sp>
+        <p:nvSpPr>
+          <p:cNvPr id="5" name="TextBox 4">
+            <a:extLst>
+              <a:ext uri="{FF2B5EF4-FFF2-40B4-BE49-F238E27FC236}">
+                <a16:creationId xmlns:a16="http://schemas.microsoft.com/office/drawing/2014/main" id="{EE797C98-9965-ED3F-9993-7389712A5CC3}"/>
+              </a:ext>
+            </a:extLst>
+          </p:cNvPr>
+          <p:cNvSpPr txBox="1"/>
+          <p:nvPr/>
+        </p:nvSpPr>
+        <p:spPr>
+          <a:xfrm>
+            <a:off x="192024" y="5903881"/>
+            <a:ext cx="6190488" cy="830997"/>
+          </a:xfrm>
+          <a:prstGeom prst="rect">
+            <a:avLst/>
+          </a:prstGeom>
+          <a:noFill/>
+        </p:spPr>
+        <p:txBody>
+          <a:bodyPr wrap="square">
+            <a:spAutoFit/>
+          </a:bodyPr>
+          <a:lstStyle/>
+          <a:p>
+            <a:r>
+              <a:rPr lang="en-US" sz="2400" dirty="0">
+                <a:solidFill>
+                  <a:schemeClr val="accent6">
+                    <a:lumMod val="60000"/>
+                    <a:lumOff val="40000"/>
+                  </a:schemeClr>
+                </a:solidFill>
+              </a:rPr>
+              <a:t>Suppose you want to answer following: </a:t>
+            </a:r>
+          </a:p>
+          <a:p>
+            <a:r>
+              <a:rPr lang="en-US" sz="2400" dirty="0">
+                <a:solidFill>
+                  <a:schemeClr val="accent6">
+                    <a:lumMod val="60000"/>
+                    <a:lumOff val="40000"/>
+                  </a:schemeClr>
+                </a:solidFill>
+              </a:rPr>
+              <a:t> Find topics liked by people Ash follows ?</a:t>
+            </a:r>
+          </a:p>
+        </p:txBody>
+      </p:sp>
+      <p:sp>
+        <p:nvSpPr>
+          <p:cNvPr id="4" name="TextBox 3">
+            <a:extLst>
+              <a:ext uri="{FF2B5EF4-FFF2-40B4-BE49-F238E27FC236}">
+                <a16:creationId xmlns:a16="http://schemas.microsoft.com/office/drawing/2014/main" id="{DAC2F19D-BA93-FAE5-FC1E-CCDE6E508696}"/>
+              </a:ext>
+            </a:extLst>
+          </p:cNvPr>
+          <p:cNvSpPr txBox="1"/>
+          <p:nvPr/>
+        </p:nvSpPr>
+        <p:spPr>
+          <a:xfrm>
+            <a:off x="7379208" y="887123"/>
+            <a:ext cx="4901184" cy="5016758"/>
+          </a:xfrm>
+          <a:prstGeom prst="rect">
+            <a:avLst/>
+          </a:prstGeom>
+          <a:noFill/>
+        </p:spPr>
+        <p:txBody>
+          <a:bodyPr wrap="square">
+            <a:spAutoFit/>
+          </a:bodyPr>
+          <a:lstStyle/>
+          <a:p>
+            <a:pPr>
+              <a:buNone/>
+            </a:pPr>
+            <a:r>
+              <a:rPr lang="en-US" sz="2000" b="1" dirty="0">
+                <a:solidFill>
+                  <a:schemeClr val="accent6">
+                    <a:lumMod val="60000"/>
+                    <a:lumOff val="40000"/>
+                  </a:schemeClr>
+                </a:solidFill>
+              </a:rPr>
+              <a:t>Relationships:</a:t>
+            </a:r>
+          </a:p>
+          <a:p>
+            <a:pPr rtl="0">
+              <a:buNone/>
+            </a:pPr>
+            <a:r>
+              <a:rPr lang="en-US" sz="2000" dirty="0">
+                <a:solidFill>
+                  <a:schemeClr val="accent6">
+                    <a:lumMod val="60000"/>
+                    <a:lumOff val="40000"/>
+                  </a:schemeClr>
+                </a:solidFill>
+                <a:latin typeface="Courier New" panose="02070309020205020404" pitchFamily="49" charset="0"/>
+              </a:rPr>
+              <a:t>(Ash) ---FOLLOWS---&gt; (Ravi)</a:t>
+            </a:r>
+          </a:p>
+          <a:p>
+            <a:pPr rtl="0">
+              <a:buNone/>
+            </a:pPr>
+            <a:r>
+              <a:rPr lang="en-US" sz="2000" dirty="0">
+                <a:solidFill>
+                  <a:schemeClr val="accent6">
+                    <a:lumMod val="60000"/>
+                    <a:lumOff val="40000"/>
+                  </a:schemeClr>
+                </a:solidFill>
+                <a:latin typeface="Courier New" panose="02070309020205020404" pitchFamily="49" charset="0"/>
+              </a:rPr>
+              <a:t>(Ash) ---FOLLOWS---&gt; (Neha)</a:t>
+            </a:r>
+          </a:p>
+          <a:p>
+            <a:pPr rtl="0">
+              <a:buNone/>
+            </a:pPr>
+            <a:r>
+              <a:rPr lang="en-US" sz="2000" dirty="0">
+                <a:solidFill>
+                  <a:schemeClr val="accent6">
+                    <a:lumMod val="60000"/>
+                    <a:lumOff val="40000"/>
+                  </a:schemeClr>
+                </a:solidFill>
+                <a:latin typeface="Courier New" panose="02070309020205020404" pitchFamily="49" charset="0"/>
+              </a:rPr>
+              <a:t>(Ravi) ---FOLLOWS---&gt; (Neha)</a:t>
+            </a:r>
+          </a:p>
+          <a:p>
+            <a:pPr rtl="0">
+              <a:buNone/>
+            </a:pPr>
+            <a:endParaRPr lang="en-US" sz="2000" dirty="0">
+              <a:solidFill>
+                <a:schemeClr val="accent6">
+                  <a:lumMod val="60000"/>
+                  <a:lumOff val="40000"/>
+                </a:schemeClr>
+              </a:solidFill>
+              <a:latin typeface="Courier New" panose="02070309020205020404" pitchFamily="49" charset="0"/>
+            </a:endParaRPr>
+          </a:p>
+          <a:p>
+            <a:pPr rtl="0">
+              <a:buNone/>
+            </a:pPr>
+            <a:r>
+              <a:rPr lang="en-US" sz="2000" dirty="0">
+                <a:solidFill>
+                  <a:schemeClr val="accent6">
+                    <a:lumMod val="60000"/>
+                    <a:lumOff val="40000"/>
+                  </a:schemeClr>
+                </a:solidFill>
+                <a:latin typeface="Courier New" panose="02070309020205020404" pitchFamily="49" charset="0"/>
+              </a:rPr>
+              <a:t>(Ash) ---CREATED---&gt; (Post1)</a:t>
+            </a:r>
+          </a:p>
+          <a:p>
+            <a:pPr rtl="0">
+              <a:buNone/>
+            </a:pPr>
+            <a:r>
+              <a:rPr lang="en-US" sz="2000" dirty="0">
+                <a:solidFill>
+                  <a:schemeClr val="accent6">
+                    <a:lumMod val="60000"/>
+                    <a:lumOff val="40000"/>
+                  </a:schemeClr>
+                </a:solidFill>
+                <a:latin typeface="Courier New" panose="02070309020205020404" pitchFamily="49" charset="0"/>
+              </a:rPr>
+              <a:t>(Ravi) ---CREATED---&gt; (Post2)</a:t>
+            </a:r>
+          </a:p>
+          <a:p>
+            <a:pPr rtl="0">
+              <a:buNone/>
+            </a:pPr>
+            <a:endParaRPr lang="en-US" sz="2000" dirty="0">
+              <a:solidFill>
+                <a:schemeClr val="accent6">
+                  <a:lumMod val="60000"/>
+                  <a:lumOff val="40000"/>
+                </a:schemeClr>
+              </a:solidFill>
+              <a:latin typeface="Courier New" panose="02070309020205020404" pitchFamily="49" charset="0"/>
+            </a:endParaRPr>
+          </a:p>
+          <a:p>
+            <a:pPr rtl="0">
+              <a:buNone/>
+            </a:pPr>
+            <a:r>
+              <a:rPr lang="en-US" sz="2000" dirty="0">
+                <a:solidFill>
+                  <a:schemeClr val="accent6">
+                    <a:lumMod val="60000"/>
+                    <a:lumOff val="40000"/>
+                  </a:schemeClr>
+                </a:solidFill>
+                <a:latin typeface="Courier New" panose="02070309020205020404" pitchFamily="49" charset="0"/>
+              </a:rPr>
+              <a:t>(Post1) ---ABOUT---&gt; (AI)</a:t>
+            </a:r>
+          </a:p>
+          <a:p>
+            <a:pPr rtl="0">
+              <a:buNone/>
+            </a:pPr>
+            <a:r>
+              <a:rPr lang="en-US" sz="2000" dirty="0">
+                <a:solidFill>
+                  <a:schemeClr val="accent6">
+                    <a:lumMod val="60000"/>
+                    <a:lumOff val="40000"/>
+                  </a:schemeClr>
+                </a:solidFill>
+                <a:latin typeface="Courier New" panose="02070309020205020404" pitchFamily="49" charset="0"/>
+              </a:rPr>
+              <a:t>(Post2) ---ABOUT---&gt; (Travel)</a:t>
+            </a:r>
+          </a:p>
+          <a:p>
+            <a:pPr rtl="0">
+              <a:buNone/>
+            </a:pPr>
+            <a:endParaRPr lang="en-US" sz="2000" dirty="0">
+              <a:solidFill>
+                <a:schemeClr val="accent6">
+                  <a:lumMod val="60000"/>
+                  <a:lumOff val="40000"/>
+                </a:schemeClr>
+              </a:solidFill>
+              <a:latin typeface="Courier New" panose="02070309020205020404" pitchFamily="49" charset="0"/>
+            </a:endParaRPr>
+          </a:p>
+          <a:p>
+            <a:pPr rtl="0">
+              <a:buNone/>
+            </a:pPr>
+            <a:r>
+              <a:rPr lang="en-US" sz="2000" dirty="0">
+                <a:solidFill>
+                  <a:schemeClr val="accent6">
+                    <a:lumMod val="60000"/>
+                    <a:lumOff val="40000"/>
+                  </a:schemeClr>
+                </a:solidFill>
+                <a:latin typeface="Courier New" panose="02070309020205020404" pitchFamily="49" charset="0"/>
+              </a:rPr>
+              <a:t>(Neha) ---LIKES---&gt; (Post1)</a:t>
+            </a:r>
+          </a:p>
+          <a:p>
+            <a:pPr rtl="0">
+              <a:buNone/>
+            </a:pPr>
+            <a:r>
+              <a:rPr lang="en-US" sz="2000" dirty="0">
+                <a:solidFill>
+                  <a:schemeClr val="accent6">
+                    <a:lumMod val="60000"/>
+                    <a:lumOff val="40000"/>
+                  </a:schemeClr>
+                </a:solidFill>
+                <a:latin typeface="Courier New" panose="02070309020205020404" pitchFamily="49" charset="0"/>
+              </a:rPr>
+              <a:t>(Ash) ---LIKES---&gt; (Post2)</a:t>
+            </a:r>
+          </a:p>
+          <a:p>
+            <a:pPr rtl="0">
+              <a:buNone/>
+            </a:pPr>
+            <a:endParaRPr lang="en-US" sz="2000" dirty="0">
+              <a:solidFill>
+                <a:schemeClr val="accent6">
+                  <a:lumMod val="60000"/>
+                  <a:lumOff val="40000"/>
+                </a:schemeClr>
+              </a:solidFill>
+              <a:latin typeface="Courier New" panose="02070309020205020404" pitchFamily="49" charset="0"/>
+            </a:endParaRPr>
+          </a:p>
+          <a:p>
+            <a:pPr rtl="0">
+              <a:buNone/>
+            </a:pPr>
+            <a:r>
+              <a:rPr lang="en-US" sz="2000" dirty="0">
+                <a:solidFill>
+                  <a:schemeClr val="accent6">
+                    <a:lumMod val="60000"/>
+                    <a:lumOff val="40000"/>
+                  </a:schemeClr>
+                </a:solidFill>
+                <a:latin typeface="Courier New" panose="02070309020205020404" pitchFamily="49" charset="0"/>
+              </a:rPr>
+              <a:t>(Ash) ---LIVES_IN---&gt; (Delhi)</a:t>
+            </a:r>
+          </a:p>
+          <a:p>
+            <a:pPr rtl="0">
+              <a:buNone/>
+            </a:pPr>
+            <a:r>
+              <a:rPr lang="en-US" sz="2000" dirty="0">
+                <a:solidFill>
+                  <a:schemeClr val="accent6">
+                    <a:lumMod val="60000"/>
+                    <a:lumOff val="40000"/>
+                  </a:schemeClr>
+                </a:solidFill>
+                <a:latin typeface="Courier New" panose="02070309020205020404" pitchFamily="49" charset="0"/>
+              </a:rPr>
+              <a:t>(Ravi) ---LIVES_IN---&gt; (Tokyo)</a:t>
+            </a:r>
+          </a:p>
+        </p:txBody>
+      </p:sp>
+    </p:spTree>
+    <p:extLst>
+      <p:ext uri="{BB962C8B-B14F-4D97-AF65-F5344CB8AC3E}">
+        <p14:creationId xmlns:p14="http://schemas.microsoft.com/office/powerpoint/2010/main" val="1966452714"/>
+      </p:ext>
+    </p:extLst>
+  </p:cSld>
+  <p:clrMapOvr>
+    <a:masterClrMapping/>
+  </p:clrMapOvr>
+</p:sld>
+</file>
+
+<file path=ppt/slides/slide13.xml><?xml version="1.0" encoding="utf-8"?>
+<p:sld xmlns:a="http://schemas.openxmlformats.org/drawingml/2006/main" xmlns:r="http://schemas.openxmlformats.org/officeDocument/2006/relationships" xmlns:p="http://schemas.openxmlformats.org/presentationml/2006/main">
+  <p:cSld>
+    <p:spTree>
+      <p:nvGrpSpPr>
+        <p:cNvPr id="1" name="">
+          <a:extLst>
+            <a:ext uri="{FF2B5EF4-FFF2-40B4-BE49-F238E27FC236}">
               <a16:creationId xmlns:a16="http://schemas.microsoft.com/office/drawing/2014/main" id="{71C20EC3-D3C2-A977-B3F9-83643DBFC8D9}"/>
             </a:ext>
           </a:extLst>
@@ -4685,7 +6409,7 @@
 </p:sld>
 </file>
 
-<file path=ppt/slides/slide11.xml><?xml version="1.0" encoding="utf-8"?>
+<file path=ppt/slides/slide14.xml><?xml version="1.0" encoding="utf-8"?>
 <p:sld xmlns:a="http://schemas.openxmlformats.org/drawingml/2006/main" xmlns:r="http://schemas.openxmlformats.org/officeDocument/2006/relationships" xmlns:p="http://schemas.openxmlformats.org/presentationml/2006/main">
   <p:cSld>
     <p:spTree>
@@ -5295,7 +7019,7 @@
 </p:sld>
 </file>
 
-<file path=ppt/slides/slide12.xml><?xml version="1.0" encoding="utf-8"?>
+<file path=ppt/slides/slide15.xml><?xml version="1.0" encoding="utf-8"?>
 <p:sld xmlns:a="http://schemas.openxmlformats.org/drawingml/2006/main" xmlns:r="http://schemas.openxmlformats.org/officeDocument/2006/relationships" xmlns:p="http://schemas.openxmlformats.org/presentationml/2006/main">
   <p:cSld>
     <p:spTree>
@@ -5332,8 +7056,8 @@
         </p:nvSpPr>
         <p:spPr>
           <a:xfrm>
-            <a:off x="406908" y="5676638"/>
-            <a:ext cx="6190488" cy="830997"/>
+            <a:off x="7411212" y="1177790"/>
+            <a:ext cx="6190488" cy="1569660"/>
           </a:xfrm>
           <a:prstGeom prst="rect">
             <a:avLst/>
@@ -5355,8 +7079,18 @@
                   </a:schemeClr>
                 </a:solidFill>
               </a:rPr>
-              <a:t>Q: Find topics liked by people Ash follows ?</a:t>
-            </a:r>
+              <a:t>To view the graph: </a:t>
+            </a:r>
+          </a:p>
+          <a:p>
+            <a:endParaRPr lang="en-US" sz="2400" dirty="0">
+              <a:solidFill>
+                <a:schemeClr val="accent6">
+                  <a:lumMod val="60000"/>
+                  <a:lumOff val="40000"/>
+                </a:schemeClr>
+              </a:solidFill>
+            </a:endParaRPr>
           </a:p>
           <a:p>
             <a:r>
@@ -5368,7 +7102,20 @@
                   </a:schemeClr>
                 </a:solidFill>
               </a:rPr>
-              <a:t>Answer (Visually): AI</a:t>
+              <a:t>MATCH (source)-[r]-&gt;(target)</a:t>
+            </a:r>
+          </a:p>
+          <a:p>
+            <a:r>
+              <a:rPr lang="en-US" sz="2400" dirty="0">
+                <a:solidFill>
+                  <a:schemeClr val="accent6">
+                    <a:lumMod val="60000"/>
+                    <a:lumOff val="40000"/>
+                  </a:schemeClr>
+                </a:solidFill>
+              </a:rPr>
+              <a:t>RETURN source, r, target</a:t>
             </a:r>
           </a:p>
         </p:txBody>
@@ -5416,7 +7163,128 @@
 </p:sld>
 </file>
 
-<file path=ppt/slides/slide13.xml><?xml version="1.0" encoding="utf-8"?>
+<file path=ppt/slides/slide16.xml><?xml version="1.0" encoding="utf-8"?>
+<p:sld xmlns:a="http://schemas.openxmlformats.org/drawingml/2006/main" xmlns:r="http://schemas.openxmlformats.org/officeDocument/2006/relationships" xmlns:p="http://schemas.openxmlformats.org/presentationml/2006/main">
+  <p:cSld>
+    <p:spTree>
+      <p:nvGrpSpPr>
+        <p:cNvPr id="1" name="">
+          <a:extLst>
+            <a:ext uri="{FF2B5EF4-FFF2-40B4-BE49-F238E27FC236}">
+              <a16:creationId xmlns:a16="http://schemas.microsoft.com/office/drawing/2014/main" id="{2BFCADB8-D76A-309B-3D5F-584B63036C0E}"/>
+            </a:ext>
+          </a:extLst>
+        </p:cNvPr>
+        <p:cNvGrpSpPr/>
+        <p:nvPr/>
+      </p:nvGrpSpPr>
+      <p:grpSpPr>
+        <a:xfrm>
+          <a:off x="0" y="0"/>
+          <a:ext cx="0" cy="0"/>
+          <a:chOff x="0" y="0"/>
+          <a:chExt cx="0" cy="0"/>
+        </a:xfrm>
+      </p:grpSpPr>
+      <p:sp>
+        <p:nvSpPr>
+          <p:cNvPr id="5" name="TextBox 4">
+            <a:extLst>
+              <a:ext uri="{FF2B5EF4-FFF2-40B4-BE49-F238E27FC236}">
+                <a16:creationId xmlns:a16="http://schemas.microsoft.com/office/drawing/2014/main" id="{634CFFB0-36C1-1206-DAED-039AF27DACE8}"/>
+              </a:ext>
+            </a:extLst>
+          </p:cNvPr>
+          <p:cNvSpPr txBox="1"/>
+          <p:nvPr/>
+        </p:nvSpPr>
+        <p:spPr>
+          <a:xfrm>
+            <a:off x="406908" y="5676638"/>
+            <a:ext cx="6190488" cy="830997"/>
+          </a:xfrm>
+          <a:prstGeom prst="rect">
+            <a:avLst/>
+          </a:prstGeom>
+          <a:noFill/>
+        </p:spPr>
+        <p:txBody>
+          <a:bodyPr wrap="square">
+            <a:spAutoFit/>
+          </a:bodyPr>
+          <a:lstStyle/>
+          <a:p>
+            <a:r>
+              <a:rPr lang="en-US" sz="2400" dirty="0">
+                <a:solidFill>
+                  <a:schemeClr val="accent6">
+                    <a:lumMod val="60000"/>
+                    <a:lumOff val="40000"/>
+                  </a:schemeClr>
+                </a:solidFill>
+              </a:rPr>
+              <a:t>Q: Find topics liked by people Ash follows ?</a:t>
+            </a:r>
+          </a:p>
+          <a:p>
+            <a:r>
+              <a:rPr lang="en-US" sz="2400" dirty="0">
+                <a:solidFill>
+                  <a:schemeClr val="accent6">
+                    <a:lumMod val="60000"/>
+                    <a:lumOff val="40000"/>
+                  </a:schemeClr>
+                </a:solidFill>
+              </a:rPr>
+              <a:t>Answer (Visually): AI</a:t>
+            </a:r>
+          </a:p>
+        </p:txBody>
+      </p:sp>
+      <p:pic>
+        <p:nvPicPr>
+          <p:cNvPr id="8" name="Picture 7">
+            <a:extLst>
+              <a:ext uri="{FF2B5EF4-FFF2-40B4-BE49-F238E27FC236}">
+                <a16:creationId xmlns:a16="http://schemas.microsoft.com/office/drawing/2014/main" id="{418C0460-546D-49EE-BFA7-13395DD90BC8}"/>
+              </a:ext>
+            </a:extLst>
+          </p:cNvPr>
+          <p:cNvPicPr>
+            <a:picLocks noChangeAspect="1"/>
+          </p:cNvPicPr>
+          <p:nvPr/>
+        </p:nvPicPr>
+        <p:blipFill>
+          <a:blip r:embed="rId2"/>
+          <a:stretch>
+            <a:fillRect/>
+          </a:stretch>
+        </p:blipFill>
+        <p:spPr>
+          <a:xfrm>
+            <a:off x="86792" y="1"/>
+            <a:ext cx="7248166" cy="4654296"/>
+          </a:xfrm>
+          <a:prstGeom prst="rect">
+            <a:avLst/>
+          </a:prstGeom>
+        </p:spPr>
+      </p:pic>
+    </p:spTree>
+    <p:extLst>
+      <p:ext uri="{BB962C8B-B14F-4D97-AF65-F5344CB8AC3E}">
+        <p14:creationId xmlns:p14="http://schemas.microsoft.com/office/powerpoint/2010/main" val="3092287328"/>
+      </p:ext>
+    </p:extLst>
+  </p:cSld>
+  <p:clrMapOvr>
+    <a:masterClrMapping/>
+  </p:clrMapOvr>
+</p:sld>
+</file>
+
+<file path=ppt/slides/slide17.xml><?xml version="1.0" encoding="utf-8"?>
 <p:sld xmlns:a="http://schemas.openxmlformats.org/drawingml/2006/main" xmlns:r="http://schemas.openxmlformats.org/officeDocument/2006/relationships" xmlns:p="http://schemas.openxmlformats.org/presentationml/2006/main">
   <p:cSld>
     <p:spTree>
@@ -5707,7 +7575,7 @@
 </p:sld>
 </file>
 
-<file path=ppt/slides/slide14.xml><?xml version="1.0" encoding="utf-8"?>
+<file path=ppt/slides/slide18.xml><?xml version="1.0" encoding="utf-8"?>
 <p:sld xmlns:a="http://schemas.openxmlformats.org/drawingml/2006/main" xmlns:r="http://schemas.openxmlformats.org/officeDocument/2006/relationships" xmlns:p="http://schemas.openxmlformats.org/presentationml/2006/main">
   <p:cSld>
     <p:spTree>
@@ -5745,7 +7613,7 @@
         <p:spPr>
           <a:xfrm>
             <a:off x="137160" y="164360"/>
-            <a:ext cx="9015984" cy="3416320"/>
+            <a:ext cx="11365992" cy="3416320"/>
           </a:xfrm>
           <a:prstGeom prst="rect">
             <a:avLst/>
@@ -5881,7 +7749,7 @@
                   </a:schemeClr>
                 </a:solidFill>
               </a:rPr>
-              <a:t>p:Person</a:t>
+              <a:t>followedPerson:Person</a:t>
             </a:r>
             <a:r>
               <a:rPr lang="en-US" sz="2400" dirty="0">
@@ -5905,7 +7773,7 @@
                   </a:schemeClr>
                 </a:solidFill>
               </a:rPr>
-              <a:t>RETURN p.name AS </a:t>
+              <a:t>RETURN followedPerson.name AS </a:t>
             </a:r>
             <a:r>
               <a:rPr lang="en-US" sz="2400" dirty="0" err="1">
@@ -5916,7 +7784,7 @@
                   </a:schemeClr>
                 </a:solidFill>
               </a:rPr>
-              <a:t>FollowedPerson</a:t>
+              <a:t>FollowedUser</a:t>
             </a:r>
             <a:endParaRPr lang="en-US" sz="2400" dirty="0">
               <a:solidFill>
@@ -5995,7 +7863,7 @@
 </p:sld>
 </file>
 
-<file path=ppt/slides/slide15.xml><?xml version="1.0" encoding="utf-8"?>
+<file path=ppt/slides/slide19.xml><?xml version="1.0" encoding="utf-8"?>
 <p:sld xmlns:a="http://schemas.openxmlformats.org/drawingml/2006/main" xmlns:r="http://schemas.openxmlformats.org/officeDocument/2006/relationships" xmlns:p="http://schemas.openxmlformats.org/presentationml/2006/main">
   <p:cSld>
     <p:spTree>
@@ -6113,7 +7981,7 @@
                   </a:schemeClr>
                 </a:solidFill>
               </a:rPr>
-              <a:t>Q: what kind of post Ash likes ?</a:t>
+              <a:t>Q: What kind of post Ash likes ?</a:t>
             </a:r>
           </a:p>
           <a:p>
@@ -6286,7 +8154,213 @@
 </p:sld>
 </file>
 
-<file path=ppt/slides/slide16.xml><?xml version="1.0" encoding="utf-8"?>
+<file path=ppt/slides/slide2.xml><?xml version="1.0" encoding="utf-8"?>
+<p:sld xmlns:a="http://schemas.openxmlformats.org/drawingml/2006/main" xmlns:r="http://schemas.openxmlformats.org/officeDocument/2006/relationships" xmlns:p="http://schemas.openxmlformats.org/presentationml/2006/main">
+  <p:cSld>
+    <p:spTree>
+      <p:nvGrpSpPr>
+        <p:cNvPr id="1" name="">
+          <a:extLst>
+            <a:ext uri="{FF2B5EF4-FFF2-40B4-BE49-F238E27FC236}">
+              <a16:creationId xmlns:a16="http://schemas.microsoft.com/office/drawing/2014/main" id="{DD931D7F-4279-DA2E-FA64-6CF3C441D414}"/>
+            </a:ext>
+          </a:extLst>
+        </p:cNvPr>
+        <p:cNvGrpSpPr/>
+        <p:nvPr/>
+      </p:nvGrpSpPr>
+      <p:grpSpPr>
+        <a:xfrm>
+          <a:off x="0" y="0"/>
+          <a:ext cx="0" cy="0"/>
+          <a:chOff x="0" y="0"/>
+          <a:chExt cx="0" cy="0"/>
+        </a:xfrm>
+      </p:grpSpPr>
+      <p:sp>
+        <p:nvSpPr>
+          <p:cNvPr id="7" name="TextBox 6">
+            <a:extLst>
+              <a:ext uri="{FF2B5EF4-FFF2-40B4-BE49-F238E27FC236}">
+                <a16:creationId xmlns:a16="http://schemas.microsoft.com/office/drawing/2014/main" id="{15E1C549-05C2-509B-7E55-FC53425D92E1}"/>
+              </a:ext>
+            </a:extLst>
+          </p:cNvPr>
+          <p:cNvSpPr txBox="1"/>
+          <p:nvPr/>
+        </p:nvSpPr>
+        <p:spPr>
+          <a:xfrm>
+            <a:off x="841248" y="989552"/>
+            <a:ext cx="8362188" cy="1938992"/>
+          </a:xfrm>
+          <a:prstGeom prst="rect">
+            <a:avLst/>
+          </a:prstGeom>
+          <a:noFill/>
+        </p:spPr>
+        <p:txBody>
+          <a:bodyPr wrap="square">
+            <a:spAutoFit/>
+          </a:bodyPr>
+          <a:lstStyle/>
+          <a:p>
+            <a:pPr>
+              <a:buNone/>
+            </a:pPr>
+            <a:r>
+              <a:rPr lang="en-US" sz="2400" dirty="0">
+                <a:solidFill>
+                  <a:schemeClr val="accent6">
+                    <a:lumMod val="60000"/>
+                    <a:lumOff val="40000"/>
+                  </a:schemeClr>
+                </a:solidFill>
+              </a:rPr>
+              <a:t>A </a:t>
+            </a:r>
+            <a:r>
+              <a:rPr lang="en-US" sz="2400" b="1" dirty="0">
+                <a:solidFill>
+                  <a:schemeClr val="accent6">
+                    <a:lumMod val="60000"/>
+                    <a:lumOff val="40000"/>
+                  </a:schemeClr>
+                </a:solidFill>
+              </a:rPr>
+              <a:t>Graph Database (Graph DB)</a:t>
+            </a:r>
+            <a:r>
+              <a:rPr lang="en-US" sz="2400" dirty="0">
+                <a:solidFill>
+                  <a:schemeClr val="accent6">
+                    <a:lumMod val="60000"/>
+                    <a:lumOff val="40000"/>
+                  </a:schemeClr>
+                </a:solidFill>
+              </a:rPr>
+              <a:t> is a type of database designed to store and manage data based on </a:t>
+            </a:r>
+            <a:r>
+              <a:rPr lang="en-US" sz="2400" b="1" dirty="0">
+                <a:solidFill>
+                  <a:schemeClr val="accent6">
+                    <a:lumMod val="60000"/>
+                    <a:lumOff val="40000"/>
+                  </a:schemeClr>
+                </a:solidFill>
+              </a:rPr>
+              <a:t>relationships</a:t>
+            </a:r>
+            <a:r>
+              <a:rPr lang="en-US" sz="2400" dirty="0">
+                <a:solidFill>
+                  <a:schemeClr val="accent6">
+                    <a:lumMod val="60000"/>
+                    <a:lumOff val="40000"/>
+                  </a:schemeClr>
+                </a:solidFill>
+              </a:rPr>
+              <a:t> rather than tables.</a:t>
+            </a:r>
+          </a:p>
+          <a:p>
+            <a:pPr>
+              <a:buNone/>
+            </a:pPr>
+            <a:endParaRPr lang="en-US" sz="2400" dirty="0">
+              <a:solidFill>
+                <a:schemeClr val="accent6">
+                  <a:lumMod val="60000"/>
+                  <a:lumOff val="40000"/>
+                </a:schemeClr>
+              </a:solidFill>
+            </a:endParaRPr>
+          </a:p>
+          <a:p>
+            <a:pPr>
+              <a:buNone/>
+            </a:pPr>
+            <a:r>
+              <a:rPr lang="en-US" sz="2400" dirty="0">
+                <a:solidFill>
+                  <a:schemeClr val="accent6">
+                    <a:lumMod val="60000"/>
+                    <a:lumOff val="40000"/>
+                  </a:schemeClr>
+                </a:solidFill>
+              </a:rPr>
+              <a:t>Instead of rows and columns (like in SQL), it uses a structure similar to a </a:t>
+            </a:r>
+            <a:r>
+              <a:rPr lang="en-US" sz="2400" b="1" dirty="0">
+                <a:solidFill>
+                  <a:schemeClr val="accent6">
+                    <a:lumMod val="60000"/>
+                    <a:lumOff val="40000"/>
+                  </a:schemeClr>
+                </a:solidFill>
+              </a:rPr>
+              <a:t>network or graph</a:t>
+            </a:r>
+            <a:r>
+              <a:rPr lang="en-US" sz="2400" dirty="0">
+                <a:solidFill>
+                  <a:schemeClr val="accent6">
+                    <a:lumMod val="60000"/>
+                    <a:lumOff val="40000"/>
+                  </a:schemeClr>
+                </a:solidFill>
+              </a:rPr>
+              <a:t>.</a:t>
+            </a:r>
+          </a:p>
+        </p:txBody>
+      </p:sp>
+      <p:pic>
+        <p:nvPicPr>
+          <p:cNvPr id="3" name="Picture 2">
+            <a:extLst>
+              <a:ext uri="{FF2B5EF4-FFF2-40B4-BE49-F238E27FC236}">
+                <a16:creationId xmlns:a16="http://schemas.microsoft.com/office/drawing/2014/main" id="{33357497-60C1-D8BA-160F-FE18D4B40CCD}"/>
+              </a:ext>
+            </a:extLst>
+          </p:cNvPr>
+          <p:cNvPicPr>
+            <a:picLocks noChangeAspect="1"/>
+          </p:cNvPicPr>
+          <p:nvPr/>
+        </p:nvPicPr>
+        <p:blipFill>
+          <a:blip r:embed="rId2"/>
+          <a:stretch>
+            <a:fillRect/>
+          </a:stretch>
+        </p:blipFill>
+        <p:spPr>
+          <a:xfrm>
+            <a:off x="3542256" y="3429000"/>
+            <a:ext cx="4092278" cy="2945117"/>
+          </a:xfrm>
+          <a:prstGeom prst="rect">
+            <a:avLst/>
+          </a:prstGeom>
+        </p:spPr>
+      </p:pic>
+    </p:spTree>
+    <p:extLst>
+      <p:ext uri="{BB962C8B-B14F-4D97-AF65-F5344CB8AC3E}">
+        <p14:creationId xmlns:p14="http://schemas.microsoft.com/office/powerpoint/2010/main" val="366625378"/>
+      </p:ext>
+    </p:extLst>
+  </p:cSld>
+  <p:clrMapOvr>
+    <a:masterClrMapping/>
+  </p:clrMapOvr>
+</p:sld>
+</file>
+
+<file path=ppt/slides/slide20.xml><?xml version="1.0" encoding="utf-8"?>
 <p:sld xmlns:a="http://schemas.openxmlformats.org/drawingml/2006/main" xmlns:r="http://schemas.openxmlformats.org/officeDocument/2006/relationships" xmlns:p="http://schemas.openxmlformats.org/presentationml/2006/main">
   <p:cSld>
     <p:spTree>
@@ -6324,7 +8398,7 @@
         <p:spPr>
           <a:xfrm>
             <a:off x="137160" y="164360"/>
-            <a:ext cx="12054840" cy="3785652"/>
+            <a:ext cx="12054840" cy="4154984"/>
           </a:xfrm>
           <a:prstGeom prst="rect">
             <a:avLst/>
@@ -6338,19 +8412,6 @@
           <a:lstStyle/>
           <a:p>
             <a:r>
-              <a:rPr lang="en-US" sz="2400" b="1" dirty="0">
-                <a:solidFill>
-                  <a:schemeClr val="accent6">
-                    <a:lumMod val="60000"/>
-                    <a:lumOff val="40000"/>
-                  </a:schemeClr>
-                </a:solidFill>
-              </a:rPr>
-              <a:t>4. Query Example</a:t>
-            </a:r>
-          </a:p>
-          <a:p>
-            <a:r>
               <a:rPr lang="en-US" sz="2400" dirty="0">
                 <a:solidFill>
                   <a:schemeClr val="accent6">
@@ -6359,29 +8420,7 @@
                   </a:schemeClr>
                 </a:solidFill>
               </a:rPr>
-              <a:t>In graph databases like Neo4j, you use </a:t>
-            </a:r>
-            <a:r>
-              <a:rPr lang="en-US" sz="2400" b="1" dirty="0">
-                <a:solidFill>
-                  <a:schemeClr val="accent6">
-                    <a:lumMod val="60000"/>
-                    <a:lumOff val="40000"/>
-                  </a:schemeClr>
-                </a:solidFill>
-              </a:rPr>
-              <a:t>Cypher query language</a:t>
-            </a:r>
-            <a:r>
-              <a:rPr lang="en-US" sz="2400" dirty="0">
-                <a:solidFill>
-                  <a:schemeClr val="accent6">
-                    <a:lumMod val="60000"/>
-                    <a:lumOff val="40000"/>
-                  </a:schemeClr>
-                </a:solidFill>
-              </a:rPr>
-              <a:t>:</a:t>
+              <a:t>Few basic commands:</a:t>
             </a:r>
           </a:p>
           <a:p>
@@ -6404,7 +8443,7 @@
                   </a:schemeClr>
                 </a:solidFill>
               </a:rPr>
-              <a:t>Q: Find topics liked by people Ash follows ?</a:t>
+              <a:t>1) To delete nodes and relations:</a:t>
             </a:r>
           </a:p>
           <a:p>
@@ -6419,120 +8458,32 @@
           </a:p>
           <a:p>
             <a:r>
-              <a:rPr lang="en-US" sz="2400" dirty="0">
-                <a:solidFill>
-                  <a:schemeClr val="accent6">
-                    <a:lumMod val="60000"/>
-                    <a:lumOff val="40000"/>
-                  </a:schemeClr>
-                </a:solidFill>
-              </a:rPr>
-              <a:t>MATCH (</a:t>
-            </a:r>
-            <a:r>
-              <a:rPr lang="en-US" sz="2400" dirty="0" err="1">
-                <a:solidFill>
-                  <a:schemeClr val="accent6">
-                    <a:lumMod val="60000"/>
-                    <a:lumOff val="40000"/>
-                  </a:schemeClr>
-                </a:solidFill>
-              </a:rPr>
-              <a:t>p:Person</a:t>
-            </a:r>
-            <a:r>
-              <a:rPr lang="en-US" sz="2400" dirty="0">
-                <a:solidFill>
-                  <a:schemeClr val="accent6">
-                    <a:lumMod val="60000"/>
-                    <a:lumOff val="40000"/>
-                  </a:schemeClr>
-                </a:solidFill>
-              </a:rPr>
-              <a:t> {name: 'Ash'})-[:Follows]-&gt;(</a:t>
-            </a:r>
-            <a:r>
-              <a:rPr lang="en-US" sz="2400" dirty="0" err="1">
-                <a:solidFill>
-                  <a:schemeClr val="accent6">
-                    <a:lumMod val="60000"/>
-                    <a:lumOff val="40000"/>
-                  </a:schemeClr>
-                </a:solidFill>
-              </a:rPr>
-              <a:t>f:Person</a:t>
-            </a:r>
-            <a:r>
-              <a:rPr lang="en-US" sz="2400" dirty="0">
-                <a:solidFill>
-                  <a:schemeClr val="accent6">
-                    <a:lumMod val="60000"/>
-                    <a:lumOff val="40000"/>
-                  </a:schemeClr>
-                </a:solidFill>
-              </a:rPr>
-              <a:t>)-[:Likes]-&gt;(</a:t>
-            </a:r>
-            <a:r>
-              <a:rPr lang="en-US" sz="2400" dirty="0" err="1">
-                <a:solidFill>
-                  <a:schemeClr val="accent6">
-                    <a:lumMod val="60000"/>
-                    <a:lumOff val="40000"/>
-                  </a:schemeClr>
-                </a:solidFill>
-              </a:rPr>
-              <a:t>post:Post</a:t>
-            </a:r>
-            <a:r>
-              <a:rPr lang="en-US" sz="2400" dirty="0">
-                <a:solidFill>
-                  <a:schemeClr val="accent6">
-                    <a:lumMod val="60000"/>
-                    <a:lumOff val="40000"/>
-                  </a:schemeClr>
-                </a:solidFill>
-              </a:rPr>
-              <a:t>)-[:About]-&gt;(</a:t>
-            </a:r>
-            <a:r>
-              <a:rPr lang="en-US" sz="2400" dirty="0" err="1">
-                <a:solidFill>
-                  <a:schemeClr val="accent6">
-                    <a:lumMod val="60000"/>
-                    <a:lumOff val="40000"/>
-                  </a:schemeClr>
-                </a:solidFill>
-              </a:rPr>
-              <a:t>t:Topic</a:t>
-            </a:r>
-            <a:r>
-              <a:rPr lang="en-US" sz="2400" dirty="0">
-                <a:solidFill>
-                  <a:schemeClr val="accent6">
-                    <a:lumMod val="60000"/>
-                    <a:lumOff val="40000"/>
-                  </a:schemeClr>
-                </a:solidFill>
-              </a:rPr>
-              <a:t>)</a:t>
-            </a:r>
-          </a:p>
-          <a:p>
-            <a:r>
-              <a:rPr lang="en-US" sz="2400" dirty="0">
-                <a:solidFill>
-                  <a:schemeClr val="accent6">
-                    <a:lumMod val="60000"/>
-                    <a:lumOff val="40000"/>
-                  </a:schemeClr>
-                </a:solidFill>
-              </a:rPr>
-              <a:t>RETURN DISTINCT t.name AS Topic</a:t>
-            </a:r>
-          </a:p>
-          <a:p>
-            <a:endParaRPr lang="en-US" sz="2400" dirty="0">
+              <a:rPr lang="pt-BR" sz="2400" dirty="0">
+                <a:solidFill>
+                  <a:schemeClr val="accent6">
+                    <a:lumMod val="60000"/>
+                    <a:lumOff val="40000"/>
+                  </a:schemeClr>
+                </a:solidFill>
+              </a:rPr>
+              <a:t>MATCH (n) </a:t>
+            </a:r>
+          </a:p>
+          <a:p>
+            <a:r>
+              <a:rPr lang="pt-BR" sz="2400" dirty="0">
+                <a:solidFill>
+                  <a:schemeClr val="accent6">
+                    <a:lumMod val="60000"/>
+                    <a:lumOff val="40000"/>
+                  </a:schemeClr>
+                </a:solidFill>
+              </a:rPr>
+              <a:t>DETACH DELETE n</a:t>
+            </a:r>
+          </a:p>
+          <a:p>
+            <a:endParaRPr lang="pt-BR" sz="2400" dirty="0">
               <a:solidFill>
                 <a:schemeClr val="accent6">
                   <a:lumMod val="60000"/>
@@ -6542,16 +8493,32 @@
             </a:endParaRPr>
           </a:p>
           <a:p>
-            <a:endParaRPr lang="en-US" sz="2400" dirty="0">
-              <a:solidFill>
-                <a:schemeClr val="accent6">
-                  <a:lumMod val="60000"/>
-                  <a:lumOff val="40000"/>
-                </a:schemeClr>
-              </a:solidFill>
-            </a:endParaRPr>
-          </a:p>
-          <a:p>
+            <a:pPr marL="457200" indent="-457200">
+              <a:buAutoNum type="arabicParenR" startAt="2"/>
+            </a:pPr>
+            <a:r>
+              <a:rPr lang="pt-BR" sz="2400" dirty="0">
+                <a:solidFill>
+                  <a:schemeClr val="accent6">
+                    <a:lumMod val="60000"/>
+                    <a:lumOff val="40000"/>
+                  </a:schemeClr>
+                </a:solidFill>
+              </a:rPr>
+              <a:t>To drop database:</a:t>
+            </a:r>
+          </a:p>
+          <a:p>
+            <a:br>
+              <a:rPr lang="pt-BR" sz="2400" dirty="0">
+                <a:solidFill>
+                  <a:schemeClr val="accent6">
+                    <a:lumMod val="60000"/>
+                    <a:lumOff val="40000"/>
+                  </a:schemeClr>
+                </a:solidFill>
+              </a:rPr>
+            </a:br>
             <a:r>
               <a:rPr lang="en-US" sz="2400" dirty="0">
                 <a:solidFill>
@@ -6561,7 +8528,20 @@
                   </a:schemeClr>
                 </a:solidFill>
               </a:rPr>
-              <a:t>Answer: AI</a:t>
+              <a:t>:use system</a:t>
+            </a:r>
+          </a:p>
+          <a:p>
+            <a:r>
+              <a:rPr lang="en-US" sz="2400" dirty="0">
+                <a:solidFill>
+                  <a:schemeClr val="accent6">
+                    <a:lumMod val="60000"/>
+                    <a:lumOff val="40000"/>
+                  </a:schemeClr>
+                </a:solidFill>
+              </a:rPr>
+              <a:t>DROP DATABASE neo4j;</a:t>
             </a:r>
           </a:p>
         </p:txBody>
@@ -6609,7 +8589,7 @@
 </p:sld>
 </file>
 
-<file path=ppt/slides/slide17.xml><?xml version="1.0" encoding="utf-8"?>
+<file path=ppt/slides/slide21.xml><?xml version="1.0" encoding="utf-8"?>
 <p:sld xmlns:a="http://schemas.openxmlformats.org/drawingml/2006/main" xmlns:r="http://schemas.openxmlformats.org/officeDocument/2006/relationships" xmlns:p="http://schemas.openxmlformats.org/presentationml/2006/main">
   <p:cSld>
     <p:spTree>
@@ -7314,7 +9294,7 @@
                   </a:schemeClr>
                 </a:solidFill>
               </a:rPr>
-              <a:t>Comparison: Graph Databases vs Relation DB</a:t>
+              <a:t>Comparison: Graph DB vs Relation DB</a:t>
             </a:r>
           </a:p>
         </p:txBody>
@@ -7332,7 +9312,7 @@
 </p:sld>
 </file>
 
-<file path=ppt/slides/slide18.xml><?xml version="1.0" encoding="utf-8"?>
+<file path=ppt/slides/slide22.xml><?xml version="1.0" encoding="utf-8"?>
 <p:sld xmlns:a="http://schemas.openxmlformats.org/drawingml/2006/main" xmlns:r="http://schemas.openxmlformats.org/officeDocument/2006/relationships" xmlns:p="http://schemas.openxmlformats.org/presentationml/2006/main">
   <p:cSld>
     <p:spTree>
@@ -7540,7 +9520,7 @@
 </p:sld>
 </file>
 
-<file path=ppt/slides/slide19.xml><?xml version="1.0" encoding="utf-8"?>
+<file path=ppt/slides/slide23.xml><?xml version="1.0" encoding="utf-8"?>
 <p:sld xmlns:a="http://schemas.openxmlformats.org/drawingml/2006/main" xmlns:r="http://schemas.openxmlformats.org/officeDocument/2006/relationships" xmlns:p="http://schemas.openxmlformats.org/presentationml/2006/main">
   <p:cSld>
     <p:spTree>
@@ -7577,8 +9557,8 @@
         </p:nvSpPr>
         <p:spPr>
           <a:xfrm>
-            <a:off x="859536" y="709875"/>
-            <a:ext cx="8343900" cy="5632311"/>
+            <a:off x="1746504" y="499563"/>
+            <a:ext cx="8343900" cy="461665"/>
           </a:xfrm>
           <a:prstGeom prst="rect">
             <a:avLst/>
@@ -7600,253 +9580,887 @@
                   </a:schemeClr>
                 </a:solidFill>
               </a:rPr>
-              <a:t>7. Real-World Use Cases</a:t>
-            </a:r>
-          </a:p>
-          <a:p>
-            <a:endParaRPr lang="en-US" sz="2400" b="1" dirty="0">
-              <a:solidFill>
-                <a:schemeClr val="accent6">
-                  <a:lumMod val="60000"/>
-                  <a:lumOff val="40000"/>
-                </a:schemeClr>
-              </a:solidFill>
-            </a:endParaRPr>
-          </a:p>
-          <a:p>
-            <a:r>
-              <a:rPr lang="en-US" sz="2400" b="1" dirty="0">
-                <a:solidFill>
-                  <a:schemeClr val="accent6">
-                    <a:lumMod val="60000"/>
-                    <a:lumOff val="40000"/>
-                  </a:schemeClr>
-                </a:solidFill>
-              </a:rPr>
-              <a:t>Social Media</a:t>
-            </a:r>
-          </a:p>
-          <a:p>
-            <a:pPr marL="342900" indent="-342900">
-              <a:buFont typeface="Arial" panose="020B0604020202020204" pitchFamily="34" charset="0"/>
-              <a:buChar char="•"/>
-            </a:pPr>
-            <a:r>
-              <a:rPr lang="en-US" sz="2400" dirty="0">
-                <a:solidFill>
-                  <a:schemeClr val="accent6">
-                    <a:lumMod val="60000"/>
-                    <a:lumOff val="40000"/>
-                  </a:schemeClr>
-                </a:solidFill>
-              </a:rPr>
-              <a:t>Facebook uses graph-like structures for connections</a:t>
-            </a:r>
-          </a:p>
-          <a:p>
-            <a:endParaRPr lang="en-US" sz="2400" dirty="0">
-              <a:solidFill>
-                <a:schemeClr val="accent6">
-                  <a:lumMod val="60000"/>
-                  <a:lumOff val="40000"/>
-                </a:schemeClr>
-              </a:solidFill>
-            </a:endParaRPr>
-          </a:p>
-          <a:p>
-            <a:endParaRPr lang="en-US" sz="2400" dirty="0">
-              <a:solidFill>
-                <a:schemeClr val="accent6">
-                  <a:lumMod val="60000"/>
-                  <a:lumOff val="40000"/>
-                </a:schemeClr>
-              </a:solidFill>
-            </a:endParaRPr>
-          </a:p>
-          <a:p>
-            <a:r>
-              <a:rPr lang="en-US" sz="2400" b="1" dirty="0">
-                <a:solidFill>
-                  <a:schemeClr val="accent6">
-                    <a:lumMod val="60000"/>
-                    <a:lumOff val="40000"/>
-                  </a:schemeClr>
-                </a:solidFill>
-              </a:rPr>
-              <a:t>When Should You Use Graph DB?</a:t>
-            </a:r>
-          </a:p>
-          <a:p>
-            <a:r>
-              <a:rPr lang="en-US" sz="2400" dirty="0">
-                <a:solidFill>
-                  <a:schemeClr val="accent6">
-                    <a:lumMod val="60000"/>
-                    <a:lumOff val="40000"/>
-                  </a:schemeClr>
-                </a:solidFill>
-              </a:rPr>
-              <a:t>Use it when:</a:t>
-            </a:r>
-          </a:p>
-          <a:p>
-            <a:pPr marL="342900" indent="-342900">
-              <a:buFont typeface="Arial" panose="020B0604020202020204" pitchFamily="34" charset="0"/>
-              <a:buChar char="•"/>
-            </a:pPr>
-            <a:r>
-              <a:rPr lang="en-US" sz="2400" dirty="0">
-                <a:solidFill>
-                  <a:schemeClr val="accent6">
-                    <a:lumMod val="60000"/>
-                    <a:lumOff val="40000"/>
-                  </a:schemeClr>
-                </a:solidFill>
-              </a:rPr>
-              <a:t>Data is </a:t>
-            </a:r>
-            <a:r>
-              <a:rPr lang="en-US" sz="2400" b="1" dirty="0">
-                <a:solidFill>
-                  <a:schemeClr val="accent6">
-                    <a:lumMod val="60000"/>
-                    <a:lumOff val="40000"/>
-                  </a:schemeClr>
-                </a:solidFill>
-              </a:rPr>
-              <a:t>highly connected</a:t>
-            </a:r>
-            <a:r>
-              <a:rPr lang="en-US" sz="2400" dirty="0">
-                <a:solidFill>
-                  <a:schemeClr val="accent6">
-                    <a:lumMod val="60000"/>
-                    <a:lumOff val="40000"/>
-                  </a:schemeClr>
-                </a:solidFill>
-              </a:rPr>
-              <a:t> </a:t>
-            </a:r>
-          </a:p>
-          <a:p>
-            <a:pPr marL="342900" indent="-342900">
-              <a:buFont typeface="Arial" panose="020B0604020202020204" pitchFamily="34" charset="0"/>
-              <a:buChar char="•"/>
-            </a:pPr>
-            <a:r>
-              <a:rPr lang="en-US" sz="2400" dirty="0">
-                <a:solidFill>
-                  <a:schemeClr val="accent6">
-                    <a:lumMod val="60000"/>
-                    <a:lumOff val="40000"/>
-                  </a:schemeClr>
-                </a:solidFill>
-              </a:rPr>
-              <a:t>You need </a:t>
-            </a:r>
-            <a:r>
-              <a:rPr lang="en-US" sz="2400" b="1" dirty="0">
-                <a:solidFill>
-                  <a:schemeClr val="accent6">
-                    <a:lumMod val="60000"/>
-                    <a:lumOff val="40000"/>
-                  </a:schemeClr>
-                </a:solidFill>
-              </a:rPr>
-              <a:t>fast relationship queries</a:t>
-            </a:r>
-            <a:r>
-              <a:rPr lang="en-US" sz="2400" dirty="0">
-                <a:solidFill>
-                  <a:schemeClr val="accent6">
-                    <a:lumMod val="60000"/>
-                    <a:lumOff val="40000"/>
-                  </a:schemeClr>
-                </a:solidFill>
-              </a:rPr>
-              <a:t> </a:t>
-            </a:r>
-          </a:p>
-          <a:p>
-            <a:pPr marL="342900" indent="-342900">
-              <a:buFont typeface="Arial" panose="020B0604020202020204" pitchFamily="34" charset="0"/>
-              <a:buChar char="•"/>
-            </a:pPr>
-            <a:r>
-              <a:rPr lang="en-US" sz="2400" dirty="0">
-                <a:solidFill>
-                  <a:schemeClr val="accent6">
-                    <a:lumMod val="60000"/>
-                    <a:lumOff val="40000"/>
-                  </a:schemeClr>
-                </a:solidFill>
-              </a:rPr>
-              <a:t>You are building: </a:t>
-            </a:r>
-          </a:p>
-          <a:p>
-            <a:pPr marL="800100" lvl="1" indent="-342900">
-              <a:buFont typeface="Arial" panose="020B0604020202020204" pitchFamily="34" charset="0"/>
-              <a:buChar char="•"/>
-            </a:pPr>
-            <a:r>
-              <a:rPr lang="en-US" sz="2400" dirty="0">
-                <a:solidFill>
-                  <a:schemeClr val="accent6">
-                    <a:lumMod val="60000"/>
-                    <a:lumOff val="40000"/>
-                  </a:schemeClr>
-                </a:solidFill>
-              </a:rPr>
-              <a:t>Recommendation engines </a:t>
-            </a:r>
-          </a:p>
-          <a:p>
-            <a:pPr marL="800100" lvl="1" indent="-342900">
-              <a:buFont typeface="Arial" panose="020B0604020202020204" pitchFamily="34" charset="0"/>
-              <a:buChar char="•"/>
-            </a:pPr>
-            <a:r>
-              <a:rPr lang="en-US" sz="2400" dirty="0">
-                <a:solidFill>
-                  <a:schemeClr val="accent6">
-                    <a:lumMod val="60000"/>
-                    <a:lumOff val="40000"/>
-                  </a:schemeClr>
-                </a:solidFill>
-              </a:rPr>
-              <a:t>Chatbots (RAG + knowledge graph 🔥) </a:t>
-            </a:r>
-          </a:p>
-          <a:p>
-            <a:pPr marL="800100" lvl="1" indent="-342900">
-              <a:buFont typeface="Arial" panose="020B0604020202020204" pitchFamily="34" charset="0"/>
-              <a:buChar char="•"/>
-            </a:pPr>
-            <a:r>
-              <a:rPr lang="en-US" sz="2400" dirty="0">
-                <a:solidFill>
-                  <a:schemeClr val="accent6">
-                    <a:lumMod val="60000"/>
-                    <a:lumOff val="40000"/>
-                  </a:schemeClr>
-                </a:solidFill>
-              </a:rPr>
-              <a:t>Network analysis systems</a:t>
-            </a:r>
-          </a:p>
-          <a:p>
-            <a:endParaRPr lang="en-US" sz="2400" dirty="0">
-              <a:solidFill>
-                <a:schemeClr val="accent6">
-                  <a:lumMod val="60000"/>
-                  <a:lumOff val="40000"/>
-                </a:schemeClr>
-              </a:solidFill>
-            </a:endParaRPr>
+              <a:t>When to use Graph RAG vs Traditional Vector DB RAG</a:t>
+            </a:r>
           </a:p>
         </p:txBody>
       </p:sp>
+      <p:graphicFrame>
+        <p:nvGraphicFramePr>
+          <p:cNvPr id="2" name="Table 1">
+            <a:extLst>
+              <a:ext uri="{FF2B5EF4-FFF2-40B4-BE49-F238E27FC236}">
+                <a16:creationId xmlns:a16="http://schemas.microsoft.com/office/drawing/2014/main" id="{C288AE9C-9074-F5A2-FCB7-A9F27D9F1A2C}"/>
+              </a:ext>
+            </a:extLst>
+          </p:cNvPr>
+          <p:cNvGraphicFramePr>
+            <a:graphicFrameLocks noGrp="1"/>
+          </p:cNvGraphicFramePr>
+          <p:nvPr>
+            <p:extLst>
+              <p:ext uri="{D42A27DB-BD31-4B8C-83A1-F6EECF244321}">
+                <p14:modId xmlns:p14="http://schemas.microsoft.com/office/powerpoint/2010/main" val="1349592929"/>
+              </p:ext>
+            </p:extLst>
+          </p:nvPr>
+        </p:nvGraphicFramePr>
+        <p:xfrm>
+          <a:off x="420624" y="2797334"/>
+          <a:ext cx="11301984" cy="2956560"/>
+        </p:xfrm>
+        <a:graphic>
+          <a:graphicData uri="http://schemas.openxmlformats.org/drawingml/2006/table">
+            <a:tbl>
+              <a:tblPr/>
+              <a:tblGrid>
+                <a:gridCol w="6017897">
+                  <a:extLst>
+                    <a:ext uri="{9D8B030D-6E8A-4147-A177-3AD203B41FA5}">
+                      <a16:colId xmlns:a16="http://schemas.microsoft.com/office/drawing/2014/main" val="3322410958"/>
+                    </a:ext>
+                  </a:extLst>
+                </a:gridCol>
+                <a:gridCol w="5284087">
+                  <a:extLst>
+                    <a:ext uri="{9D8B030D-6E8A-4147-A177-3AD203B41FA5}">
+                      <a16:colId xmlns:a16="http://schemas.microsoft.com/office/drawing/2014/main" val="1080149859"/>
+                    </a:ext>
+                  </a:extLst>
+                </a:gridCol>
+              </a:tblGrid>
+              <a:tr h="0">
+                <a:tc>
+                  <a:txBody>
+                    <a:bodyPr/>
+                    <a:lstStyle/>
+                    <a:p>
+                      <a:pPr algn="ctr" fontAlgn="t">
+                        <a:buNone/>
+                      </a:pPr>
+                      <a:r>
+                        <a:rPr lang="en-US" sz="2400" b="1" dirty="0">
+                          <a:solidFill>
+                            <a:schemeClr val="accent6">
+                              <a:lumMod val="60000"/>
+                              <a:lumOff val="40000"/>
+                            </a:schemeClr>
+                          </a:solidFill>
+                          <a:effectLst/>
+                        </a:rPr>
+                        <a:t>Use </a:t>
+                      </a:r>
+                      <a:r>
+                        <a:rPr lang="en-US" sz="2400" b="1" dirty="0" err="1">
+                          <a:solidFill>
+                            <a:schemeClr val="accent6">
+                              <a:lumMod val="60000"/>
+                              <a:lumOff val="40000"/>
+                            </a:schemeClr>
+                          </a:solidFill>
+                          <a:effectLst/>
+                        </a:rPr>
+                        <a:t>GraphRAG</a:t>
+                      </a:r>
+                      <a:r>
+                        <a:rPr lang="en-US" sz="2400" b="1" dirty="0">
+                          <a:solidFill>
+                            <a:schemeClr val="accent6">
+                              <a:lumMod val="60000"/>
+                              <a:lumOff val="40000"/>
+                            </a:schemeClr>
+                          </a:solidFill>
+                          <a:effectLst/>
+                        </a:rPr>
+                        <a:t> when</a:t>
+                      </a:r>
+                      <a:endParaRPr lang="en-US" sz="2400" dirty="0">
+                        <a:solidFill>
+                          <a:schemeClr val="accent6">
+                            <a:lumMod val="60000"/>
+                            <a:lumOff val="40000"/>
+                          </a:schemeClr>
+                        </a:solidFill>
+                        <a:effectLst/>
+                      </a:endParaRPr>
+                    </a:p>
+                  </a:txBody>
+                  <a:tcPr marL="63500" marR="63500" marT="63500" marB="63500">
+                    <a:lnL w="12700" cap="flat" cmpd="sng" algn="ctr">
+                      <a:solidFill>
+                        <a:srgbClr val="000000"/>
+                      </a:solidFill>
+                      <a:prstDash val="solid"/>
+                      <a:round/>
+                      <a:headEnd type="none" w="med" len="med"/>
+                      <a:tailEnd type="none" w="med" len="med"/>
+                    </a:lnL>
+                    <a:lnR w="12700" cap="flat" cmpd="sng" algn="ctr">
+                      <a:solidFill>
+                        <a:srgbClr val="000000"/>
+                      </a:solidFill>
+                      <a:prstDash val="solid"/>
+                      <a:round/>
+                      <a:headEnd type="none" w="med" len="med"/>
+                      <a:tailEnd type="none" w="med" len="med"/>
+                    </a:lnR>
+                    <a:lnT w="12700" cap="flat" cmpd="sng" algn="ctr">
+                      <a:solidFill>
+                        <a:srgbClr val="000000"/>
+                      </a:solidFill>
+                      <a:prstDash val="solid"/>
+                      <a:round/>
+                      <a:headEnd type="none" w="med" len="med"/>
+                      <a:tailEnd type="none" w="med" len="med"/>
+                    </a:lnT>
+                    <a:lnB w="12700" cap="flat" cmpd="sng" algn="ctr">
+                      <a:solidFill>
+                        <a:srgbClr val="000000"/>
+                      </a:solidFill>
+                      <a:prstDash val="solid"/>
+                      <a:round/>
+                      <a:headEnd type="none" w="med" len="med"/>
+                      <a:tailEnd type="none" w="med" len="med"/>
+                    </a:lnB>
+                    <a:noFill/>
+                  </a:tcPr>
+                </a:tc>
+                <a:tc>
+                  <a:txBody>
+                    <a:bodyPr/>
+                    <a:lstStyle/>
+                    <a:p>
+                      <a:pPr algn="ctr" fontAlgn="t">
+                        <a:buNone/>
+                      </a:pPr>
+                      <a:r>
+                        <a:rPr lang="en-US" sz="2400" b="1" dirty="0">
+                          <a:solidFill>
+                            <a:schemeClr val="accent6">
+                              <a:lumMod val="60000"/>
+                              <a:lumOff val="40000"/>
+                            </a:schemeClr>
+                          </a:solidFill>
+                          <a:effectLst/>
+                        </a:rPr>
+                        <a:t>Use Vector RAG when</a:t>
+                      </a:r>
+                      <a:endParaRPr lang="en-US" sz="2400" dirty="0">
+                        <a:solidFill>
+                          <a:schemeClr val="accent6">
+                            <a:lumMod val="60000"/>
+                            <a:lumOff val="40000"/>
+                          </a:schemeClr>
+                        </a:solidFill>
+                        <a:effectLst/>
+                      </a:endParaRPr>
+                    </a:p>
+                  </a:txBody>
+                  <a:tcPr marL="63500" marR="63500" marT="63500" marB="63500">
+                    <a:lnL w="12700" cap="flat" cmpd="sng" algn="ctr">
+                      <a:solidFill>
+                        <a:srgbClr val="000000"/>
+                      </a:solidFill>
+                      <a:prstDash val="solid"/>
+                      <a:round/>
+                      <a:headEnd type="none" w="med" len="med"/>
+                      <a:tailEnd type="none" w="med" len="med"/>
+                    </a:lnL>
+                    <a:lnR w="12700" cap="flat" cmpd="sng" algn="ctr">
+                      <a:solidFill>
+                        <a:srgbClr val="000000"/>
+                      </a:solidFill>
+                      <a:prstDash val="solid"/>
+                      <a:round/>
+                      <a:headEnd type="none" w="med" len="med"/>
+                      <a:tailEnd type="none" w="med" len="med"/>
+                    </a:lnR>
+                    <a:lnT w="12700" cap="flat" cmpd="sng" algn="ctr">
+                      <a:solidFill>
+                        <a:srgbClr val="000000"/>
+                      </a:solidFill>
+                      <a:prstDash val="solid"/>
+                      <a:round/>
+                      <a:headEnd type="none" w="med" len="med"/>
+                      <a:tailEnd type="none" w="med" len="med"/>
+                    </a:lnT>
+                    <a:lnB w="12700" cap="flat" cmpd="sng" algn="ctr">
+                      <a:solidFill>
+                        <a:srgbClr val="000000"/>
+                      </a:solidFill>
+                      <a:prstDash val="solid"/>
+                      <a:round/>
+                      <a:headEnd type="none" w="med" len="med"/>
+                      <a:tailEnd type="none" w="med" len="med"/>
+                    </a:lnB>
+                    <a:noFill/>
+                  </a:tcPr>
+                </a:tc>
+                <a:extLst>
+                  <a:ext uri="{0D108BD9-81ED-4DB2-BD59-A6C34878D82A}">
+                    <a16:rowId xmlns:a16="http://schemas.microsoft.com/office/drawing/2014/main" val="1486622495"/>
+                  </a:ext>
+                </a:extLst>
+              </a:tr>
+              <a:tr h="0">
+                <a:tc>
+                  <a:txBody>
+                    <a:bodyPr/>
+                    <a:lstStyle/>
+                    <a:p>
+                      <a:pPr algn="l" fontAlgn="t">
+                        <a:buNone/>
+                      </a:pPr>
+                      <a:r>
+                        <a:rPr lang="en-US" sz="2400" dirty="0">
+                          <a:solidFill>
+                            <a:schemeClr val="accent6">
+                              <a:lumMod val="60000"/>
+                              <a:lumOff val="40000"/>
+                            </a:schemeClr>
+                          </a:solidFill>
+                          <a:effectLst/>
+                        </a:rPr>
+                        <a:t>Many interconnected documents</a:t>
+                      </a:r>
+                    </a:p>
+                  </a:txBody>
+                  <a:tcPr marL="63500" marR="63500" marT="63500" marB="63500">
+                    <a:lnL w="12700" cap="flat" cmpd="sng" algn="ctr">
+                      <a:solidFill>
+                        <a:srgbClr val="000000"/>
+                      </a:solidFill>
+                      <a:prstDash val="solid"/>
+                      <a:round/>
+                      <a:headEnd type="none" w="med" len="med"/>
+                      <a:tailEnd type="none" w="med" len="med"/>
+                    </a:lnL>
+                    <a:lnR w="12700" cap="flat" cmpd="sng" algn="ctr">
+                      <a:solidFill>
+                        <a:srgbClr val="000000"/>
+                      </a:solidFill>
+                      <a:prstDash val="solid"/>
+                      <a:round/>
+                      <a:headEnd type="none" w="med" len="med"/>
+                      <a:tailEnd type="none" w="med" len="med"/>
+                    </a:lnR>
+                    <a:lnT w="12700" cap="flat" cmpd="sng" algn="ctr">
+                      <a:solidFill>
+                        <a:srgbClr val="000000"/>
+                      </a:solidFill>
+                      <a:prstDash val="solid"/>
+                      <a:round/>
+                      <a:headEnd type="none" w="med" len="med"/>
+                      <a:tailEnd type="none" w="med" len="med"/>
+                    </a:lnT>
+                    <a:lnB w="12700" cap="flat" cmpd="sng" algn="ctr">
+                      <a:solidFill>
+                        <a:srgbClr val="000000"/>
+                      </a:solidFill>
+                      <a:prstDash val="solid"/>
+                      <a:round/>
+                      <a:headEnd type="none" w="med" len="med"/>
+                      <a:tailEnd type="none" w="med" len="med"/>
+                    </a:lnB>
+                    <a:noFill/>
+                  </a:tcPr>
+                </a:tc>
+                <a:tc>
+                  <a:txBody>
+                    <a:bodyPr/>
+                    <a:lstStyle/>
+                    <a:p>
+                      <a:pPr algn="l" fontAlgn="t">
+                        <a:buNone/>
+                      </a:pPr>
+                      <a:r>
+                        <a:rPr lang="en-US" sz="2400">
+                          <a:solidFill>
+                            <a:schemeClr val="accent6">
+                              <a:lumMod val="60000"/>
+                              <a:lumOff val="40000"/>
+                            </a:schemeClr>
+                          </a:solidFill>
+                          <a:effectLst/>
+                        </a:rPr>
+                        <a:t>Small, standalone dataset</a:t>
+                      </a:r>
+                    </a:p>
+                  </a:txBody>
+                  <a:tcPr marL="63500" marR="63500" marT="63500" marB="63500">
+                    <a:lnL w="12700" cap="flat" cmpd="sng" algn="ctr">
+                      <a:solidFill>
+                        <a:srgbClr val="000000"/>
+                      </a:solidFill>
+                      <a:prstDash val="solid"/>
+                      <a:round/>
+                      <a:headEnd type="none" w="med" len="med"/>
+                      <a:tailEnd type="none" w="med" len="med"/>
+                    </a:lnL>
+                    <a:lnR w="12700" cap="flat" cmpd="sng" algn="ctr">
+                      <a:solidFill>
+                        <a:srgbClr val="000000"/>
+                      </a:solidFill>
+                      <a:prstDash val="solid"/>
+                      <a:round/>
+                      <a:headEnd type="none" w="med" len="med"/>
+                      <a:tailEnd type="none" w="med" len="med"/>
+                    </a:lnR>
+                    <a:lnT w="12700" cap="flat" cmpd="sng" algn="ctr">
+                      <a:solidFill>
+                        <a:srgbClr val="000000"/>
+                      </a:solidFill>
+                      <a:prstDash val="solid"/>
+                      <a:round/>
+                      <a:headEnd type="none" w="med" len="med"/>
+                      <a:tailEnd type="none" w="med" len="med"/>
+                    </a:lnT>
+                    <a:lnB w="12700" cap="flat" cmpd="sng" algn="ctr">
+                      <a:solidFill>
+                        <a:srgbClr val="000000"/>
+                      </a:solidFill>
+                      <a:prstDash val="solid"/>
+                      <a:round/>
+                      <a:headEnd type="none" w="med" len="med"/>
+                      <a:tailEnd type="none" w="med" len="med"/>
+                    </a:lnB>
+                    <a:noFill/>
+                  </a:tcPr>
+                </a:tc>
+                <a:extLst>
+                  <a:ext uri="{0D108BD9-81ED-4DB2-BD59-A6C34878D82A}">
+                    <a16:rowId xmlns:a16="http://schemas.microsoft.com/office/drawing/2014/main" val="4166277863"/>
+                  </a:ext>
+                </a:extLst>
+              </a:tr>
+              <a:tr h="0">
+                <a:tc>
+                  <a:txBody>
+                    <a:bodyPr/>
+                    <a:lstStyle/>
+                    <a:p>
+                      <a:pPr algn="l" fontAlgn="t">
+                        <a:buNone/>
+                      </a:pPr>
+                      <a:r>
+                        <a:rPr lang="en-US" sz="2400" dirty="0">
+                          <a:solidFill>
+                            <a:schemeClr val="accent6">
+                              <a:lumMod val="60000"/>
+                              <a:lumOff val="40000"/>
+                            </a:schemeClr>
+                          </a:solidFill>
+                          <a:effectLst/>
+                        </a:rPr>
+                        <a:t>Connect facts, trace relationships</a:t>
+                      </a:r>
+                    </a:p>
+                  </a:txBody>
+                  <a:tcPr marL="63500" marR="63500" marT="63500" marB="63500">
+                    <a:lnL w="12700" cap="flat" cmpd="sng" algn="ctr">
+                      <a:solidFill>
+                        <a:srgbClr val="000000"/>
+                      </a:solidFill>
+                      <a:prstDash val="solid"/>
+                      <a:round/>
+                      <a:headEnd type="none" w="med" len="med"/>
+                      <a:tailEnd type="none" w="med" len="med"/>
+                    </a:lnL>
+                    <a:lnR w="12700" cap="flat" cmpd="sng" algn="ctr">
+                      <a:solidFill>
+                        <a:srgbClr val="000000"/>
+                      </a:solidFill>
+                      <a:prstDash val="solid"/>
+                      <a:round/>
+                      <a:headEnd type="none" w="med" len="med"/>
+                      <a:tailEnd type="none" w="med" len="med"/>
+                    </a:lnR>
+                    <a:lnT w="12700" cap="flat" cmpd="sng" algn="ctr">
+                      <a:solidFill>
+                        <a:srgbClr val="000000"/>
+                      </a:solidFill>
+                      <a:prstDash val="solid"/>
+                      <a:round/>
+                      <a:headEnd type="none" w="med" len="med"/>
+                      <a:tailEnd type="none" w="med" len="med"/>
+                    </a:lnT>
+                    <a:lnB w="12700" cap="flat" cmpd="sng" algn="ctr">
+                      <a:solidFill>
+                        <a:srgbClr val="000000"/>
+                      </a:solidFill>
+                      <a:prstDash val="solid"/>
+                      <a:round/>
+                      <a:headEnd type="none" w="med" len="med"/>
+                      <a:tailEnd type="none" w="med" len="med"/>
+                    </a:lnB>
+                    <a:noFill/>
+                  </a:tcPr>
+                </a:tc>
+                <a:tc>
+                  <a:txBody>
+                    <a:bodyPr/>
+                    <a:lstStyle/>
+                    <a:p>
+                      <a:pPr algn="l" fontAlgn="t">
+                        <a:buNone/>
+                      </a:pPr>
+                      <a:r>
+                        <a:rPr lang="en-US" sz="2400" dirty="0">
+                          <a:solidFill>
+                            <a:schemeClr val="accent6">
+                              <a:lumMod val="60000"/>
+                              <a:lumOff val="40000"/>
+                            </a:schemeClr>
+                          </a:solidFill>
+                          <a:effectLst/>
+                        </a:rPr>
+                        <a:t>Direct fact lookups</a:t>
+                      </a:r>
+                    </a:p>
+                  </a:txBody>
+                  <a:tcPr marL="63500" marR="63500" marT="63500" marB="63500">
+                    <a:lnL w="12700" cap="flat" cmpd="sng" algn="ctr">
+                      <a:solidFill>
+                        <a:srgbClr val="000000"/>
+                      </a:solidFill>
+                      <a:prstDash val="solid"/>
+                      <a:round/>
+                      <a:headEnd type="none" w="med" len="med"/>
+                      <a:tailEnd type="none" w="med" len="med"/>
+                    </a:lnL>
+                    <a:lnR w="12700" cap="flat" cmpd="sng" algn="ctr">
+                      <a:solidFill>
+                        <a:srgbClr val="000000"/>
+                      </a:solidFill>
+                      <a:prstDash val="solid"/>
+                      <a:round/>
+                      <a:headEnd type="none" w="med" len="med"/>
+                      <a:tailEnd type="none" w="med" len="med"/>
+                    </a:lnR>
+                    <a:lnT w="12700" cap="flat" cmpd="sng" algn="ctr">
+                      <a:solidFill>
+                        <a:srgbClr val="000000"/>
+                      </a:solidFill>
+                      <a:prstDash val="solid"/>
+                      <a:round/>
+                      <a:headEnd type="none" w="med" len="med"/>
+                      <a:tailEnd type="none" w="med" len="med"/>
+                    </a:lnT>
+                    <a:lnB w="12700" cap="flat" cmpd="sng" algn="ctr">
+                      <a:solidFill>
+                        <a:srgbClr val="000000"/>
+                      </a:solidFill>
+                      <a:prstDash val="solid"/>
+                      <a:round/>
+                      <a:headEnd type="none" w="med" len="med"/>
+                      <a:tailEnd type="none" w="med" len="med"/>
+                    </a:lnB>
+                    <a:noFill/>
+                  </a:tcPr>
+                </a:tc>
+                <a:extLst>
+                  <a:ext uri="{0D108BD9-81ED-4DB2-BD59-A6C34878D82A}">
+                    <a16:rowId xmlns:a16="http://schemas.microsoft.com/office/drawing/2014/main" val="2521640669"/>
+                  </a:ext>
+                </a:extLst>
+              </a:tr>
+              <a:tr h="0">
+                <a:tc>
+                  <a:txBody>
+                    <a:bodyPr/>
+                    <a:lstStyle/>
+                    <a:p>
+                      <a:pPr algn="l" fontAlgn="t">
+                        <a:buNone/>
+                      </a:pPr>
+                      <a:r>
+                        <a:rPr lang="en-US" sz="2400" dirty="0">
+                          <a:solidFill>
+                            <a:schemeClr val="accent6">
+                              <a:lumMod val="60000"/>
+                              <a:lumOff val="40000"/>
+                            </a:schemeClr>
+                          </a:solidFill>
+                          <a:effectLst/>
+                        </a:rPr>
+                        <a:t>Find Themes, trends, full-dataset summaries</a:t>
+                      </a:r>
+                    </a:p>
+                  </a:txBody>
+                  <a:tcPr marL="63500" marR="63500" marT="63500" marB="63500">
+                    <a:lnL w="12700" cap="flat" cmpd="sng" algn="ctr">
+                      <a:solidFill>
+                        <a:srgbClr val="000000"/>
+                      </a:solidFill>
+                      <a:prstDash val="solid"/>
+                      <a:round/>
+                      <a:headEnd type="none" w="med" len="med"/>
+                      <a:tailEnd type="none" w="med" len="med"/>
+                    </a:lnL>
+                    <a:lnR w="12700" cap="flat" cmpd="sng" algn="ctr">
+                      <a:solidFill>
+                        <a:srgbClr val="000000"/>
+                      </a:solidFill>
+                      <a:prstDash val="solid"/>
+                      <a:round/>
+                      <a:headEnd type="none" w="med" len="med"/>
+                      <a:tailEnd type="none" w="med" len="med"/>
+                    </a:lnR>
+                    <a:lnT w="12700" cap="flat" cmpd="sng" algn="ctr">
+                      <a:solidFill>
+                        <a:srgbClr val="000000"/>
+                      </a:solidFill>
+                      <a:prstDash val="solid"/>
+                      <a:round/>
+                      <a:headEnd type="none" w="med" len="med"/>
+                      <a:tailEnd type="none" w="med" len="med"/>
+                    </a:lnT>
+                    <a:lnB w="12700" cap="flat" cmpd="sng" algn="ctr">
+                      <a:solidFill>
+                        <a:srgbClr val="000000"/>
+                      </a:solidFill>
+                      <a:prstDash val="solid"/>
+                      <a:round/>
+                      <a:headEnd type="none" w="med" len="med"/>
+                      <a:tailEnd type="none" w="med" len="med"/>
+                    </a:lnB>
+                    <a:noFill/>
+                  </a:tcPr>
+                </a:tc>
+                <a:tc>
+                  <a:txBody>
+                    <a:bodyPr/>
+                    <a:lstStyle/>
+                    <a:p>
+                      <a:pPr algn="l" fontAlgn="t">
+                        <a:buNone/>
+                      </a:pPr>
+                      <a:r>
+                        <a:rPr lang="en-US" sz="2400">
+                          <a:solidFill>
+                            <a:schemeClr val="accent6">
+                              <a:lumMod val="60000"/>
+                              <a:lumOff val="40000"/>
+                            </a:schemeClr>
+                          </a:solidFill>
+                          <a:effectLst/>
+                        </a:rPr>
+                        <a:t>Answer in a single chunk</a:t>
+                      </a:r>
+                    </a:p>
+                  </a:txBody>
+                  <a:tcPr marL="63500" marR="63500" marT="63500" marB="63500">
+                    <a:lnL w="12700" cap="flat" cmpd="sng" algn="ctr">
+                      <a:solidFill>
+                        <a:srgbClr val="000000"/>
+                      </a:solidFill>
+                      <a:prstDash val="solid"/>
+                      <a:round/>
+                      <a:headEnd type="none" w="med" len="med"/>
+                      <a:tailEnd type="none" w="med" len="med"/>
+                    </a:lnL>
+                    <a:lnR w="12700" cap="flat" cmpd="sng" algn="ctr">
+                      <a:solidFill>
+                        <a:srgbClr val="000000"/>
+                      </a:solidFill>
+                      <a:prstDash val="solid"/>
+                      <a:round/>
+                      <a:headEnd type="none" w="med" len="med"/>
+                      <a:tailEnd type="none" w="med" len="med"/>
+                    </a:lnR>
+                    <a:lnT w="12700" cap="flat" cmpd="sng" algn="ctr">
+                      <a:solidFill>
+                        <a:srgbClr val="000000"/>
+                      </a:solidFill>
+                      <a:prstDash val="solid"/>
+                      <a:round/>
+                      <a:headEnd type="none" w="med" len="med"/>
+                      <a:tailEnd type="none" w="med" len="med"/>
+                    </a:lnT>
+                    <a:lnB w="12700" cap="flat" cmpd="sng" algn="ctr">
+                      <a:solidFill>
+                        <a:srgbClr val="000000"/>
+                      </a:solidFill>
+                      <a:prstDash val="solid"/>
+                      <a:round/>
+                      <a:headEnd type="none" w="med" len="med"/>
+                      <a:tailEnd type="none" w="med" len="med"/>
+                    </a:lnB>
+                    <a:noFill/>
+                  </a:tcPr>
+                </a:tc>
+                <a:extLst>
+                  <a:ext uri="{0D108BD9-81ED-4DB2-BD59-A6C34878D82A}">
+                    <a16:rowId xmlns:a16="http://schemas.microsoft.com/office/drawing/2014/main" val="2831718210"/>
+                  </a:ext>
+                </a:extLst>
+              </a:tr>
+              <a:tr h="0">
+                <a:tc>
+                  <a:txBody>
+                    <a:bodyPr/>
+                    <a:lstStyle/>
+                    <a:p>
+                      <a:pPr algn="l" fontAlgn="t">
+                        <a:buNone/>
+                      </a:pPr>
+                      <a:r>
+                        <a:rPr lang="en-US" sz="2400" dirty="0">
+                          <a:solidFill>
+                            <a:schemeClr val="accent6">
+                              <a:lumMod val="60000"/>
+                              <a:lumOff val="40000"/>
+                            </a:schemeClr>
+                          </a:solidFill>
+                          <a:effectLst/>
+                        </a:rPr>
+                        <a:t>Explainability matters</a:t>
+                      </a:r>
+                    </a:p>
+                  </a:txBody>
+                  <a:tcPr marL="63500" marR="63500" marT="63500" marB="63500">
+                    <a:lnL w="12700" cap="flat" cmpd="sng" algn="ctr">
+                      <a:solidFill>
+                        <a:srgbClr val="000000"/>
+                      </a:solidFill>
+                      <a:prstDash val="solid"/>
+                      <a:round/>
+                      <a:headEnd type="none" w="med" len="med"/>
+                      <a:tailEnd type="none" w="med" len="med"/>
+                    </a:lnL>
+                    <a:lnR w="12700" cap="flat" cmpd="sng" algn="ctr">
+                      <a:solidFill>
+                        <a:srgbClr val="000000"/>
+                      </a:solidFill>
+                      <a:prstDash val="solid"/>
+                      <a:round/>
+                      <a:headEnd type="none" w="med" len="med"/>
+                      <a:tailEnd type="none" w="med" len="med"/>
+                    </a:lnR>
+                    <a:lnT w="12700" cap="flat" cmpd="sng" algn="ctr">
+                      <a:solidFill>
+                        <a:srgbClr val="000000"/>
+                      </a:solidFill>
+                      <a:prstDash val="solid"/>
+                      <a:round/>
+                      <a:headEnd type="none" w="med" len="med"/>
+                      <a:tailEnd type="none" w="med" len="med"/>
+                    </a:lnT>
+                    <a:lnB w="12700" cap="flat" cmpd="sng" algn="ctr">
+                      <a:solidFill>
+                        <a:srgbClr val="000000"/>
+                      </a:solidFill>
+                      <a:prstDash val="solid"/>
+                      <a:round/>
+                      <a:headEnd type="none" w="med" len="med"/>
+                      <a:tailEnd type="none" w="med" len="med"/>
+                    </a:lnB>
+                    <a:noFill/>
+                  </a:tcPr>
+                </a:tc>
+                <a:tc>
+                  <a:txBody>
+                    <a:bodyPr/>
+                    <a:lstStyle/>
+                    <a:p>
+                      <a:pPr algn="l" fontAlgn="t">
+                        <a:buNone/>
+                      </a:pPr>
+                      <a:r>
+                        <a:rPr lang="en-US" sz="2400" dirty="0">
+                          <a:solidFill>
+                            <a:schemeClr val="accent6">
+                              <a:lumMod val="60000"/>
+                              <a:lumOff val="40000"/>
+                            </a:schemeClr>
+                          </a:solidFill>
+                          <a:effectLst/>
+                        </a:rPr>
+                        <a:t>Speed and cost are priority</a:t>
+                      </a:r>
+                    </a:p>
+                  </a:txBody>
+                  <a:tcPr marL="63500" marR="63500" marT="63500" marB="63500">
+                    <a:lnL w="12700" cap="flat" cmpd="sng" algn="ctr">
+                      <a:solidFill>
+                        <a:srgbClr val="000000"/>
+                      </a:solidFill>
+                      <a:prstDash val="solid"/>
+                      <a:round/>
+                      <a:headEnd type="none" w="med" len="med"/>
+                      <a:tailEnd type="none" w="med" len="med"/>
+                    </a:lnL>
+                    <a:lnR w="12700" cap="flat" cmpd="sng" algn="ctr">
+                      <a:solidFill>
+                        <a:srgbClr val="000000"/>
+                      </a:solidFill>
+                      <a:prstDash val="solid"/>
+                      <a:round/>
+                      <a:headEnd type="none" w="med" len="med"/>
+                      <a:tailEnd type="none" w="med" len="med"/>
+                    </a:lnR>
+                    <a:lnT w="12700" cap="flat" cmpd="sng" algn="ctr">
+                      <a:solidFill>
+                        <a:srgbClr val="000000"/>
+                      </a:solidFill>
+                      <a:prstDash val="solid"/>
+                      <a:round/>
+                      <a:headEnd type="none" w="med" len="med"/>
+                      <a:tailEnd type="none" w="med" len="med"/>
+                    </a:lnT>
+                    <a:lnB w="12700" cap="flat" cmpd="sng" algn="ctr">
+                      <a:solidFill>
+                        <a:srgbClr val="000000"/>
+                      </a:solidFill>
+                      <a:prstDash val="solid"/>
+                      <a:round/>
+                      <a:headEnd type="none" w="med" len="med"/>
+                      <a:tailEnd type="none" w="med" len="med"/>
+                    </a:lnB>
+                    <a:noFill/>
+                  </a:tcPr>
+                </a:tc>
+                <a:extLst>
+                  <a:ext uri="{0D108BD9-81ED-4DB2-BD59-A6C34878D82A}">
+                    <a16:rowId xmlns:a16="http://schemas.microsoft.com/office/drawing/2014/main" val="1121206496"/>
+                  </a:ext>
+                </a:extLst>
+              </a:tr>
+              <a:tr h="0">
+                <a:tc>
+                  <a:txBody>
+                    <a:bodyPr/>
+                    <a:lstStyle/>
+                    <a:p>
+                      <a:pPr algn="l" fontAlgn="t">
+                        <a:buNone/>
+                      </a:pPr>
+                      <a:r>
+                        <a:rPr lang="en-US" sz="2400" dirty="0">
+                          <a:solidFill>
+                            <a:schemeClr val="accent6">
+                              <a:lumMod val="60000"/>
+                              <a:lumOff val="40000"/>
+                            </a:schemeClr>
+                          </a:solidFill>
+                          <a:effectLst/>
+                        </a:rPr>
+                        <a:t>Law, policy, research domains</a:t>
+                      </a:r>
+                    </a:p>
+                  </a:txBody>
+                  <a:tcPr marL="63500" marR="63500" marT="63500" marB="63500">
+                    <a:lnL w="12700" cap="flat" cmpd="sng" algn="ctr">
+                      <a:solidFill>
+                        <a:srgbClr val="000000"/>
+                      </a:solidFill>
+                      <a:prstDash val="solid"/>
+                      <a:round/>
+                      <a:headEnd type="none" w="med" len="med"/>
+                      <a:tailEnd type="none" w="med" len="med"/>
+                    </a:lnL>
+                    <a:lnR w="12700" cap="flat" cmpd="sng" algn="ctr">
+                      <a:solidFill>
+                        <a:srgbClr val="000000"/>
+                      </a:solidFill>
+                      <a:prstDash val="solid"/>
+                      <a:round/>
+                      <a:headEnd type="none" w="med" len="med"/>
+                      <a:tailEnd type="none" w="med" len="med"/>
+                    </a:lnR>
+                    <a:lnT w="12700" cap="flat" cmpd="sng" algn="ctr">
+                      <a:solidFill>
+                        <a:srgbClr val="000000"/>
+                      </a:solidFill>
+                      <a:prstDash val="solid"/>
+                      <a:round/>
+                      <a:headEnd type="none" w="med" len="med"/>
+                      <a:tailEnd type="none" w="med" len="med"/>
+                    </a:lnT>
+                    <a:lnB w="12700" cap="flat" cmpd="sng" algn="ctr">
+                      <a:solidFill>
+                        <a:srgbClr val="000000"/>
+                      </a:solidFill>
+                      <a:prstDash val="solid"/>
+                      <a:round/>
+                      <a:headEnd type="none" w="med" len="med"/>
+                      <a:tailEnd type="none" w="med" len="med"/>
+                    </a:lnB>
+                    <a:noFill/>
+                  </a:tcPr>
+                </a:tc>
+                <a:tc>
+                  <a:txBody>
+                    <a:bodyPr/>
+                    <a:lstStyle/>
+                    <a:p>
+                      <a:pPr algn="l" fontAlgn="t">
+                        <a:buNone/>
+                      </a:pPr>
+                      <a:r>
+                        <a:rPr lang="en-US" sz="2400" dirty="0">
+                          <a:solidFill>
+                            <a:schemeClr val="accent6">
+                              <a:lumMod val="60000"/>
+                              <a:lumOff val="40000"/>
+                            </a:schemeClr>
+                          </a:solidFill>
+                          <a:effectLst/>
+                        </a:rPr>
+                        <a:t>No dense cross-doc relationships</a:t>
+                      </a:r>
+                    </a:p>
+                  </a:txBody>
+                  <a:tcPr marL="63500" marR="63500" marT="63500" marB="63500">
+                    <a:lnL w="12700" cap="flat" cmpd="sng" algn="ctr">
+                      <a:solidFill>
+                        <a:srgbClr val="000000"/>
+                      </a:solidFill>
+                      <a:prstDash val="solid"/>
+                      <a:round/>
+                      <a:headEnd type="none" w="med" len="med"/>
+                      <a:tailEnd type="none" w="med" len="med"/>
+                    </a:lnL>
+                    <a:lnR w="12700" cap="flat" cmpd="sng" algn="ctr">
+                      <a:solidFill>
+                        <a:srgbClr val="000000"/>
+                      </a:solidFill>
+                      <a:prstDash val="solid"/>
+                      <a:round/>
+                      <a:headEnd type="none" w="med" len="med"/>
+                      <a:tailEnd type="none" w="med" len="med"/>
+                    </a:lnR>
+                    <a:lnT w="12700" cap="flat" cmpd="sng" algn="ctr">
+                      <a:solidFill>
+                        <a:srgbClr val="000000"/>
+                      </a:solidFill>
+                      <a:prstDash val="solid"/>
+                      <a:round/>
+                      <a:headEnd type="none" w="med" len="med"/>
+                      <a:tailEnd type="none" w="med" len="med"/>
+                    </a:lnT>
+                    <a:lnB w="12700" cap="flat" cmpd="sng" algn="ctr">
+                      <a:solidFill>
+                        <a:srgbClr val="000000"/>
+                      </a:solidFill>
+                      <a:prstDash val="solid"/>
+                      <a:round/>
+                      <a:headEnd type="none" w="med" len="med"/>
+                      <a:tailEnd type="none" w="med" len="med"/>
+                    </a:lnB>
+                    <a:noFill/>
+                  </a:tcPr>
+                </a:tc>
+                <a:extLst>
+                  <a:ext uri="{0D108BD9-81ED-4DB2-BD59-A6C34878D82A}">
+                    <a16:rowId xmlns:a16="http://schemas.microsoft.com/office/drawing/2014/main" val="2139681948"/>
+                  </a:ext>
+                </a:extLst>
+              </a:tr>
+            </a:tbl>
+          </a:graphicData>
+        </a:graphic>
+      </p:graphicFrame>
     </p:spTree>
     <p:extLst>
       <p:ext uri="{BB962C8B-B14F-4D97-AF65-F5344CB8AC3E}">
@@ -7860,7 +10474,7 @@
 </p:sld>
 </file>
 
-<file path=ppt/slides/slide2.xml><?xml version="1.0" encoding="utf-8"?>
+<file path=ppt/slides/slide24.xml><?xml version="1.0" encoding="utf-8"?>
 <p:sld xmlns:a="http://schemas.openxmlformats.org/drawingml/2006/main" xmlns:r="http://schemas.openxmlformats.org/officeDocument/2006/relationships" xmlns:p="http://schemas.openxmlformats.org/presentationml/2006/main">
   <p:cSld>
     <p:spTree>
@@ -7868,7 +10482,7 @@
         <p:cNvPr id="1" name="">
           <a:extLst>
             <a:ext uri="{FF2B5EF4-FFF2-40B4-BE49-F238E27FC236}">
-              <a16:creationId xmlns:a16="http://schemas.microsoft.com/office/drawing/2014/main" id="{DD931D7F-4279-DA2E-FA64-6CF3C441D414}"/>
+              <a16:creationId xmlns:a16="http://schemas.microsoft.com/office/drawing/2014/main" id="{0363C881-BEE3-537D-5BB2-D206DE094BC5}"/>
             </a:ext>
           </a:extLst>
         </p:cNvPr>
@@ -7883,12 +10497,42 @@
           <a:chExt cx="0" cy="0"/>
         </a:xfrm>
       </p:grpSpPr>
+      <p:pic>
+        <p:nvPicPr>
+          <p:cNvPr id="4" name="Picture 3">
+            <a:extLst>
+              <a:ext uri="{FF2B5EF4-FFF2-40B4-BE49-F238E27FC236}">
+                <a16:creationId xmlns:a16="http://schemas.microsoft.com/office/drawing/2014/main" id="{4F2104F4-F545-CBD5-368D-22A6B9665B5D}"/>
+              </a:ext>
+            </a:extLst>
+          </p:cNvPr>
+          <p:cNvPicPr>
+            <a:picLocks noChangeAspect="1"/>
+          </p:cNvPicPr>
+          <p:nvPr/>
+        </p:nvPicPr>
+        <p:blipFill>
+          <a:blip r:embed="rId2"/>
+          <a:stretch>
+            <a:fillRect/>
+          </a:stretch>
+        </p:blipFill>
+        <p:spPr>
+          <a:xfrm>
+            <a:off x="1515617" y="1810511"/>
+            <a:ext cx="7990334" cy="4856261"/>
+          </a:xfrm>
+          <a:prstGeom prst="rect">
+            <a:avLst/>
+          </a:prstGeom>
+        </p:spPr>
+      </p:pic>
       <p:sp>
         <p:nvSpPr>
-          <p:cNvPr id="7" name="TextBox 6">
-            <a:extLst>
-              <a:ext uri="{FF2B5EF4-FFF2-40B4-BE49-F238E27FC236}">
-                <a16:creationId xmlns:a16="http://schemas.microsoft.com/office/drawing/2014/main" id="{15E1C549-05C2-509B-7E55-FC53425D92E1}"/>
+          <p:cNvPr id="6" name="TextBox 5">
+            <a:extLst>
+              <a:ext uri="{FF2B5EF4-FFF2-40B4-BE49-F238E27FC236}">
+                <a16:creationId xmlns:a16="http://schemas.microsoft.com/office/drawing/2014/main" id="{9E51A119-BD20-857F-BDC7-E325B4141AA1}"/>
               </a:ext>
             </a:extLst>
           </p:cNvPr>
@@ -7897,8 +10541,8 @@
         </p:nvSpPr>
         <p:spPr>
           <a:xfrm>
-            <a:off x="841248" y="989552"/>
-            <a:ext cx="8362188" cy="1938992"/>
+            <a:off x="1746504" y="499563"/>
+            <a:ext cx="8343900" cy="461665"/>
           </a:xfrm>
           <a:prstGeom prst="rect">
             <a:avLst/>
@@ -7911,20 +10555,6 @@
           </a:bodyPr>
           <a:lstStyle/>
           <a:p>
-            <a:pPr>
-              <a:buNone/>
-            </a:pPr>
-            <a:r>
-              <a:rPr lang="en-US" sz="2400" dirty="0">
-                <a:solidFill>
-                  <a:schemeClr val="accent6">
-                    <a:lumMod val="60000"/>
-                    <a:lumOff val="40000"/>
-                  </a:schemeClr>
-                </a:solidFill>
-              </a:rPr>
-              <a:t>A </a:t>
-            </a:r>
             <a:r>
               <a:rPr lang="en-US" sz="2400" b="1" dirty="0">
                 <a:solidFill>
@@ -7934,99 +10564,117 @@
                   </a:schemeClr>
                 </a:solidFill>
               </a:rPr>
-              <a:t>Graph Database (Graph DB)</a:t>
-            </a:r>
-            <a:r>
-              <a:rPr lang="en-US" sz="2400" dirty="0">
-                <a:solidFill>
-                  <a:schemeClr val="accent6">
-                    <a:lumMod val="60000"/>
-                    <a:lumOff val="40000"/>
-                  </a:schemeClr>
-                </a:solidFill>
-              </a:rPr>
-              <a:t> is a type of database designed to store and manage data based on </a:t>
-            </a:r>
-            <a:r>
-              <a:rPr lang="en-US" sz="2400" b="1" dirty="0">
-                <a:solidFill>
-                  <a:schemeClr val="accent6">
-                    <a:lumMod val="60000"/>
-                    <a:lumOff val="40000"/>
-                  </a:schemeClr>
-                </a:solidFill>
-              </a:rPr>
-              <a:t>relationships</a:t>
-            </a:r>
-            <a:r>
-              <a:rPr lang="en-US" sz="2400" dirty="0">
-                <a:solidFill>
-                  <a:schemeClr val="accent6">
-                    <a:lumMod val="60000"/>
-                    <a:lumOff val="40000"/>
-                  </a:schemeClr>
-                </a:solidFill>
-              </a:rPr>
-              <a:t> rather than tables.</a:t>
-            </a:r>
-          </a:p>
-          <a:p>
-            <a:pPr>
-              <a:buNone/>
-            </a:pPr>
-            <a:endParaRPr lang="en-US" sz="2400" dirty="0">
-              <a:solidFill>
-                <a:schemeClr val="accent6">
-                  <a:lumMod val="60000"/>
-                  <a:lumOff val="40000"/>
-                </a:schemeClr>
-              </a:solidFill>
-            </a:endParaRPr>
-          </a:p>
-          <a:p>
-            <a:pPr>
-              <a:buNone/>
-            </a:pPr>
-            <a:r>
-              <a:rPr lang="en-US" sz="2400" dirty="0">
-                <a:solidFill>
-                  <a:schemeClr val="accent6">
-                    <a:lumMod val="60000"/>
-                    <a:lumOff val="40000"/>
-                  </a:schemeClr>
-                </a:solidFill>
-              </a:rPr>
-              <a:t>Instead of rows and columns (like in SQL), it uses a structure similar to a </a:t>
-            </a:r>
-            <a:r>
-              <a:rPr lang="en-US" sz="2400" b="1" dirty="0">
-                <a:solidFill>
-                  <a:schemeClr val="accent6">
-                    <a:lumMod val="60000"/>
-                    <a:lumOff val="40000"/>
-                  </a:schemeClr>
-                </a:solidFill>
-              </a:rPr>
-              <a:t>network or graph</a:t>
-            </a:r>
-            <a:r>
-              <a:rPr lang="en-US" sz="2400" dirty="0">
-                <a:solidFill>
-                  <a:schemeClr val="accent6">
-                    <a:lumMod val="60000"/>
-                    <a:lumOff val="40000"/>
-                  </a:schemeClr>
-                </a:solidFill>
-              </a:rPr>
-              <a:t>.</a:t>
+              <a:t>2 phases to Graph RAG – Ingestion and Retrieval</a:t>
             </a:r>
           </a:p>
         </p:txBody>
       </p:sp>
+      <mc:AlternateContent xmlns:mc="http://schemas.openxmlformats.org/markup-compatibility/2006">
+        <mc:Choice xmlns:p14="http://schemas.microsoft.com/office/powerpoint/2010/main" Requires="p14">
+          <p:contentPart p14:bwMode="auto" r:id="rId3">
+            <p14:nvContentPartPr>
+              <p14:cNvPr id="7" name="Ink 6">
+                <a:extLst>
+                  <a:ext uri="{FF2B5EF4-FFF2-40B4-BE49-F238E27FC236}">
+                    <a16:creationId xmlns:a16="http://schemas.microsoft.com/office/drawing/2014/main" id="{5CA4E43B-D5E5-CCAA-717E-E10FF2A7CEE2}"/>
+                  </a:ext>
+                </a:extLst>
+              </p14:cNvPr>
+              <p14:cNvContentPartPr/>
+              <p14:nvPr/>
+            </p14:nvContentPartPr>
+            <p14:xfrm>
+              <a:off x="3713904" y="895896"/>
+              <a:ext cx="1827720" cy="819360"/>
+            </p14:xfrm>
+          </p:contentPart>
+        </mc:Choice>
+        <mc:Fallback>
+          <p:pic>
+            <p:nvPicPr>
+              <p:cNvPr id="7" name="Ink 6">
+                <a:extLst>
+                  <a:ext uri="{FF2B5EF4-FFF2-40B4-BE49-F238E27FC236}">
+                    <a16:creationId xmlns:a16="http://schemas.microsoft.com/office/drawing/2014/main" id="{5CA4E43B-D5E5-CCAA-717E-E10FF2A7CEE2}"/>
+                  </a:ext>
+                </a:extLst>
+              </p:cNvPr>
+              <p:cNvPicPr/>
+              <p:nvPr/>
+            </p:nvPicPr>
+            <p:blipFill>
+              <a:blip r:embed="rId4"/>
+              <a:stretch>
+                <a:fillRect/>
+              </a:stretch>
+            </p:blipFill>
+            <p:spPr>
+              <a:xfrm>
+                <a:off x="3678264" y="860256"/>
+                <a:ext cx="1899360" cy="891000"/>
+              </a:xfrm>
+              <a:prstGeom prst="rect">
+                <a:avLst/>
+              </a:prstGeom>
+            </p:spPr>
+          </p:pic>
+        </mc:Fallback>
+      </mc:AlternateContent>
+      <mc:AlternateContent xmlns:mc="http://schemas.openxmlformats.org/markup-compatibility/2006">
+        <mc:Choice xmlns:p14="http://schemas.microsoft.com/office/powerpoint/2010/main" Requires="p14">
+          <p:contentPart p14:bwMode="auto" r:id="rId5">
+            <p14:nvContentPartPr>
+              <p14:cNvPr id="8" name="Ink 7">
+                <a:extLst>
+                  <a:ext uri="{FF2B5EF4-FFF2-40B4-BE49-F238E27FC236}">
+                    <a16:creationId xmlns:a16="http://schemas.microsoft.com/office/drawing/2014/main" id="{7786E8BB-A311-1A2B-5D41-BE373921944E}"/>
+                  </a:ext>
+                </a:extLst>
+              </p14:cNvPr>
+              <p14:cNvContentPartPr/>
+              <p14:nvPr/>
+            </p14:nvContentPartPr>
+            <p14:xfrm>
+              <a:off x="7049664" y="996696"/>
+              <a:ext cx="399960" cy="700920"/>
+            </p14:xfrm>
+          </p:contentPart>
+        </mc:Choice>
+        <mc:Fallback>
+          <p:pic>
+            <p:nvPicPr>
+              <p:cNvPr id="8" name="Ink 7">
+                <a:extLst>
+                  <a:ext uri="{FF2B5EF4-FFF2-40B4-BE49-F238E27FC236}">
+                    <a16:creationId xmlns:a16="http://schemas.microsoft.com/office/drawing/2014/main" id="{7786E8BB-A311-1A2B-5D41-BE373921944E}"/>
+                  </a:ext>
+                </a:extLst>
+              </p:cNvPr>
+              <p:cNvPicPr/>
+              <p:nvPr/>
+            </p:nvPicPr>
+            <p:blipFill>
+              <a:blip r:embed="rId6"/>
+              <a:stretch>
+                <a:fillRect/>
+              </a:stretch>
+            </p:blipFill>
+            <p:spPr>
+              <a:xfrm>
+                <a:off x="7014024" y="960696"/>
+                <a:ext cx="471600" cy="772560"/>
+              </a:xfrm>
+              <a:prstGeom prst="rect">
+                <a:avLst/>
+              </a:prstGeom>
+            </p:spPr>
+          </p:pic>
+        </mc:Fallback>
+      </mc:AlternateContent>
     </p:spTree>
     <p:extLst>
       <p:ext uri="{BB962C8B-B14F-4D97-AF65-F5344CB8AC3E}">
-        <p14:creationId xmlns:p14="http://schemas.microsoft.com/office/powerpoint/2010/main" val="366625378"/>
+        <p14:creationId xmlns:p14="http://schemas.microsoft.com/office/powerpoint/2010/main" val="1306262746"/>
       </p:ext>
     </p:extLst>
   </p:cSld>
@@ -8036,7 +10684,7 @@
 </p:sld>
 </file>
 
-<file path=ppt/slides/slide20.xml><?xml version="1.0" encoding="utf-8"?>
+<file path=ppt/slides/slide25.xml><?xml version="1.0" encoding="utf-8"?>
 <p:sld xmlns:a="http://schemas.openxmlformats.org/drawingml/2006/main" xmlns:r="http://schemas.openxmlformats.org/officeDocument/2006/relationships" xmlns:p="http://schemas.openxmlformats.org/presentationml/2006/main">
   <p:cSld>
     <p:spTree>
@@ -8158,7 +10806,7 @@
 </p:sld>
 </file>
 
-<file path=ppt/slides/slide21.xml><?xml version="1.0" encoding="utf-8"?>
+<file path=ppt/slides/slide26.xml><?xml version="1.0" encoding="utf-8"?>
 <p:sld xmlns:a="http://schemas.openxmlformats.org/drawingml/2006/main" xmlns:r="http://schemas.openxmlformats.org/officeDocument/2006/relationships" xmlns:p="http://schemas.openxmlformats.org/presentationml/2006/main">
   <p:cSld>
     <p:spTree>
@@ -8194,7 +10842,7 @@
 </p:sld>
 </file>
 
-<file path=ppt/slides/slide22.xml><?xml version="1.0" encoding="utf-8"?>
+<file path=ppt/slides/slide27.xml><?xml version="1.0" encoding="utf-8"?>
 <p:sld xmlns:a="http://schemas.openxmlformats.org/drawingml/2006/main" xmlns:r="http://schemas.openxmlformats.org/officeDocument/2006/relationships" xmlns:p="http://schemas.openxmlformats.org/presentationml/2006/main">
   <p:cSld>
     <p:spTree>
@@ -8429,8 +11077,8 @@
         </p:nvSpPr>
         <p:spPr>
           <a:xfrm>
-            <a:off x="603504" y="1053560"/>
-            <a:ext cx="10735056" cy="5262979"/>
+            <a:off x="256032" y="117693"/>
+            <a:ext cx="11823192" cy="6740307"/>
           </a:xfrm>
           <a:prstGeom prst="rect">
             <a:avLst/>
@@ -8452,29 +11100,7 @@
                   </a:schemeClr>
                 </a:solidFill>
               </a:rPr>
-              <a:t>Need for </a:t>
-            </a:r>
-            <a:r>
-              <a:rPr lang="en-US" sz="2400" b="1" dirty="0" err="1">
-                <a:solidFill>
-                  <a:schemeClr val="accent6">
-                    <a:lumMod val="60000"/>
-                    <a:lumOff val="40000"/>
-                  </a:schemeClr>
-                </a:solidFill>
-              </a:rPr>
-              <a:t>GraphDB</a:t>
-            </a:r>
-            <a:r>
-              <a:rPr lang="en-US" sz="2400" b="1" dirty="0">
-                <a:solidFill>
-                  <a:schemeClr val="accent6">
-                    <a:lumMod val="60000"/>
-                    <a:lumOff val="40000"/>
-                  </a:schemeClr>
-                </a:solidFill>
-              </a:rPr>
-              <a:t>: </a:t>
+              <a:t>Need for Graph DB: </a:t>
             </a:r>
           </a:p>
           <a:p>
@@ -8497,7 +11123,7 @@
                   </a:schemeClr>
                 </a:solidFill>
               </a:rPr>
-              <a:t>Vector databases fail when an AI needs to understand </a:t>
+              <a:t>Vector DB fail when an AI needs to understand </a:t>
             </a:r>
             <a:r>
               <a:rPr lang="en-US" sz="2400" b="1" dirty="0">
@@ -8563,26 +11189,16 @@
           </a:p>
           <a:p>
             <a:r>
-              <a:rPr lang="en-US" sz="2400" i="1" dirty="0">
-                <a:solidFill>
-                  <a:schemeClr val="accent6">
-                    <a:lumMod val="60000"/>
-                    <a:lumOff val="40000"/>
-                  </a:schemeClr>
-                </a:solidFill>
-              </a:rPr>
-              <a:t>“Find posts liked by people Ash follows ?”</a:t>
-            </a:r>
-          </a:p>
-          <a:p>
-            <a:endParaRPr lang="en-US" sz="2400" b="1" dirty="0">
-              <a:solidFill>
-                <a:schemeClr val="accent6">
-                  <a:lumMod val="60000"/>
-                  <a:lumOff val="40000"/>
-                </a:schemeClr>
-              </a:solidFill>
-            </a:endParaRPr>
+              <a:rPr lang="en-US" sz="2400" dirty="0">
+                <a:solidFill>
+                  <a:schemeClr val="accent6">
+                    <a:lumMod val="60000"/>
+                    <a:lumOff val="40000"/>
+                  </a:schemeClr>
+                </a:solidFill>
+              </a:rPr>
+              <a:t>Ash work in Loxford. Ash also owns restaurants. He owns a house in Berlin and lives here. His friends ….(more text here)</a:t>
+            </a:r>
           </a:p>
           <a:p>
             <a:endParaRPr lang="en-US" sz="2400" dirty="0">
@@ -8604,65 +11220,84 @@
                   </a:schemeClr>
                 </a:solidFill>
               </a:rPr>
-              <a:t> 2) </a:t>
-            </a:r>
-            <a:r>
-              <a:rPr lang="en-US" sz="2400" b="1" dirty="0">
-                <a:solidFill>
-                  <a:schemeClr val="accent6">
-                    <a:lumMod val="60000"/>
-                    <a:lumOff val="40000"/>
-                  </a:schemeClr>
-                </a:solidFill>
-              </a:rPr>
-              <a:t>Corporate Supply Chain Risk Management &amp; Compliance</a:t>
-            </a:r>
-            <a:r>
-              <a:rPr lang="en-US" sz="2400" dirty="0">
-                <a:solidFill>
-                  <a:schemeClr val="accent6">
-                    <a:lumMod val="60000"/>
-                    <a:lumOff val="40000"/>
-                  </a:schemeClr>
-                </a:solidFill>
-              </a:rPr>
-              <a:t>.</a:t>
-            </a:r>
+              <a:t>He follows posts by Jay and Nancy. They both work in Loxford. The type of post that Jay, Indian resident, writes about is Math and Chemistry but he does not like it. On the other hand, Nancy, she writes posts about Poems and Literature and she likes Literature.  Nancy is living near Ash.</a:t>
+            </a:r>
+          </a:p>
+          <a:p>
+            <a:endParaRPr lang="en-US" sz="2400" dirty="0">
+              <a:solidFill>
+                <a:schemeClr val="accent6">
+                  <a:lumMod val="60000"/>
+                  <a:lumOff val="40000"/>
+                </a:schemeClr>
+              </a:solidFill>
+            </a:endParaRPr>
           </a:p>
           <a:p>
             <a:r>
               <a:rPr lang="en-US" sz="2400" i="1" dirty="0">
                 <a:solidFill>
-                  <a:schemeClr val="accent6">
-                    <a:lumMod val="60000"/>
-                    <a:lumOff val="40000"/>
-                  </a:schemeClr>
-                </a:solidFill>
-              </a:rPr>
-              <a:t>"Are we sourcing components from any supplier owned by or connected to </a:t>
-            </a:r>
-            <a:r>
-              <a:rPr lang="en-US" sz="2400" b="1" i="1" dirty="0">
-                <a:solidFill>
-                  <a:schemeClr val="accent6">
-                    <a:lumMod val="60000"/>
-                    <a:lumOff val="40000"/>
-                  </a:schemeClr>
-                </a:solidFill>
-              </a:rPr>
-              <a:t>Company X</a:t>
+                  <a:schemeClr val="accent4">
+                    <a:lumMod val="60000"/>
+                    <a:lumOff val="40000"/>
+                  </a:schemeClr>
+                </a:solidFill>
+              </a:rPr>
+              <a:t>“Find people who work in Loxford and live in Berlin ?”   </a:t>
             </a:r>
             <a:r>
               <a:rPr lang="en-US" sz="2400" i="1" dirty="0">
                 <a:solidFill>
-                  <a:schemeClr val="accent6">
-                    <a:lumMod val="60000"/>
-                    <a:lumOff val="40000"/>
-                  </a:schemeClr>
-                </a:solidFill>
-              </a:rPr>
-              <a:t>, which was recently blacklisted?"</a:t>
-            </a:r>
+                  <a:schemeClr val="accent4">
+                    <a:lumMod val="60000"/>
+                    <a:lumOff val="40000"/>
+                  </a:schemeClr>
+                </a:solidFill>
+                <a:sym typeface="Wingdings" panose="05000000000000000000" pitchFamily="2" charset="2"/>
+              </a:rPr>
+              <a:t> Answer: Ash and Nancy</a:t>
+            </a:r>
+            <a:endParaRPr lang="en-US" sz="2400" dirty="0">
+              <a:solidFill>
+                <a:schemeClr val="accent4">
+                  <a:lumMod val="60000"/>
+                  <a:lumOff val="40000"/>
+                </a:schemeClr>
+              </a:solidFill>
+            </a:endParaRPr>
+          </a:p>
+          <a:p>
+            <a:r>
+              <a:rPr lang="en-US" sz="2400" i="1" dirty="0">
+                <a:solidFill>
+                  <a:schemeClr val="accent4">
+                    <a:lumMod val="60000"/>
+                    <a:lumOff val="40000"/>
+                  </a:schemeClr>
+                </a:solidFill>
+              </a:rPr>
+              <a:t>“Find topics liked by people Ash follows ?”                        </a:t>
+            </a:r>
+            <a:r>
+              <a:rPr lang="en-US" sz="2400" i="1" dirty="0">
+                <a:solidFill>
+                  <a:schemeClr val="accent4">
+                    <a:lumMod val="60000"/>
+                    <a:lumOff val="40000"/>
+                  </a:schemeClr>
+                </a:solidFill>
+                <a:sym typeface="Wingdings" panose="05000000000000000000" pitchFamily="2" charset="2"/>
+              </a:rPr>
+              <a:t> Answer: Literature</a:t>
+            </a:r>
+            <a:endParaRPr lang="en-US" sz="2400" i="1" dirty="0">
+              <a:solidFill>
+                <a:schemeClr val="accent4">
+                  <a:lumMod val="60000"/>
+                  <a:lumOff val="40000"/>
+                </a:schemeClr>
+              </a:solidFill>
+            </a:endParaRPr>
           </a:p>
         </p:txBody>
       </p:sp>
@@ -8680,6 +11315,630 @@
 </file>
 
 <file path=ppt/slides/slide4.xml><?xml version="1.0" encoding="utf-8"?>
+<p:sld xmlns:a="http://schemas.openxmlformats.org/drawingml/2006/main" xmlns:r="http://schemas.openxmlformats.org/officeDocument/2006/relationships" xmlns:p="http://schemas.openxmlformats.org/presentationml/2006/main">
+  <p:cSld>
+    <p:spTree>
+      <p:nvGrpSpPr>
+        <p:cNvPr id="1" name="">
+          <a:extLst>
+            <a:ext uri="{FF2B5EF4-FFF2-40B4-BE49-F238E27FC236}">
+              <a16:creationId xmlns:a16="http://schemas.microsoft.com/office/drawing/2014/main" id="{BBEF4B19-98A8-9DD9-3729-AA08FE9374FE}"/>
+            </a:ext>
+          </a:extLst>
+        </p:cNvPr>
+        <p:cNvGrpSpPr/>
+        <p:nvPr/>
+      </p:nvGrpSpPr>
+      <p:grpSpPr>
+        <a:xfrm>
+          <a:off x="0" y="0"/>
+          <a:ext cx="0" cy="0"/>
+          <a:chOff x="0" y="0"/>
+          <a:chExt cx="0" cy="0"/>
+        </a:xfrm>
+      </p:grpSpPr>
+      <p:sp>
+        <p:nvSpPr>
+          <p:cNvPr id="7" name="TextBox 6">
+            <a:extLst>
+              <a:ext uri="{FF2B5EF4-FFF2-40B4-BE49-F238E27FC236}">
+                <a16:creationId xmlns:a16="http://schemas.microsoft.com/office/drawing/2014/main" id="{1BF03E52-C50F-CB31-2A7B-EA563365096A}"/>
+              </a:ext>
+            </a:extLst>
+          </p:cNvPr>
+          <p:cNvSpPr txBox="1"/>
+          <p:nvPr/>
+        </p:nvSpPr>
+        <p:spPr>
+          <a:xfrm>
+            <a:off x="431292" y="294939"/>
+            <a:ext cx="11329416" cy="1200329"/>
+          </a:xfrm>
+          <a:prstGeom prst="rect">
+            <a:avLst/>
+          </a:prstGeom>
+          <a:noFill/>
+        </p:spPr>
+        <p:txBody>
+          <a:bodyPr wrap="square">
+            <a:spAutoFit/>
+          </a:bodyPr>
+          <a:lstStyle/>
+          <a:p>
+            <a:r>
+              <a:rPr lang="en-US" sz="2400" b="1" dirty="0">
+                <a:solidFill>
+                  <a:schemeClr val="accent6">
+                    <a:lumMod val="60000"/>
+                    <a:lumOff val="40000"/>
+                  </a:schemeClr>
+                </a:solidFill>
+              </a:rPr>
+              <a:t>Need for Graph DB: </a:t>
+            </a:r>
+          </a:p>
+          <a:p>
+            <a:endParaRPr lang="en-US" sz="2400" dirty="0">
+              <a:solidFill>
+                <a:schemeClr val="accent6">
+                  <a:lumMod val="60000"/>
+                  <a:lumOff val="40000"/>
+                </a:schemeClr>
+              </a:solidFill>
+            </a:endParaRPr>
+          </a:p>
+          <a:p>
+            <a:r>
+              <a:rPr lang="en-US" sz="2400" dirty="0">
+                <a:solidFill>
+                  <a:schemeClr val="accent6">
+                    <a:lumMod val="60000"/>
+                    <a:lumOff val="40000"/>
+                  </a:schemeClr>
+                </a:solidFill>
+              </a:rPr>
+              <a:t>2) </a:t>
+            </a:r>
+            <a:r>
+              <a:rPr lang="en-US" sz="2400" b="1" dirty="0">
+                <a:solidFill>
+                  <a:schemeClr val="accent6">
+                    <a:lumMod val="60000"/>
+                    <a:lumOff val="40000"/>
+                  </a:schemeClr>
+                </a:solidFill>
+              </a:rPr>
+              <a:t>Accuracy of vector DB drops as documents increase</a:t>
+            </a:r>
+          </a:p>
+        </p:txBody>
+      </p:sp>
+      <p:pic>
+        <p:nvPicPr>
+          <p:cNvPr id="3" name="Picture 2">
+            <a:extLst>
+              <a:ext uri="{FF2B5EF4-FFF2-40B4-BE49-F238E27FC236}">
+                <a16:creationId xmlns:a16="http://schemas.microsoft.com/office/drawing/2014/main" id="{8444A526-15AF-9A19-322C-D637AA229192}"/>
+              </a:ext>
+            </a:extLst>
+          </p:cNvPr>
+          <p:cNvPicPr>
+            <a:picLocks noChangeAspect="1"/>
+          </p:cNvPicPr>
+          <p:nvPr/>
+        </p:nvPicPr>
+        <p:blipFill>
+          <a:blip r:embed="rId2"/>
+          <a:stretch>
+            <a:fillRect/>
+          </a:stretch>
+        </p:blipFill>
+        <p:spPr>
+          <a:xfrm>
+            <a:off x="731520" y="1806226"/>
+            <a:ext cx="7924498" cy="4022958"/>
+          </a:xfrm>
+          <a:prstGeom prst="rect">
+            <a:avLst/>
+          </a:prstGeom>
+        </p:spPr>
+      </p:pic>
+      <p:sp>
+        <p:nvSpPr>
+          <p:cNvPr id="5" name="TextBox 4">
+            <a:extLst>
+              <a:ext uri="{FF2B5EF4-FFF2-40B4-BE49-F238E27FC236}">
+                <a16:creationId xmlns:a16="http://schemas.microsoft.com/office/drawing/2014/main" id="{BF097E3F-D9CA-62B0-261A-13A43FC0EF34}"/>
+              </a:ext>
+            </a:extLst>
+          </p:cNvPr>
+          <p:cNvSpPr txBox="1"/>
+          <p:nvPr/>
+        </p:nvSpPr>
+        <p:spPr>
+          <a:xfrm>
+            <a:off x="237744" y="6140142"/>
+            <a:ext cx="11850624" cy="461665"/>
+          </a:xfrm>
+          <a:prstGeom prst="rect">
+            <a:avLst/>
+          </a:prstGeom>
+          <a:noFill/>
+        </p:spPr>
+        <p:txBody>
+          <a:bodyPr wrap="square">
+            <a:spAutoFit/>
+          </a:bodyPr>
+          <a:lstStyle/>
+          <a:p>
+            <a:r>
+              <a:rPr lang="en-US" sz="2400" dirty="0">
+                <a:solidFill>
+                  <a:schemeClr val="accent6">
+                    <a:lumMod val="60000"/>
+                    <a:lumOff val="40000"/>
+                  </a:schemeClr>
+                </a:solidFill>
+              </a:rPr>
+              <a:t>Reason -&gt; More document -&gt; More Vector in embedding  space -&gt; harder to find right vectors</a:t>
+            </a:r>
+          </a:p>
+        </p:txBody>
+      </p:sp>
+    </p:spTree>
+    <p:extLst>
+      <p:ext uri="{BB962C8B-B14F-4D97-AF65-F5344CB8AC3E}">
+        <p14:creationId xmlns:p14="http://schemas.microsoft.com/office/powerpoint/2010/main" val="4119184548"/>
+      </p:ext>
+    </p:extLst>
+  </p:cSld>
+  <p:clrMapOvr>
+    <a:masterClrMapping/>
+  </p:clrMapOvr>
+</p:sld>
+</file>
+
+<file path=ppt/slides/slide5.xml><?xml version="1.0" encoding="utf-8"?>
+<p:sld xmlns:a="http://schemas.openxmlformats.org/drawingml/2006/main" xmlns:r="http://schemas.openxmlformats.org/officeDocument/2006/relationships" xmlns:p="http://schemas.openxmlformats.org/presentationml/2006/main">
+  <p:cSld>
+    <p:spTree>
+      <p:nvGrpSpPr>
+        <p:cNvPr id="1" name="">
+          <a:extLst>
+            <a:ext uri="{FF2B5EF4-FFF2-40B4-BE49-F238E27FC236}">
+              <a16:creationId xmlns:a16="http://schemas.microsoft.com/office/drawing/2014/main" id="{B82542BA-3CB5-4CEA-D80B-A368E1BD2910}"/>
+            </a:ext>
+          </a:extLst>
+        </p:cNvPr>
+        <p:cNvGrpSpPr/>
+        <p:nvPr/>
+      </p:nvGrpSpPr>
+      <p:grpSpPr>
+        <a:xfrm>
+          <a:off x="0" y="0"/>
+          <a:ext cx="0" cy="0"/>
+          <a:chOff x="0" y="0"/>
+          <a:chExt cx="0" cy="0"/>
+        </a:xfrm>
+      </p:grpSpPr>
+      <p:sp>
+        <p:nvSpPr>
+          <p:cNvPr id="7" name="TextBox 6">
+            <a:extLst>
+              <a:ext uri="{FF2B5EF4-FFF2-40B4-BE49-F238E27FC236}">
+                <a16:creationId xmlns:a16="http://schemas.microsoft.com/office/drawing/2014/main" id="{EF2F6530-D00E-BE88-1D1B-5B8D1FDDDAEB}"/>
+              </a:ext>
+            </a:extLst>
+          </p:cNvPr>
+          <p:cNvSpPr txBox="1"/>
+          <p:nvPr/>
+        </p:nvSpPr>
+        <p:spPr>
+          <a:xfrm>
+            <a:off x="566928" y="487025"/>
+            <a:ext cx="10735056" cy="461665"/>
+          </a:xfrm>
+          <a:prstGeom prst="rect">
+            <a:avLst/>
+          </a:prstGeom>
+          <a:noFill/>
+        </p:spPr>
+        <p:txBody>
+          <a:bodyPr wrap="square">
+            <a:spAutoFit/>
+          </a:bodyPr>
+          <a:lstStyle/>
+          <a:p>
+            <a:r>
+              <a:rPr lang="en-US" sz="2400" b="1" dirty="0">
+                <a:solidFill>
+                  <a:schemeClr val="accent6">
+                    <a:lumMod val="60000"/>
+                    <a:lumOff val="40000"/>
+                  </a:schemeClr>
+                </a:solidFill>
+              </a:rPr>
+              <a:t>Need for Graph DB: </a:t>
+            </a:r>
+          </a:p>
+        </p:txBody>
+      </p:sp>
+      <p:sp>
+        <p:nvSpPr>
+          <p:cNvPr id="3" name="TextBox 2">
+            <a:extLst>
+              <a:ext uri="{FF2B5EF4-FFF2-40B4-BE49-F238E27FC236}">
+                <a16:creationId xmlns:a16="http://schemas.microsoft.com/office/drawing/2014/main" id="{13DCC3C4-A9B3-5A67-3FD3-7CB508D79200}"/>
+              </a:ext>
+            </a:extLst>
+          </p:cNvPr>
+          <p:cNvSpPr txBox="1"/>
+          <p:nvPr/>
+        </p:nvSpPr>
+        <p:spPr>
+          <a:xfrm>
+            <a:off x="417576" y="1032617"/>
+            <a:ext cx="11231880" cy="4893647"/>
+          </a:xfrm>
+          <a:prstGeom prst="rect">
+            <a:avLst/>
+          </a:prstGeom>
+          <a:noFill/>
+        </p:spPr>
+        <p:txBody>
+          <a:bodyPr wrap="square">
+            <a:spAutoFit/>
+          </a:bodyPr>
+          <a:lstStyle/>
+          <a:p>
+            <a:r>
+              <a:rPr lang="en-US" sz="2400" b="1" dirty="0">
+                <a:solidFill>
+                  <a:schemeClr val="accent6">
+                    <a:lumMod val="60000"/>
+                    <a:lumOff val="40000"/>
+                  </a:schemeClr>
+                </a:solidFill>
+              </a:rPr>
+              <a:t>3) Vector DB struggles if information is spread across the whole document.</a:t>
+            </a:r>
+          </a:p>
+          <a:p>
+            <a:endParaRPr lang="en-US" sz="2400" i="1" dirty="0">
+              <a:solidFill>
+                <a:schemeClr val="accent6">
+                  <a:lumMod val="60000"/>
+                  <a:lumOff val="40000"/>
+                </a:schemeClr>
+              </a:solidFill>
+            </a:endParaRPr>
+          </a:p>
+          <a:p>
+            <a:r>
+              <a:rPr lang="en-US" sz="2400" dirty="0">
+                <a:solidFill>
+                  <a:schemeClr val="accent6">
+                    <a:lumMod val="60000"/>
+                    <a:lumOff val="40000"/>
+                  </a:schemeClr>
+                </a:solidFill>
+              </a:rPr>
+              <a:t>&lt;Paragraph about company Loxford detailing its history&gt;</a:t>
+            </a:r>
+          </a:p>
+          <a:p>
+            <a:endParaRPr lang="en-US" sz="2400" dirty="0">
+              <a:solidFill>
+                <a:schemeClr val="accent6">
+                  <a:lumMod val="60000"/>
+                  <a:lumOff val="40000"/>
+                </a:schemeClr>
+              </a:solidFill>
+            </a:endParaRPr>
+          </a:p>
+          <a:p>
+            <a:r>
+              <a:rPr lang="en-US" sz="2400" dirty="0">
+                <a:solidFill>
+                  <a:schemeClr val="accent6">
+                    <a:lumMod val="60000"/>
+                    <a:lumOff val="40000"/>
+                  </a:schemeClr>
+                </a:solidFill>
+              </a:rPr>
+              <a:t>&lt;Paragraph about Loxford and its business partners and its suppliers&gt;</a:t>
+            </a:r>
+          </a:p>
+          <a:p>
+            <a:endParaRPr lang="en-US" sz="2400" dirty="0">
+              <a:solidFill>
+                <a:schemeClr val="accent6">
+                  <a:lumMod val="60000"/>
+                  <a:lumOff val="40000"/>
+                </a:schemeClr>
+              </a:solidFill>
+            </a:endParaRPr>
+          </a:p>
+          <a:p>
+            <a:r>
+              <a:rPr lang="en-US" sz="2400" dirty="0">
+                <a:solidFill>
+                  <a:schemeClr val="accent6">
+                    <a:lumMod val="60000"/>
+                    <a:lumOff val="40000"/>
+                  </a:schemeClr>
+                </a:solidFill>
+              </a:rPr>
+              <a:t>&lt;Paragraph about all the companies that have been blacklisted by Brazil&gt;</a:t>
+            </a:r>
+          </a:p>
+          <a:p>
+            <a:endParaRPr lang="en-US" sz="2400" i="1" dirty="0">
+              <a:solidFill>
+                <a:schemeClr val="accent6">
+                  <a:lumMod val="60000"/>
+                  <a:lumOff val="40000"/>
+                </a:schemeClr>
+              </a:solidFill>
+            </a:endParaRPr>
+          </a:p>
+          <a:p>
+            <a:r>
+              <a:rPr lang="en-US" sz="2400" dirty="0">
+                <a:solidFill>
+                  <a:schemeClr val="accent6">
+                    <a:lumMod val="60000"/>
+                    <a:lumOff val="40000"/>
+                  </a:schemeClr>
+                </a:solidFill>
+              </a:rPr>
+              <a:t>&lt;Paragraph about all the companies that have trade embargo&gt;</a:t>
+            </a:r>
+          </a:p>
+          <a:p>
+            <a:endParaRPr lang="en-US" sz="2400" i="1" dirty="0">
+              <a:solidFill>
+                <a:schemeClr val="accent6">
+                  <a:lumMod val="60000"/>
+                  <a:lumOff val="40000"/>
+                </a:schemeClr>
+              </a:solidFill>
+            </a:endParaRPr>
+          </a:p>
+          <a:p>
+            <a:endParaRPr lang="en-US" sz="2400" i="1" dirty="0">
+              <a:solidFill>
+                <a:schemeClr val="accent6">
+                  <a:lumMod val="60000"/>
+                  <a:lumOff val="40000"/>
+                </a:schemeClr>
+              </a:solidFill>
+            </a:endParaRPr>
+          </a:p>
+          <a:p>
+            <a:r>
+              <a:rPr lang="en-US" sz="2400" i="1" dirty="0">
+                <a:solidFill>
+                  <a:schemeClr val="accent6">
+                    <a:lumMod val="60000"/>
+                    <a:lumOff val="40000"/>
+                  </a:schemeClr>
+                </a:solidFill>
+              </a:rPr>
+              <a:t>“Is Loxford sourcing components from any supplier owned by or connected to </a:t>
+            </a:r>
+            <a:r>
+              <a:rPr lang="en-US" sz="2400" b="1" i="1" dirty="0">
+                <a:solidFill>
+                  <a:schemeClr val="accent6">
+                    <a:lumMod val="60000"/>
+                    <a:lumOff val="40000"/>
+                  </a:schemeClr>
+                </a:solidFill>
+              </a:rPr>
+              <a:t>Company X</a:t>
+            </a:r>
+            <a:r>
+              <a:rPr lang="en-US" sz="2400" i="1" dirty="0">
+                <a:solidFill>
+                  <a:schemeClr val="accent6">
+                    <a:lumMod val="60000"/>
+                    <a:lumOff val="40000"/>
+                  </a:schemeClr>
+                </a:solidFill>
+              </a:rPr>
+              <a:t>, which was recently blacklisted by the Government of Brazil due to trade embargo? "</a:t>
+            </a:r>
+          </a:p>
+        </p:txBody>
+      </p:sp>
+    </p:spTree>
+    <p:extLst>
+      <p:ext uri="{BB962C8B-B14F-4D97-AF65-F5344CB8AC3E}">
+        <p14:creationId xmlns:p14="http://schemas.microsoft.com/office/powerpoint/2010/main" val="1149316699"/>
+      </p:ext>
+    </p:extLst>
+  </p:cSld>
+  <p:clrMapOvr>
+    <a:masterClrMapping/>
+  </p:clrMapOvr>
+</p:sld>
+</file>
+
+<file path=ppt/slides/slide6.xml><?xml version="1.0" encoding="utf-8"?>
+<p:sld xmlns:a="http://schemas.openxmlformats.org/drawingml/2006/main" xmlns:r="http://schemas.openxmlformats.org/officeDocument/2006/relationships" xmlns:p="http://schemas.openxmlformats.org/presentationml/2006/main">
+  <p:cSld>
+    <p:spTree>
+      <p:nvGrpSpPr>
+        <p:cNvPr id="1" name="">
+          <a:extLst>
+            <a:ext uri="{FF2B5EF4-FFF2-40B4-BE49-F238E27FC236}">
+              <a16:creationId xmlns:a16="http://schemas.microsoft.com/office/drawing/2014/main" id="{16AB36A8-A791-9559-F668-26774B4A1912}"/>
+            </a:ext>
+          </a:extLst>
+        </p:cNvPr>
+        <p:cNvGrpSpPr/>
+        <p:nvPr/>
+      </p:nvGrpSpPr>
+      <p:grpSpPr>
+        <a:xfrm>
+          <a:off x="0" y="0"/>
+          <a:ext cx="0" cy="0"/>
+          <a:chOff x="0" y="0"/>
+          <a:chExt cx="0" cy="0"/>
+        </a:xfrm>
+      </p:grpSpPr>
+      <p:sp>
+        <p:nvSpPr>
+          <p:cNvPr id="7" name="TextBox 6">
+            <a:extLst>
+              <a:ext uri="{FF2B5EF4-FFF2-40B4-BE49-F238E27FC236}">
+                <a16:creationId xmlns:a16="http://schemas.microsoft.com/office/drawing/2014/main" id="{62E55FC5-B8D7-123F-BEFE-1D6153980A8B}"/>
+              </a:ext>
+            </a:extLst>
+          </p:cNvPr>
+          <p:cNvSpPr txBox="1"/>
+          <p:nvPr/>
+        </p:nvSpPr>
+        <p:spPr>
+          <a:xfrm>
+            <a:off x="566928" y="487025"/>
+            <a:ext cx="10735056" cy="461665"/>
+          </a:xfrm>
+          <a:prstGeom prst="rect">
+            <a:avLst/>
+          </a:prstGeom>
+          <a:noFill/>
+        </p:spPr>
+        <p:txBody>
+          <a:bodyPr wrap="square">
+            <a:spAutoFit/>
+          </a:bodyPr>
+          <a:lstStyle/>
+          <a:p>
+            <a:r>
+              <a:rPr lang="en-US" sz="2400" b="1" dirty="0">
+                <a:solidFill>
+                  <a:schemeClr val="accent6">
+                    <a:lumMod val="60000"/>
+                    <a:lumOff val="40000"/>
+                  </a:schemeClr>
+                </a:solidFill>
+              </a:rPr>
+              <a:t>Need for Graph DB: </a:t>
+            </a:r>
+          </a:p>
+        </p:txBody>
+      </p:sp>
+      <p:sp>
+        <p:nvSpPr>
+          <p:cNvPr id="5" name="TextBox 4">
+            <a:extLst>
+              <a:ext uri="{FF2B5EF4-FFF2-40B4-BE49-F238E27FC236}">
+                <a16:creationId xmlns:a16="http://schemas.microsoft.com/office/drawing/2014/main" id="{98C79A60-008E-B1A5-3DFE-7A9E8F51FBCC}"/>
+              </a:ext>
+            </a:extLst>
+          </p:cNvPr>
+          <p:cNvSpPr txBox="1"/>
+          <p:nvPr/>
+        </p:nvSpPr>
+        <p:spPr>
+          <a:xfrm>
+            <a:off x="429768" y="1194161"/>
+            <a:ext cx="10735056" cy="1200329"/>
+          </a:xfrm>
+          <a:prstGeom prst="rect">
+            <a:avLst/>
+          </a:prstGeom>
+          <a:noFill/>
+        </p:spPr>
+        <p:txBody>
+          <a:bodyPr wrap="square">
+            <a:spAutoFit/>
+          </a:bodyPr>
+          <a:lstStyle/>
+          <a:p>
+            <a:r>
+              <a:rPr lang="en-US" sz="2400" b="1" dirty="0">
+                <a:solidFill>
+                  <a:schemeClr val="accent6">
+                    <a:lumMod val="60000"/>
+                    <a:lumOff val="40000"/>
+                  </a:schemeClr>
+                </a:solidFill>
+              </a:rPr>
+              <a:t>4)</a:t>
+            </a:r>
+            <a:r>
+              <a:rPr lang="en-US" sz="2400" dirty="0">
+                <a:solidFill>
+                  <a:schemeClr val="accent6">
+                    <a:lumMod val="60000"/>
+                    <a:lumOff val="40000"/>
+                  </a:schemeClr>
+                </a:solidFill>
+              </a:rPr>
+              <a:t> </a:t>
+            </a:r>
+            <a:r>
+              <a:rPr lang="en-US" sz="2400" b="1" dirty="0">
+                <a:solidFill>
+                  <a:schemeClr val="accent6">
+                    <a:lumMod val="60000"/>
+                    <a:lumOff val="40000"/>
+                  </a:schemeClr>
+                </a:solidFill>
+              </a:rPr>
+              <a:t>Vector DB cannot provide Holistic view</a:t>
+            </a:r>
+            <a:endParaRPr lang="en-US" sz="2400" dirty="0">
+              <a:solidFill>
+                <a:schemeClr val="accent6">
+                  <a:lumMod val="60000"/>
+                  <a:lumOff val="40000"/>
+                </a:schemeClr>
+              </a:solidFill>
+            </a:endParaRPr>
+          </a:p>
+          <a:p>
+            <a:endParaRPr lang="en-US" sz="2400" i="1" dirty="0">
+              <a:solidFill>
+                <a:schemeClr val="accent6">
+                  <a:lumMod val="60000"/>
+                  <a:lumOff val="40000"/>
+                </a:schemeClr>
+              </a:solidFill>
+            </a:endParaRPr>
+          </a:p>
+          <a:p>
+            <a:r>
+              <a:rPr lang="en-US" sz="2400" i="1" dirty="0">
+                <a:solidFill>
+                  <a:schemeClr val="accent6">
+                    <a:lumMod val="60000"/>
+                    <a:lumOff val="40000"/>
+                  </a:schemeClr>
+                </a:solidFill>
+              </a:rPr>
+              <a:t>“What are the top 3 main themes of this research paper? "</a:t>
+            </a:r>
+          </a:p>
+        </p:txBody>
+      </p:sp>
+    </p:spTree>
+    <p:extLst>
+      <p:ext uri="{BB962C8B-B14F-4D97-AF65-F5344CB8AC3E}">
+        <p14:creationId xmlns:p14="http://schemas.microsoft.com/office/powerpoint/2010/main" val="1774888469"/>
+      </p:ext>
+    </p:extLst>
+  </p:cSld>
+  <p:clrMapOvr>
+    <a:masterClrMapping/>
+  </p:clrMapOvr>
+</p:sld>
+</file>
+
+<file path=ppt/slides/slide7.xml><?xml version="1.0" encoding="utf-8"?>
 <p:sld xmlns:a="http://schemas.openxmlformats.org/drawingml/2006/main" xmlns:r="http://schemas.openxmlformats.org/officeDocument/2006/relationships" xmlns:p="http://schemas.openxmlformats.org/presentationml/2006/main">
   <p:cSld>
     <p:spTree>
@@ -8716,8 +11975,8 @@
         </p:nvSpPr>
         <p:spPr>
           <a:xfrm>
-            <a:off x="1042416" y="901452"/>
-            <a:ext cx="8362188" cy="2677656"/>
+            <a:off x="256032" y="395957"/>
+            <a:ext cx="5321808" cy="2677656"/>
           </a:xfrm>
           <a:prstGeom prst="rect">
             <a:avLst/>
@@ -8730,9 +11989,6 @@
           </a:bodyPr>
           <a:lstStyle/>
           <a:p>
-            <a:pPr marL="457200" indent="-457200">
-              <a:buAutoNum type="arabicPeriod"/>
-            </a:pPr>
             <a:r>
               <a:rPr lang="en-US" sz="2400" b="1" dirty="0">
                 <a:solidFill>
@@ -8873,8 +12129,8 @@
         </p:nvSpPr>
         <p:spPr>
           <a:xfrm>
-            <a:off x="1417320" y="4617720"/>
-            <a:ext cx="1353312" cy="950976"/>
+            <a:off x="1648336" y="4617720"/>
+            <a:ext cx="1122295" cy="950976"/>
           </a:xfrm>
           <a:prstGeom prst="ellipse">
             <a:avLst/>
@@ -8902,8 +12158,8 @@
           <a:p>
             <a:pPr algn="ctr"/>
             <a:r>
-              <a:rPr lang="en-US" sz="2800" dirty="0"/>
-              <a:t>You</a:t>
+              <a:rPr lang="en-US" sz="2000" dirty="0"/>
+              <a:t>Ash</a:t>
             </a:r>
           </a:p>
         </p:txBody>
@@ -8922,8 +12178,8 @@
         </p:nvSpPr>
         <p:spPr>
           <a:xfrm>
-            <a:off x="3791712" y="4706112"/>
-            <a:ext cx="2023872" cy="950976"/>
+            <a:off x="3920957" y="4558391"/>
+            <a:ext cx="1463894" cy="1144417"/>
           </a:xfrm>
           <a:prstGeom prst="ellipse">
             <a:avLst/>
@@ -8951,14 +12207,14 @@
           <a:p>
             <a:pPr algn="ctr"/>
             <a:r>
-              <a:rPr lang="en-US" sz="2800" dirty="0"/>
+              <a:rPr lang="en-US" sz="2000" dirty="0"/>
               <a:t>Fredo</a:t>
             </a:r>
           </a:p>
           <a:p>
             <a:pPr algn="ctr"/>
             <a:r>
-              <a:rPr lang="en-US" sz="2800" dirty="0"/>
+              <a:rPr lang="en-US" sz="2000" dirty="0"/>
               <a:t>(Friend)</a:t>
             </a:r>
           </a:p>
@@ -9024,8 +12280,8 @@
         </p:nvSpPr>
         <p:spPr>
           <a:xfrm>
-            <a:off x="7007352" y="4715256"/>
-            <a:ext cx="2023872" cy="950976"/>
+            <a:off x="7202967" y="4649724"/>
+            <a:ext cx="1141990" cy="950976"/>
           </a:xfrm>
           <a:prstGeom prst="ellipse">
             <a:avLst/>
@@ -9053,9 +12309,10 @@
           <a:p>
             <a:pPr algn="ctr"/>
             <a:r>
-              <a:rPr lang="en-US" sz="2800" dirty="0"/>
+              <a:rPr lang="en-US" sz="2000" dirty="0"/>
               <a:t>Post</a:t>
             </a:r>
+            <a:endParaRPr lang="en-US" sz="2800" dirty="0"/>
           </a:p>
         </p:txBody>
       </p:sp>
@@ -9073,7 +12330,7 @@
         </p:nvSpPr>
         <p:spPr>
           <a:xfrm>
-            <a:off x="6036564" y="4974336"/>
+            <a:off x="6036859" y="5084879"/>
             <a:ext cx="749808" cy="265176"/>
           </a:xfrm>
           <a:prstGeom prst="rightArrow">
@@ -9119,8 +12376,8 @@
         </p:nvSpPr>
         <p:spPr>
           <a:xfrm>
-            <a:off x="10024872" y="4631436"/>
-            <a:ext cx="2023872" cy="950976"/>
+            <a:off x="10272571" y="4732844"/>
+            <a:ext cx="1249680" cy="969264"/>
           </a:xfrm>
           <a:prstGeom prst="ellipse">
             <a:avLst/>
@@ -9148,7 +12405,7 @@
           <a:p>
             <a:pPr algn="ctr"/>
             <a:r>
-              <a:rPr lang="en-US" sz="2800" dirty="0"/>
+              <a:rPr lang="en-US" sz="2000" dirty="0"/>
               <a:t>Stocks</a:t>
             </a:r>
           </a:p>
@@ -9259,7 +12516,7 @@
         </p:nvSpPr>
         <p:spPr>
           <a:xfrm>
-            <a:off x="5784630" y="4518767"/>
+            <a:off x="5223510" y="3633086"/>
             <a:ext cx="788677" cy="461665"/>
           </a:xfrm>
           <a:prstGeom prst="rect">
@@ -9335,6 +12592,566 @@
           </a:p>
         </p:txBody>
       </p:sp>
+      <p:sp>
+        <p:nvSpPr>
+          <p:cNvPr id="6" name="Oval 5">
+            <a:extLst>
+              <a:ext uri="{FF2B5EF4-FFF2-40B4-BE49-F238E27FC236}">
+                <a16:creationId xmlns:a16="http://schemas.microsoft.com/office/drawing/2014/main" id="{2929C3CC-324A-9B65-E1B6-7C4989281BDE}"/>
+              </a:ext>
+            </a:extLst>
+          </p:cNvPr>
+          <p:cNvSpPr/>
+          <p:nvPr/>
+        </p:nvSpPr>
+        <p:spPr>
+          <a:xfrm>
+            <a:off x="9433378" y="2060254"/>
+            <a:ext cx="1494512" cy="1179870"/>
+          </a:xfrm>
+          <a:prstGeom prst="ellipse">
+            <a:avLst/>
+          </a:prstGeom>
+        </p:spPr>
+        <p:style>
+          <a:lnRef idx="2">
+            <a:schemeClr val="accent1">
+              <a:shade val="15000"/>
+            </a:schemeClr>
+          </a:lnRef>
+          <a:fillRef idx="1">
+            <a:schemeClr val="accent1"/>
+          </a:fillRef>
+          <a:effectRef idx="0">
+            <a:schemeClr val="accent1"/>
+          </a:effectRef>
+          <a:fontRef idx="minor">
+            <a:schemeClr val="lt1"/>
+          </a:fontRef>
+        </p:style>
+        <p:txBody>
+          <a:bodyPr rtlCol="0" anchor="ctr"/>
+          <a:lstStyle/>
+          <a:p>
+            <a:pPr algn="ctr"/>
+            <a:r>
+              <a:rPr lang="en-US" sz="2000" dirty="0"/>
+              <a:t>Finance</a:t>
+            </a:r>
+          </a:p>
+        </p:txBody>
+      </p:sp>
+      <p:sp>
+        <p:nvSpPr>
+          <p:cNvPr id="11" name="Arrow: Right 10">
+            <a:extLst>
+              <a:ext uri="{FF2B5EF4-FFF2-40B4-BE49-F238E27FC236}">
+                <a16:creationId xmlns:a16="http://schemas.microsoft.com/office/drawing/2014/main" id="{BA93A1BB-9761-6FB9-4ECA-26DD877C104D}"/>
+              </a:ext>
+            </a:extLst>
+          </p:cNvPr>
+          <p:cNvSpPr/>
+          <p:nvPr/>
+        </p:nvSpPr>
+        <p:spPr>
+          <a:xfrm rot="18887279">
+            <a:off x="8304503" y="3696998"/>
+            <a:ext cx="1386271" cy="382362"/>
+          </a:xfrm>
+          <a:prstGeom prst="rightArrow">
+            <a:avLst/>
+          </a:prstGeom>
+        </p:spPr>
+        <p:style>
+          <a:lnRef idx="2">
+            <a:schemeClr val="accent1">
+              <a:shade val="15000"/>
+            </a:schemeClr>
+          </a:lnRef>
+          <a:fillRef idx="1">
+            <a:schemeClr val="accent1"/>
+          </a:fillRef>
+          <a:effectRef idx="0">
+            <a:schemeClr val="accent1"/>
+          </a:effectRef>
+          <a:fontRef idx="minor">
+            <a:schemeClr val="lt1"/>
+          </a:fontRef>
+        </p:style>
+        <p:txBody>
+          <a:bodyPr rtlCol="0" anchor="ctr"/>
+          <a:lstStyle/>
+          <a:p>
+            <a:pPr algn="ctr"/>
+            <a:endParaRPr lang="en-US"/>
+          </a:p>
+        </p:txBody>
+      </p:sp>
+      <p:sp>
+        <p:nvSpPr>
+          <p:cNvPr id="16" name="Oval 15">
+            <a:extLst>
+              <a:ext uri="{FF2B5EF4-FFF2-40B4-BE49-F238E27FC236}">
+                <a16:creationId xmlns:a16="http://schemas.microsoft.com/office/drawing/2014/main" id="{000DE703-01B4-6D3F-9120-A5D26A9137AB}"/>
+              </a:ext>
+            </a:extLst>
+          </p:cNvPr>
+          <p:cNvSpPr/>
+          <p:nvPr/>
+        </p:nvSpPr>
+        <p:spPr>
+          <a:xfrm>
+            <a:off x="6763161" y="2840887"/>
+            <a:ext cx="1360885" cy="1085570"/>
+          </a:xfrm>
+          <a:prstGeom prst="ellipse">
+            <a:avLst/>
+          </a:prstGeom>
+        </p:spPr>
+        <p:style>
+          <a:lnRef idx="2">
+            <a:schemeClr val="accent1">
+              <a:shade val="15000"/>
+            </a:schemeClr>
+          </a:lnRef>
+          <a:fillRef idx="1">
+            <a:schemeClr val="accent1"/>
+          </a:fillRef>
+          <a:effectRef idx="0">
+            <a:schemeClr val="accent1"/>
+          </a:effectRef>
+          <a:fontRef idx="minor">
+            <a:schemeClr val="lt1"/>
+          </a:fontRef>
+        </p:style>
+        <p:txBody>
+          <a:bodyPr rtlCol="0" anchor="ctr"/>
+          <a:lstStyle/>
+          <a:p>
+            <a:pPr algn="ctr"/>
+            <a:r>
+              <a:rPr lang="en-US" sz="2000" dirty="0"/>
+              <a:t>Movies</a:t>
+            </a:r>
+          </a:p>
+        </p:txBody>
+      </p:sp>
+      <p:sp>
+        <p:nvSpPr>
+          <p:cNvPr id="20" name="Arrow: Right 19">
+            <a:extLst>
+              <a:ext uri="{FF2B5EF4-FFF2-40B4-BE49-F238E27FC236}">
+                <a16:creationId xmlns:a16="http://schemas.microsoft.com/office/drawing/2014/main" id="{493B3E65-78B7-6200-084A-A88C4731D542}"/>
+              </a:ext>
+            </a:extLst>
+          </p:cNvPr>
+          <p:cNvSpPr/>
+          <p:nvPr/>
+        </p:nvSpPr>
+        <p:spPr>
+          <a:xfrm rot="19233492">
+            <a:off x="5133073" y="4007400"/>
+            <a:ext cx="1544045" cy="265176"/>
+          </a:xfrm>
+          <a:prstGeom prst="rightArrow">
+            <a:avLst/>
+          </a:prstGeom>
+        </p:spPr>
+        <p:style>
+          <a:lnRef idx="2">
+            <a:schemeClr val="accent1">
+              <a:shade val="15000"/>
+            </a:schemeClr>
+          </a:lnRef>
+          <a:fillRef idx="1">
+            <a:schemeClr val="accent1"/>
+          </a:fillRef>
+          <a:effectRef idx="0">
+            <a:schemeClr val="accent1"/>
+          </a:effectRef>
+          <a:fontRef idx="minor">
+            <a:schemeClr val="lt1"/>
+          </a:fontRef>
+        </p:style>
+        <p:txBody>
+          <a:bodyPr rtlCol="0" anchor="ctr"/>
+          <a:lstStyle/>
+          <a:p>
+            <a:pPr algn="ctr"/>
+            <a:endParaRPr lang="en-US"/>
+          </a:p>
+        </p:txBody>
+      </p:sp>
+      <p:sp>
+        <p:nvSpPr>
+          <p:cNvPr id="22" name="TextBox 21">
+            <a:extLst>
+              <a:ext uri="{FF2B5EF4-FFF2-40B4-BE49-F238E27FC236}">
+                <a16:creationId xmlns:a16="http://schemas.microsoft.com/office/drawing/2014/main" id="{CB86FE38-644D-7191-8C61-6AA42825FD66}"/>
+              </a:ext>
+            </a:extLst>
+          </p:cNvPr>
+          <p:cNvSpPr txBox="1"/>
+          <p:nvPr/>
+        </p:nvSpPr>
+        <p:spPr>
+          <a:xfrm>
+            <a:off x="6036859" y="4645259"/>
+            <a:ext cx="788677" cy="461665"/>
+          </a:xfrm>
+          <a:prstGeom prst="rect">
+            <a:avLst/>
+          </a:prstGeom>
+          <a:noFill/>
+        </p:spPr>
+        <p:txBody>
+          <a:bodyPr wrap="none" rtlCol="0">
+            <a:spAutoFit/>
+          </a:bodyPr>
+          <a:lstStyle/>
+          <a:p>
+            <a:r>
+              <a:rPr lang="en-US" sz="2400" dirty="0">
+                <a:solidFill>
+                  <a:schemeClr val="accent6">
+                    <a:lumMod val="60000"/>
+                    <a:lumOff val="40000"/>
+                  </a:schemeClr>
+                </a:solidFill>
+                <a:highlight>
+                  <a:srgbClr val="800000"/>
+                </a:highlight>
+              </a:rPr>
+              <a:t>Likes</a:t>
+            </a:r>
+          </a:p>
+        </p:txBody>
+      </p:sp>
+      <p:sp>
+        <p:nvSpPr>
+          <p:cNvPr id="24" name="TextBox 23">
+            <a:extLst>
+              <a:ext uri="{FF2B5EF4-FFF2-40B4-BE49-F238E27FC236}">
+                <a16:creationId xmlns:a16="http://schemas.microsoft.com/office/drawing/2014/main" id="{1A756FF5-D082-3AE4-1C01-7C7649249D3F}"/>
+              </a:ext>
+            </a:extLst>
+          </p:cNvPr>
+          <p:cNvSpPr txBox="1"/>
+          <p:nvPr/>
+        </p:nvSpPr>
+        <p:spPr>
+          <a:xfrm>
+            <a:off x="9533115" y="3409980"/>
+            <a:ext cx="1494512" cy="461665"/>
+          </a:xfrm>
+          <a:prstGeom prst="rect">
+            <a:avLst/>
+          </a:prstGeom>
+          <a:noFill/>
+        </p:spPr>
+        <p:txBody>
+          <a:bodyPr wrap="none" rtlCol="0">
+            <a:spAutoFit/>
+          </a:bodyPr>
+          <a:lstStyle/>
+          <a:p>
+            <a:r>
+              <a:rPr lang="en-US" sz="2400" dirty="0">
+                <a:solidFill>
+                  <a:schemeClr val="accent6">
+                    <a:lumMod val="60000"/>
+                    <a:lumOff val="40000"/>
+                  </a:schemeClr>
+                </a:solidFill>
+                <a:highlight>
+                  <a:srgbClr val="800000"/>
+                </a:highlight>
+              </a:rPr>
+              <a:t>Belongs to</a:t>
+            </a:r>
+          </a:p>
+        </p:txBody>
+      </p:sp>
+      <p:sp>
+        <p:nvSpPr>
+          <p:cNvPr id="9" name="Oval 8">
+            <a:extLst>
+              <a:ext uri="{FF2B5EF4-FFF2-40B4-BE49-F238E27FC236}">
+                <a16:creationId xmlns:a16="http://schemas.microsoft.com/office/drawing/2014/main" id="{D648B8EE-996F-C46B-4563-F08A3628D898}"/>
+              </a:ext>
+            </a:extLst>
+          </p:cNvPr>
+          <p:cNvSpPr/>
+          <p:nvPr/>
+        </p:nvSpPr>
+        <p:spPr>
+          <a:xfrm>
+            <a:off x="6763161" y="451205"/>
+            <a:ext cx="1207008" cy="1085570"/>
+          </a:xfrm>
+          <a:prstGeom prst="ellipse">
+            <a:avLst/>
+          </a:prstGeom>
+        </p:spPr>
+        <p:style>
+          <a:lnRef idx="2">
+            <a:schemeClr val="accent1">
+              <a:shade val="15000"/>
+            </a:schemeClr>
+          </a:lnRef>
+          <a:fillRef idx="1">
+            <a:schemeClr val="accent1"/>
+          </a:fillRef>
+          <a:effectRef idx="0">
+            <a:schemeClr val="accent1"/>
+          </a:effectRef>
+          <a:fontRef idx="minor">
+            <a:schemeClr val="lt1"/>
+          </a:fontRef>
+        </p:style>
+        <p:txBody>
+          <a:bodyPr rtlCol="0" anchor="ctr"/>
+          <a:lstStyle/>
+          <a:p>
+            <a:pPr algn="ctr"/>
+            <a:r>
+              <a:rPr lang="en-US" sz="2000" dirty="0"/>
+              <a:t>Action</a:t>
+            </a:r>
+          </a:p>
+        </p:txBody>
+      </p:sp>
+      <p:sp>
+        <p:nvSpPr>
+          <p:cNvPr id="18" name="Arrow: Right 17">
+            <a:extLst>
+              <a:ext uri="{FF2B5EF4-FFF2-40B4-BE49-F238E27FC236}">
+                <a16:creationId xmlns:a16="http://schemas.microsoft.com/office/drawing/2014/main" id="{1BAB2101-B04F-F769-5AC2-0033A15742E6}"/>
+              </a:ext>
+            </a:extLst>
+          </p:cNvPr>
+          <p:cNvSpPr/>
+          <p:nvPr/>
+        </p:nvSpPr>
+        <p:spPr>
+          <a:xfrm rot="16200000">
+            <a:off x="6696309" y="2038149"/>
+            <a:ext cx="1179870" cy="265176"/>
+          </a:xfrm>
+          <a:prstGeom prst="rightArrow">
+            <a:avLst/>
+          </a:prstGeom>
+        </p:spPr>
+        <p:style>
+          <a:lnRef idx="2">
+            <a:schemeClr val="accent1">
+              <a:shade val="15000"/>
+            </a:schemeClr>
+          </a:lnRef>
+          <a:fillRef idx="1">
+            <a:schemeClr val="accent1"/>
+          </a:fillRef>
+          <a:effectRef idx="0">
+            <a:schemeClr val="accent1"/>
+          </a:effectRef>
+          <a:fontRef idx="minor">
+            <a:schemeClr val="lt1"/>
+          </a:fontRef>
+        </p:style>
+        <p:txBody>
+          <a:bodyPr rtlCol="0" anchor="ctr"/>
+          <a:lstStyle/>
+          <a:p>
+            <a:pPr algn="ctr"/>
+            <a:endParaRPr lang="en-US"/>
+          </a:p>
+        </p:txBody>
+      </p:sp>
+      <p:sp>
+        <p:nvSpPr>
+          <p:cNvPr id="23" name="TextBox 22">
+            <a:extLst>
+              <a:ext uri="{FF2B5EF4-FFF2-40B4-BE49-F238E27FC236}">
+                <a16:creationId xmlns:a16="http://schemas.microsoft.com/office/drawing/2014/main" id="{81229425-9DE4-8B66-508A-2F93C5198F41}"/>
+              </a:ext>
+            </a:extLst>
+          </p:cNvPr>
+          <p:cNvSpPr txBox="1"/>
+          <p:nvPr/>
+        </p:nvSpPr>
+        <p:spPr>
+          <a:xfrm>
+            <a:off x="7475203" y="1886787"/>
+            <a:ext cx="950901" cy="461665"/>
+          </a:xfrm>
+          <a:prstGeom prst="rect">
+            <a:avLst/>
+          </a:prstGeom>
+          <a:noFill/>
+        </p:spPr>
+        <p:txBody>
+          <a:bodyPr wrap="none" rtlCol="0">
+            <a:spAutoFit/>
+          </a:bodyPr>
+          <a:lstStyle/>
+          <a:p>
+            <a:r>
+              <a:rPr lang="en-US" sz="2400" dirty="0">
+                <a:solidFill>
+                  <a:schemeClr val="accent6">
+                    <a:lumMod val="60000"/>
+                    <a:lumOff val="40000"/>
+                  </a:schemeClr>
+                </a:solidFill>
+                <a:highlight>
+                  <a:srgbClr val="800000"/>
+                </a:highlight>
+              </a:rPr>
+              <a:t>About</a:t>
+            </a:r>
+          </a:p>
+        </p:txBody>
+      </p:sp>
+      <p:sp>
+        <p:nvSpPr>
+          <p:cNvPr id="13" name="Oval 12">
+            <a:extLst>
+              <a:ext uri="{FF2B5EF4-FFF2-40B4-BE49-F238E27FC236}">
+                <a16:creationId xmlns:a16="http://schemas.microsoft.com/office/drawing/2014/main" id="{E2669EC4-3B42-6FA5-B2C0-AD0902A1697E}"/>
+              </a:ext>
+            </a:extLst>
+          </p:cNvPr>
+          <p:cNvSpPr/>
+          <p:nvPr/>
+        </p:nvSpPr>
+        <p:spPr>
+          <a:xfrm>
+            <a:off x="256032" y="5747828"/>
+            <a:ext cx="1122295" cy="950976"/>
+          </a:xfrm>
+          <a:prstGeom prst="ellipse">
+            <a:avLst/>
+          </a:prstGeom>
+        </p:spPr>
+        <p:style>
+          <a:lnRef idx="2">
+            <a:schemeClr val="accent1">
+              <a:shade val="15000"/>
+            </a:schemeClr>
+          </a:lnRef>
+          <a:fillRef idx="1">
+            <a:schemeClr val="accent1"/>
+          </a:fillRef>
+          <a:effectRef idx="0">
+            <a:schemeClr val="accent1"/>
+          </a:effectRef>
+          <a:fontRef idx="minor">
+            <a:schemeClr val="lt1"/>
+          </a:fontRef>
+        </p:style>
+        <p:txBody>
+          <a:bodyPr rtlCol="0" anchor="ctr"/>
+          <a:lstStyle/>
+          <a:p>
+            <a:pPr algn="ctr"/>
+            <a:r>
+              <a:rPr lang="en-US" sz="2000" dirty="0"/>
+              <a:t>Tom</a:t>
+            </a:r>
+          </a:p>
+        </p:txBody>
+      </p:sp>
+      <p:sp>
+        <p:nvSpPr>
+          <p:cNvPr id="25" name="Arrow: Right 24">
+            <a:extLst>
+              <a:ext uri="{FF2B5EF4-FFF2-40B4-BE49-F238E27FC236}">
+                <a16:creationId xmlns:a16="http://schemas.microsoft.com/office/drawing/2014/main" id="{093F0E2A-F359-9DB5-3332-CDA396EEDA66}"/>
+              </a:ext>
+            </a:extLst>
+          </p:cNvPr>
+          <p:cNvSpPr/>
+          <p:nvPr/>
+        </p:nvSpPr>
+        <p:spPr>
+          <a:xfrm rot="8844236">
+            <a:off x="1191305" y="5569520"/>
+            <a:ext cx="749808" cy="265176"/>
+          </a:xfrm>
+          <a:prstGeom prst="rightArrow">
+            <a:avLst/>
+          </a:prstGeom>
+        </p:spPr>
+        <p:style>
+          <a:lnRef idx="2">
+            <a:schemeClr val="accent1">
+              <a:shade val="15000"/>
+            </a:schemeClr>
+          </a:lnRef>
+          <a:fillRef idx="1">
+            <a:schemeClr val="accent1"/>
+          </a:fillRef>
+          <a:effectRef idx="0">
+            <a:schemeClr val="accent1"/>
+          </a:effectRef>
+          <a:fontRef idx="minor">
+            <a:schemeClr val="lt1"/>
+          </a:fontRef>
+        </p:style>
+        <p:txBody>
+          <a:bodyPr rtlCol="0" anchor="ctr"/>
+          <a:lstStyle/>
+          <a:p>
+            <a:pPr algn="ctr"/>
+            <a:endParaRPr lang="en-US" dirty="0"/>
+          </a:p>
+        </p:txBody>
+      </p:sp>
+      <p:sp>
+        <p:nvSpPr>
+          <p:cNvPr id="27" name="TextBox 26">
+            <a:extLst>
+              <a:ext uri="{FF2B5EF4-FFF2-40B4-BE49-F238E27FC236}">
+                <a16:creationId xmlns:a16="http://schemas.microsoft.com/office/drawing/2014/main" id="{185BCC18-D04D-2A4B-CAD0-81287F3CE501}"/>
+              </a:ext>
+            </a:extLst>
+          </p:cNvPr>
+          <p:cNvSpPr txBox="1"/>
+          <p:nvPr/>
+        </p:nvSpPr>
+        <p:spPr>
+          <a:xfrm>
+            <a:off x="385218" y="5240443"/>
+            <a:ext cx="1122295" cy="461665"/>
+          </a:xfrm>
+          <a:prstGeom prst="rect">
+            <a:avLst/>
+          </a:prstGeom>
+          <a:noFill/>
+        </p:spPr>
+        <p:txBody>
+          <a:bodyPr wrap="none" rtlCol="0">
+            <a:spAutoFit/>
+          </a:bodyPr>
+          <a:lstStyle/>
+          <a:p>
+            <a:r>
+              <a:rPr lang="en-US" sz="2400" dirty="0">
+                <a:solidFill>
+                  <a:schemeClr val="accent6">
+                    <a:lumMod val="60000"/>
+                    <a:lumOff val="40000"/>
+                  </a:schemeClr>
+                </a:solidFill>
+                <a:highlight>
+                  <a:srgbClr val="800000"/>
+                </a:highlight>
+              </a:rPr>
+              <a:t>Follows</a:t>
+            </a:r>
+          </a:p>
+        </p:txBody>
+      </p:sp>
     </p:spTree>
     <p:extLst>
       <p:ext uri="{BB962C8B-B14F-4D97-AF65-F5344CB8AC3E}">
@@ -9348,7 +13165,7 @@
 </p:sld>
 </file>
 
-<file path=ppt/slides/slide5.xml><?xml version="1.0" encoding="utf-8"?>
+<file path=ppt/slides/slide8.xml><?xml version="1.0" encoding="utf-8"?>
 <p:sld xmlns:a="http://schemas.openxmlformats.org/drawingml/2006/main" xmlns:r="http://schemas.openxmlformats.org/officeDocument/2006/relationships" xmlns:p="http://schemas.openxmlformats.org/presentationml/2006/main">
   <p:cSld>
     <p:spTree>
@@ -9386,7 +13203,7 @@
         <p:spPr>
           <a:xfrm>
             <a:off x="1618488" y="1401032"/>
-            <a:ext cx="8362188" cy="646331"/>
+            <a:ext cx="8362188" cy="2308324"/>
           </a:xfrm>
           <a:prstGeom prst="rect">
             <a:avLst/>
@@ -9408,7 +13225,58 @@
                   </a:schemeClr>
                 </a:solidFill>
               </a:rPr>
-              <a:t>2. Basic Components of a Graph DB</a:t>
+              <a:t>Basic Components of a Graph DB</a:t>
+            </a:r>
+          </a:p>
+          <a:p>
+            <a:pPr marL="571500" indent="-571500">
+              <a:buFont typeface="Arial" panose="020B0604020202020204" pitchFamily="34" charset="0"/>
+              <a:buChar char="•"/>
+            </a:pPr>
+            <a:r>
+              <a:rPr lang="en-US" sz="3600" dirty="0">
+                <a:solidFill>
+                  <a:schemeClr val="accent6">
+                    <a:lumMod val="60000"/>
+                    <a:lumOff val="40000"/>
+                  </a:schemeClr>
+                </a:solidFill>
+              </a:rPr>
+              <a:t>Nodes</a:t>
+            </a:r>
+          </a:p>
+          <a:p>
+            <a:pPr marL="571500" indent="-571500">
+              <a:buFont typeface="Arial" panose="020B0604020202020204" pitchFamily="34" charset="0"/>
+              <a:buChar char="•"/>
+            </a:pPr>
+            <a:r>
+              <a:rPr lang="en-US" sz="3600" dirty="0">
+                <a:solidFill>
+                  <a:schemeClr val="accent6">
+                    <a:lumMod val="60000"/>
+                    <a:lumOff val="40000"/>
+                  </a:schemeClr>
+                </a:solidFill>
+              </a:rPr>
+              <a:t>Relationship</a:t>
+            </a:r>
+          </a:p>
+          <a:p>
+            <a:pPr marL="571500" indent="-571500">
+              <a:buFont typeface="Arial" panose="020B0604020202020204" pitchFamily="34" charset="0"/>
+              <a:buChar char="•"/>
+            </a:pPr>
+            <a:r>
+              <a:rPr lang="en-US" sz="3600" dirty="0">
+                <a:solidFill>
+                  <a:schemeClr val="accent6">
+                    <a:lumMod val="60000"/>
+                    <a:lumOff val="40000"/>
+                  </a:schemeClr>
+                </a:solidFill>
+              </a:rPr>
+              <a:t>Properties</a:t>
             </a:r>
           </a:p>
         </p:txBody>
@@ -9426,7 +13294,7 @@
 </p:sld>
 </file>
 
-<file path=ppt/slides/slide6.xml><?xml version="1.0" encoding="utf-8"?>
+<file path=ppt/slides/slide9.xml><?xml version="1.0" encoding="utf-8"?>
 <p:sld xmlns:a="http://schemas.openxmlformats.org/drawingml/2006/main" xmlns:r="http://schemas.openxmlformats.org/officeDocument/2006/relationships" xmlns:p="http://schemas.openxmlformats.org/presentationml/2006/main">
   <p:cSld>
     <p:spTree>
@@ -9728,17 +13596,17 @@
             <a:pPr algn="ctr"/>
             <a:r>
               <a:rPr lang="en-US" sz="2400" dirty="0"/>
-              <a:t>Python Course</a:t>
+              <a:t>Course</a:t>
             </a:r>
           </a:p>
         </p:txBody>
       </p:sp>
       <p:sp>
         <p:nvSpPr>
-          <p:cNvPr id="15" name="Oval 14">
-            <a:extLst>
-              <a:ext uri="{FF2B5EF4-FFF2-40B4-BE49-F238E27FC236}">
-                <a16:creationId xmlns:a16="http://schemas.microsoft.com/office/drawing/2014/main" id="{8747E2A9-4690-8CE6-CEBF-FEB1671E781B}"/>
+          <p:cNvPr id="3" name="Oval 2">
+            <a:extLst>
+              <a:ext uri="{FF2B5EF4-FFF2-40B4-BE49-F238E27FC236}">
+                <a16:creationId xmlns:a16="http://schemas.microsoft.com/office/drawing/2014/main" id="{461B88D9-B868-C46D-7968-1816F787D596}"/>
               </a:ext>
             </a:extLst>
           </p:cNvPr>
@@ -9747,8 +13615,8 @@
         </p:nvSpPr>
         <p:spPr>
           <a:xfrm>
-            <a:off x="6821424" y="5340632"/>
-            <a:ext cx="1591056" cy="1033272"/>
+            <a:off x="6821424" y="5212080"/>
+            <a:ext cx="3474720" cy="1161824"/>
           </a:xfrm>
           <a:prstGeom prst="ellipse">
             <a:avLst/>
@@ -9786,1664 +13654,6 @@
     <p:extLst>
       <p:ext uri="{BB962C8B-B14F-4D97-AF65-F5344CB8AC3E}">
         <p14:creationId xmlns:p14="http://schemas.microsoft.com/office/powerpoint/2010/main" val="2682543753"/>
-      </p:ext>
-    </p:extLst>
-  </p:cSld>
-  <p:clrMapOvr>
-    <a:masterClrMapping/>
-  </p:clrMapOvr>
-</p:sld>
-</file>
-
-<file path=ppt/slides/slide7.xml><?xml version="1.0" encoding="utf-8"?>
-<p:sld xmlns:a="http://schemas.openxmlformats.org/drawingml/2006/main" xmlns:r="http://schemas.openxmlformats.org/officeDocument/2006/relationships" xmlns:p="http://schemas.openxmlformats.org/presentationml/2006/main">
-  <p:cSld>
-    <p:spTree>
-      <p:nvGrpSpPr>
-        <p:cNvPr id="1" name="">
-          <a:extLst>
-            <a:ext uri="{FF2B5EF4-FFF2-40B4-BE49-F238E27FC236}">
-              <a16:creationId xmlns:a16="http://schemas.microsoft.com/office/drawing/2014/main" id="{D212DBA7-B16F-2E9F-9E8C-D916F0B21A85}"/>
-            </a:ext>
-          </a:extLst>
-        </p:cNvPr>
-        <p:cNvGrpSpPr/>
-        <p:nvPr/>
-      </p:nvGrpSpPr>
-      <p:grpSpPr>
-        <a:xfrm>
-          <a:off x="0" y="0"/>
-          <a:ext cx="0" cy="0"/>
-          <a:chOff x="0" y="0"/>
-          <a:chExt cx="0" cy="0"/>
-        </a:xfrm>
-      </p:grpSpPr>
-      <p:sp>
-        <p:nvSpPr>
-          <p:cNvPr id="7" name="TextBox 6">
-            <a:extLst>
-              <a:ext uri="{FF2B5EF4-FFF2-40B4-BE49-F238E27FC236}">
-                <a16:creationId xmlns:a16="http://schemas.microsoft.com/office/drawing/2014/main" id="{9866BA6E-8A83-2CCF-9BA8-6FBB1A4417CF}"/>
-              </a:ext>
-            </a:extLst>
-          </p:cNvPr>
-          <p:cNvSpPr txBox="1"/>
-          <p:nvPr/>
-        </p:nvSpPr>
-        <p:spPr>
-          <a:xfrm>
-            <a:off x="192024" y="331184"/>
-            <a:ext cx="8362188" cy="2677656"/>
-          </a:xfrm>
-          <a:prstGeom prst="rect">
-            <a:avLst/>
-          </a:prstGeom>
-          <a:noFill/>
-        </p:spPr>
-        <p:txBody>
-          <a:bodyPr wrap="square">
-            <a:spAutoFit/>
-          </a:bodyPr>
-          <a:lstStyle/>
-          <a:p>
-            <a:r>
-              <a:rPr lang="en-US" sz="2400" b="1" dirty="0">
-                <a:solidFill>
-                  <a:schemeClr val="accent6">
-                    <a:lumMod val="60000"/>
-                    <a:lumOff val="40000"/>
-                  </a:schemeClr>
-                </a:solidFill>
-              </a:rPr>
-              <a:t>2. Relationships (Edges)</a:t>
-            </a:r>
-          </a:p>
-          <a:p>
-            <a:pPr marL="342900" indent="-342900">
-              <a:buFont typeface="Arial" panose="020B0604020202020204" pitchFamily="34" charset="0"/>
-              <a:buChar char="•"/>
-            </a:pPr>
-            <a:r>
-              <a:rPr lang="en-US" sz="2400" dirty="0">
-                <a:solidFill>
-                  <a:schemeClr val="accent6">
-                    <a:lumMod val="60000"/>
-                    <a:lumOff val="40000"/>
-                  </a:schemeClr>
-                </a:solidFill>
-              </a:rPr>
-              <a:t>Define how nodes are connected </a:t>
-            </a:r>
-          </a:p>
-          <a:p>
-            <a:pPr marL="342900" indent="-342900">
-              <a:buFont typeface="Arial" panose="020B0604020202020204" pitchFamily="34" charset="0"/>
-              <a:buChar char="•"/>
-            </a:pPr>
-            <a:r>
-              <a:rPr lang="en-US" sz="2400" dirty="0">
-                <a:solidFill>
-                  <a:schemeClr val="accent6">
-                    <a:lumMod val="60000"/>
-                    <a:lumOff val="40000"/>
-                  </a:schemeClr>
-                </a:solidFill>
-              </a:rPr>
-              <a:t>They are </a:t>
-            </a:r>
-            <a:r>
-              <a:rPr lang="en-US" sz="2400" b="1" dirty="0">
-                <a:solidFill>
-                  <a:schemeClr val="accent6">
-                    <a:lumMod val="60000"/>
-                    <a:lumOff val="40000"/>
-                  </a:schemeClr>
-                </a:solidFill>
-              </a:rPr>
-              <a:t>first-class citizens</a:t>
-            </a:r>
-            <a:r>
-              <a:rPr lang="en-US" sz="2400" dirty="0">
-                <a:solidFill>
-                  <a:schemeClr val="accent6">
-                    <a:lumMod val="60000"/>
-                    <a:lumOff val="40000"/>
-                  </a:schemeClr>
-                </a:solidFill>
-              </a:rPr>
-              <a:t> (very important!) </a:t>
-            </a:r>
-          </a:p>
-          <a:p>
-            <a:endParaRPr lang="en-US" sz="2400" dirty="0">
-              <a:solidFill>
-                <a:schemeClr val="accent6">
-                  <a:lumMod val="60000"/>
-                  <a:lumOff val="40000"/>
-                </a:schemeClr>
-              </a:solidFill>
-            </a:endParaRPr>
-          </a:p>
-          <a:p>
-            <a:r>
-              <a:rPr lang="en-US" sz="2400" dirty="0">
-                <a:solidFill>
-                  <a:schemeClr val="accent6">
-                    <a:lumMod val="60000"/>
-                    <a:lumOff val="40000"/>
-                  </a:schemeClr>
-                </a:solidFill>
-              </a:rPr>
-              <a:t>👉 Example:</a:t>
-            </a:r>
-          </a:p>
-          <a:p>
-            <a:pPr marL="342900" indent="-342900">
-              <a:buFont typeface="Arial" panose="020B0604020202020204" pitchFamily="34" charset="0"/>
-              <a:buChar char="•"/>
-            </a:pPr>
-            <a:r>
-              <a:rPr lang="en-US" sz="2400" dirty="0">
-                <a:solidFill>
-                  <a:schemeClr val="accent6">
-                    <a:lumMod val="60000"/>
-                    <a:lumOff val="40000"/>
-                  </a:schemeClr>
-                </a:solidFill>
-              </a:rPr>
-              <a:t>Ash → </a:t>
-            </a:r>
-            <a:r>
-              <a:rPr lang="en-US" sz="2400" b="1" dirty="0">
-                <a:solidFill>
-                  <a:schemeClr val="accent6">
-                    <a:lumMod val="60000"/>
-                    <a:lumOff val="40000"/>
-                  </a:schemeClr>
-                </a:solidFill>
-              </a:rPr>
-              <a:t>TEACHES</a:t>
-            </a:r>
-            <a:r>
-              <a:rPr lang="en-US" sz="2400" dirty="0">
-                <a:solidFill>
-                  <a:schemeClr val="accent6">
-                    <a:lumMod val="60000"/>
-                    <a:lumOff val="40000"/>
-                  </a:schemeClr>
-                </a:solidFill>
-              </a:rPr>
-              <a:t> → Python Course </a:t>
-            </a:r>
-          </a:p>
-          <a:p>
-            <a:pPr marL="342900" indent="-342900">
-              <a:buFont typeface="Arial" panose="020B0604020202020204" pitchFamily="34" charset="0"/>
-              <a:buChar char="•"/>
-            </a:pPr>
-            <a:r>
-              <a:rPr lang="en-US" sz="2400" dirty="0">
-                <a:solidFill>
-                  <a:schemeClr val="accent6">
-                    <a:lumMod val="60000"/>
-                    <a:lumOff val="40000"/>
-                  </a:schemeClr>
-                </a:solidFill>
-              </a:rPr>
-              <a:t>Ash → </a:t>
-            </a:r>
-            <a:r>
-              <a:rPr lang="en-US" sz="2400" b="1" dirty="0">
-                <a:solidFill>
-                  <a:schemeClr val="accent6">
-                    <a:lumMod val="60000"/>
-                    <a:lumOff val="40000"/>
-                  </a:schemeClr>
-                </a:solidFill>
-              </a:rPr>
-              <a:t>LIVES_IN</a:t>
-            </a:r>
-            <a:r>
-              <a:rPr lang="en-US" sz="2400" dirty="0">
-                <a:solidFill>
-                  <a:schemeClr val="accent6">
-                    <a:lumMod val="60000"/>
-                    <a:lumOff val="40000"/>
-                  </a:schemeClr>
-                </a:solidFill>
-              </a:rPr>
-              <a:t> → Delhi</a:t>
-            </a:r>
-          </a:p>
-        </p:txBody>
-      </p:sp>
-      <p:sp>
-        <p:nvSpPr>
-          <p:cNvPr id="17" name="Oval 16">
-            <a:extLst>
-              <a:ext uri="{FF2B5EF4-FFF2-40B4-BE49-F238E27FC236}">
-                <a16:creationId xmlns:a16="http://schemas.microsoft.com/office/drawing/2014/main" id="{0C3257FE-A44F-AA81-1768-D48C7FC9242C}"/>
-              </a:ext>
-            </a:extLst>
-          </p:cNvPr>
-          <p:cNvSpPr/>
-          <p:nvPr/>
-        </p:nvSpPr>
-        <p:spPr>
-          <a:xfrm>
-            <a:off x="722376" y="3008840"/>
-            <a:ext cx="2679192" cy="1453432"/>
-          </a:xfrm>
-          <a:prstGeom prst="ellipse">
-            <a:avLst/>
-          </a:prstGeom>
-        </p:spPr>
-        <p:style>
-          <a:lnRef idx="2">
-            <a:schemeClr val="accent1">
-              <a:shade val="15000"/>
-            </a:schemeClr>
-          </a:lnRef>
-          <a:fillRef idx="1">
-            <a:schemeClr val="accent1"/>
-          </a:fillRef>
-          <a:effectRef idx="0">
-            <a:schemeClr val="accent1"/>
-          </a:effectRef>
-          <a:fontRef idx="minor">
-            <a:schemeClr val="lt1"/>
-          </a:fontRef>
-        </p:style>
-        <p:txBody>
-          <a:bodyPr rtlCol="0" anchor="ctr"/>
-          <a:lstStyle/>
-          <a:p>
-            <a:pPr algn="ctr"/>
-            <a:r>
-              <a:rPr lang="en-US" sz="2400" dirty="0"/>
-              <a:t>Ash</a:t>
-            </a:r>
-          </a:p>
-        </p:txBody>
-      </p:sp>
-      <p:sp>
-        <p:nvSpPr>
-          <p:cNvPr id="19" name="Oval 18">
-            <a:extLst>
-              <a:ext uri="{FF2B5EF4-FFF2-40B4-BE49-F238E27FC236}">
-                <a16:creationId xmlns:a16="http://schemas.microsoft.com/office/drawing/2014/main" id="{C4845B29-7BDB-99E5-D8B3-117C97BE827B}"/>
-              </a:ext>
-            </a:extLst>
-          </p:cNvPr>
-          <p:cNvSpPr/>
-          <p:nvPr/>
-        </p:nvSpPr>
-        <p:spPr>
-          <a:xfrm>
-            <a:off x="6440426" y="3429000"/>
-            <a:ext cx="2868166" cy="1033272"/>
-          </a:xfrm>
-          <a:prstGeom prst="ellipse">
-            <a:avLst/>
-          </a:prstGeom>
-        </p:spPr>
-        <p:style>
-          <a:lnRef idx="2">
-            <a:schemeClr val="accent1">
-              <a:shade val="15000"/>
-            </a:schemeClr>
-          </a:lnRef>
-          <a:fillRef idx="1">
-            <a:schemeClr val="accent1"/>
-          </a:fillRef>
-          <a:effectRef idx="0">
-            <a:schemeClr val="accent1"/>
-          </a:effectRef>
-          <a:fontRef idx="minor">
-            <a:schemeClr val="lt1"/>
-          </a:fontRef>
-        </p:style>
-        <p:txBody>
-          <a:bodyPr rtlCol="0" anchor="ctr"/>
-          <a:lstStyle/>
-          <a:p>
-            <a:pPr algn="ctr"/>
-            <a:r>
-              <a:rPr lang="en-US" sz="2400" dirty="0"/>
-              <a:t>Python Course</a:t>
-            </a:r>
-          </a:p>
-        </p:txBody>
-      </p:sp>
-      <p:sp>
-        <p:nvSpPr>
-          <p:cNvPr id="21" name="Arrow: Right 20">
-            <a:extLst>
-              <a:ext uri="{FF2B5EF4-FFF2-40B4-BE49-F238E27FC236}">
-                <a16:creationId xmlns:a16="http://schemas.microsoft.com/office/drawing/2014/main" id="{E499FEC1-708E-E774-5B7F-69C872D0C6F6}"/>
-              </a:ext>
-            </a:extLst>
-          </p:cNvPr>
-          <p:cNvSpPr/>
-          <p:nvPr/>
-        </p:nvSpPr>
-        <p:spPr>
-          <a:xfrm>
-            <a:off x="4800600" y="3785616"/>
-            <a:ext cx="950976" cy="475488"/>
-          </a:xfrm>
-          <a:prstGeom prst="rightArrow">
-            <a:avLst/>
-          </a:prstGeom>
-        </p:spPr>
-        <p:style>
-          <a:lnRef idx="2">
-            <a:schemeClr val="accent1">
-              <a:shade val="15000"/>
-            </a:schemeClr>
-          </a:lnRef>
-          <a:fillRef idx="1">
-            <a:schemeClr val="accent1"/>
-          </a:fillRef>
-          <a:effectRef idx="0">
-            <a:schemeClr val="accent1"/>
-          </a:effectRef>
-          <a:fontRef idx="minor">
-            <a:schemeClr val="lt1"/>
-          </a:fontRef>
-        </p:style>
-        <p:txBody>
-          <a:bodyPr rtlCol="0" anchor="ctr"/>
-          <a:lstStyle/>
-          <a:p>
-            <a:pPr algn="ctr"/>
-            <a:endParaRPr lang="en-US"/>
-          </a:p>
-        </p:txBody>
-      </p:sp>
-      <p:sp>
-        <p:nvSpPr>
-          <p:cNvPr id="23" name="TextBox 22">
-            <a:extLst>
-              <a:ext uri="{FF2B5EF4-FFF2-40B4-BE49-F238E27FC236}">
-                <a16:creationId xmlns:a16="http://schemas.microsoft.com/office/drawing/2014/main" id="{664CFDA6-1860-A432-E2F3-E3700DD74B61}"/>
-              </a:ext>
-            </a:extLst>
-          </p:cNvPr>
-          <p:cNvSpPr txBox="1"/>
-          <p:nvPr/>
-        </p:nvSpPr>
-        <p:spPr>
-          <a:xfrm>
-            <a:off x="4367403" y="3018164"/>
-            <a:ext cx="1817370" cy="461665"/>
-          </a:xfrm>
-          <a:prstGeom prst="rect">
-            <a:avLst/>
-          </a:prstGeom>
-          <a:noFill/>
-        </p:spPr>
-        <p:txBody>
-          <a:bodyPr wrap="square">
-            <a:spAutoFit/>
-          </a:bodyPr>
-          <a:lstStyle/>
-          <a:p>
-            <a:pPr algn="ctr"/>
-            <a:r>
-              <a:rPr lang="en-US" sz="2400" b="1" dirty="0">
-                <a:solidFill>
-                  <a:schemeClr val="accent6">
-                    <a:lumMod val="60000"/>
-                    <a:lumOff val="40000"/>
-                  </a:schemeClr>
-                </a:solidFill>
-                <a:highlight>
-                  <a:srgbClr val="800000"/>
-                </a:highlight>
-              </a:rPr>
-              <a:t>TEACHES</a:t>
-            </a:r>
-          </a:p>
-        </p:txBody>
-      </p:sp>
-      <p:sp>
-        <p:nvSpPr>
-          <p:cNvPr id="25" name="Oval 24">
-            <a:extLst>
-              <a:ext uri="{FF2B5EF4-FFF2-40B4-BE49-F238E27FC236}">
-                <a16:creationId xmlns:a16="http://schemas.microsoft.com/office/drawing/2014/main" id="{23CD2358-A0FA-9E44-D28D-A66ECF864130}"/>
-              </a:ext>
-            </a:extLst>
-          </p:cNvPr>
-          <p:cNvSpPr/>
-          <p:nvPr/>
-        </p:nvSpPr>
-        <p:spPr>
-          <a:xfrm>
-            <a:off x="6821424" y="5340632"/>
-            <a:ext cx="1591056" cy="1033272"/>
-          </a:xfrm>
-          <a:prstGeom prst="ellipse">
-            <a:avLst/>
-          </a:prstGeom>
-        </p:spPr>
-        <p:style>
-          <a:lnRef idx="2">
-            <a:schemeClr val="accent1">
-              <a:shade val="15000"/>
-            </a:schemeClr>
-          </a:lnRef>
-          <a:fillRef idx="1">
-            <a:schemeClr val="accent1"/>
-          </a:fillRef>
-          <a:effectRef idx="0">
-            <a:schemeClr val="accent1"/>
-          </a:effectRef>
-          <a:fontRef idx="minor">
-            <a:schemeClr val="lt1"/>
-          </a:fontRef>
-        </p:style>
-        <p:txBody>
-          <a:bodyPr rtlCol="0" anchor="ctr"/>
-          <a:lstStyle/>
-          <a:p>
-            <a:pPr algn="ctr"/>
-            <a:r>
-              <a:rPr lang="en-US" sz="2400" dirty="0"/>
-              <a:t>Delhi</a:t>
-            </a:r>
-          </a:p>
-        </p:txBody>
-      </p:sp>
-      <p:sp>
-        <p:nvSpPr>
-          <p:cNvPr id="27" name="Arrow: Right 26">
-            <a:extLst>
-              <a:ext uri="{FF2B5EF4-FFF2-40B4-BE49-F238E27FC236}">
-                <a16:creationId xmlns:a16="http://schemas.microsoft.com/office/drawing/2014/main" id="{99CC68BD-7F9C-1E39-97BC-B2D86A5002AF}"/>
-              </a:ext>
-            </a:extLst>
-          </p:cNvPr>
-          <p:cNvSpPr/>
-          <p:nvPr/>
-        </p:nvSpPr>
-        <p:spPr>
-          <a:xfrm rot="1414725">
-            <a:off x="4271159" y="5001987"/>
-            <a:ext cx="2272526" cy="475488"/>
-          </a:xfrm>
-          <a:prstGeom prst="rightArrow">
-            <a:avLst/>
-          </a:prstGeom>
-        </p:spPr>
-        <p:style>
-          <a:lnRef idx="2">
-            <a:schemeClr val="accent1">
-              <a:shade val="15000"/>
-            </a:schemeClr>
-          </a:lnRef>
-          <a:fillRef idx="1">
-            <a:schemeClr val="accent1"/>
-          </a:fillRef>
-          <a:effectRef idx="0">
-            <a:schemeClr val="accent1"/>
-          </a:effectRef>
-          <a:fontRef idx="minor">
-            <a:schemeClr val="lt1"/>
-          </a:fontRef>
-        </p:style>
-        <p:txBody>
-          <a:bodyPr rtlCol="0" anchor="ctr"/>
-          <a:lstStyle/>
-          <a:p>
-            <a:pPr algn="ctr"/>
-            <a:endParaRPr lang="en-US"/>
-          </a:p>
-        </p:txBody>
-      </p:sp>
-      <p:sp>
-        <p:nvSpPr>
-          <p:cNvPr id="29" name="TextBox 28">
-            <a:extLst>
-              <a:ext uri="{FF2B5EF4-FFF2-40B4-BE49-F238E27FC236}">
-                <a16:creationId xmlns:a16="http://schemas.microsoft.com/office/drawing/2014/main" id="{C150A6F2-F838-B06E-D636-EE3D88AD9920}"/>
-              </a:ext>
-            </a:extLst>
-          </p:cNvPr>
-          <p:cNvSpPr txBox="1"/>
-          <p:nvPr/>
-        </p:nvSpPr>
-        <p:spPr>
-          <a:xfrm>
-            <a:off x="4120514" y="5713481"/>
-            <a:ext cx="1813941" cy="461665"/>
-          </a:xfrm>
-          <a:prstGeom prst="rect">
-            <a:avLst/>
-          </a:prstGeom>
-          <a:noFill/>
-        </p:spPr>
-        <p:txBody>
-          <a:bodyPr wrap="square">
-            <a:spAutoFit/>
-          </a:bodyPr>
-          <a:lstStyle/>
-          <a:p>
-            <a:pPr algn="ctr"/>
-            <a:r>
-              <a:rPr lang="en-US" sz="2400" b="1" dirty="0">
-                <a:solidFill>
-                  <a:schemeClr val="accent6">
-                    <a:lumMod val="60000"/>
-                    <a:lumOff val="40000"/>
-                  </a:schemeClr>
-                </a:solidFill>
-                <a:highlight>
-                  <a:srgbClr val="800000"/>
-                </a:highlight>
-              </a:rPr>
-              <a:t>LIVES_IN</a:t>
-            </a:r>
-          </a:p>
-        </p:txBody>
-      </p:sp>
-    </p:spTree>
-    <p:extLst>
-      <p:ext uri="{BB962C8B-B14F-4D97-AF65-F5344CB8AC3E}">
-        <p14:creationId xmlns:p14="http://schemas.microsoft.com/office/powerpoint/2010/main" val="2009317395"/>
-      </p:ext>
-    </p:extLst>
-  </p:cSld>
-  <p:clrMapOvr>
-    <a:masterClrMapping/>
-  </p:clrMapOvr>
-</p:sld>
-</file>
-
-<file path=ppt/slides/slide8.xml><?xml version="1.0" encoding="utf-8"?>
-<p:sld xmlns:a="http://schemas.openxmlformats.org/drawingml/2006/main" xmlns:r="http://schemas.openxmlformats.org/officeDocument/2006/relationships" xmlns:p="http://schemas.openxmlformats.org/presentationml/2006/main">
-  <p:cSld>
-    <p:spTree>
-      <p:nvGrpSpPr>
-        <p:cNvPr id="1" name="">
-          <a:extLst>
-            <a:ext uri="{FF2B5EF4-FFF2-40B4-BE49-F238E27FC236}">
-              <a16:creationId xmlns:a16="http://schemas.microsoft.com/office/drawing/2014/main" id="{7CDCAD47-E728-E3B5-F9E6-5BD10351860A}"/>
-            </a:ext>
-          </a:extLst>
-        </p:cNvPr>
-        <p:cNvGrpSpPr/>
-        <p:nvPr/>
-      </p:nvGrpSpPr>
-      <p:grpSpPr>
-        <a:xfrm>
-          <a:off x="0" y="0"/>
-          <a:ext cx="0" cy="0"/>
-          <a:chOff x="0" y="0"/>
-          <a:chExt cx="0" cy="0"/>
-        </a:xfrm>
-      </p:grpSpPr>
-      <p:sp>
-        <p:nvSpPr>
-          <p:cNvPr id="7" name="TextBox 6">
-            <a:extLst>
-              <a:ext uri="{FF2B5EF4-FFF2-40B4-BE49-F238E27FC236}">
-                <a16:creationId xmlns:a16="http://schemas.microsoft.com/office/drawing/2014/main" id="{23AD63E1-85D4-E65E-544E-D370AE6D9C80}"/>
-              </a:ext>
-            </a:extLst>
-          </p:cNvPr>
-          <p:cNvSpPr txBox="1"/>
-          <p:nvPr/>
-        </p:nvSpPr>
-        <p:spPr>
-          <a:xfrm>
-            <a:off x="192024" y="331184"/>
-            <a:ext cx="8362188" cy="2677656"/>
-          </a:xfrm>
-          <a:prstGeom prst="rect">
-            <a:avLst/>
-          </a:prstGeom>
-          <a:noFill/>
-        </p:spPr>
-        <p:txBody>
-          <a:bodyPr wrap="square">
-            <a:spAutoFit/>
-          </a:bodyPr>
-          <a:lstStyle/>
-          <a:p>
-            <a:r>
-              <a:rPr lang="en-US" sz="2400" b="1" dirty="0">
-                <a:solidFill>
-                  <a:schemeClr val="accent6">
-                    <a:lumMod val="60000"/>
-                    <a:lumOff val="40000"/>
-                  </a:schemeClr>
-                </a:solidFill>
-              </a:rPr>
-              <a:t>3. Properties</a:t>
-            </a:r>
-          </a:p>
-          <a:p>
-            <a:pPr marL="342900" indent="-342900">
-              <a:buFont typeface="Arial" panose="020B0604020202020204" pitchFamily="34" charset="0"/>
-              <a:buChar char="•"/>
-            </a:pPr>
-            <a:r>
-              <a:rPr lang="en-US" sz="2400" dirty="0">
-                <a:solidFill>
-                  <a:schemeClr val="accent6">
-                    <a:lumMod val="60000"/>
-                    <a:lumOff val="40000"/>
-                  </a:schemeClr>
-                </a:solidFill>
-              </a:rPr>
-              <a:t>Additional information about nodes/relationships </a:t>
-            </a:r>
-          </a:p>
-          <a:p>
-            <a:endParaRPr lang="en-US" sz="2400" dirty="0">
-              <a:solidFill>
-                <a:schemeClr val="accent6">
-                  <a:lumMod val="60000"/>
-                  <a:lumOff val="40000"/>
-                </a:schemeClr>
-              </a:solidFill>
-            </a:endParaRPr>
-          </a:p>
-          <a:p>
-            <a:r>
-              <a:rPr lang="en-US" sz="2400" dirty="0">
-                <a:solidFill>
-                  <a:schemeClr val="accent6">
-                    <a:lumMod val="60000"/>
-                    <a:lumOff val="40000"/>
-                  </a:schemeClr>
-                </a:solidFill>
-              </a:rPr>
-              <a:t>👉 Example:</a:t>
-            </a:r>
-          </a:p>
-          <a:p>
-            <a:pPr marL="342900" indent="-342900">
-              <a:buFont typeface="Arial" panose="020B0604020202020204" pitchFamily="34" charset="0"/>
-              <a:buChar char="•"/>
-            </a:pPr>
-            <a:r>
-              <a:rPr lang="en-US" sz="2400" dirty="0">
-                <a:solidFill>
-                  <a:schemeClr val="accent6">
-                    <a:lumMod val="60000"/>
-                    <a:lumOff val="40000"/>
-                  </a:schemeClr>
-                </a:solidFill>
-              </a:rPr>
-              <a:t>Node (Ash): {age: 30, role: Trainer} </a:t>
-            </a:r>
-          </a:p>
-          <a:p>
-            <a:pPr marL="342900" indent="-342900">
-              <a:buFont typeface="Arial" panose="020B0604020202020204" pitchFamily="34" charset="0"/>
-              <a:buChar char="•"/>
-            </a:pPr>
-            <a:r>
-              <a:rPr lang="en-US" sz="2400" dirty="0">
-                <a:solidFill>
-                  <a:schemeClr val="accent6">
-                    <a:lumMod val="60000"/>
-                    <a:lumOff val="40000"/>
-                  </a:schemeClr>
-                </a:solidFill>
-              </a:rPr>
-              <a:t>Relationship: { since: 2022 }</a:t>
-            </a:r>
-          </a:p>
-          <a:p>
-            <a:endParaRPr lang="en-US" sz="2400" b="1" dirty="0">
-              <a:solidFill>
-                <a:schemeClr val="accent6">
-                  <a:lumMod val="60000"/>
-                  <a:lumOff val="40000"/>
-                </a:schemeClr>
-              </a:solidFill>
-            </a:endParaRPr>
-          </a:p>
-        </p:txBody>
-      </p:sp>
-      <p:sp>
-        <p:nvSpPr>
-          <p:cNvPr id="3" name="Oval 2">
-            <a:extLst>
-              <a:ext uri="{FF2B5EF4-FFF2-40B4-BE49-F238E27FC236}">
-                <a16:creationId xmlns:a16="http://schemas.microsoft.com/office/drawing/2014/main" id="{12D2026F-3363-24D3-DC72-F73E81B0E9CB}"/>
-              </a:ext>
-            </a:extLst>
-          </p:cNvPr>
-          <p:cNvSpPr/>
-          <p:nvPr/>
-        </p:nvSpPr>
-        <p:spPr>
-          <a:xfrm>
-            <a:off x="722376" y="3008840"/>
-            <a:ext cx="2679192" cy="1453432"/>
-          </a:xfrm>
-          <a:prstGeom prst="ellipse">
-            <a:avLst/>
-          </a:prstGeom>
-        </p:spPr>
-        <p:style>
-          <a:lnRef idx="2">
-            <a:schemeClr val="accent1">
-              <a:shade val="15000"/>
-            </a:schemeClr>
-          </a:lnRef>
-          <a:fillRef idx="1">
-            <a:schemeClr val="accent1"/>
-          </a:fillRef>
-          <a:effectRef idx="0">
-            <a:schemeClr val="accent1"/>
-          </a:effectRef>
-          <a:fontRef idx="minor">
-            <a:schemeClr val="lt1"/>
-          </a:fontRef>
-        </p:style>
-        <p:txBody>
-          <a:bodyPr rtlCol="0" anchor="ctr"/>
-          <a:lstStyle/>
-          <a:p>
-            <a:pPr algn="ctr"/>
-            <a:r>
-              <a:rPr lang="en-US" sz="2400" dirty="0"/>
-              <a:t>Ash</a:t>
-            </a:r>
-          </a:p>
-          <a:p>
-            <a:pPr algn="ctr"/>
-            <a:r>
-              <a:rPr lang="en-US" sz="2400" dirty="0">
-                <a:solidFill>
-                  <a:schemeClr val="accent6">
-                    <a:lumMod val="60000"/>
-                    <a:lumOff val="40000"/>
-                  </a:schemeClr>
-                </a:solidFill>
-              </a:rPr>
-              <a:t>{age: 30,</a:t>
-            </a:r>
-          </a:p>
-          <a:p>
-            <a:pPr algn="ctr"/>
-            <a:r>
-              <a:rPr lang="en-US" sz="2400" dirty="0">
-                <a:solidFill>
-                  <a:schemeClr val="accent6">
-                    <a:lumMod val="60000"/>
-                    <a:lumOff val="40000"/>
-                  </a:schemeClr>
-                </a:solidFill>
-              </a:rPr>
-              <a:t> role: Trainer}</a:t>
-            </a:r>
-            <a:endParaRPr lang="en-US" sz="2400" dirty="0"/>
-          </a:p>
-        </p:txBody>
-      </p:sp>
-      <p:sp>
-        <p:nvSpPr>
-          <p:cNvPr id="5" name="Oval 4">
-            <a:extLst>
-              <a:ext uri="{FF2B5EF4-FFF2-40B4-BE49-F238E27FC236}">
-                <a16:creationId xmlns:a16="http://schemas.microsoft.com/office/drawing/2014/main" id="{276705A4-DC33-38B1-D4D8-EA0263F66F91}"/>
-              </a:ext>
-            </a:extLst>
-          </p:cNvPr>
-          <p:cNvSpPr/>
-          <p:nvPr/>
-        </p:nvSpPr>
-        <p:spPr>
-          <a:xfrm>
-            <a:off x="6440426" y="3429000"/>
-            <a:ext cx="2868166" cy="1033272"/>
-          </a:xfrm>
-          <a:prstGeom prst="ellipse">
-            <a:avLst/>
-          </a:prstGeom>
-        </p:spPr>
-        <p:style>
-          <a:lnRef idx="2">
-            <a:schemeClr val="accent1">
-              <a:shade val="15000"/>
-            </a:schemeClr>
-          </a:lnRef>
-          <a:fillRef idx="1">
-            <a:schemeClr val="accent1"/>
-          </a:fillRef>
-          <a:effectRef idx="0">
-            <a:schemeClr val="accent1"/>
-          </a:effectRef>
-          <a:fontRef idx="minor">
-            <a:schemeClr val="lt1"/>
-          </a:fontRef>
-        </p:style>
-        <p:txBody>
-          <a:bodyPr rtlCol="0" anchor="ctr"/>
-          <a:lstStyle/>
-          <a:p>
-            <a:pPr algn="ctr"/>
-            <a:r>
-              <a:rPr lang="en-US" sz="2400" dirty="0"/>
-              <a:t>Python Course</a:t>
-            </a:r>
-          </a:p>
-          <a:p>
-            <a:pPr algn="ctr"/>
-            <a:r>
-              <a:rPr lang="en-US" sz="2400" dirty="0"/>
-              <a:t>{Cost: 300 }</a:t>
-            </a:r>
-          </a:p>
-        </p:txBody>
-      </p:sp>
-      <p:sp>
-        <p:nvSpPr>
-          <p:cNvPr id="8" name="Arrow: Right 7">
-            <a:extLst>
-              <a:ext uri="{FF2B5EF4-FFF2-40B4-BE49-F238E27FC236}">
-                <a16:creationId xmlns:a16="http://schemas.microsoft.com/office/drawing/2014/main" id="{0E79E258-756F-FF7F-AAC2-925933B79093}"/>
-              </a:ext>
-            </a:extLst>
-          </p:cNvPr>
-          <p:cNvSpPr/>
-          <p:nvPr/>
-        </p:nvSpPr>
-        <p:spPr>
-          <a:xfrm>
-            <a:off x="4800600" y="3785616"/>
-            <a:ext cx="950976" cy="475488"/>
-          </a:xfrm>
-          <a:prstGeom prst="rightArrow">
-            <a:avLst/>
-          </a:prstGeom>
-        </p:spPr>
-        <p:style>
-          <a:lnRef idx="2">
-            <a:schemeClr val="accent1">
-              <a:shade val="15000"/>
-            </a:schemeClr>
-          </a:lnRef>
-          <a:fillRef idx="1">
-            <a:schemeClr val="accent1"/>
-          </a:fillRef>
-          <a:effectRef idx="0">
-            <a:schemeClr val="accent1"/>
-          </a:effectRef>
-          <a:fontRef idx="minor">
-            <a:schemeClr val="lt1"/>
-          </a:fontRef>
-        </p:style>
-        <p:txBody>
-          <a:bodyPr rtlCol="0" anchor="ctr"/>
-          <a:lstStyle/>
-          <a:p>
-            <a:pPr algn="ctr"/>
-            <a:endParaRPr lang="en-US"/>
-          </a:p>
-        </p:txBody>
-      </p:sp>
-      <p:sp>
-        <p:nvSpPr>
-          <p:cNvPr id="10" name="TextBox 9">
-            <a:extLst>
-              <a:ext uri="{FF2B5EF4-FFF2-40B4-BE49-F238E27FC236}">
-                <a16:creationId xmlns:a16="http://schemas.microsoft.com/office/drawing/2014/main" id="{D8255465-1211-E2AF-90D2-7DB5E0A9A353}"/>
-              </a:ext>
-            </a:extLst>
-          </p:cNvPr>
-          <p:cNvSpPr txBox="1"/>
-          <p:nvPr/>
-        </p:nvSpPr>
-        <p:spPr>
-          <a:xfrm>
-            <a:off x="4367403" y="3018164"/>
-            <a:ext cx="1817370" cy="830997"/>
-          </a:xfrm>
-          <a:prstGeom prst="rect">
-            <a:avLst/>
-          </a:prstGeom>
-          <a:noFill/>
-        </p:spPr>
-        <p:txBody>
-          <a:bodyPr wrap="square">
-            <a:spAutoFit/>
-          </a:bodyPr>
-          <a:lstStyle/>
-          <a:p>
-            <a:pPr algn="ctr"/>
-            <a:r>
-              <a:rPr lang="en-US" sz="2400" b="1" dirty="0">
-                <a:solidFill>
-                  <a:schemeClr val="accent6">
-                    <a:lumMod val="60000"/>
-                    <a:lumOff val="40000"/>
-                  </a:schemeClr>
-                </a:solidFill>
-                <a:highlight>
-                  <a:srgbClr val="800000"/>
-                </a:highlight>
-              </a:rPr>
-              <a:t>TEACHES</a:t>
-            </a:r>
-          </a:p>
-          <a:p>
-            <a:pPr algn="ctr"/>
-            <a:r>
-              <a:rPr lang="en-US" sz="2400" b="1" dirty="0">
-                <a:solidFill>
-                  <a:schemeClr val="accent6">
-                    <a:lumMod val="60000"/>
-                    <a:lumOff val="40000"/>
-                  </a:schemeClr>
-                </a:solidFill>
-                <a:highlight>
-                  <a:srgbClr val="800000"/>
-                </a:highlight>
-              </a:rPr>
-              <a:t>{since: 2022}</a:t>
-            </a:r>
-            <a:endParaRPr lang="en-US" dirty="0">
-              <a:highlight>
-                <a:srgbClr val="800000"/>
-              </a:highlight>
-            </a:endParaRPr>
-          </a:p>
-        </p:txBody>
-      </p:sp>
-      <p:sp>
-        <p:nvSpPr>
-          <p:cNvPr id="12" name="Oval 11">
-            <a:extLst>
-              <a:ext uri="{FF2B5EF4-FFF2-40B4-BE49-F238E27FC236}">
-                <a16:creationId xmlns:a16="http://schemas.microsoft.com/office/drawing/2014/main" id="{75CABCFF-49C2-15E7-E992-5BB07A246A4F}"/>
-              </a:ext>
-            </a:extLst>
-          </p:cNvPr>
-          <p:cNvSpPr/>
-          <p:nvPr/>
-        </p:nvSpPr>
-        <p:spPr>
-          <a:xfrm>
-            <a:off x="6821424" y="5340632"/>
-            <a:ext cx="1591056" cy="1033272"/>
-          </a:xfrm>
-          <a:prstGeom prst="ellipse">
-            <a:avLst/>
-          </a:prstGeom>
-        </p:spPr>
-        <p:style>
-          <a:lnRef idx="2">
-            <a:schemeClr val="accent1">
-              <a:shade val="15000"/>
-            </a:schemeClr>
-          </a:lnRef>
-          <a:fillRef idx="1">
-            <a:schemeClr val="accent1"/>
-          </a:fillRef>
-          <a:effectRef idx="0">
-            <a:schemeClr val="accent1"/>
-          </a:effectRef>
-          <a:fontRef idx="minor">
-            <a:schemeClr val="lt1"/>
-          </a:fontRef>
-        </p:style>
-        <p:txBody>
-          <a:bodyPr rtlCol="0" anchor="ctr"/>
-          <a:lstStyle/>
-          <a:p>
-            <a:pPr algn="ctr"/>
-            <a:r>
-              <a:rPr lang="en-US" sz="2400" dirty="0"/>
-              <a:t>Delhi</a:t>
-            </a:r>
-          </a:p>
-        </p:txBody>
-      </p:sp>
-      <p:sp>
-        <p:nvSpPr>
-          <p:cNvPr id="14" name="Arrow: Right 13">
-            <a:extLst>
-              <a:ext uri="{FF2B5EF4-FFF2-40B4-BE49-F238E27FC236}">
-                <a16:creationId xmlns:a16="http://schemas.microsoft.com/office/drawing/2014/main" id="{BF24E424-0AE1-17D5-BDF7-DE165A4294A1}"/>
-              </a:ext>
-            </a:extLst>
-          </p:cNvPr>
-          <p:cNvSpPr/>
-          <p:nvPr/>
-        </p:nvSpPr>
-        <p:spPr>
-          <a:xfrm rot="1414725">
-            <a:off x="4271159" y="5001987"/>
-            <a:ext cx="2272526" cy="475488"/>
-          </a:xfrm>
-          <a:prstGeom prst="rightArrow">
-            <a:avLst/>
-          </a:prstGeom>
-        </p:spPr>
-        <p:style>
-          <a:lnRef idx="2">
-            <a:schemeClr val="accent1">
-              <a:shade val="15000"/>
-            </a:schemeClr>
-          </a:lnRef>
-          <a:fillRef idx="1">
-            <a:schemeClr val="accent1"/>
-          </a:fillRef>
-          <a:effectRef idx="0">
-            <a:schemeClr val="accent1"/>
-          </a:effectRef>
-          <a:fontRef idx="minor">
-            <a:schemeClr val="lt1"/>
-          </a:fontRef>
-        </p:style>
-        <p:txBody>
-          <a:bodyPr rtlCol="0" anchor="ctr"/>
-          <a:lstStyle/>
-          <a:p>
-            <a:pPr algn="ctr"/>
-            <a:endParaRPr lang="en-US"/>
-          </a:p>
-        </p:txBody>
-      </p:sp>
-      <p:sp>
-        <p:nvSpPr>
-          <p:cNvPr id="16" name="TextBox 15">
-            <a:extLst>
-              <a:ext uri="{FF2B5EF4-FFF2-40B4-BE49-F238E27FC236}">
-                <a16:creationId xmlns:a16="http://schemas.microsoft.com/office/drawing/2014/main" id="{1FD0E11D-84A8-933E-D5D3-E3DC93DB236E}"/>
-              </a:ext>
-            </a:extLst>
-          </p:cNvPr>
-          <p:cNvSpPr txBox="1"/>
-          <p:nvPr/>
-        </p:nvSpPr>
-        <p:spPr>
-          <a:xfrm>
-            <a:off x="4120514" y="5713481"/>
-            <a:ext cx="1813941" cy="830997"/>
-          </a:xfrm>
-          <a:prstGeom prst="rect">
-            <a:avLst/>
-          </a:prstGeom>
-          <a:noFill/>
-        </p:spPr>
-        <p:txBody>
-          <a:bodyPr wrap="square">
-            <a:spAutoFit/>
-          </a:bodyPr>
-          <a:lstStyle/>
-          <a:p>
-            <a:pPr algn="ctr"/>
-            <a:r>
-              <a:rPr lang="en-US" sz="2400" b="1" dirty="0">
-                <a:solidFill>
-                  <a:schemeClr val="accent6">
-                    <a:lumMod val="60000"/>
-                    <a:lumOff val="40000"/>
-                  </a:schemeClr>
-                </a:solidFill>
-                <a:highlight>
-                  <a:srgbClr val="800000"/>
-                </a:highlight>
-              </a:rPr>
-              <a:t>LIVES_IN</a:t>
-            </a:r>
-          </a:p>
-          <a:p>
-            <a:pPr algn="ctr"/>
-            <a:r>
-              <a:rPr lang="en-US" sz="2400" b="1" dirty="0">
-                <a:solidFill>
-                  <a:schemeClr val="accent6">
-                    <a:lumMod val="60000"/>
-                    <a:lumOff val="40000"/>
-                  </a:schemeClr>
-                </a:solidFill>
-                <a:highlight>
-                  <a:srgbClr val="800000"/>
-                </a:highlight>
-              </a:rPr>
-              <a:t>{since: 1998}</a:t>
-            </a:r>
-            <a:endParaRPr lang="en-US" dirty="0">
-              <a:highlight>
-                <a:srgbClr val="800000"/>
-              </a:highlight>
-            </a:endParaRPr>
-          </a:p>
-        </p:txBody>
-      </p:sp>
-    </p:spTree>
-    <p:extLst>
-      <p:ext uri="{BB962C8B-B14F-4D97-AF65-F5344CB8AC3E}">
-        <p14:creationId xmlns:p14="http://schemas.microsoft.com/office/powerpoint/2010/main" val="1757293067"/>
-      </p:ext>
-    </p:extLst>
-  </p:cSld>
-  <p:clrMapOvr>
-    <a:masterClrMapping/>
-  </p:clrMapOvr>
-</p:sld>
-</file>
-
-<file path=ppt/slides/slide9.xml><?xml version="1.0" encoding="utf-8"?>
-<p:sld xmlns:a="http://schemas.openxmlformats.org/drawingml/2006/main" xmlns:r="http://schemas.openxmlformats.org/officeDocument/2006/relationships" xmlns:p="http://schemas.openxmlformats.org/presentationml/2006/main">
-  <p:cSld>
-    <p:spTree>
-      <p:nvGrpSpPr>
-        <p:cNvPr id="1" name="">
-          <a:extLst>
-            <a:ext uri="{FF2B5EF4-FFF2-40B4-BE49-F238E27FC236}">
-              <a16:creationId xmlns:a16="http://schemas.microsoft.com/office/drawing/2014/main" id="{4B04D031-8990-B1BC-F83A-48A2A0F9CF6A}"/>
-            </a:ext>
-          </a:extLst>
-        </p:cNvPr>
-        <p:cNvGrpSpPr/>
-        <p:nvPr/>
-      </p:nvGrpSpPr>
-      <p:grpSpPr>
-        <a:xfrm>
-          <a:off x="0" y="0"/>
-          <a:ext cx="0" cy="0"/>
-          <a:chOff x="0" y="0"/>
-          <a:chExt cx="0" cy="0"/>
-        </a:xfrm>
-      </p:grpSpPr>
-      <p:sp>
-        <p:nvSpPr>
-          <p:cNvPr id="7" name="TextBox 6">
-            <a:extLst>
-              <a:ext uri="{FF2B5EF4-FFF2-40B4-BE49-F238E27FC236}">
-                <a16:creationId xmlns:a16="http://schemas.microsoft.com/office/drawing/2014/main" id="{8228D394-F464-2836-2C33-38A70D0A243A}"/>
-              </a:ext>
-            </a:extLst>
-          </p:cNvPr>
-          <p:cNvSpPr txBox="1"/>
-          <p:nvPr/>
-        </p:nvSpPr>
-        <p:spPr>
-          <a:xfrm>
-            <a:off x="192024" y="331184"/>
-            <a:ext cx="5660136" cy="3416320"/>
-          </a:xfrm>
-          <a:prstGeom prst="rect">
-            <a:avLst/>
-          </a:prstGeom>
-          <a:noFill/>
-        </p:spPr>
-        <p:txBody>
-          <a:bodyPr wrap="square">
-            <a:spAutoFit/>
-          </a:bodyPr>
-          <a:lstStyle/>
-          <a:p>
-            <a:r>
-              <a:rPr lang="en-US" sz="2400" b="1" dirty="0">
-                <a:solidFill>
-                  <a:schemeClr val="accent6">
-                    <a:lumMod val="60000"/>
-                    <a:lumOff val="40000"/>
-                  </a:schemeClr>
-                </a:solidFill>
-              </a:rPr>
-              <a:t>Query example:</a:t>
-            </a:r>
-          </a:p>
-          <a:p>
-            <a:endParaRPr lang="en-US" sz="2400" b="1" dirty="0">
-              <a:solidFill>
-                <a:schemeClr val="accent6">
-                  <a:lumMod val="60000"/>
-                  <a:lumOff val="40000"/>
-                </a:schemeClr>
-              </a:solidFill>
-            </a:endParaRPr>
-          </a:p>
-          <a:p>
-            <a:r>
-              <a:rPr lang="en-US" sz="2400" b="1" dirty="0">
-                <a:solidFill>
-                  <a:schemeClr val="accent6">
-                    <a:lumMod val="60000"/>
-                    <a:lumOff val="40000"/>
-                  </a:schemeClr>
-                </a:solidFill>
-              </a:rPr>
-              <a:t>Social Network + Content Graph</a:t>
-            </a:r>
-          </a:p>
-          <a:p>
-            <a:endParaRPr lang="en-US" sz="2400" b="1" dirty="0">
-              <a:solidFill>
-                <a:schemeClr val="accent6">
-                  <a:lumMod val="60000"/>
-                  <a:lumOff val="40000"/>
-                </a:schemeClr>
-              </a:solidFill>
-            </a:endParaRPr>
-          </a:p>
-          <a:p>
-            <a:r>
-              <a:rPr lang="en-US" sz="2400" b="1" dirty="0">
-                <a:solidFill>
-                  <a:schemeClr val="accent6">
-                    <a:lumMod val="60000"/>
-                    <a:lumOff val="40000"/>
-                  </a:schemeClr>
-                </a:solidFill>
-              </a:rPr>
-              <a:t>Nodes:</a:t>
-            </a:r>
-          </a:p>
-          <a:p>
-            <a:r>
-              <a:rPr lang="en-US" sz="2400" dirty="0">
-                <a:solidFill>
-                  <a:schemeClr val="accent6">
-                    <a:lumMod val="60000"/>
-                    <a:lumOff val="40000"/>
-                  </a:schemeClr>
-                </a:solidFill>
-              </a:rPr>
-              <a:t>Person: Ash, Ravi, Neha </a:t>
-            </a:r>
-          </a:p>
-          <a:p>
-            <a:r>
-              <a:rPr lang="en-US" sz="2400" dirty="0">
-                <a:solidFill>
-                  <a:schemeClr val="accent6">
-                    <a:lumMod val="60000"/>
-                    <a:lumOff val="40000"/>
-                  </a:schemeClr>
-                </a:solidFill>
-              </a:rPr>
-              <a:t>Post: Post1, Post2 </a:t>
-            </a:r>
-          </a:p>
-          <a:p>
-            <a:r>
-              <a:rPr lang="en-US" sz="2400" dirty="0">
-                <a:solidFill>
-                  <a:schemeClr val="accent6">
-                    <a:lumMod val="60000"/>
-                    <a:lumOff val="40000"/>
-                  </a:schemeClr>
-                </a:solidFill>
-              </a:rPr>
-              <a:t>City: Delhi, Tokyo</a:t>
-            </a:r>
-          </a:p>
-          <a:p>
-            <a:r>
-              <a:rPr lang="en-US" sz="2400" dirty="0">
-                <a:solidFill>
-                  <a:schemeClr val="accent6">
-                    <a:lumMod val="60000"/>
-                    <a:lumOff val="40000"/>
-                  </a:schemeClr>
-                </a:solidFill>
-              </a:rPr>
-              <a:t>Topic: AI, Travel</a:t>
-            </a:r>
-          </a:p>
-        </p:txBody>
-      </p:sp>
-      <p:sp>
-        <p:nvSpPr>
-          <p:cNvPr id="5" name="TextBox 4">
-            <a:extLst>
-              <a:ext uri="{FF2B5EF4-FFF2-40B4-BE49-F238E27FC236}">
-                <a16:creationId xmlns:a16="http://schemas.microsoft.com/office/drawing/2014/main" id="{EE797C98-9965-ED3F-9993-7389712A5CC3}"/>
-              </a:ext>
-            </a:extLst>
-          </p:cNvPr>
-          <p:cNvSpPr txBox="1"/>
-          <p:nvPr/>
-        </p:nvSpPr>
-        <p:spPr>
-          <a:xfrm>
-            <a:off x="192024" y="5283446"/>
-            <a:ext cx="6190488" cy="830997"/>
-          </a:xfrm>
-          <a:prstGeom prst="rect">
-            <a:avLst/>
-          </a:prstGeom>
-          <a:noFill/>
-        </p:spPr>
-        <p:txBody>
-          <a:bodyPr wrap="square">
-            <a:spAutoFit/>
-          </a:bodyPr>
-          <a:lstStyle/>
-          <a:p>
-            <a:r>
-              <a:rPr lang="en-US" sz="2400" dirty="0">
-                <a:solidFill>
-                  <a:schemeClr val="accent6">
-                    <a:lumMod val="60000"/>
-                    <a:lumOff val="40000"/>
-                  </a:schemeClr>
-                </a:solidFill>
-              </a:rPr>
-              <a:t>Suppose you want to answer following: </a:t>
-            </a:r>
-          </a:p>
-          <a:p>
-            <a:r>
-              <a:rPr lang="en-US" sz="2400" dirty="0">
-                <a:solidFill>
-                  <a:schemeClr val="accent6">
-                    <a:lumMod val="60000"/>
-                    <a:lumOff val="40000"/>
-                  </a:schemeClr>
-                </a:solidFill>
-              </a:rPr>
-              <a:t> Find topics liked by people Ash follows ?</a:t>
-            </a:r>
-          </a:p>
-        </p:txBody>
-      </p:sp>
-      <p:sp>
-        <p:nvSpPr>
-          <p:cNvPr id="4" name="TextBox 3">
-            <a:extLst>
-              <a:ext uri="{FF2B5EF4-FFF2-40B4-BE49-F238E27FC236}">
-                <a16:creationId xmlns:a16="http://schemas.microsoft.com/office/drawing/2014/main" id="{DAC2F19D-BA93-FAE5-FC1E-CCDE6E508696}"/>
-              </a:ext>
-            </a:extLst>
-          </p:cNvPr>
-          <p:cNvSpPr txBox="1"/>
-          <p:nvPr/>
-        </p:nvSpPr>
-        <p:spPr>
-          <a:xfrm>
-            <a:off x="7379208" y="887123"/>
-            <a:ext cx="4901184" cy="5016758"/>
-          </a:xfrm>
-          <a:prstGeom prst="rect">
-            <a:avLst/>
-          </a:prstGeom>
-          <a:noFill/>
-        </p:spPr>
-        <p:txBody>
-          <a:bodyPr wrap="square">
-            <a:spAutoFit/>
-          </a:bodyPr>
-          <a:lstStyle/>
-          <a:p>
-            <a:pPr>
-              <a:buNone/>
-            </a:pPr>
-            <a:r>
-              <a:rPr lang="en-US" sz="2000" b="1" dirty="0">
-                <a:solidFill>
-                  <a:schemeClr val="accent6">
-                    <a:lumMod val="60000"/>
-                    <a:lumOff val="40000"/>
-                  </a:schemeClr>
-                </a:solidFill>
-              </a:rPr>
-              <a:t>Relationships:</a:t>
-            </a:r>
-          </a:p>
-          <a:p>
-            <a:pPr rtl="0">
-              <a:buNone/>
-            </a:pPr>
-            <a:r>
-              <a:rPr lang="en-US" sz="2000" dirty="0">
-                <a:solidFill>
-                  <a:schemeClr val="accent6">
-                    <a:lumMod val="60000"/>
-                    <a:lumOff val="40000"/>
-                  </a:schemeClr>
-                </a:solidFill>
-                <a:latin typeface="Courier New" panose="02070309020205020404" pitchFamily="49" charset="0"/>
-              </a:rPr>
-              <a:t>(Ash) ---FOLLOWS---&gt; (Ravi)</a:t>
-            </a:r>
-          </a:p>
-          <a:p>
-            <a:pPr rtl="0">
-              <a:buNone/>
-            </a:pPr>
-            <a:r>
-              <a:rPr lang="en-US" sz="2000" dirty="0">
-                <a:solidFill>
-                  <a:schemeClr val="accent6">
-                    <a:lumMod val="60000"/>
-                    <a:lumOff val="40000"/>
-                  </a:schemeClr>
-                </a:solidFill>
-                <a:latin typeface="Courier New" panose="02070309020205020404" pitchFamily="49" charset="0"/>
-              </a:rPr>
-              <a:t>(Ash) ---FOLLOWS---&gt; (Neha)</a:t>
-            </a:r>
-          </a:p>
-          <a:p>
-            <a:pPr rtl="0">
-              <a:buNone/>
-            </a:pPr>
-            <a:r>
-              <a:rPr lang="en-US" sz="2000" dirty="0">
-                <a:solidFill>
-                  <a:schemeClr val="accent6">
-                    <a:lumMod val="60000"/>
-                    <a:lumOff val="40000"/>
-                  </a:schemeClr>
-                </a:solidFill>
-                <a:latin typeface="Courier New" panose="02070309020205020404" pitchFamily="49" charset="0"/>
-              </a:rPr>
-              <a:t>(Ravi) ---FOLLOWS---&gt; (Neha)</a:t>
-            </a:r>
-          </a:p>
-          <a:p>
-            <a:pPr rtl="0">
-              <a:buNone/>
-            </a:pPr>
-            <a:endParaRPr lang="en-US" sz="2000" dirty="0">
-              <a:solidFill>
-                <a:schemeClr val="accent6">
-                  <a:lumMod val="60000"/>
-                  <a:lumOff val="40000"/>
-                </a:schemeClr>
-              </a:solidFill>
-              <a:latin typeface="Courier New" panose="02070309020205020404" pitchFamily="49" charset="0"/>
-            </a:endParaRPr>
-          </a:p>
-          <a:p>
-            <a:pPr rtl="0">
-              <a:buNone/>
-            </a:pPr>
-            <a:r>
-              <a:rPr lang="en-US" sz="2000" dirty="0">
-                <a:solidFill>
-                  <a:schemeClr val="accent6">
-                    <a:lumMod val="60000"/>
-                    <a:lumOff val="40000"/>
-                  </a:schemeClr>
-                </a:solidFill>
-                <a:latin typeface="Courier New" panose="02070309020205020404" pitchFamily="49" charset="0"/>
-              </a:rPr>
-              <a:t>(Ash) ---CREATED---&gt; (Post1)</a:t>
-            </a:r>
-          </a:p>
-          <a:p>
-            <a:pPr rtl="0">
-              <a:buNone/>
-            </a:pPr>
-            <a:r>
-              <a:rPr lang="en-US" sz="2000" dirty="0">
-                <a:solidFill>
-                  <a:schemeClr val="accent6">
-                    <a:lumMod val="60000"/>
-                    <a:lumOff val="40000"/>
-                  </a:schemeClr>
-                </a:solidFill>
-                <a:latin typeface="Courier New" panose="02070309020205020404" pitchFamily="49" charset="0"/>
-              </a:rPr>
-              <a:t>(Ravi) ---CREATED---&gt; (Post2)</a:t>
-            </a:r>
-          </a:p>
-          <a:p>
-            <a:pPr rtl="0">
-              <a:buNone/>
-            </a:pPr>
-            <a:endParaRPr lang="en-US" sz="2000" dirty="0">
-              <a:solidFill>
-                <a:schemeClr val="accent6">
-                  <a:lumMod val="60000"/>
-                  <a:lumOff val="40000"/>
-                </a:schemeClr>
-              </a:solidFill>
-              <a:latin typeface="Courier New" panose="02070309020205020404" pitchFamily="49" charset="0"/>
-            </a:endParaRPr>
-          </a:p>
-          <a:p>
-            <a:pPr rtl="0">
-              <a:buNone/>
-            </a:pPr>
-            <a:r>
-              <a:rPr lang="en-US" sz="2000" dirty="0">
-                <a:solidFill>
-                  <a:schemeClr val="accent6">
-                    <a:lumMod val="60000"/>
-                    <a:lumOff val="40000"/>
-                  </a:schemeClr>
-                </a:solidFill>
-                <a:latin typeface="Courier New" panose="02070309020205020404" pitchFamily="49" charset="0"/>
-              </a:rPr>
-              <a:t>(Post1) ---ABOUT---&gt; (AI)</a:t>
-            </a:r>
-          </a:p>
-          <a:p>
-            <a:pPr rtl="0">
-              <a:buNone/>
-            </a:pPr>
-            <a:r>
-              <a:rPr lang="en-US" sz="2000" dirty="0">
-                <a:solidFill>
-                  <a:schemeClr val="accent6">
-                    <a:lumMod val="60000"/>
-                    <a:lumOff val="40000"/>
-                  </a:schemeClr>
-                </a:solidFill>
-                <a:latin typeface="Courier New" panose="02070309020205020404" pitchFamily="49" charset="0"/>
-              </a:rPr>
-              <a:t>(Post2) ---ABOUT---&gt; (Travel)</a:t>
-            </a:r>
-          </a:p>
-          <a:p>
-            <a:pPr rtl="0">
-              <a:buNone/>
-            </a:pPr>
-            <a:endParaRPr lang="en-US" sz="2000" dirty="0">
-              <a:solidFill>
-                <a:schemeClr val="accent6">
-                  <a:lumMod val="60000"/>
-                  <a:lumOff val="40000"/>
-                </a:schemeClr>
-              </a:solidFill>
-              <a:latin typeface="Courier New" panose="02070309020205020404" pitchFamily="49" charset="0"/>
-            </a:endParaRPr>
-          </a:p>
-          <a:p>
-            <a:pPr rtl="0">
-              <a:buNone/>
-            </a:pPr>
-            <a:r>
-              <a:rPr lang="en-US" sz="2000" dirty="0">
-                <a:solidFill>
-                  <a:schemeClr val="accent6">
-                    <a:lumMod val="60000"/>
-                    <a:lumOff val="40000"/>
-                  </a:schemeClr>
-                </a:solidFill>
-                <a:latin typeface="Courier New" panose="02070309020205020404" pitchFamily="49" charset="0"/>
-              </a:rPr>
-              <a:t>(Neha) ---LIKES---&gt; (Post1)</a:t>
-            </a:r>
-          </a:p>
-          <a:p>
-            <a:pPr rtl="0">
-              <a:buNone/>
-            </a:pPr>
-            <a:r>
-              <a:rPr lang="en-US" sz="2000" dirty="0">
-                <a:solidFill>
-                  <a:schemeClr val="accent6">
-                    <a:lumMod val="60000"/>
-                    <a:lumOff val="40000"/>
-                  </a:schemeClr>
-                </a:solidFill>
-                <a:latin typeface="Courier New" panose="02070309020205020404" pitchFamily="49" charset="0"/>
-              </a:rPr>
-              <a:t>(Ash) ---LIKES---&gt; (Post2)</a:t>
-            </a:r>
-          </a:p>
-          <a:p>
-            <a:pPr rtl="0">
-              <a:buNone/>
-            </a:pPr>
-            <a:endParaRPr lang="en-US" sz="2000" dirty="0">
-              <a:solidFill>
-                <a:schemeClr val="accent6">
-                  <a:lumMod val="60000"/>
-                  <a:lumOff val="40000"/>
-                </a:schemeClr>
-              </a:solidFill>
-              <a:latin typeface="Courier New" panose="02070309020205020404" pitchFamily="49" charset="0"/>
-            </a:endParaRPr>
-          </a:p>
-          <a:p>
-            <a:pPr rtl="0">
-              <a:buNone/>
-            </a:pPr>
-            <a:r>
-              <a:rPr lang="en-US" sz="2000" dirty="0">
-                <a:solidFill>
-                  <a:schemeClr val="accent6">
-                    <a:lumMod val="60000"/>
-                    <a:lumOff val="40000"/>
-                  </a:schemeClr>
-                </a:solidFill>
-                <a:latin typeface="Courier New" panose="02070309020205020404" pitchFamily="49" charset="0"/>
-              </a:rPr>
-              <a:t>(Ash) ---LIVES_IN---&gt; (Delhi)</a:t>
-            </a:r>
-          </a:p>
-          <a:p>
-            <a:pPr rtl="0">
-              <a:buNone/>
-            </a:pPr>
-            <a:r>
-              <a:rPr lang="en-US" sz="2000" dirty="0">
-                <a:solidFill>
-                  <a:schemeClr val="accent6">
-                    <a:lumMod val="60000"/>
-                    <a:lumOff val="40000"/>
-                  </a:schemeClr>
-                </a:solidFill>
-                <a:latin typeface="Courier New" panose="02070309020205020404" pitchFamily="49" charset="0"/>
-              </a:rPr>
-              <a:t>(Ravi) ---LIVES_IN---&gt; (Tokyo)</a:t>
-            </a:r>
-          </a:p>
-        </p:txBody>
-      </p:sp>
-    </p:spTree>
-    <p:extLst>
-      <p:ext uri="{BB962C8B-B14F-4D97-AF65-F5344CB8AC3E}">
-        <p14:creationId xmlns:p14="http://schemas.microsoft.com/office/powerpoint/2010/main" val="1966452714"/>
       </p:ext>
     </p:extLst>
   </p:cSld>
